--- a/slides/06-3-Hardness.pptx
+++ b/slides/06-3-Hardness.pptx
@@ -5,7 +5,7 @@
     <p:sldMasterId id="2147484006" r:id="rId1"/>
   </p:sldMasterIdLst>
   <p:notesMasterIdLst>
-    <p:notesMasterId r:id="rId31"/>
+    <p:notesMasterId r:id="rId35"/>
   </p:notesMasterIdLst>
   <p:sldIdLst>
     <p:sldId id="256" r:id="rId2"/>
@@ -34,9 +34,13 @@
     <p:sldId id="880" r:id="rId25"/>
     <p:sldId id="877" r:id="rId26"/>
     <p:sldId id="881" r:id="rId27"/>
-    <p:sldId id="789" r:id="rId28"/>
-    <p:sldId id="790" r:id="rId29"/>
-    <p:sldId id="791" r:id="rId30"/>
+    <p:sldId id="882" r:id="rId28"/>
+    <p:sldId id="883" r:id="rId29"/>
+    <p:sldId id="884" r:id="rId30"/>
+    <p:sldId id="885" r:id="rId31"/>
+    <p:sldId id="789" r:id="rId32"/>
+    <p:sldId id="790" r:id="rId33"/>
+    <p:sldId id="791" r:id="rId34"/>
   </p:sldIdLst>
   <p:sldSz cx="12192000" cy="6858000"/>
   <p:notesSz cx="6858000" cy="9144000"/>
@@ -225,7 +229,7 @@
           <a:p>
             <a:fld id="{C5B45307-6ED4-B142-BD64-10F739779302}" type="datetimeFigureOut">
               <a:rPr lang="en-US" smtClean="0"/>
-              <a:t>10/15/25</a:t>
+              <a:t>10/20/25</a:t>
             </a:fld>
             <a:endParaRPr lang="en-US"/>
           </a:p>
@@ -633,7 +637,7 @@
           <a:noFill/>
           <a:extLst>
             <a:ext uri="{909E8E84-426E-40dd-AFC4-6F175D3DCCD1}">
-              <a14:hiddenFill xmlns:a14="http://schemas.microsoft.com/office/drawing/2010/main" xmlns="">
+              <a14:hiddenFill xmlns="" xmlns:a14="http://schemas.microsoft.com/office/drawing/2010/main">
                 <a:solidFill>
                   <a:srgbClr val="FFFFFF"/>
                 </a:solidFill>
@@ -692,7 +696,7 @@
             </a:ln>
             <a:extLst>
               <a:ext uri="{91240B29-F687-4f45-9708-019B960494DF}">
-                <a14:hiddenLine xmlns:a14="http://schemas.microsoft.com/office/drawing/2010/main" xmlns="" w="9525">
+                <a14:hiddenLine xmlns="" xmlns:a14="http://schemas.microsoft.com/office/drawing/2010/main" w="9525">
                   <a:solidFill>
                     <a:srgbClr val="000000"/>
                   </a:solidFill>
@@ -782,7 +786,7 @@
             </a:ln>
             <a:extLst>
               <a:ext uri="{91240B29-F687-4f45-9708-019B960494DF}">
-                <a14:hiddenLine xmlns:a14="http://schemas.microsoft.com/office/drawing/2010/main" xmlns="" w="9525">
+                <a14:hiddenLine xmlns="" xmlns:a14="http://schemas.microsoft.com/office/drawing/2010/main" w="9525">
                   <a:solidFill>
                     <a:srgbClr val="000000"/>
                   </a:solidFill>
@@ -872,7 +876,7 @@
             </a:ln>
             <a:extLst>
               <a:ext uri="{91240B29-F687-4f45-9708-019B960494DF}">
-                <a14:hiddenLine xmlns:a14="http://schemas.microsoft.com/office/drawing/2010/main" xmlns="" w="9525">
+                <a14:hiddenLine xmlns="" xmlns:a14="http://schemas.microsoft.com/office/drawing/2010/main" w="9525">
                   <a:solidFill>
                     <a:srgbClr val="000000"/>
                   </a:solidFill>
@@ -906,7 +910,7 @@
             </a:ln>
             <a:extLst>
               <a:ext uri="{91240B29-F687-4f45-9708-019B960494DF}">
-                <a14:hiddenLine xmlns:a14="http://schemas.microsoft.com/office/drawing/2010/main" xmlns="" w="9525">
+                <a14:hiddenLine xmlns="" xmlns:a14="http://schemas.microsoft.com/office/drawing/2010/main" w="9525">
                   <a:solidFill>
                     <a:srgbClr val="000000"/>
                   </a:solidFill>
@@ -996,7 +1000,7 @@
             </a:ln>
             <a:extLst>
               <a:ext uri="{91240B29-F687-4f45-9708-019B960494DF}">
-                <a14:hiddenLine xmlns:a14="http://schemas.microsoft.com/office/drawing/2010/main" xmlns="" w="9525">
+                <a14:hiddenLine xmlns="" xmlns:a14="http://schemas.microsoft.com/office/drawing/2010/main" w="9525">
                   <a:solidFill>
                     <a:srgbClr val="000000"/>
                   </a:solidFill>
@@ -1058,7 +1062,7 @@
             </a:ln>
             <a:extLst>
               <a:ext uri="{91240B29-F687-4f45-9708-019B960494DF}">
-                <a14:hiddenLine xmlns:a14="http://schemas.microsoft.com/office/drawing/2010/main" xmlns="" w="9525">
+                <a14:hiddenLine xmlns="" xmlns:a14="http://schemas.microsoft.com/office/drawing/2010/main" w="9525">
                   <a:solidFill>
                     <a:srgbClr val="000000"/>
                   </a:solidFill>
@@ -1120,7 +1124,7 @@
             </a:ln>
             <a:extLst>
               <a:ext uri="{91240B29-F687-4f45-9708-019B960494DF}">
-                <a14:hiddenLine xmlns:a14="http://schemas.microsoft.com/office/drawing/2010/main" xmlns="" w="9525">
+                <a14:hiddenLine xmlns="" xmlns:a14="http://schemas.microsoft.com/office/drawing/2010/main" w="9525">
                   <a:solidFill>
                     <a:srgbClr val="000000"/>
                   </a:solidFill>
@@ -1210,7 +1214,7 @@
             </a:ln>
             <a:extLst>
               <a:ext uri="{91240B29-F687-4f45-9708-019B960494DF}">
-                <a14:hiddenLine xmlns:a14="http://schemas.microsoft.com/office/drawing/2010/main" xmlns="" w="9525">
+                <a14:hiddenLine xmlns="" xmlns:a14="http://schemas.microsoft.com/office/drawing/2010/main" w="9525">
                   <a:solidFill>
                     <a:srgbClr val="000000"/>
                   </a:solidFill>
@@ -1272,7 +1276,7 @@
             </a:ln>
             <a:extLst>
               <a:ext uri="{91240B29-F687-4f45-9708-019B960494DF}">
-                <a14:hiddenLine xmlns:a14="http://schemas.microsoft.com/office/drawing/2010/main" xmlns="" w="9525">
+                <a14:hiddenLine xmlns="" xmlns:a14="http://schemas.microsoft.com/office/drawing/2010/main" w="9525">
                   <a:solidFill>
                     <a:srgbClr val="000000"/>
                   </a:solidFill>
@@ -1334,7 +1338,7 @@
             </a:ln>
             <a:extLst>
               <a:ext uri="{91240B29-F687-4f45-9708-019B960494DF}">
-                <a14:hiddenLine xmlns:a14="http://schemas.microsoft.com/office/drawing/2010/main" xmlns="" w="9525">
+                <a14:hiddenLine xmlns="" xmlns:a14="http://schemas.microsoft.com/office/drawing/2010/main" w="9525">
                   <a:solidFill>
                     <a:srgbClr val="000000"/>
                   </a:solidFill>
@@ -1424,7 +1428,7 @@
             </a:ln>
             <a:extLst>
               <a:ext uri="{91240B29-F687-4f45-9708-019B960494DF}">
-                <a14:hiddenLine xmlns:a14="http://schemas.microsoft.com/office/drawing/2010/main" xmlns="" w="9525">
+                <a14:hiddenLine xmlns="" xmlns:a14="http://schemas.microsoft.com/office/drawing/2010/main" w="9525">
                   <a:solidFill>
                     <a:srgbClr val="000000"/>
                   </a:solidFill>
@@ -1514,7 +1518,7 @@
             </a:ln>
             <a:extLst>
               <a:ext uri="{91240B29-F687-4f45-9708-019B960494DF}">
-                <a14:hiddenLine xmlns:a14="http://schemas.microsoft.com/office/drawing/2010/main" xmlns="" w="9525">
+                <a14:hiddenLine xmlns="" xmlns:a14="http://schemas.microsoft.com/office/drawing/2010/main" w="9525">
                   <a:solidFill>
                     <a:srgbClr val="000000"/>
                   </a:solidFill>
@@ -1576,7 +1580,7 @@
             </a:ln>
             <a:extLst>
               <a:ext uri="{91240B29-F687-4f45-9708-019B960494DF}">
-                <a14:hiddenLine xmlns:a14="http://schemas.microsoft.com/office/drawing/2010/main" xmlns="" w="9525">
+                <a14:hiddenLine xmlns="" xmlns:a14="http://schemas.microsoft.com/office/drawing/2010/main" w="9525">
                   <a:solidFill>
                     <a:srgbClr val="000000"/>
                   </a:solidFill>
@@ -1686,7 +1690,7 @@
             </a:ln>
             <a:extLst>
               <a:ext uri="{91240B29-F687-4f45-9708-019B960494DF}">
-                <a14:hiddenLine xmlns:a14="http://schemas.microsoft.com/office/drawing/2010/main" xmlns="" w="9525">
+                <a14:hiddenLine xmlns="" xmlns:a14="http://schemas.microsoft.com/office/drawing/2010/main" w="9525">
                   <a:solidFill>
                     <a:srgbClr val="000000"/>
                   </a:solidFill>
@@ -1748,7 +1752,7 @@
             </a:ln>
             <a:extLst>
               <a:ext uri="{91240B29-F687-4f45-9708-019B960494DF}">
-                <a14:hiddenLine xmlns:a14="http://schemas.microsoft.com/office/drawing/2010/main" xmlns="" w="9525">
+                <a14:hiddenLine xmlns="" xmlns:a14="http://schemas.microsoft.com/office/drawing/2010/main" w="9525">
                   <a:solidFill>
                     <a:srgbClr val="000000"/>
                   </a:solidFill>
@@ -1838,7 +1842,7 @@
             </a:ln>
             <a:extLst>
               <a:ext uri="{91240B29-F687-4f45-9708-019B960494DF}">
-                <a14:hiddenLine xmlns:a14="http://schemas.microsoft.com/office/drawing/2010/main" xmlns="" w="9525">
+                <a14:hiddenLine xmlns="" xmlns:a14="http://schemas.microsoft.com/office/drawing/2010/main" w="9525">
                   <a:solidFill>
                     <a:srgbClr val="000000"/>
                   </a:solidFill>
@@ -1928,7 +1932,7 @@
             </a:ln>
             <a:extLst>
               <a:ext uri="{91240B29-F687-4f45-9708-019B960494DF}">
-                <a14:hiddenLine xmlns:a14="http://schemas.microsoft.com/office/drawing/2010/main" xmlns="" w="9525">
+                <a14:hiddenLine xmlns="" xmlns:a14="http://schemas.microsoft.com/office/drawing/2010/main" w="9525">
                   <a:solidFill>
                     <a:srgbClr val="000000"/>
                   </a:solidFill>
@@ -1990,7 +1994,7 @@
             </a:ln>
             <a:extLst>
               <a:ext uri="{91240B29-F687-4f45-9708-019B960494DF}">
-                <a14:hiddenLine xmlns:a14="http://schemas.microsoft.com/office/drawing/2010/main" xmlns="" w="9525">
+                <a14:hiddenLine xmlns="" xmlns:a14="http://schemas.microsoft.com/office/drawing/2010/main" w="9525">
                   <a:solidFill>
                     <a:srgbClr val="000000"/>
                   </a:solidFill>
@@ -2080,7 +2084,7 @@
             </a:ln>
             <a:extLst>
               <a:ext uri="{91240B29-F687-4f45-9708-019B960494DF}">
-                <a14:hiddenLine xmlns:a14="http://schemas.microsoft.com/office/drawing/2010/main" xmlns="" w="9525">
+                <a14:hiddenLine xmlns="" xmlns:a14="http://schemas.microsoft.com/office/drawing/2010/main" w="9525">
                   <a:solidFill>
                     <a:srgbClr val="000000"/>
                   </a:solidFill>
@@ -2170,7 +2174,7 @@
             </a:ln>
             <a:extLst>
               <a:ext uri="{91240B29-F687-4f45-9708-019B960494DF}">
-                <a14:hiddenLine xmlns:a14="http://schemas.microsoft.com/office/drawing/2010/main" xmlns="" w="9525">
+                <a14:hiddenLine xmlns="" xmlns:a14="http://schemas.microsoft.com/office/drawing/2010/main" w="9525">
                   <a:solidFill>
                     <a:srgbClr val="000000"/>
                   </a:solidFill>
@@ -2226,7 +2230,7 @@
             </a:ln>
             <a:extLst>
               <a:ext uri="{91240B29-F687-4f45-9708-019B960494DF}">
-                <a14:hiddenLine xmlns:a14="http://schemas.microsoft.com/office/drawing/2010/main" xmlns="" w="9525">
+                <a14:hiddenLine xmlns="" xmlns:a14="http://schemas.microsoft.com/office/drawing/2010/main" w="9525">
                   <a:solidFill>
                     <a:srgbClr val="000000"/>
                   </a:solidFill>
@@ -2316,7 +2320,7 @@
             </a:ln>
             <a:extLst>
               <a:ext uri="{91240B29-F687-4f45-9708-019B960494DF}">
-                <a14:hiddenLine xmlns:a14="http://schemas.microsoft.com/office/drawing/2010/main" xmlns="" w="9525">
+                <a14:hiddenLine xmlns="" xmlns:a14="http://schemas.microsoft.com/office/drawing/2010/main" w="9525">
                   <a:solidFill>
                     <a:srgbClr val="000000"/>
                   </a:solidFill>
@@ -2372,7 +2376,7 @@
             </a:ln>
             <a:extLst>
               <a:ext uri="{91240B29-F687-4f45-9708-019B960494DF}">
-                <a14:hiddenLine xmlns:a14="http://schemas.microsoft.com/office/drawing/2010/main" xmlns="" w="9525">
+                <a14:hiddenLine xmlns="" xmlns:a14="http://schemas.microsoft.com/office/drawing/2010/main" w="9525">
                   <a:solidFill>
                     <a:srgbClr val="000000"/>
                   </a:solidFill>
@@ -2462,7 +2466,7 @@
             </a:ln>
             <a:extLst>
               <a:ext uri="{91240B29-F687-4f45-9708-019B960494DF}">
-                <a14:hiddenLine xmlns:a14="http://schemas.microsoft.com/office/drawing/2010/main" xmlns="" w="9525">
+                <a14:hiddenLine xmlns="" xmlns:a14="http://schemas.microsoft.com/office/drawing/2010/main" w="9525">
                   <a:solidFill>
                     <a:srgbClr val="000000"/>
                   </a:solidFill>
@@ -2530,7 +2534,7 @@
             </a:ln>
             <a:extLst>
               <a:ext uri="{91240B29-F687-4f45-9708-019B960494DF}">
-                <a14:hiddenLine xmlns:a14="http://schemas.microsoft.com/office/drawing/2010/main" xmlns="" w="9525">
+                <a14:hiddenLine xmlns="" xmlns:a14="http://schemas.microsoft.com/office/drawing/2010/main" w="9525">
                   <a:solidFill>
                     <a:srgbClr val="000000"/>
                   </a:solidFill>
@@ -2620,7 +2624,7 @@
             </a:ln>
             <a:extLst>
               <a:ext uri="{91240B29-F687-4f45-9708-019B960494DF}">
-                <a14:hiddenLine xmlns:a14="http://schemas.microsoft.com/office/drawing/2010/main" xmlns="" w="9525">
+                <a14:hiddenLine xmlns="" xmlns:a14="http://schemas.microsoft.com/office/drawing/2010/main" w="9525">
                   <a:solidFill>
                     <a:srgbClr val="000000"/>
                   </a:solidFill>
@@ -2688,7 +2692,7 @@
             </a:ln>
             <a:extLst>
               <a:ext uri="{91240B29-F687-4f45-9708-019B960494DF}">
-                <a14:hiddenLine xmlns:a14="http://schemas.microsoft.com/office/drawing/2010/main" xmlns="" w="9525">
+                <a14:hiddenLine xmlns="" xmlns:a14="http://schemas.microsoft.com/office/drawing/2010/main" w="9525">
                   <a:solidFill>
                     <a:srgbClr val="000000"/>
                   </a:solidFill>
@@ -2778,7 +2782,7 @@
             </a:ln>
             <a:extLst>
               <a:ext uri="{91240B29-F687-4f45-9708-019B960494DF}">
-                <a14:hiddenLine xmlns:a14="http://schemas.microsoft.com/office/drawing/2010/main" xmlns="" w="9525">
+                <a14:hiddenLine xmlns="" xmlns:a14="http://schemas.microsoft.com/office/drawing/2010/main" w="9525">
                   <a:solidFill>
                     <a:srgbClr val="000000"/>
                   </a:solidFill>
@@ -2812,7 +2816,7 @@
             </a:ln>
             <a:extLst>
               <a:ext uri="{91240B29-F687-4f45-9708-019B960494DF}">
-                <a14:hiddenLine xmlns:a14="http://schemas.microsoft.com/office/drawing/2010/main" xmlns="" w="9525">
+                <a14:hiddenLine xmlns="" xmlns:a14="http://schemas.microsoft.com/office/drawing/2010/main" w="9525">
                   <a:solidFill>
                     <a:srgbClr val="000000"/>
                   </a:solidFill>
@@ -2902,7 +2906,7 @@
             </a:ln>
             <a:extLst>
               <a:ext uri="{91240B29-F687-4f45-9708-019B960494DF}">
-                <a14:hiddenLine xmlns:a14="http://schemas.microsoft.com/office/drawing/2010/main" xmlns="" w="9525">
+                <a14:hiddenLine xmlns="" xmlns:a14="http://schemas.microsoft.com/office/drawing/2010/main" w="9525">
                   <a:solidFill>
                     <a:srgbClr val="000000"/>
                   </a:solidFill>
@@ -2964,7 +2968,7 @@
             </a:ln>
             <a:extLst>
               <a:ext uri="{91240B29-F687-4f45-9708-019B960494DF}">
-                <a14:hiddenLine xmlns:a14="http://schemas.microsoft.com/office/drawing/2010/main" xmlns="" w="9525">
+                <a14:hiddenLine xmlns="" xmlns:a14="http://schemas.microsoft.com/office/drawing/2010/main" w="9525">
                   <a:solidFill>
                     <a:srgbClr val="000000"/>
                   </a:solidFill>
@@ -3026,7 +3030,7 @@
             </a:ln>
             <a:extLst>
               <a:ext uri="{91240B29-F687-4f45-9708-019B960494DF}">
-                <a14:hiddenLine xmlns:a14="http://schemas.microsoft.com/office/drawing/2010/main" xmlns="" w="9525">
+                <a14:hiddenLine xmlns="" xmlns:a14="http://schemas.microsoft.com/office/drawing/2010/main" w="9525">
                   <a:solidFill>
                     <a:srgbClr val="000000"/>
                   </a:solidFill>
@@ -3116,7 +3120,7 @@
             </a:ln>
             <a:extLst>
               <a:ext uri="{91240B29-F687-4f45-9708-019B960494DF}">
-                <a14:hiddenLine xmlns:a14="http://schemas.microsoft.com/office/drawing/2010/main" xmlns="" w="9525">
+                <a14:hiddenLine xmlns="" xmlns:a14="http://schemas.microsoft.com/office/drawing/2010/main" w="9525">
                   <a:solidFill>
                     <a:srgbClr val="000000"/>
                   </a:solidFill>
@@ -3184,7 +3188,7 @@
             </a:ln>
             <a:extLst>
               <a:ext uri="{91240B29-F687-4f45-9708-019B960494DF}">
-                <a14:hiddenLine xmlns:a14="http://schemas.microsoft.com/office/drawing/2010/main" xmlns="" w="9525">
+                <a14:hiddenLine xmlns="" xmlns:a14="http://schemas.microsoft.com/office/drawing/2010/main" w="9525">
                   <a:solidFill>
                     <a:srgbClr val="000000"/>
                   </a:solidFill>
@@ -3246,7 +3250,7 @@
             </a:ln>
             <a:extLst>
               <a:ext uri="{91240B29-F687-4f45-9708-019B960494DF}">
-                <a14:hiddenLine xmlns:a14="http://schemas.microsoft.com/office/drawing/2010/main" xmlns="" w="9525">
+                <a14:hiddenLine xmlns="" xmlns:a14="http://schemas.microsoft.com/office/drawing/2010/main" w="9525">
                   <a:solidFill>
                     <a:srgbClr val="000000"/>
                   </a:solidFill>
@@ -3336,7 +3340,7 @@
             </a:ln>
             <a:extLst>
               <a:ext uri="{91240B29-F687-4f45-9708-019B960494DF}">
-                <a14:hiddenLine xmlns:a14="http://schemas.microsoft.com/office/drawing/2010/main" xmlns="" w="9525">
+                <a14:hiddenLine xmlns="" xmlns:a14="http://schemas.microsoft.com/office/drawing/2010/main" w="9525">
                   <a:solidFill>
                     <a:srgbClr val="000000"/>
                   </a:solidFill>
@@ -3398,7 +3402,7 @@
             </a:ln>
             <a:extLst>
               <a:ext uri="{91240B29-F687-4f45-9708-019B960494DF}">
-                <a14:hiddenLine xmlns:a14="http://schemas.microsoft.com/office/drawing/2010/main" xmlns="" w="9525">
+                <a14:hiddenLine xmlns="" xmlns:a14="http://schemas.microsoft.com/office/drawing/2010/main" w="9525">
                   <a:solidFill>
                     <a:srgbClr val="000000"/>
                   </a:solidFill>
@@ -3488,7 +3492,7 @@
             </a:ln>
             <a:extLst>
               <a:ext uri="{91240B29-F687-4f45-9708-019B960494DF}">
-                <a14:hiddenLine xmlns:a14="http://schemas.microsoft.com/office/drawing/2010/main" xmlns="" w="9525">
+                <a14:hiddenLine xmlns="" xmlns:a14="http://schemas.microsoft.com/office/drawing/2010/main" w="9525">
                   <a:solidFill>
                     <a:srgbClr val="000000"/>
                   </a:solidFill>
@@ -3550,7 +3554,7 @@
             </a:ln>
             <a:extLst>
               <a:ext uri="{91240B29-F687-4f45-9708-019B960494DF}">
-                <a14:hiddenLine xmlns:a14="http://schemas.microsoft.com/office/drawing/2010/main" xmlns="" w="9525">
+                <a14:hiddenLine xmlns="" xmlns:a14="http://schemas.microsoft.com/office/drawing/2010/main" w="9525">
                   <a:solidFill>
                     <a:srgbClr val="000000"/>
                   </a:solidFill>
@@ -3640,7 +3644,7 @@
             </a:ln>
             <a:extLst>
               <a:ext uri="{91240B29-F687-4f45-9708-019B960494DF}">
-                <a14:hiddenLine xmlns:a14="http://schemas.microsoft.com/office/drawing/2010/main" xmlns="" w="9525">
+                <a14:hiddenLine xmlns="" xmlns:a14="http://schemas.microsoft.com/office/drawing/2010/main" w="9525">
                   <a:solidFill>
                     <a:srgbClr val="000000"/>
                   </a:solidFill>
@@ -3674,7 +3678,7 @@
             </a:ln>
             <a:extLst>
               <a:ext uri="{91240B29-F687-4f45-9708-019B960494DF}">
-                <a14:hiddenLine xmlns:a14="http://schemas.microsoft.com/office/drawing/2010/main" xmlns="" w="9525">
+                <a14:hiddenLine xmlns="" xmlns:a14="http://schemas.microsoft.com/office/drawing/2010/main" w="9525">
                   <a:solidFill>
                     <a:srgbClr val="000000"/>
                   </a:solidFill>
@@ -3739,7 +3743,7 @@
             </a:ln>
             <a:extLst>
               <a:ext uri="{91240B29-F687-4f45-9708-019B960494DF}">
-                <a14:hiddenLine xmlns:a14="http://schemas.microsoft.com/office/drawing/2010/main" xmlns="" w="9525">
+                <a14:hiddenLine xmlns="" xmlns:a14="http://schemas.microsoft.com/office/drawing/2010/main" w="9525">
                   <a:solidFill>
                     <a:srgbClr val="000000"/>
                   </a:solidFill>
@@ -3829,7 +3833,7 @@
             </a:ln>
             <a:extLst>
               <a:ext uri="{91240B29-F687-4f45-9708-019B960494DF}">
-                <a14:hiddenLine xmlns:a14="http://schemas.microsoft.com/office/drawing/2010/main" xmlns="" w="9525">
+                <a14:hiddenLine xmlns="" xmlns:a14="http://schemas.microsoft.com/office/drawing/2010/main" w="9525">
                   <a:solidFill>
                     <a:srgbClr val="000000"/>
                   </a:solidFill>
@@ -3891,7 +3895,7 @@
             </a:ln>
             <a:extLst>
               <a:ext uri="{91240B29-F687-4f45-9708-019B960494DF}">
-                <a14:hiddenLine xmlns:a14="http://schemas.microsoft.com/office/drawing/2010/main" xmlns="" w="9525">
+                <a14:hiddenLine xmlns="" xmlns:a14="http://schemas.microsoft.com/office/drawing/2010/main" w="9525">
                   <a:solidFill>
                     <a:srgbClr val="000000"/>
                   </a:solidFill>
@@ -3981,7 +3985,7 @@
             </a:ln>
             <a:extLst>
               <a:ext uri="{91240B29-F687-4f45-9708-019B960494DF}">
-                <a14:hiddenLine xmlns:a14="http://schemas.microsoft.com/office/drawing/2010/main" xmlns="" w="9525">
+                <a14:hiddenLine xmlns="" xmlns:a14="http://schemas.microsoft.com/office/drawing/2010/main" w="9525">
                   <a:solidFill>
                     <a:srgbClr val="000000"/>
                   </a:solidFill>
@@ -4071,7 +4075,7 @@
             </a:ln>
             <a:extLst>
               <a:ext uri="{91240B29-F687-4f45-9708-019B960494DF}">
-                <a14:hiddenLine xmlns:a14="http://schemas.microsoft.com/office/drawing/2010/main" xmlns="" w="9525">
+                <a14:hiddenLine xmlns="" xmlns:a14="http://schemas.microsoft.com/office/drawing/2010/main" w="9525">
                   <a:solidFill>
                     <a:srgbClr val="000000"/>
                   </a:solidFill>
@@ -4136,7 +4140,7 @@
             </a:ln>
             <a:extLst>
               <a:ext uri="{91240B29-F687-4f45-9708-019B960494DF}">
-                <a14:hiddenLine xmlns:a14="http://schemas.microsoft.com/office/drawing/2010/main" xmlns="" w="9525">
+                <a14:hiddenLine xmlns="" xmlns:a14="http://schemas.microsoft.com/office/drawing/2010/main" w="9525">
                   <a:solidFill>
                     <a:srgbClr val="000000"/>
                   </a:solidFill>
@@ -4198,7 +4202,7 @@
             </a:ln>
             <a:extLst>
               <a:ext uri="{91240B29-F687-4f45-9708-019B960494DF}">
-                <a14:hiddenLine xmlns:a14="http://schemas.microsoft.com/office/drawing/2010/main" xmlns="" w="9525">
+                <a14:hiddenLine xmlns="" xmlns:a14="http://schemas.microsoft.com/office/drawing/2010/main" w="9525">
                   <a:solidFill>
                     <a:srgbClr val="000000"/>
                   </a:solidFill>
@@ -4288,7 +4292,7 @@
             </a:ln>
             <a:extLst>
               <a:ext uri="{91240B29-F687-4f45-9708-019B960494DF}">
-                <a14:hiddenLine xmlns:a14="http://schemas.microsoft.com/office/drawing/2010/main" xmlns="" w="9525">
+                <a14:hiddenLine xmlns="" xmlns:a14="http://schemas.microsoft.com/office/drawing/2010/main" w="9525">
                   <a:solidFill>
                     <a:srgbClr val="000000"/>
                   </a:solidFill>
@@ -4378,7 +4382,7 @@
             </a:ln>
             <a:extLst>
               <a:ext uri="{91240B29-F687-4f45-9708-019B960494DF}">
-                <a14:hiddenLine xmlns:a14="http://schemas.microsoft.com/office/drawing/2010/main" xmlns="" w="9525">
+                <a14:hiddenLine xmlns="" xmlns:a14="http://schemas.microsoft.com/office/drawing/2010/main" w="9525">
                   <a:solidFill>
                     <a:srgbClr val="000000"/>
                   </a:solidFill>
@@ -4440,7 +4444,7 @@
             </a:ln>
             <a:extLst>
               <a:ext uri="{91240B29-F687-4f45-9708-019B960494DF}">
-                <a14:hiddenLine xmlns:a14="http://schemas.microsoft.com/office/drawing/2010/main" xmlns="" w="9525">
+                <a14:hiddenLine xmlns="" xmlns:a14="http://schemas.microsoft.com/office/drawing/2010/main" w="9525">
                   <a:solidFill>
                     <a:srgbClr val="000000"/>
                   </a:solidFill>
@@ -4560,7 +4564,7 @@
             </a:ln>
             <a:extLst>
               <a:ext uri="{91240B29-F687-4f45-9708-019B960494DF}">
-                <a14:hiddenLine xmlns:a14="http://schemas.microsoft.com/office/drawing/2010/main" xmlns="" w="9525">
+                <a14:hiddenLine xmlns="" xmlns:a14="http://schemas.microsoft.com/office/drawing/2010/main" w="9525">
                   <a:solidFill>
                     <a:srgbClr val="000000"/>
                   </a:solidFill>
@@ -4628,7 +4632,7 @@
             </a:ln>
             <a:extLst>
               <a:ext uri="{91240B29-F687-4f45-9708-019B960494DF}">
-                <a14:hiddenLine xmlns:a14="http://schemas.microsoft.com/office/drawing/2010/main" xmlns="" w="9525">
+                <a14:hiddenLine xmlns="" xmlns:a14="http://schemas.microsoft.com/office/drawing/2010/main" w="9525">
                   <a:solidFill>
                     <a:srgbClr val="000000"/>
                   </a:solidFill>
@@ -4718,7 +4722,7 @@
             </a:ln>
             <a:extLst>
               <a:ext uri="{91240B29-F687-4f45-9708-019B960494DF}">
-                <a14:hiddenLine xmlns:a14="http://schemas.microsoft.com/office/drawing/2010/main" xmlns="" w="9525">
+                <a14:hiddenLine xmlns="" xmlns:a14="http://schemas.microsoft.com/office/drawing/2010/main" w="9525">
                   <a:solidFill>
                     <a:srgbClr val="000000"/>
                   </a:solidFill>
@@ -4858,7 +4862,7 @@
           <a:p>
             <a:fld id="{7D5C5133-F893-F14C-BA08-1EC9586E074E}" type="datetime1">
               <a:rPr lang="en-US" smtClean="0"/>
-              <a:t>10/15/25</a:t>
+              <a:t>10/20/25</a:t>
             </a:fld>
             <a:endParaRPr lang="en-US"/>
           </a:p>
@@ -5125,7 +5129,7 @@
           <a:p>
             <a:fld id="{C3F42846-DDBA-4B41-AB95-6CC7486A9594}" type="datetime1">
               <a:rPr lang="en-US" smtClean="0"/>
-              <a:t>10/15/25</a:t>
+              <a:t>10/20/25</a:t>
             </a:fld>
             <a:endParaRPr lang="en-US"/>
           </a:p>
@@ -5321,7 +5325,7 @@
           <a:p>
             <a:fld id="{BAD347C4-88DA-C446-8E50-9CCD1CDD5CFD}" type="datetime1">
               <a:rPr lang="en-US" smtClean="0"/>
-              <a:t>10/15/25</a:t>
+              <a:t>10/20/25</a:t>
             </a:fld>
             <a:endParaRPr lang="en-US"/>
           </a:p>
@@ -5584,7 +5588,7 @@
           <a:p>
             <a:fld id="{CFEB3FC4-8F4E-0048-9E6E-571457D9347D}" type="datetime1">
               <a:rPr lang="en-US" smtClean="0"/>
-              <a:t>10/15/25</a:t>
+              <a:t>10/20/25</a:t>
             </a:fld>
             <a:endParaRPr lang="en-US"/>
           </a:p>
@@ -6018,7 +6022,7 @@
           <a:p>
             <a:fld id="{3F56FB70-2694-734B-BD00-3E9B1243DA1B}" type="datetime1">
               <a:rPr lang="en-US" smtClean="0"/>
-              <a:t>10/15/25</a:t>
+              <a:t>10/20/25</a:t>
             </a:fld>
             <a:endParaRPr lang="en-US"/>
           </a:p>
@@ -6564,7 +6568,7 @@
           <a:p>
             <a:fld id="{5536664F-3BD9-3D47-89E3-C16CBAA67B09}" type="datetime1">
               <a:rPr lang="en-US" smtClean="0"/>
-              <a:t>10/15/25</a:t>
+              <a:t>10/20/25</a:t>
             </a:fld>
             <a:endParaRPr lang="en-US"/>
           </a:p>
@@ -7284,7 +7288,7 @@
           <a:p>
             <a:fld id="{B6930052-022C-594D-BCC4-41E81B10B173}" type="datetime1">
               <a:rPr lang="en-US" smtClean="0"/>
-              <a:t>10/15/25</a:t>
+              <a:t>10/20/25</a:t>
             </a:fld>
             <a:endParaRPr lang="en-US"/>
           </a:p>
@@ -7454,7 +7458,7 @@
           <a:p>
             <a:fld id="{790A53BD-D470-4D45-A2F4-FDA414AF0BDC}" type="datetime1">
               <a:rPr lang="en-US" smtClean="0"/>
-              <a:t>10/15/25</a:t>
+              <a:t>10/20/25</a:t>
             </a:fld>
             <a:endParaRPr lang="en-US"/>
           </a:p>
@@ -7634,7 +7638,7 @@
           <a:p>
             <a:fld id="{0E9ECF03-F18B-C94B-8BE4-E6A6733BA604}" type="datetime1">
               <a:rPr lang="en-US" smtClean="0"/>
-              <a:t>10/15/25</a:t>
+              <a:t>10/20/25</a:t>
             </a:fld>
             <a:endParaRPr lang="en-US"/>
           </a:p>
@@ -7804,7 +7808,7 @@
           <a:p>
             <a:fld id="{D46FB50B-1FD8-5E46-8B10-0DF06EAB94B0}" type="datetime1">
               <a:rPr lang="en-US" smtClean="0"/>
-              <a:t>10/15/25</a:t>
+              <a:t>10/20/25</a:t>
             </a:fld>
             <a:endParaRPr lang="en-US"/>
           </a:p>
@@ -8054,7 +8058,7 @@
           <a:p>
             <a:fld id="{C085F7E1-7C38-2D4D-8C00-4127E00B0B48}" type="datetime1">
               <a:rPr lang="en-US" smtClean="0"/>
-              <a:t>10/15/25</a:t>
+              <a:t>10/20/25</a:t>
             </a:fld>
             <a:endParaRPr lang="en-US"/>
           </a:p>
@@ -8286,7 +8290,7 @@
           <a:p>
             <a:fld id="{2D4A6956-3551-B545-9486-3BB7F190A0D2}" type="datetime1">
               <a:rPr lang="en-US" smtClean="0"/>
-              <a:t>10/15/25</a:t>
+              <a:t>10/20/25</a:t>
             </a:fld>
             <a:endParaRPr lang="en-US"/>
           </a:p>
@@ -8672,7 +8676,7 @@
           <a:p>
             <a:fld id="{DDB6C75B-25A0-6544-8302-D042197E05AD}" type="datetime1">
               <a:rPr lang="en-US" smtClean="0"/>
-              <a:t>10/15/25</a:t>
+              <a:t>10/20/25</a:t>
             </a:fld>
             <a:endParaRPr lang="en-US"/>
           </a:p>
@@ -8795,7 +8799,7 @@
           <a:p>
             <a:fld id="{0A34C7BB-BA6C-1645-9DAD-75B2F2C54F5F}" type="datetime1">
               <a:rPr lang="en-US" smtClean="0"/>
-              <a:t>10/15/25</a:t>
+              <a:t>10/20/25</a:t>
             </a:fld>
             <a:endParaRPr lang="en-US"/>
           </a:p>
@@ -8890,7 +8894,7 @@
           <a:p>
             <a:fld id="{537B4012-384C-9A46-A1BB-C4ECB3A515E2}" type="datetime1">
               <a:rPr lang="en-US" smtClean="0"/>
-              <a:t>10/15/25</a:t>
+              <a:t>10/20/25</a:t>
             </a:fld>
             <a:endParaRPr lang="en-US"/>
           </a:p>
@@ -9139,7 +9143,7 @@
           <a:p>
             <a:fld id="{A90591FD-BB3A-3E45-BDDF-440A7F347371}" type="datetime1">
               <a:rPr lang="en-US" smtClean="0"/>
-              <a:t>10/15/25</a:t>
+              <a:t>10/20/25</a:t>
             </a:fld>
             <a:endParaRPr lang="en-US"/>
           </a:p>
@@ -9424,7 +9428,7 @@
           <a:p>
             <a:fld id="{D397735C-1C73-1945-A987-CC3C33F7E070}" type="datetime1">
               <a:rPr lang="en-US" smtClean="0"/>
-              <a:t>10/15/25</a:t>
+              <a:t>10/20/25</a:t>
             </a:fld>
             <a:endParaRPr lang="en-US"/>
           </a:p>
@@ -9547,7 +9551,7 @@
           <a:noFill/>
           <a:extLst>
             <a:ext uri="{909E8E84-426E-40dd-AFC4-6F175D3DCCD1}">
-              <a14:hiddenFill xmlns:a14="http://schemas.microsoft.com/office/drawing/2010/main" xmlns="">
+              <a14:hiddenFill xmlns="" xmlns:a14="http://schemas.microsoft.com/office/drawing/2010/main">
                 <a:solidFill>
                   <a:srgbClr val="FFFFFF"/>
                 </a:solidFill>
@@ -9621,7 +9625,7 @@
               </a:ln>
               <a:extLst>
                 <a:ext uri="{91240B29-F687-4f45-9708-019B960494DF}">
-                  <a14:hiddenLine xmlns:a14="http://schemas.microsoft.com/office/drawing/2010/main" xmlns="" w="9525">
+                  <a14:hiddenLine xmlns="" xmlns:a14="http://schemas.microsoft.com/office/drawing/2010/main" w="9525">
                     <a:solidFill>
                       <a:srgbClr val="000000"/>
                     </a:solidFill>
@@ -9711,7 +9715,7 @@
               </a:ln>
               <a:extLst>
                 <a:ext uri="{91240B29-F687-4f45-9708-019B960494DF}">
-                  <a14:hiddenLine xmlns:a14="http://schemas.microsoft.com/office/drawing/2010/main" xmlns="" w="9525">
+                  <a14:hiddenLine xmlns="" xmlns:a14="http://schemas.microsoft.com/office/drawing/2010/main" w="9525">
                     <a:solidFill>
                       <a:srgbClr val="000000"/>
                     </a:solidFill>
@@ -9801,7 +9805,7 @@
               </a:ln>
               <a:extLst>
                 <a:ext uri="{91240B29-F687-4f45-9708-019B960494DF}">
-                  <a14:hiddenLine xmlns:a14="http://schemas.microsoft.com/office/drawing/2010/main" xmlns="" w="9525">
+                  <a14:hiddenLine xmlns="" xmlns:a14="http://schemas.microsoft.com/office/drawing/2010/main" w="9525">
                     <a:solidFill>
                       <a:srgbClr val="000000"/>
                     </a:solidFill>
@@ -9863,7 +9867,7 @@
               </a:ln>
               <a:extLst>
                 <a:ext uri="{91240B29-F687-4f45-9708-019B960494DF}">
-                  <a14:hiddenLine xmlns:a14="http://schemas.microsoft.com/office/drawing/2010/main" xmlns="" w="9525">
+                  <a14:hiddenLine xmlns="" xmlns:a14="http://schemas.microsoft.com/office/drawing/2010/main" w="9525">
                     <a:solidFill>
                       <a:srgbClr val="000000"/>
                     </a:solidFill>
@@ -9953,7 +9957,7 @@
               </a:ln>
               <a:extLst>
                 <a:ext uri="{91240B29-F687-4f45-9708-019B960494DF}">
-                  <a14:hiddenLine xmlns:a14="http://schemas.microsoft.com/office/drawing/2010/main" xmlns="" w="9525">
+                  <a14:hiddenLine xmlns="" xmlns:a14="http://schemas.microsoft.com/office/drawing/2010/main" w="9525">
                     <a:solidFill>
                       <a:srgbClr val="000000"/>
                     </a:solidFill>
@@ -10015,7 +10019,7 @@
               </a:ln>
               <a:extLst>
                 <a:ext uri="{91240B29-F687-4f45-9708-019B960494DF}">
-                  <a14:hiddenLine xmlns:a14="http://schemas.microsoft.com/office/drawing/2010/main" xmlns="" w="9525">
+                  <a14:hiddenLine xmlns="" xmlns:a14="http://schemas.microsoft.com/office/drawing/2010/main" w="9525">
                     <a:solidFill>
                       <a:srgbClr val="000000"/>
                     </a:solidFill>
@@ -10077,7 +10081,7 @@
               </a:ln>
               <a:extLst>
                 <a:ext uri="{91240B29-F687-4f45-9708-019B960494DF}">
-                  <a14:hiddenLine xmlns:a14="http://schemas.microsoft.com/office/drawing/2010/main" xmlns="" w="9525">
+                  <a14:hiddenLine xmlns="" xmlns:a14="http://schemas.microsoft.com/office/drawing/2010/main" w="9525">
                     <a:solidFill>
                       <a:srgbClr val="000000"/>
                     </a:solidFill>
@@ -10167,7 +10171,7 @@
               </a:ln>
               <a:extLst>
                 <a:ext uri="{91240B29-F687-4f45-9708-019B960494DF}">
-                  <a14:hiddenLine xmlns:a14="http://schemas.microsoft.com/office/drawing/2010/main" xmlns="" w="9525">
+                  <a14:hiddenLine xmlns="" xmlns:a14="http://schemas.microsoft.com/office/drawing/2010/main" w="9525">
                     <a:solidFill>
                       <a:srgbClr val="000000"/>
                     </a:solidFill>
@@ -10257,7 +10261,7 @@
               </a:ln>
               <a:extLst>
                 <a:ext uri="{91240B29-F687-4f45-9708-019B960494DF}">
-                  <a14:hiddenLine xmlns:a14="http://schemas.microsoft.com/office/drawing/2010/main" xmlns="" w="9525">
+                  <a14:hiddenLine xmlns="" xmlns:a14="http://schemas.microsoft.com/office/drawing/2010/main" w="9525">
                     <a:solidFill>
                       <a:srgbClr val="000000"/>
                     </a:solidFill>
@@ -10319,7 +10323,7 @@
               </a:ln>
               <a:extLst>
                 <a:ext uri="{91240B29-F687-4f45-9708-019B960494DF}">
-                  <a14:hiddenLine xmlns:a14="http://schemas.microsoft.com/office/drawing/2010/main" xmlns="" w="9525">
+                  <a14:hiddenLine xmlns="" xmlns:a14="http://schemas.microsoft.com/office/drawing/2010/main" w="9525">
                     <a:solidFill>
                       <a:srgbClr val="000000"/>
                     </a:solidFill>
@@ -10429,7 +10433,7 @@
               </a:ln>
               <a:extLst>
                 <a:ext uri="{91240B29-F687-4f45-9708-019B960494DF}">
-                  <a14:hiddenLine xmlns:a14="http://schemas.microsoft.com/office/drawing/2010/main" xmlns="" w="9525">
+                  <a14:hiddenLine xmlns="" xmlns:a14="http://schemas.microsoft.com/office/drawing/2010/main" w="9525">
                     <a:solidFill>
                       <a:srgbClr val="000000"/>
                     </a:solidFill>
@@ -10513,7 +10517,7 @@
               </a:ln>
               <a:extLst>
                 <a:ext uri="{91240B29-F687-4f45-9708-019B960494DF}">
-                  <a14:hiddenLine xmlns:a14="http://schemas.microsoft.com/office/drawing/2010/main" xmlns="" w="9525">
+                  <a14:hiddenLine xmlns="" xmlns:a14="http://schemas.microsoft.com/office/drawing/2010/main" w="9525">
                     <a:solidFill>
                       <a:srgbClr val="000000"/>
                     </a:solidFill>
@@ -10575,7 +10579,7 @@
               </a:ln>
               <a:extLst>
                 <a:ext uri="{91240B29-F687-4f45-9708-019B960494DF}">
-                  <a14:hiddenLine xmlns:a14="http://schemas.microsoft.com/office/drawing/2010/main" xmlns="" w="9525">
+                  <a14:hiddenLine xmlns="" xmlns:a14="http://schemas.microsoft.com/office/drawing/2010/main" w="9525">
                     <a:solidFill>
                       <a:srgbClr val="000000"/>
                     </a:solidFill>
@@ -10637,7 +10641,7 @@
               </a:ln>
               <a:extLst>
                 <a:ext uri="{91240B29-F687-4f45-9708-019B960494DF}">
-                  <a14:hiddenLine xmlns:a14="http://schemas.microsoft.com/office/drawing/2010/main" xmlns="" w="9525">
+                  <a14:hiddenLine xmlns="" xmlns:a14="http://schemas.microsoft.com/office/drawing/2010/main" w="9525">
                     <a:solidFill>
                       <a:srgbClr val="000000"/>
                     </a:solidFill>
@@ -10727,7 +10731,7 @@
               </a:ln>
               <a:extLst>
                 <a:ext uri="{91240B29-F687-4f45-9708-019B960494DF}">
-                  <a14:hiddenLine xmlns:a14="http://schemas.microsoft.com/office/drawing/2010/main" xmlns="" w="9525">
+                  <a14:hiddenLine xmlns="" xmlns:a14="http://schemas.microsoft.com/office/drawing/2010/main" w="9525">
                     <a:solidFill>
                       <a:srgbClr val="000000"/>
                     </a:solidFill>
@@ -10761,7 +10765,7 @@
               </a:ln>
               <a:extLst>
                 <a:ext uri="{91240B29-F687-4f45-9708-019B960494DF}">
-                  <a14:hiddenLine xmlns:a14="http://schemas.microsoft.com/office/drawing/2010/main" xmlns="" w="9525">
+                  <a14:hiddenLine xmlns="" xmlns:a14="http://schemas.microsoft.com/office/drawing/2010/main" w="9525">
                     <a:solidFill>
                       <a:srgbClr val="000000"/>
                     </a:solidFill>
@@ -10826,7 +10830,7 @@
               </a:ln>
               <a:extLst>
                 <a:ext uri="{91240B29-F687-4f45-9708-019B960494DF}">
-                  <a14:hiddenLine xmlns:a14="http://schemas.microsoft.com/office/drawing/2010/main" xmlns="" w="9525">
+                  <a14:hiddenLine xmlns="" xmlns:a14="http://schemas.microsoft.com/office/drawing/2010/main" w="9525">
                     <a:solidFill>
                       <a:srgbClr val="000000"/>
                     </a:solidFill>
@@ -10916,7 +10920,7 @@
               </a:ln>
               <a:extLst>
                 <a:ext uri="{91240B29-F687-4f45-9708-019B960494DF}">
-                  <a14:hiddenLine xmlns:a14="http://schemas.microsoft.com/office/drawing/2010/main" xmlns="" w="9525">
+                  <a14:hiddenLine xmlns="" xmlns:a14="http://schemas.microsoft.com/office/drawing/2010/main" w="9525">
                     <a:solidFill>
                       <a:srgbClr val="000000"/>
                     </a:solidFill>
@@ -10978,7 +10982,7 @@
               </a:ln>
               <a:extLst>
                 <a:ext uri="{91240B29-F687-4f45-9708-019B960494DF}">
-                  <a14:hiddenLine xmlns:a14="http://schemas.microsoft.com/office/drawing/2010/main" xmlns="" w="9525">
+                  <a14:hiddenLine xmlns="" xmlns:a14="http://schemas.microsoft.com/office/drawing/2010/main" w="9525">
                     <a:solidFill>
                       <a:srgbClr val="000000"/>
                     </a:solidFill>
@@ -11068,7 +11072,7 @@
               </a:ln>
               <a:extLst>
                 <a:ext uri="{91240B29-F687-4f45-9708-019B960494DF}">
-                  <a14:hiddenLine xmlns:a14="http://schemas.microsoft.com/office/drawing/2010/main" xmlns="" w="9525">
+                  <a14:hiddenLine xmlns="" xmlns:a14="http://schemas.microsoft.com/office/drawing/2010/main" w="9525">
                     <a:solidFill>
                       <a:srgbClr val="000000"/>
                     </a:solidFill>
@@ -11133,7 +11137,7 @@
               </a:ln>
               <a:extLst>
                 <a:ext uri="{91240B29-F687-4f45-9708-019B960494DF}">
-                  <a14:hiddenLine xmlns:a14="http://schemas.microsoft.com/office/drawing/2010/main" xmlns="" w="9525">
+                  <a14:hiddenLine xmlns="" xmlns:a14="http://schemas.microsoft.com/office/drawing/2010/main" w="9525">
                     <a:solidFill>
                       <a:srgbClr val="000000"/>
                     </a:solidFill>
@@ -11195,7 +11199,7 @@
               </a:ln>
               <a:extLst>
                 <a:ext uri="{91240B29-F687-4f45-9708-019B960494DF}">
-                  <a14:hiddenLine xmlns:a14="http://schemas.microsoft.com/office/drawing/2010/main" xmlns="" w="9525">
+                  <a14:hiddenLine xmlns="" xmlns:a14="http://schemas.microsoft.com/office/drawing/2010/main" w="9525">
                     <a:solidFill>
                       <a:srgbClr val="000000"/>
                     </a:solidFill>
@@ -11285,7 +11289,7 @@
               </a:ln>
               <a:extLst>
                 <a:ext uri="{91240B29-F687-4f45-9708-019B960494DF}">
-                  <a14:hiddenLine xmlns:a14="http://schemas.microsoft.com/office/drawing/2010/main" xmlns="" w="9525">
+                  <a14:hiddenLine xmlns="" xmlns:a14="http://schemas.microsoft.com/office/drawing/2010/main" w="9525">
                     <a:solidFill>
                       <a:srgbClr val="000000"/>
                     </a:solidFill>
@@ -11375,7 +11379,7 @@
               </a:ln>
               <a:extLst>
                 <a:ext uri="{91240B29-F687-4f45-9708-019B960494DF}">
-                  <a14:hiddenLine xmlns:a14="http://schemas.microsoft.com/office/drawing/2010/main" xmlns="" w="9525">
+                  <a14:hiddenLine xmlns="" xmlns:a14="http://schemas.microsoft.com/office/drawing/2010/main" w="9525">
                     <a:solidFill>
                       <a:srgbClr val="000000"/>
                     </a:solidFill>
@@ -11440,7 +11444,7 @@
               </a:ln>
               <a:extLst>
                 <a:ext uri="{91240B29-F687-4f45-9708-019B960494DF}">
-                  <a14:hiddenLine xmlns:a14="http://schemas.microsoft.com/office/drawing/2010/main" xmlns="" w="9525">
+                  <a14:hiddenLine xmlns="" xmlns:a14="http://schemas.microsoft.com/office/drawing/2010/main" w="9525">
                     <a:solidFill>
                       <a:srgbClr val="000000"/>
                     </a:solidFill>
@@ -11560,7 +11564,7 @@
               </a:ln>
               <a:extLst>
                 <a:ext uri="{91240B29-F687-4f45-9708-019B960494DF}">
-                  <a14:hiddenLine xmlns:a14="http://schemas.microsoft.com/office/drawing/2010/main" xmlns="" w="9525">
+                  <a14:hiddenLine xmlns="" xmlns:a14="http://schemas.microsoft.com/office/drawing/2010/main" w="9525">
                     <a:solidFill>
                       <a:srgbClr val="000000"/>
                     </a:solidFill>
@@ -11641,7 +11645,7 @@
               </a:ln>
               <a:extLst>
                 <a:ext uri="{91240B29-F687-4f45-9708-019B960494DF}">
-                  <a14:hiddenLine xmlns:a14="http://schemas.microsoft.com/office/drawing/2010/main" xmlns="" w="9525">
+                  <a14:hiddenLine xmlns="" xmlns:a14="http://schemas.microsoft.com/office/drawing/2010/main" w="9525">
                     <a:solidFill>
                       <a:srgbClr val="000000"/>
                     </a:solidFill>
@@ -11756,7 +11760,7 @@
               </a:ln>
               <a:extLst>
                 <a:ext uri="{91240B29-F687-4f45-9708-019B960494DF}">
-                  <a14:hiddenLine xmlns:a14="http://schemas.microsoft.com/office/drawing/2010/main" xmlns="" w="9525">
+                  <a14:hiddenLine xmlns="" xmlns:a14="http://schemas.microsoft.com/office/drawing/2010/main" w="9525">
                     <a:solidFill>
                       <a:srgbClr val="000000"/>
                     </a:solidFill>
@@ -11846,7 +11850,7 @@
               </a:ln>
               <a:extLst>
                 <a:ext uri="{91240B29-F687-4f45-9708-019B960494DF}">
-                  <a14:hiddenLine xmlns:a14="http://schemas.microsoft.com/office/drawing/2010/main" xmlns="" w="9525">
+                  <a14:hiddenLine xmlns="" xmlns:a14="http://schemas.microsoft.com/office/drawing/2010/main" w="9525">
                     <a:solidFill>
                       <a:srgbClr val="000000"/>
                     </a:solidFill>
@@ -11911,7 +11915,7 @@
               </a:ln>
               <a:extLst>
                 <a:ext uri="{91240B29-F687-4f45-9708-019B960494DF}">
-                  <a14:hiddenLine xmlns:a14="http://schemas.microsoft.com/office/drawing/2010/main" xmlns="" w="9525">
+                  <a14:hiddenLine xmlns="" xmlns:a14="http://schemas.microsoft.com/office/drawing/2010/main" w="9525">
                     <a:solidFill>
                       <a:srgbClr val="000000"/>
                     </a:solidFill>
@@ -12001,7 +12005,7 @@
               </a:ln>
               <a:extLst>
                 <a:ext uri="{91240B29-F687-4f45-9708-019B960494DF}">
-                  <a14:hiddenLine xmlns:a14="http://schemas.microsoft.com/office/drawing/2010/main" xmlns="" w="9525">
+                  <a14:hiddenLine xmlns="" xmlns:a14="http://schemas.microsoft.com/office/drawing/2010/main" w="9525">
                     <a:solidFill>
                       <a:srgbClr val="000000"/>
                     </a:solidFill>
@@ -12069,7 +12073,7 @@
               </a:ln>
               <a:extLst>
                 <a:ext uri="{91240B29-F687-4f45-9708-019B960494DF}">
-                  <a14:hiddenLine xmlns:a14="http://schemas.microsoft.com/office/drawing/2010/main" xmlns="" w="9525">
+                  <a14:hiddenLine xmlns="" xmlns:a14="http://schemas.microsoft.com/office/drawing/2010/main" w="9525">
                     <a:solidFill>
                       <a:srgbClr val="000000"/>
                     </a:solidFill>
@@ -12159,7 +12163,7 @@
               </a:ln>
               <a:extLst>
                 <a:ext uri="{91240B29-F687-4f45-9708-019B960494DF}">
-                  <a14:hiddenLine xmlns:a14="http://schemas.microsoft.com/office/drawing/2010/main" xmlns="" w="9525">
+                  <a14:hiddenLine xmlns="" xmlns:a14="http://schemas.microsoft.com/office/drawing/2010/main" w="9525">
                     <a:solidFill>
                       <a:srgbClr val="000000"/>
                     </a:solidFill>
@@ -12227,7 +12231,7 @@
               </a:ln>
               <a:extLst>
                 <a:ext uri="{91240B29-F687-4f45-9708-019B960494DF}">
-                  <a14:hiddenLine xmlns:a14="http://schemas.microsoft.com/office/drawing/2010/main" xmlns="" w="9525">
+                  <a14:hiddenLine xmlns="" xmlns:a14="http://schemas.microsoft.com/office/drawing/2010/main" w="9525">
                     <a:solidFill>
                       <a:srgbClr val="000000"/>
                     </a:solidFill>
@@ -12317,7 +12321,7 @@
               </a:ln>
               <a:extLst>
                 <a:ext uri="{91240B29-F687-4f45-9708-019B960494DF}">
-                  <a14:hiddenLine xmlns:a14="http://schemas.microsoft.com/office/drawing/2010/main" xmlns="" w="9525">
+                  <a14:hiddenLine xmlns="" xmlns:a14="http://schemas.microsoft.com/office/drawing/2010/main" w="9525">
                     <a:solidFill>
                       <a:srgbClr val="000000"/>
                     </a:solidFill>
@@ -12351,7 +12355,7 @@
               </a:ln>
               <a:extLst>
                 <a:ext uri="{91240B29-F687-4f45-9708-019B960494DF}">
-                  <a14:hiddenLine xmlns:a14="http://schemas.microsoft.com/office/drawing/2010/main" xmlns="" w="9525">
+                  <a14:hiddenLine xmlns="" xmlns:a14="http://schemas.microsoft.com/office/drawing/2010/main" w="9525">
                     <a:solidFill>
                       <a:srgbClr val="000000"/>
                     </a:solidFill>
@@ -12491,7 +12495,7 @@
           <a:p>
             <a:fld id="{68D995C4-FA21-394A-8B12-BECDBE77E1C6}" type="datetime1">
               <a:rPr lang="en-US" smtClean="0"/>
-              <a:t>10/15/25</a:t>
+              <a:t>10/20/25</a:t>
             </a:fld>
             <a:endParaRPr lang="en-US"/>
           </a:p>
@@ -13019,8 +13023,8 @@
           <a:chExt cx="0" cy="0"/>
         </a:xfrm>
       </p:grpSpPr>
-      <mc:AlternateContent xmlns:mc="http://schemas.openxmlformats.org/markup-compatibility/2006">
-        <mc:Choice xmlns:a14="http://schemas.microsoft.com/office/drawing/2010/main" Requires="a14">
+      <mc:AlternateContent xmlns:mc="http://schemas.openxmlformats.org/markup-compatibility/2006" xmlns:a14="http://schemas.microsoft.com/office/drawing/2010/main">
+        <mc:Choice Requires="a14">
           <p:sp>
             <p:nvSpPr>
               <p:cNvPr id="4" name="Title 3"/>
@@ -13062,7 +13066,7 @@
             </p:txBody>
           </p:sp>
         </mc:Choice>
-        <mc:Fallback>
+        <mc:Fallback xmlns="">
           <p:sp>
             <p:nvSpPr>
               <p:cNvPr id="4" name="Title 3"/>
@@ -13100,8 +13104,8 @@
           </p:sp>
         </mc:Fallback>
       </mc:AlternateContent>
-      <mc:AlternateContent xmlns:mc="http://schemas.openxmlformats.org/markup-compatibility/2006">
-        <mc:Choice xmlns:a14="http://schemas.microsoft.com/office/drawing/2010/main" Requires="a14">
+      <mc:AlternateContent xmlns:mc="http://schemas.openxmlformats.org/markup-compatibility/2006" xmlns:a14="http://schemas.microsoft.com/office/drawing/2010/main">
+        <mc:Choice Requires="a14">
           <p:sp>
             <p:nvSpPr>
               <p:cNvPr id="11" name="Content Placeholder 4">
@@ -13419,7 +13423,7 @@
             </p:txBody>
           </p:sp>
         </mc:Choice>
-        <mc:Fallback>
+        <mc:Fallback xmlns="">
           <p:sp>
             <p:nvSpPr>
               <p:cNvPr id="11" name="Content Placeholder 4">
@@ -14392,8 +14396,8 @@
           </a:fontRef>
         </p:style>
       </p:cxnSp>
-      <mc:AlternateContent xmlns:mc="http://schemas.openxmlformats.org/markup-compatibility/2006">
-        <mc:Choice xmlns:a14="http://schemas.microsoft.com/office/drawing/2010/main" Requires="a14">
+      <mc:AlternateContent xmlns:mc="http://schemas.openxmlformats.org/markup-compatibility/2006" xmlns:a14="http://schemas.microsoft.com/office/drawing/2010/main">
+        <mc:Choice Requires="a14">
           <p:sp>
             <p:nvSpPr>
               <p:cNvPr id="12" name="TextBox 11">
@@ -14454,7 +14458,7 @@
             </p:txBody>
           </p:sp>
         </mc:Choice>
-        <mc:Fallback>
+        <mc:Fallback xmlns="">
           <p:sp>
             <p:nvSpPr>
               <p:cNvPr id="12" name="TextBox 11">
@@ -16865,8 +16869,8 @@
           </a:fontRef>
         </p:style>
       </p:cxnSp>
-      <mc:AlternateContent xmlns:mc="http://schemas.openxmlformats.org/markup-compatibility/2006">
-        <mc:Choice xmlns:a14="http://schemas.microsoft.com/office/drawing/2010/main" Requires="a14">
+      <mc:AlternateContent xmlns:mc="http://schemas.openxmlformats.org/markup-compatibility/2006" xmlns:a14="http://schemas.microsoft.com/office/drawing/2010/main">
+        <mc:Choice Requires="a14">
           <p:sp>
             <p:nvSpPr>
               <p:cNvPr id="6" name="TextBox 5">
@@ -16926,7 +16930,7 @@
             </p:txBody>
           </p:sp>
         </mc:Choice>
-        <mc:Fallback>
+        <mc:Fallback xmlns="">
           <p:sp>
             <p:nvSpPr>
               <p:cNvPr id="6" name="TextBox 5">
@@ -26211,8 +26215,8 @@
           </a:p>
         </p:txBody>
       </p:sp>
-      <mc:AlternateContent xmlns:mc="http://schemas.openxmlformats.org/markup-compatibility/2006">
-        <mc:Choice xmlns:a14="http://schemas.microsoft.com/office/drawing/2010/main" Requires="a14">
+      <mc:AlternateContent xmlns:mc="http://schemas.openxmlformats.org/markup-compatibility/2006" xmlns:a14="http://schemas.microsoft.com/office/drawing/2010/main">
+        <mc:Choice Requires="a14">
           <p:sp>
             <p:nvSpPr>
               <p:cNvPr id="5" name="Content Placeholder 2">
@@ -26802,7 +26806,7 @@
             </p:txBody>
           </p:sp>
         </mc:Choice>
-        <mc:Fallback>
+        <mc:Fallback xmlns="">
           <p:sp>
             <p:nvSpPr>
               <p:cNvPr id="5" name="Content Placeholder 2">
@@ -26852,8 +26856,8 @@
           </p:sp>
         </mc:Fallback>
       </mc:AlternateContent>
-      <mc:AlternateContent xmlns:mc="http://schemas.openxmlformats.org/markup-compatibility/2006">
-        <mc:Choice xmlns:a14="http://schemas.microsoft.com/office/drawing/2010/main" Requires="a14">
+      <mc:AlternateContent xmlns:mc="http://schemas.openxmlformats.org/markup-compatibility/2006" xmlns:a14="http://schemas.microsoft.com/office/drawing/2010/main">
+        <mc:Choice Requires="a14">
           <p:sp>
             <p:nvSpPr>
               <p:cNvPr id="6" name="Content Placeholder 2">
@@ -27434,7 +27438,7 @@
             </p:txBody>
           </p:sp>
         </mc:Choice>
-        <mc:Fallback>
+        <mc:Fallback xmlns="">
           <p:sp>
             <p:nvSpPr>
               <p:cNvPr id="6" name="Content Placeholder 2">
@@ -28036,8 +28040,8 @@
           </a:p>
         </p:txBody>
       </p:sp>
-      <mc:AlternateContent xmlns:mc="http://schemas.openxmlformats.org/markup-compatibility/2006">
-        <mc:Choice xmlns:a14="http://schemas.microsoft.com/office/drawing/2010/main" Requires="a14">
+      <mc:AlternateContent xmlns:mc="http://schemas.openxmlformats.org/markup-compatibility/2006" xmlns:a14="http://schemas.microsoft.com/office/drawing/2010/main">
+        <mc:Choice Requires="a14">
           <p:sp>
             <p:nvSpPr>
               <p:cNvPr id="7" name="TextBox 6">
@@ -28186,7 +28190,7 @@
             </p:txBody>
           </p:sp>
         </mc:Choice>
-        <mc:Fallback>
+        <mc:Fallback xmlns="">
           <p:sp>
             <p:nvSpPr>
               <p:cNvPr id="7" name="TextBox 6">
@@ -28236,8 +28240,8 @@
           </p:sp>
         </mc:Fallback>
       </mc:AlternateContent>
-      <mc:AlternateContent xmlns:mc="http://schemas.openxmlformats.org/markup-compatibility/2006">
-        <mc:Choice xmlns:a14="http://schemas.microsoft.com/office/drawing/2010/main" Requires="a14">
+      <mc:AlternateContent xmlns:mc="http://schemas.openxmlformats.org/markup-compatibility/2006" xmlns:a14="http://schemas.microsoft.com/office/drawing/2010/main">
+        <mc:Choice Requires="a14">
           <p:sp>
             <p:nvSpPr>
               <p:cNvPr id="8" name="TextBox 7">
@@ -28513,7 +28517,7 @@
             </p:txBody>
           </p:sp>
         </mc:Choice>
-        <mc:Fallback>
+        <mc:Fallback xmlns="">
           <p:sp>
             <p:nvSpPr>
               <p:cNvPr id="8" name="TextBox 7">
@@ -28653,8 +28657,8 @@
           </a:fontRef>
         </p:style>
       </p:cxnSp>
-      <mc:AlternateContent xmlns:mc="http://schemas.openxmlformats.org/markup-compatibility/2006">
-        <mc:Choice xmlns:a14="http://schemas.microsoft.com/office/drawing/2010/main" Requires="a14">
+      <mc:AlternateContent xmlns:mc="http://schemas.openxmlformats.org/markup-compatibility/2006" xmlns:a14="http://schemas.microsoft.com/office/drawing/2010/main">
+        <mc:Choice Requires="a14">
           <p:sp>
             <p:nvSpPr>
               <p:cNvPr id="16" name="Content Placeholder 2">
@@ -29244,7 +29248,7 @@
             </p:txBody>
           </p:sp>
         </mc:Choice>
-        <mc:Fallback>
+        <mc:Fallback xmlns="">
           <p:sp>
             <p:nvSpPr>
               <p:cNvPr id="16" name="Content Placeholder 2">
@@ -30574,8 +30578,8 @@
           </a:p>
         </p:txBody>
       </p:sp>
-      <mc:AlternateContent xmlns:mc="http://schemas.openxmlformats.org/markup-compatibility/2006">
-        <mc:Choice xmlns:a14="http://schemas.microsoft.com/office/drawing/2010/main" Requires="a14">
+      <mc:AlternateContent xmlns:mc="http://schemas.openxmlformats.org/markup-compatibility/2006" xmlns:a14="http://schemas.microsoft.com/office/drawing/2010/main">
+        <mc:Choice Requires="a14">
           <p:sp>
             <p:nvSpPr>
               <p:cNvPr id="16" name="TextBox 15">
@@ -30604,6 +30608,7 @@
               </a:bodyPr>
               <a:lstStyle/>
               <a:p>
+                <a:pPr/>
                 <a:r>
                   <a:rPr lang="en-US" dirty="0"/>
                   <a:t>Can be reduced to SAT:</a:t>
@@ -30646,7 +30651,7 @@
             </p:txBody>
           </p:sp>
         </mc:Choice>
-        <mc:Fallback>
+        <mc:Fallback xmlns="">
           <p:sp>
             <p:nvSpPr>
               <p:cNvPr id="16" name="TextBox 15">
@@ -32785,6 +32790,2277 @@
         <p:cNvPr id="1" name="">
           <a:extLst>
             <a:ext uri="{FF2B5EF4-FFF2-40B4-BE49-F238E27FC236}">
+              <a16:creationId xmlns:a16="http://schemas.microsoft.com/office/drawing/2014/main" id="{FF1FC23A-C3F3-01CD-25BA-D69D85676F29}"/>
+            </a:ext>
+          </a:extLst>
+        </p:cNvPr>
+        <p:cNvGrpSpPr/>
+        <p:nvPr/>
+      </p:nvGrpSpPr>
+      <p:grpSpPr>
+        <a:xfrm>
+          <a:off x="0" y="0"/>
+          <a:ext cx="0" cy="0"/>
+          <a:chOff x="0" y="0"/>
+          <a:chExt cx="0" cy="0"/>
+        </a:xfrm>
+      </p:grpSpPr>
+      <p:sp>
+        <p:nvSpPr>
+          <p:cNvPr id="2" name="Title 1">
+            <a:extLst>
+              <a:ext uri="{FF2B5EF4-FFF2-40B4-BE49-F238E27FC236}">
+                <a16:creationId xmlns:a16="http://schemas.microsoft.com/office/drawing/2014/main" id="{552A5EC4-B117-0832-7E62-B92C0E2394C3}"/>
+              </a:ext>
+            </a:extLst>
+          </p:cNvPr>
+          <p:cNvSpPr>
+            <a:spLocks noGrp="1"/>
+          </p:cNvSpPr>
+          <p:nvPr>
+            <p:ph type="title"/>
+          </p:nvPr>
+        </p:nvSpPr>
+        <p:spPr>
+          <a:xfrm>
+            <a:off x="1143001" y="245651"/>
+            <a:ext cx="9905998" cy="740019"/>
+          </a:xfrm>
+        </p:spPr>
+        <p:txBody>
+          <a:bodyPr/>
+          <a:lstStyle/>
+          <a:p>
+            <a:pPr algn="ctr"/>
+            <a:r>
+              <a:rPr lang="en-US" dirty="0"/>
+              <a:t>Simple Program Example</a:t>
+            </a:r>
+          </a:p>
+        </p:txBody>
+      </p:sp>
+      <p:sp>
+        <p:nvSpPr>
+          <p:cNvPr id="3" name="Content Placeholder 2">
+            <a:extLst>
+              <a:ext uri="{FF2B5EF4-FFF2-40B4-BE49-F238E27FC236}">
+                <a16:creationId xmlns:a16="http://schemas.microsoft.com/office/drawing/2014/main" id="{FA8186B0-A970-0B0C-8BDB-E84E19A82E3A}"/>
+              </a:ext>
+            </a:extLst>
+          </p:cNvPr>
+          <p:cNvSpPr>
+            <a:spLocks noGrp="1"/>
+          </p:cNvSpPr>
+          <p:nvPr>
+            <p:ph idx="1"/>
+          </p:nvPr>
+        </p:nvSpPr>
+        <p:spPr>
+          <a:xfrm>
+            <a:off x="2198886" y="2407966"/>
+            <a:ext cx="7794228" cy="639107"/>
+          </a:xfrm>
+          <a:solidFill>
+            <a:schemeClr val="tx1">
+              <a:lumMod val="95000"/>
+            </a:schemeClr>
+          </a:solidFill>
+          <a:ln>
+            <a:solidFill>
+              <a:schemeClr val="bg1"/>
+            </a:solidFill>
+          </a:ln>
+        </p:spPr>
+        <p:txBody>
+          <a:bodyPr anchor="ctr" anchorCtr="0">
+            <a:normAutofit/>
+          </a:bodyPr>
+          <a:lstStyle/>
+          <a:p>
+            <a:pPr marL="0" indent="0" algn="ctr">
+              <a:buNone/>
+            </a:pPr>
+            <a:r>
+              <a:rPr lang="en-US" dirty="0">
+                <a:solidFill>
+                  <a:schemeClr val="bg1"/>
+                </a:solidFill>
+              </a:rPr>
+              <a:t>Given a </a:t>
+            </a:r>
+            <a:r>
+              <a:rPr lang="en-US" dirty="0">
+                <a:solidFill>
+                  <a:schemeClr val="accent5"/>
+                </a:solidFill>
+              </a:rPr>
+              <a:t>string</a:t>
+            </a:r>
+            <a:r>
+              <a:rPr lang="en-US" dirty="0">
+                <a:solidFill>
+                  <a:schemeClr val="bg1"/>
+                </a:solidFill>
+              </a:rPr>
+              <a:t> input: Is this </a:t>
+            </a:r>
+            <a:r>
+              <a:rPr lang="en-US" dirty="0">
+                <a:solidFill>
+                  <a:schemeClr val="accent5"/>
+                </a:solidFill>
+              </a:rPr>
+              <a:t>string</a:t>
+            </a:r>
+            <a:r>
+              <a:rPr lang="en-US" dirty="0">
+                <a:solidFill>
+                  <a:schemeClr val="bg1"/>
+                </a:solidFill>
+              </a:rPr>
+              <a:t> a valid UVa Computing ID?</a:t>
+            </a:r>
+            <a:endParaRPr lang="en-US" dirty="0">
+              <a:solidFill>
+                <a:schemeClr val="accent3"/>
+              </a:solidFill>
+            </a:endParaRPr>
+          </a:p>
+        </p:txBody>
+      </p:sp>
+      <p:sp>
+        <p:nvSpPr>
+          <p:cNvPr id="5" name="TextBox 4">
+            <a:extLst>
+              <a:ext uri="{FF2B5EF4-FFF2-40B4-BE49-F238E27FC236}">
+                <a16:creationId xmlns:a16="http://schemas.microsoft.com/office/drawing/2014/main" id="{19428360-AF9A-9C22-454E-9451575C425A}"/>
+              </a:ext>
+            </a:extLst>
+          </p:cNvPr>
+          <p:cNvSpPr txBox="1"/>
+          <p:nvPr/>
+        </p:nvSpPr>
+        <p:spPr>
+          <a:xfrm>
+            <a:off x="2198886" y="2038634"/>
+            <a:ext cx="7794228" cy="369332"/>
+          </a:xfrm>
+          <a:prstGeom prst="rect">
+            <a:avLst/>
+          </a:prstGeom>
+          <a:noFill/>
+          <a:ln>
+            <a:noFill/>
+          </a:ln>
+        </p:spPr>
+        <p:txBody>
+          <a:bodyPr wrap="square" rtlCol="0">
+            <a:spAutoFit/>
+          </a:bodyPr>
+          <a:lstStyle/>
+          <a:p>
+            <a:r>
+              <a:rPr lang="en-US" dirty="0"/>
+              <a:t>Consider the following problem:</a:t>
+            </a:r>
+          </a:p>
+        </p:txBody>
+      </p:sp>
+      <p:sp>
+        <p:nvSpPr>
+          <p:cNvPr id="7" name="TextBox 6">
+            <a:extLst>
+              <a:ext uri="{FF2B5EF4-FFF2-40B4-BE49-F238E27FC236}">
+                <a16:creationId xmlns:a16="http://schemas.microsoft.com/office/drawing/2014/main" id="{45B4A210-4AD1-1CC7-3781-B338085EE260}"/>
+              </a:ext>
+            </a:extLst>
+          </p:cNvPr>
+          <p:cNvSpPr txBox="1"/>
+          <p:nvPr/>
+        </p:nvSpPr>
+        <p:spPr>
+          <a:xfrm>
+            <a:off x="1340469" y="4385388"/>
+            <a:ext cx="3977980" cy="1200329"/>
+          </a:xfrm>
+          <a:prstGeom prst="rect">
+            <a:avLst/>
+          </a:prstGeom>
+          <a:noFill/>
+        </p:spPr>
+        <p:txBody>
+          <a:bodyPr wrap="square" rtlCol="0">
+            <a:spAutoFit/>
+          </a:bodyPr>
+          <a:lstStyle/>
+          <a:p>
+            <a:r>
+              <a:rPr lang="en-US" b="1" i="1" u="sng" dirty="0"/>
+              <a:t>Format</a:t>
+            </a:r>
+            <a:r>
+              <a:rPr lang="en-US" dirty="0"/>
+              <a:t>:</a:t>
+            </a:r>
+          </a:p>
+          <a:p>
+            <a:pPr marL="342900" indent="-342900">
+              <a:buAutoNum type="arabicPeriod"/>
+            </a:pPr>
+            <a:r>
+              <a:rPr lang="en-US" dirty="0"/>
+              <a:t>Starts with two or three letters (L)</a:t>
+            </a:r>
+          </a:p>
+          <a:p>
+            <a:pPr marL="342900" indent="-342900">
+              <a:buAutoNum type="arabicPeriod"/>
+            </a:pPr>
+            <a:r>
+              <a:rPr lang="en-US" dirty="0"/>
+              <a:t>Optional digit (D)</a:t>
+            </a:r>
+          </a:p>
+          <a:p>
+            <a:pPr marL="342900" indent="-342900">
+              <a:buAutoNum type="arabicPeriod"/>
+            </a:pPr>
+            <a:r>
+              <a:rPr lang="en-US" dirty="0"/>
+              <a:t>1-3 more letters IF there was a digit</a:t>
+            </a:r>
+          </a:p>
+        </p:txBody>
+      </p:sp>
+      <p:cxnSp>
+        <p:nvCxnSpPr>
+          <p:cNvPr id="9" name="Straight Connector 8">
+            <a:extLst>
+              <a:ext uri="{FF2B5EF4-FFF2-40B4-BE49-F238E27FC236}">
+                <a16:creationId xmlns:a16="http://schemas.microsoft.com/office/drawing/2014/main" id="{761A1BAE-B4F7-5FE6-080D-F194DBA54370}"/>
+              </a:ext>
+            </a:extLst>
+          </p:cNvPr>
+          <p:cNvCxnSpPr/>
+          <p:nvPr/>
+        </p:nvCxnSpPr>
+        <p:spPr>
+          <a:xfrm flipH="1">
+            <a:off x="2198886" y="3163078"/>
+            <a:ext cx="1309424" cy="1203649"/>
+          </a:xfrm>
+          <a:prstGeom prst="line">
+            <a:avLst/>
+          </a:prstGeom>
+          <a:ln>
+            <a:solidFill>
+              <a:schemeClr val="tx1">
+                <a:lumMod val="95000"/>
+              </a:schemeClr>
+            </a:solidFill>
+          </a:ln>
+        </p:spPr>
+        <p:style>
+          <a:lnRef idx="1">
+            <a:schemeClr val="accent1"/>
+          </a:lnRef>
+          <a:fillRef idx="0">
+            <a:schemeClr val="accent1"/>
+          </a:fillRef>
+          <a:effectRef idx="0">
+            <a:schemeClr val="accent1"/>
+          </a:effectRef>
+          <a:fontRef idx="minor">
+            <a:schemeClr val="tx1"/>
+          </a:fontRef>
+        </p:style>
+      </p:cxnSp>
+      <p:sp>
+        <p:nvSpPr>
+          <p:cNvPr id="10" name="TextBox 9">
+            <a:extLst>
+              <a:ext uri="{FF2B5EF4-FFF2-40B4-BE49-F238E27FC236}">
+                <a16:creationId xmlns:a16="http://schemas.microsoft.com/office/drawing/2014/main" id="{157F95CB-2AC2-AE63-8427-11C92CFFB6A6}"/>
+              </a:ext>
+            </a:extLst>
+          </p:cNvPr>
+          <p:cNvSpPr txBox="1"/>
+          <p:nvPr/>
+        </p:nvSpPr>
+        <p:spPr>
+          <a:xfrm>
+            <a:off x="6825942" y="5122590"/>
+            <a:ext cx="4223057" cy="646331"/>
+          </a:xfrm>
+          <a:prstGeom prst="rect">
+            <a:avLst/>
+          </a:prstGeom>
+          <a:noFill/>
+          <a:ln>
+            <a:solidFill>
+              <a:schemeClr val="tx1">
+                <a:lumMod val="95000"/>
+              </a:schemeClr>
+            </a:solidFill>
+          </a:ln>
+        </p:spPr>
+        <p:txBody>
+          <a:bodyPr wrap="square" rtlCol="0">
+            <a:spAutoFit/>
+          </a:bodyPr>
+          <a:lstStyle/>
+          <a:p>
+            <a:r>
+              <a:rPr lang="en-US" b="1" i="1" u="sng" dirty="0"/>
+              <a:t>Valid Formats</a:t>
+            </a:r>
+            <a:r>
+              <a:rPr lang="en-US" dirty="0"/>
+              <a:t>:</a:t>
+            </a:r>
+          </a:p>
+          <a:p>
+            <a:r>
+              <a:rPr lang="en-US" dirty="0"/>
+              <a:t>LL, LLL, LLDL, LLDLL, LLLDLL, LLDLLL, LLLDLLL</a:t>
+            </a:r>
+          </a:p>
+        </p:txBody>
+      </p:sp>
+    </p:spTree>
+    <p:extLst>
+      <p:ext uri="{BB962C8B-B14F-4D97-AF65-F5344CB8AC3E}">
+        <p14:creationId xmlns:p14="http://schemas.microsoft.com/office/powerpoint/2010/main" val="3274091448"/>
+      </p:ext>
+    </p:extLst>
+  </p:cSld>
+  <p:clrMapOvr>
+    <a:masterClrMapping/>
+  </p:clrMapOvr>
+</p:sld>
+</file>
+
+<file path=ppt/slides/slide28.xml><?xml version="1.0" encoding="utf-8"?>
+<p:sld xmlns:a="http://schemas.openxmlformats.org/drawingml/2006/main" xmlns:r="http://schemas.openxmlformats.org/officeDocument/2006/relationships" xmlns:p="http://schemas.openxmlformats.org/presentationml/2006/main">
+  <p:cSld>
+    <p:spTree>
+      <p:nvGrpSpPr>
+        <p:cNvPr id="1" name=""/>
+        <p:cNvGrpSpPr/>
+        <p:nvPr/>
+      </p:nvGrpSpPr>
+      <p:grpSpPr>
+        <a:xfrm>
+          <a:off x="0" y="0"/>
+          <a:ext cx="0" cy="0"/>
+          <a:chOff x="0" y="0"/>
+          <a:chExt cx="0" cy="0"/>
+        </a:xfrm>
+      </p:grpSpPr>
+      <p:sp>
+        <p:nvSpPr>
+          <p:cNvPr id="2" name="Title 1">
+            <a:extLst>
+              <a:ext uri="{FF2B5EF4-FFF2-40B4-BE49-F238E27FC236}">
+                <a16:creationId xmlns:a16="http://schemas.microsoft.com/office/drawing/2014/main" id="{57D31168-ADA4-A26C-D7CB-9617C1BB6CD3}"/>
+              </a:ext>
+            </a:extLst>
+          </p:cNvPr>
+          <p:cNvSpPr>
+            <a:spLocks noGrp="1"/>
+          </p:cNvSpPr>
+          <p:nvPr>
+            <p:ph type="title"/>
+          </p:nvPr>
+        </p:nvSpPr>
+        <p:spPr>
+          <a:xfrm>
+            <a:off x="1143001" y="123995"/>
+            <a:ext cx="9905998" cy="448281"/>
+          </a:xfrm>
+        </p:spPr>
+        <p:txBody>
+          <a:bodyPr>
+            <a:normAutofit fontScale="90000"/>
+          </a:bodyPr>
+          <a:lstStyle/>
+          <a:p>
+            <a:pPr algn="ctr"/>
+            <a:r>
+              <a:rPr lang="en-US" dirty="0"/>
+              <a:t>Python Code</a:t>
+            </a:r>
+          </a:p>
+        </p:txBody>
+      </p:sp>
+      <p:pic>
+        <p:nvPicPr>
+          <p:cNvPr id="5" name="Picture 4" descr="A computer code with red and blue text&#10;&#10;AI-generated content may be incorrect.">
+            <a:extLst>
+              <a:ext uri="{FF2B5EF4-FFF2-40B4-BE49-F238E27FC236}">
+                <a16:creationId xmlns:a16="http://schemas.microsoft.com/office/drawing/2014/main" id="{7AA0EC6F-A4E1-1FF4-6DF9-C786B094BA20}"/>
+              </a:ext>
+            </a:extLst>
+          </p:cNvPr>
+          <p:cNvPicPr>
+            <a:picLocks noChangeAspect="1"/>
+          </p:cNvPicPr>
+          <p:nvPr/>
+        </p:nvPicPr>
+        <p:blipFill>
+          <a:blip r:embed="rId2"/>
+          <a:stretch>
+            <a:fillRect/>
+          </a:stretch>
+        </p:blipFill>
+        <p:spPr>
+          <a:xfrm>
+            <a:off x="5924477" y="693444"/>
+            <a:ext cx="5858014" cy="3575112"/>
+          </a:xfrm>
+          <a:prstGeom prst="rect">
+            <a:avLst/>
+          </a:prstGeom>
+        </p:spPr>
+      </p:pic>
+      <p:pic>
+        <p:nvPicPr>
+          <p:cNvPr id="7" name="Picture 6" descr="A screenshot of a computer code&#10;&#10;AI-generated content may be incorrect.">
+            <a:extLst>
+              <a:ext uri="{FF2B5EF4-FFF2-40B4-BE49-F238E27FC236}">
+                <a16:creationId xmlns:a16="http://schemas.microsoft.com/office/drawing/2014/main" id="{CB198824-F6D2-5FAF-59F0-F74D31AC022C}"/>
+              </a:ext>
+            </a:extLst>
+          </p:cNvPr>
+          <p:cNvPicPr>
+            <a:picLocks noChangeAspect="1"/>
+          </p:cNvPicPr>
+          <p:nvPr/>
+        </p:nvPicPr>
+        <p:blipFill>
+          <a:blip r:embed="rId3"/>
+          <a:stretch>
+            <a:fillRect/>
+          </a:stretch>
+        </p:blipFill>
+        <p:spPr>
+          <a:xfrm>
+            <a:off x="484154" y="693444"/>
+            <a:ext cx="5216849" cy="5892245"/>
+          </a:xfrm>
+          <a:prstGeom prst="rect">
+            <a:avLst/>
+          </a:prstGeom>
+        </p:spPr>
+      </p:pic>
+      <p:sp>
+        <p:nvSpPr>
+          <p:cNvPr id="8" name="TextBox 7">
+            <a:extLst>
+              <a:ext uri="{FF2B5EF4-FFF2-40B4-BE49-F238E27FC236}">
+                <a16:creationId xmlns:a16="http://schemas.microsoft.com/office/drawing/2014/main" id="{3BEE4BCE-C589-583F-1C6E-DA0DD56DCF1A}"/>
+              </a:ext>
+            </a:extLst>
+          </p:cNvPr>
+          <p:cNvSpPr txBox="1"/>
+          <p:nvPr/>
+        </p:nvSpPr>
+        <p:spPr>
+          <a:xfrm>
+            <a:off x="6490999" y="5038531"/>
+            <a:ext cx="4618653" cy="923330"/>
+          </a:xfrm>
+          <a:prstGeom prst="rect">
+            <a:avLst/>
+          </a:prstGeom>
+          <a:noFill/>
+          <a:ln>
+            <a:solidFill>
+              <a:schemeClr val="tx1">
+                <a:lumMod val="95000"/>
+              </a:schemeClr>
+            </a:solidFill>
+          </a:ln>
+        </p:spPr>
+        <p:txBody>
+          <a:bodyPr wrap="square" rtlCol="0">
+            <a:spAutoFit/>
+          </a:bodyPr>
+          <a:lstStyle/>
+          <a:p>
+            <a:r>
+              <a:rPr lang="en-US" b="1" i="1" u="sng" dirty="0"/>
+              <a:t>Main Point</a:t>
+            </a:r>
+            <a:r>
+              <a:rPr lang="en-US" dirty="0"/>
+              <a:t>: This code works! It uses a bunch of if-statements and is a working computer program for this problem. Great!</a:t>
+            </a:r>
+          </a:p>
+        </p:txBody>
+      </p:sp>
+    </p:spTree>
+    <p:extLst>
+      <p:ext uri="{BB962C8B-B14F-4D97-AF65-F5344CB8AC3E}">
+        <p14:creationId xmlns:p14="http://schemas.microsoft.com/office/powerpoint/2010/main" val="2837126289"/>
+      </p:ext>
+    </p:extLst>
+  </p:cSld>
+  <p:clrMapOvr>
+    <a:masterClrMapping/>
+  </p:clrMapOvr>
+</p:sld>
+</file>
+
+<file path=ppt/slides/slide29.xml><?xml version="1.0" encoding="utf-8"?>
+<p:sld xmlns:a="http://schemas.openxmlformats.org/drawingml/2006/main" xmlns:r="http://schemas.openxmlformats.org/officeDocument/2006/relationships" xmlns:p="http://schemas.openxmlformats.org/presentationml/2006/main">
+  <p:cSld>
+    <p:spTree>
+      <p:nvGrpSpPr>
+        <p:cNvPr id="1" name="">
+          <a:extLst>
+            <a:ext uri="{FF2B5EF4-FFF2-40B4-BE49-F238E27FC236}">
+              <a16:creationId xmlns:a16="http://schemas.microsoft.com/office/drawing/2014/main" id="{1EF1D464-5C2E-86E8-3C39-A61BFBE34D58}"/>
+            </a:ext>
+          </a:extLst>
+        </p:cNvPr>
+        <p:cNvGrpSpPr/>
+        <p:nvPr/>
+      </p:nvGrpSpPr>
+      <p:grpSpPr>
+        <a:xfrm>
+          <a:off x="0" y="0"/>
+          <a:ext cx="0" cy="0"/>
+          <a:chOff x="0" y="0"/>
+          <a:chExt cx="0" cy="0"/>
+        </a:xfrm>
+      </p:grpSpPr>
+      <p:sp>
+        <p:nvSpPr>
+          <p:cNvPr id="2" name="Title 1">
+            <a:extLst>
+              <a:ext uri="{FF2B5EF4-FFF2-40B4-BE49-F238E27FC236}">
+                <a16:creationId xmlns:a16="http://schemas.microsoft.com/office/drawing/2014/main" id="{1ADFC6B2-3AF5-4412-398A-69F474D845D9}"/>
+              </a:ext>
+            </a:extLst>
+          </p:cNvPr>
+          <p:cNvSpPr>
+            <a:spLocks noGrp="1"/>
+          </p:cNvSpPr>
+          <p:nvPr>
+            <p:ph type="title"/>
+          </p:nvPr>
+        </p:nvSpPr>
+        <p:spPr>
+          <a:xfrm>
+            <a:off x="1143001" y="123995"/>
+            <a:ext cx="9905998" cy="448281"/>
+          </a:xfrm>
+        </p:spPr>
+        <p:txBody>
+          <a:bodyPr>
+            <a:normAutofit fontScale="90000"/>
+          </a:bodyPr>
+          <a:lstStyle/>
+          <a:p>
+            <a:pPr algn="ctr"/>
+            <a:r>
+              <a:rPr lang="en-US" dirty="0"/>
+              <a:t>A different Way of “Coding” This…</a:t>
+            </a:r>
+          </a:p>
+        </p:txBody>
+      </p:sp>
+      <p:grpSp>
+        <p:nvGrpSpPr>
+          <p:cNvPr id="55" name="Group 54">
+            <a:extLst>
+              <a:ext uri="{FF2B5EF4-FFF2-40B4-BE49-F238E27FC236}">
+                <a16:creationId xmlns:a16="http://schemas.microsoft.com/office/drawing/2014/main" id="{64B991BB-090A-5AA0-6F89-05FAA07A36E8}"/>
+              </a:ext>
+            </a:extLst>
+          </p:cNvPr>
+          <p:cNvGrpSpPr/>
+          <p:nvPr/>
+        </p:nvGrpSpPr>
+        <p:grpSpPr>
+          <a:xfrm>
+            <a:off x="1625082" y="1819471"/>
+            <a:ext cx="8941835" cy="3072883"/>
+            <a:chOff x="643814" y="2052736"/>
+            <a:chExt cx="8941835" cy="3072883"/>
+          </a:xfrm>
+        </p:grpSpPr>
+        <p:sp>
+          <p:nvSpPr>
+            <p:cNvPr id="3" name="Oval 2">
+              <a:extLst>
+                <a:ext uri="{FF2B5EF4-FFF2-40B4-BE49-F238E27FC236}">
+                  <a16:creationId xmlns:a16="http://schemas.microsoft.com/office/drawing/2014/main" id="{068EDBD0-730B-523F-BC0F-2F85A2DD6453}"/>
+                </a:ext>
+              </a:extLst>
+            </p:cNvPr>
+            <p:cNvSpPr/>
+            <p:nvPr/>
+          </p:nvSpPr>
+          <p:spPr>
+            <a:xfrm>
+              <a:off x="2258010" y="2052736"/>
+              <a:ext cx="933062" cy="933062"/>
+            </a:xfrm>
+            <a:prstGeom prst="ellipse">
+              <a:avLst/>
+            </a:prstGeom>
+            <a:ln>
+              <a:solidFill>
+                <a:schemeClr val="bg1"/>
+              </a:solidFill>
+            </a:ln>
+          </p:spPr>
+          <p:style>
+            <a:lnRef idx="2">
+              <a:schemeClr val="accent1">
+                <a:shade val="15000"/>
+              </a:schemeClr>
+            </a:lnRef>
+            <a:fillRef idx="1">
+              <a:schemeClr val="accent1"/>
+            </a:fillRef>
+            <a:effectRef idx="0">
+              <a:schemeClr val="accent1"/>
+            </a:effectRef>
+            <a:fontRef idx="minor">
+              <a:schemeClr val="lt1"/>
+            </a:fontRef>
+          </p:style>
+          <p:txBody>
+            <a:bodyPr rtlCol="0" anchor="ctr"/>
+            <a:lstStyle/>
+            <a:p>
+              <a:pPr algn="ctr"/>
+              <a:r>
+                <a:rPr lang="en-US" dirty="0">
+                  <a:solidFill>
+                    <a:schemeClr val="bg1"/>
+                  </a:solidFill>
+                </a:rPr>
+                <a:t>1</a:t>
+              </a:r>
+            </a:p>
+          </p:txBody>
+        </p:sp>
+        <p:sp>
+          <p:nvSpPr>
+            <p:cNvPr id="4" name="Oval 3">
+              <a:extLst>
+                <a:ext uri="{FF2B5EF4-FFF2-40B4-BE49-F238E27FC236}">
+                  <a16:creationId xmlns:a16="http://schemas.microsoft.com/office/drawing/2014/main" id="{0EDE0720-CC3D-FF88-43F1-5630D245240F}"/>
+                </a:ext>
+              </a:extLst>
+            </p:cNvPr>
+            <p:cNvSpPr/>
+            <p:nvPr/>
+          </p:nvSpPr>
+          <p:spPr>
+            <a:xfrm>
+              <a:off x="4323185" y="2052736"/>
+              <a:ext cx="933062" cy="933062"/>
+            </a:xfrm>
+            <a:prstGeom prst="ellipse">
+              <a:avLst/>
+            </a:prstGeom>
+            <a:ln>
+              <a:solidFill>
+                <a:schemeClr val="bg1"/>
+              </a:solidFill>
+            </a:ln>
+          </p:spPr>
+          <p:style>
+            <a:lnRef idx="2">
+              <a:schemeClr val="accent1">
+                <a:shade val="15000"/>
+              </a:schemeClr>
+            </a:lnRef>
+            <a:fillRef idx="1">
+              <a:schemeClr val="accent1"/>
+            </a:fillRef>
+            <a:effectRef idx="0">
+              <a:schemeClr val="accent1"/>
+            </a:effectRef>
+            <a:fontRef idx="minor">
+              <a:schemeClr val="lt1"/>
+            </a:fontRef>
+          </p:style>
+          <p:txBody>
+            <a:bodyPr rtlCol="0" anchor="ctr"/>
+            <a:lstStyle/>
+            <a:p>
+              <a:pPr algn="ctr"/>
+              <a:r>
+                <a:rPr lang="en-US" dirty="0">
+                  <a:solidFill>
+                    <a:schemeClr val="bg1"/>
+                  </a:solidFill>
+                </a:rPr>
+                <a:t>2</a:t>
+              </a:r>
+            </a:p>
+          </p:txBody>
+        </p:sp>
+        <p:sp>
+          <p:nvSpPr>
+            <p:cNvPr id="6" name="Oval 5">
+              <a:extLst>
+                <a:ext uri="{FF2B5EF4-FFF2-40B4-BE49-F238E27FC236}">
+                  <a16:creationId xmlns:a16="http://schemas.microsoft.com/office/drawing/2014/main" id="{43B18173-9961-8CDC-7E4A-761433912720}"/>
+                </a:ext>
+              </a:extLst>
+            </p:cNvPr>
+            <p:cNvSpPr/>
+            <p:nvPr/>
+          </p:nvSpPr>
+          <p:spPr>
+            <a:xfrm>
+              <a:off x="6388360" y="2052736"/>
+              <a:ext cx="933062" cy="933062"/>
+            </a:xfrm>
+            <a:prstGeom prst="ellipse">
+              <a:avLst/>
+            </a:prstGeom>
+            <a:ln>
+              <a:solidFill>
+                <a:schemeClr val="bg1"/>
+              </a:solidFill>
+            </a:ln>
+          </p:spPr>
+          <p:style>
+            <a:lnRef idx="2">
+              <a:schemeClr val="accent1">
+                <a:shade val="15000"/>
+              </a:schemeClr>
+            </a:lnRef>
+            <a:fillRef idx="1">
+              <a:schemeClr val="accent1"/>
+            </a:fillRef>
+            <a:effectRef idx="0">
+              <a:schemeClr val="accent1"/>
+            </a:effectRef>
+            <a:fontRef idx="minor">
+              <a:schemeClr val="lt1"/>
+            </a:fontRef>
+          </p:style>
+          <p:txBody>
+            <a:bodyPr rtlCol="0" anchor="ctr"/>
+            <a:lstStyle/>
+            <a:p>
+              <a:pPr algn="ctr"/>
+              <a:r>
+                <a:rPr lang="en-US" dirty="0">
+                  <a:solidFill>
+                    <a:schemeClr val="bg1"/>
+                  </a:solidFill>
+                </a:rPr>
+                <a:t>3</a:t>
+              </a:r>
+            </a:p>
+          </p:txBody>
+        </p:sp>
+        <p:sp>
+          <p:nvSpPr>
+            <p:cNvPr id="9" name="Oval 8">
+              <a:extLst>
+                <a:ext uri="{FF2B5EF4-FFF2-40B4-BE49-F238E27FC236}">
+                  <a16:creationId xmlns:a16="http://schemas.microsoft.com/office/drawing/2014/main" id="{43C307CC-0B7C-F6AB-2DDF-E8C6750E854D}"/>
+                </a:ext>
+              </a:extLst>
+            </p:cNvPr>
+            <p:cNvSpPr/>
+            <p:nvPr/>
+          </p:nvSpPr>
+          <p:spPr>
+            <a:xfrm>
+              <a:off x="8453535" y="2052736"/>
+              <a:ext cx="933062" cy="933062"/>
+            </a:xfrm>
+            <a:prstGeom prst="ellipse">
+              <a:avLst/>
+            </a:prstGeom>
+            <a:ln>
+              <a:solidFill>
+                <a:schemeClr val="bg1"/>
+              </a:solidFill>
+            </a:ln>
+          </p:spPr>
+          <p:style>
+            <a:lnRef idx="2">
+              <a:schemeClr val="accent1">
+                <a:shade val="15000"/>
+              </a:schemeClr>
+            </a:lnRef>
+            <a:fillRef idx="1">
+              <a:schemeClr val="accent1"/>
+            </a:fillRef>
+            <a:effectRef idx="0">
+              <a:schemeClr val="accent1"/>
+            </a:effectRef>
+            <a:fontRef idx="minor">
+              <a:schemeClr val="lt1"/>
+            </a:fontRef>
+          </p:style>
+          <p:txBody>
+            <a:bodyPr rtlCol="0" anchor="ctr"/>
+            <a:lstStyle/>
+            <a:p>
+              <a:pPr algn="ctr"/>
+              <a:r>
+                <a:rPr lang="en-US" dirty="0">
+                  <a:solidFill>
+                    <a:schemeClr val="bg1"/>
+                  </a:solidFill>
+                </a:rPr>
+                <a:t>4</a:t>
+              </a:r>
+            </a:p>
+          </p:txBody>
+        </p:sp>
+        <p:sp>
+          <p:nvSpPr>
+            <p:cNvPr id="10" name="Oval 9">
+              <a:extLst>
+                <a:ext uri="{FF2B5EF4-FFF2-40B4-BE49-F238E27FC236}">
+                  <a16:creationId xmlns:a16="http://schemas.microsoft.com/office/drawing/2014/main" id="{DFE1DDEA-4846-CDFE-46B3-8D620050FB6D}"/>
+                </a:ext>
+              </a:extLst>
+            </p:cNvPr>
+            <p:cNvSpPr/>
+            <p:nvPr/>
+          </p:nvSpPr>
+          <p:spPr>
+            <a:xfrm>
+              <a:off x="2258010" y="4192557"/>
+              <a:ext cx="933062" cy="933062"/>
+            </a:xfrm>
+            <a:prstGeom prst="ellipse">
+              <a:avLst/>
+            </a:prstGeom>
+            <a:ln>
+              <a:solidFill>
+                <a:schemeClr val="bg1"/>
+              </a:solidFill>
+            </a:ln>
+          </p:spPr>
+          <p:style>
+            <a:lnRef idx="2">
+              <a:schemeClr val="accent1">
+                <a:shade val="15000"/>
+              </a:schemeClr>
+            </a:lnRef>
+            <a:fillRef idx="1">
+              <a:schemeClr val="accent1"/>
+            </a:fillRef>
+            <a:effectRef idx="0">
+              <a:schemeClr val="accent1"/>
+            </a:effectRef>
+            <a:fontRef idx="minor">
+              <a:schemeClr val="lt1"/>
+            </a:fontRef>
+          </p:style>
+          <p:txBody>
+            <a:bodyPr rtlCol="0" anchor="ctr"/>
+            <a:lstStyle/>
+            <a:p>
+              <a:pPr algn="ctr"/>
+              <a:r>
+                <a:rPr lang="en-US" dirty="0">
+                  <a:solidFill>
+                    <a:schemeClr val="bg1"/>
+                  </a:solidFill>
+                </a:rPr>
+                <a:t>8</a:t>
+              </a:r>
+            </a:p>
+          </p:txBody>
+        </p:sp>
+        <p:sp>
+          <p:nvSpPr>
+            <p:cNvPr id="11" name="Oval 10">
+              <a:extLst>
+                <a:ext uri="{FF2B5EF4-FFF2-40B4-BE49-F238E27FC236}">
+                  <a16:creationId xmlns:a16="http://schemas.microsoft.com/office/drawing/2014/main" id="{39816CA0-BEE7-11E8-0DFC-DE7CD2110A86}"/>
+                </a:ext>
+              </a:extLst>
+            </p:cNvPr>
+            <p:cNvSpPr/>
+            <p:nvPr/>
+          </p:nvSpPr>
+          <p:spPr>
+            <a:xfrm>
+              <a:off x="4323185" y="4192557"/>
+              <a:ext cx="933062" cy="933062"/>
+            </a:xfrm>
+            <a:prstGeom prst="ellipse">
+              <a:avLst/>
+            </a:prstGeom>
+            <a:ln>
+              <a:solidFill>
+                <a:schemeClr val="bg1"/>
+              </a:solidFill>
+            </a:ln>
+          </p:spPr>
+          <p:style>
+            <a:lnRef idx="2">
+              <a:schemeClr val="accent1">
+                <a:shade val="15000"/>
+              </a:schemeClr>
+            </a:lnRef>
+            <a:fillRef idx="1">
+              <a:schemeClr val="accent1"/>
+            </a:fillRef>
+            <a:effectRef idx="0">
+              <a:schemeClr val="accent1"/>
+            </a:effectRef>
+            <a:fontRef idx="minor">
+              <a:schemeClr val="lt1"/>
+            </a:fontRef>
+          </p:style>
+          <p:txBody>
+            <a:bodyPr rtlCol="0" anchor="ctr"/>
+            <a:lstStyle/>
+            <a:p>
+              <a:pPr algn="ctr"/>
+              <a:r>
+                <a:rPr lang="en-US" dirty="0">
+                  <a:solidFill>
+                    <a:schemeClr val="bg1"/>
+                  </a:solidFill>
+                </a:rPr>
+                <a:t>7</a:t>
+              </a:r>
+            </a:p>
+          </p:txBody>
+        </p:sp>
+        <p:sp>
+          <p:nvSpPr>
+            <p:cNvPr id="12" name="Oval 11">
+              <a:extLst>
+                <a:ext uri="{FF2B5EF4-FFF2-40B4-BE49-F238E27FC236}">
+                  <a16:creationId xmlns:a16="http://schemas.microsoft.com/office/drawing/2014/main" id="{00547576-D203-3E80-A4FC-161B0CAC3B64}"/>
+                </a:ext>
+              </a:extLst>
+            </p:cNvPr>
+            <p:cNvSpPr/>
+            <p:nvPr/>
+          </p:nvSpPr>
+          <p:spPr>
+            <a:xfrm>
+              <a:off x="6388360" y="4192557"/>
+              <a:ext cx="933062" cy="933062"/>
+            </a:xfrm>
+            <a:prstGeom prst="ellipse">
+              <a:avLst/>
+            </a:prstGeom>
+            <a:ln>
+              <a:solidFill>
+                <a:schemeClr val="bg1"/>
+              </a:solidFill>
+            </a:ln>
+          </p:spPr>
+          <p:style>
+            <a:lnRef idx="2">
+              <a:schemeClr val="accent1">
+                <a:shade val="15000"/>
+              </a:schemeClr>
+            </a:lnRef>
+            <a:fillRef idx="1">
+              <a:schemeClr val="accent1"/>
+            </a:fillRef>
+            <a:effectRef idx="0">
+              <a:schemeClr val="accent1"/>
+            </a:effectRef>
+            <a:fontRef idx="minor">
+              <a:schemeClr val="lt1"/>
+            </a:fontRef>
+          </p:style>
+          <p:txBody>
+            <a:bodyPr rtlCol="0" anchor="ctr"/>
+            <a:lstStyle/>
+            <a:p>
+              <a:pPr algn="ctr"/>
+              <a:r>
+                <a:rPr lang="en-US" dirty="0">
+                  <a:solidFill>
+                    <a:schemeClr val="bg1"/>
+                  </a:solidFill>
+                </a:rPr>
+                <a:t>6</a:t>
+              </a:r>
+            </a:p>
+          </p:txBody>
+        </p:sp>
+        <p:sp>
+          <p:nvSpPr>
+            <p:cNvPr id="13" name="Oval 12">
+              <a:extLst>
+                <a:ext uri="{FF2B5EF4-FFF2-40B4-BE49-F238E27FC236}">
+                  <a16:creationId xmlns:a16="http://schemas.microsoft.com/office/drawing/2014/main" id="{A9281A55-3416-0DF1-E27D-E4A467DF535A}"/>
+                </a:ext>
+              </a:extLst>
+            </p:cNvPr>
+            <p:cNvSpPr/>
+            <p:nvPr/>
+          </p:nvSpPr>
+          <p:spPr>
+            <a:xfrm>
+              <a:off x="8453535" y="4192557"/>
+              <a:ext cx="933062" cy="933062"/>
+            </a:xfrm>
+            <a:prstGeom prst="ellipse">
+              <a:avLst/>
+            </a:prstGeom>
+            <a:ln>
+              <a:solidFill>
+                <a:schemeClr val="bg1"/>
+              </a:solidFill>
+            </a:ln>
+          </p:spPr>
+          <p:style>
+            <a:lnRef idx="2">
+              <a:schemeClr val="accent1">
+                <a:shade val="15000"/>
+              </a:schemeClr>
+            </a:lnRef>
+            <a:fillRef idx="1">
+              <a:schemeClr val="accent1"/>
+            </a:fillRef>
+            <a:effectRef idx="0">
+              <a:schemeClr val="accent1"/>
+            </a:effectRef>
+            <a:fontRef idx="minor">
+              <a:schemeClr val="lt1"/>
+            </a:fontRef>
+          </p:style>
+          <p:txBody>
+            <a:bodyPr rtlCol="0" anchor="ctr"/>
+            <a:lstStyle/>
+            <a:p>
+              <a:pPr algn="ctr"/>
+              <a:r>
+                <a:rPr lang="en-US" dirty="0">
+                  <a:solidFill>
+                    <a:schemeClr val="bg1"/>
+                  </a:solidFill>
+                </a:rPr>
+                <a:t>5</a:t>
+              </a:r>
+            </a:p>
+          </p:txBody>
+        </p:sp>
+        <p:sp>
+          <p:nvSpPr>
+            <p:cNvPr id="14" name="Oval 13">
+              <a:extLst>
+                <a:ext uri="{FF2B5EF4-FFF2-40B4-BE49-F238E27FC236}">
+                  <a16:creationId xmlns:a16="http://schemas.microsoft.com/office/drawing/2014/main" id="{9EC62288-F8F5-67DD-0BAD-D2557657845A}"/>
+                </a:ext>
+              </a:extLst>
+            </p:cNvPr>
+            <p:cNvSpPr/>
+            <p:nvPr/>
+          </p:nvSpPr>
+          <p:spPr>
+            <a:xfrm>
+              <a:off x="6466114" y="2130491"/>
+              <a:ext cx="780662" cy="780662"/>
+            </a:xfrm>
+            <a:prstGeom prst="ellipse">
+              <a:avLst/>
+            </a:prstGeom>
+            <a:ln>
+              <a:solidFill>
+                <a:schemeClr val="bg1"/>
+              </a:solidFill>
+            </a:ln>
+          </p:spPr>
+          <p:style>
+            <a:lnRef idx="2">
+              <a:schemeClr val="accent1">
+                <a:shade val="15000"/>
+              </a:schemeClr>
+            </a:lnRef>
+            <a:fillRef idx="1">
+              <a:schemeClr val="accent1"/>
+            </a:fillRef>
+            <a:effectRef idx="0">
+              <a:schemeClr val="accent1"/>
+            </a:effectRef>
+            <a:fontRef idx="minor">
+              <a:schemeClr val="lt1"/>
+            </a:fontRef>
+          </p:style>
+          <p:txBody>
+            <a:bodyPr rtlCol="0" anchor="ctr"/>
+            <a:lstStyle/>
+            <a:p>
+              <a:pPr algn="ctr"/>
+              <a:r>
+                <a:rPr lang="en-US" dirty="0">
+                  <a:solidFill>
+                    <a:schemeClr val="bg1"/>
+                  </a:solidFill>
+                </a:rPr>
+                <a:t>3</a:t>
+              </a:r>
+            </a:p>
+          </p:txBody>
+        </p:sp>
+        <p:sp>
+          <p:nvSpPr>
+            <p:cNvPr id="15" name="Oval 14">
+              <a:extLst>
+                <a:ext uri="{FF2B5EF4-FFF2-40B4-BE49-F238E27FC236}">
+                  <a16:creationId xmlns:a16="http://schemas.microsoft.com/office/drawing/2014/main" id="{25A446C3-3165-D645-F202-C3AD0815BCFC}"/>
+                </a:ext>
+              </a:extLst>
+            </p:cNvPr>
+            <p:cNvSpPr/>
+            <p:nvPr/>
+          </p:nvSpPr>
+          <p:spPr>
+            <a:xfrm>
+              <a:off x="6466114" y="4268757"/>
+              <a:ext cx="780662" cy="780662"/>
+            </a:xfrm>
+            <a:prstGeom prst="ellipse">
+              <a:avLst/>
+            </a:prstGeom>
+            <a:ln>
+              <a:solidFill>
+                <a:schemeClr val="bg1"/>
+              </a:solidFill>
+            </a:ln>
+          </p:spPr>
+          <p:style>
+            <a:lnRef idx="2">
+              <a:schemeClr val="accent1">
+                <a:shade val="15000"/>
+              </a:schemeClr>
+            </a:lnRef>
+            <a:fillRef idx="1">
+              <a:schemeClr val="accent1"/>
+            </a:fillRef>
+            <a:effectRef idx="0">
+              <a:schemeClr val="accent1"/>
+            </a:effectRef>
+            <a:fontRef idx="minor">
+              <a:schemeClr val="lt1"/>
+            </a:fontRef>
+          </p:style>
+          <p:txBody>
+            <a:bodyPr rtlCol="0" anchor="ctr"/>
+            <a:lstStyle/>
+            <a:p>
+              <a:pPr algn="ctr"/>
+              <a:r>
+                <a:rPr lang="en-US" dirty="0">
+                  <a:solidFill>
+                    <a:schemeClr val="bg1"/>
+                  </a:solidFill>
+                </a:rPr>
+                <a:t>6</a:t>
+              </a:r>
+            </a:p>
+          </p:txBody>
+        </p:sp>
+        <p:sp>
+          <p:nvSpPr>
+            <p:cNvPr id="16" name="Oval 15">
+              <a:extLst>
+                <a:ext uri="{FF2B5EF4-FFF2-40B4-BE49-F238E27FC236}">
+                  <a16:creationId xmlns:a16="http://schemas.microsoft.com/office/drawing/2014/main" id="{04C7D579-176E-6F9B-466D-4853576FC10C}"/>
+                </a:ext>
+              </a:extLst>
+            </p:cNvPr>
+            <p:cNvSpPr/>
+            <p:nvPr/>
+          </p:nvSpPr>
+          <p:spPr>
+            <a:xfrm>
+              <a:off x="4400940" y="4268757"/>
+              <a:ext cx="780662" cy="780662"/>
+            </a:xfrm>
+            <a:prstGeom prst="ellipse">
+              <a:avLst/>
+            </a:prstGeom>
+            <a:ln>
+              <a:solidFill>
+                <a:schemeClr val="bg1"/>
+              </a:solidFill>
+            </a:ln>
+          </p:spPr>
+          <p:style>
+            <a:lnRef idx="2">
+              <a:schemeClr val="accent1">
+                <a:shade val="15000"/>
+              </a:schemeClr>
+            </a:lnRef>
+            <a:fillRef idx="1">
+              <a:schemeClr val="accent1"/>
+            </a:fillRef>
+            <a:effectRef idx="0">
+              <a:schemeClr val="accent1"/>
+            </a:effectRef>
+            <a:fontRef idx="minor">
+              <a:schemeClr val="lt1"/>
+            </a:fontRef>
+          </p:style>
+          <p:txBody>
+            <a:bodyPr rtlCol="0" anchor="ctr"/>
+            <a:lstStyle/>
+            <a:p>
+              <a:pPr algn="ctr"/>
+              <a:r>
+                <a:rPr lang="en-US" dirty="0">
+                  <a:solidFill>
+                    <a:schemeClr val="bg1"/>
+                  </a:solidFill>
+                </a:rPr>
+                <a:t>5</a:t>
+              </a:r>
+            </a:p>
+          </p:txBody>
+        </p:sp>
+        <p:sp>
+          <p:nvSpPr>
+            <p:cNvPr id="17" name="Oval 16">
+              <a:extLst>
+                <a:ext uri="{FF2B5EF4-FFF2-40B4-BE49-F238E27FC236}">
+                  <a16:creationId xmlns:a16="http://schemas.microsoft.com/office/drawing/2014/main" id="{CB99755C-1E5F-60F1-AD83-5F95BE59029D}"/>
+                </a:ext>
+              </a:extLst>
+            </p:cNvPr>
+            <p:cNvSpPr/>
+            <p:nvPr/>
+          </p:nvSpPr>
+          <p:spPr>
+            <a:xfrm>
+              <a:off x="2334210" y="4268757"/>
+              <a:ext cx="780662" cy="780662"/>
+            </a:xfrm>
+            <a:prstGeom prst="ellipse">
+              <a:avLst/>
+            </a:prstGeom>
+            <a:ln>
+              <a:solidFill>
+                <a:schemeClr val="bg1"/>
+              </a:solidFill>
+            </a:ln>
+          </p:spPr>
+          <p:style>
+            <a:lnRef idx="2">
+              <a:schemeClr val="accent1">
+                <a:shade val="15000"/>
+              </a:schemeClr>
+            </a:lnRef>
+            <a:fillRef idx="1">
+              <a:schemeClr val="accent1"/>
+            </a:fillRef>
+            <a:effectRef idx="0">
+              <a:schemeClr val="accent1"/>
+            </a:effectRef>
+            <a:fontRef idx="minor">
+              <a:schemeClr val="lt1"/>
+            </a:fontRef>
+          </p:style>
+          <p:txBody>
+            <a:bodyPr rtlCol="0" anchor="ctr"/>
+            <a:lstStyle/>
+            <a:p>
+              <a:pPr algn="ctr"/>
+              <a:r>
+                <a:rPr lang="en-US" dirty="0">
+                  <a:solidFill>
+                    <a:schemeClr val="bg1"/>
+                  </a:solidFill>
+                </a:rPr>
+                <a:t>8</a:t>
+              </a:r>
+            </a:p>
+          </p:txBody>
+        </p:sp>
+        <p:cxnSp>
+          <p:nvCxnSpPr>
+            <p:cNvPr id="19" name="Straight Arrow Connector 18">
+              <a:extLst>
+                <a:ext uri="{FF2B5EF4-FFF2-40B4-BE49-F238E27FC236}">
+                  <a16:creationId xmlns:a16="http://schemas.microsoft.com/office/drawing/2014/main" id="{F0B88462-A76E-7351-BEFC-8B74D64DC3B6}"/>
+                </a:ext>
+              </a:extLst>
+            </p:cNvPr>
+            <p:cNvCxnSpPr>
+              <a:cxnSpLocks/>
+              <a:endCxn id="3" idx="2"/>
+            </p:cNvCxnSpPr>
+            <p:nvPr/>
+          </p:nvCxnSpPr>
+          <p:spPr>
+            <a:xfrm>
+              <a:off x="1334278" y="2519267"/>
+              <a:ext cx="923732" cy="0"/>
+            </a:xfrm>
+            <a:prstGeom prst="straightConnector1">
+              <a:avLst/>
+            </a:prstGeom>
+            <a:ln w="31750">
+              <a:tailEnd type="triangle"/>
+            </a:ln>
+          </p:spPr>
+          <p:style>
+            <a:lnRef idx="1">
+              <a:schemeClr val="accent1"/>
+            </a:lnRef>
+            <a:fillRef idx="0">
+              <a:schemeClr val="accent1"/>
+            </a:fillRef>
+            <a:effectRef idx="0">
+              <a:schemeClr val="accent1"/>
+            </a:effectRef>
+            <a:fontRef idx="minor">
+              <a:schemeClr val="tx1"/>
+            </a:fontRef>
+          </p:style>
+        </p:cxnSp>
+        <p:cxnSp>
+          <p:nvCxnSpPr>
+            <p:cNvPr id="21" name="Straight Arrow Connector 20">
+              <a:extLst>
+                <a:ext uri="{FF2B5EF4-FFF2-40B4-BE49-F238E27FC236}">
+                  <a16:creationId xmlns:a16="http://schemas.microsoft.com/office/drawing/2014/main" id="{B86CFAD9-5C16-AAB9-709E-0DF31535A1B9}"/>
+                </a:ext>
+              </a:extLst>
+            </p:cNvPr>
+            <p:cNvCxnSpPr>
+              <a:cxnSpLocks/>
+              <a:stCxn id="3" idx="6"/>
+              <a:endCxn id="4" idx="2"/>
+            </p:cNvCxnSpPr>
+            <p:nvPr/>
+          </p:nvCxnSpPr>
+          <p:spPr>
+            <a:xfrm>
+              <a:off x="3191072" y="2519267"/>
+              <a:ext cx="1132113" cy="0"/>
+            </a:xfrm>
+            <a:prstGeom prst="straightConnector1">
+              <a:avLst/>
+            </a:prstGeom>
+            <a:ln w="31750">
+              <a:tailEnd type="triangle"/>
+            </a:ln>
+          </p:spPr>
+          <p:style>
+            <a:lnRef idx="1">
+              <a:schemeClr val="accent1"/>
+            </a:lnRef>
+            <a:fillRef idx="0">
+              <a:schemeClr val="accent1"/>
+            </a:fillRef>
+            <a:effectRef idx="0">
+              <a:schemeClr val="accent1"/>
+            </a:effectRef>
+            <a:fontRef idx="minor">
+              <a:schemeClr val="tx1"/>
+            </a:fontRef>
+          </p:style>
+        </p:cxnSp>
+        <p:cxnSp>
+          <p:nvCxnSpPr>
+            <p:cNvPr id="24" name="Straight Arrow Connector 23">
+              <a:extLst>
+                <a:ext uri="{FF2B5EF4-FFF2-40B4-BE49-F238E27FC236}">
+                  <a16:creationId xmlns:a16="http://schemas.microsoft.com/office/drawing/2014/main" id="{AFC85AFB-DD86-3CA2-104B-99F18CCBCD02}"/>
+                </a:ext>
+              </a:extLst>
+            </p:cNvPr>
+            <p:cNvCxnSpPr>
+              <a:cxnSpLocks/>
+              <a:stCxn id="4" idx="6"/>
+              <a:endCxn id="6" idx="2"/>
+            </p:cNvCxnSpPr>
+            <p:nvPr/>
+          </p:nvCxnSpPr>
+          <p:spPr>
+            <a:xfrm>
+              <a:off x="5256247" y="2519267"/>
+              <a:ext cx="1132113" cy="0"/>
+            </a:xfrm>
+            <a:prstGeom prst="straightConnector1">
+              <a:avLst/>
+            </a:prstGeom>
+            <a:ln w="31750">
+              <a:tailEnd type="triangle"/>
+            </a:ln>
+          </p:spPr>
+          <p:style>
+            <a:lnRef idx="1">
+              <a:schemeClr val="accent1"/>
+            </a:lnRef>
+            <a:fillRef idx="0">
+              <a:schemeClr val="accent1"/>
+            </a:fillRef>
+            <a:effectRef idx="0">
+              <a:schemeClr val="accent1"/>
+            </a:effectRef>
+            <a:fontRef idx="minor">
+              <a:schemeClr val="tx1"/>
+            </a:fontRef>
+          </p:style>
+        </p:cxnSp>
+        <p:cxnSp>
+          <p:nvCxnSpPr>
+            <p:cNvPr id="27" name="Straight Arrow Connector 26">
+              <a:extLst>
+                <a:ext uri="{FF2B5EF4-FFF2-40B4-BE49-F238E27FC236}">
+                  <a16:creationId xmlns:a16="http://schemas.microsoft.com/office/drawing/2014/main" id="{1144CD39-3E2E-52ED-B467-AA636A88A210}"/>
+                </a:ext>
+              </a:extLst>
+            </p:cNvPr>
+            <p:cNvCxnSpPr>
+              <a:cxnSpLocks/>
+              <a:stCxn id="6" idx="6"/>
+              <a:endCxn id="9" idx="2"/>
+            </p:cNvCxnSpPr>
+            <p:nvPr/>
+          </p:nvCxnSpPr>
+          <p:spPr>
+            <a:xfrm>
+              <a:off x="7321422" y="2519267"/>
+              <a:ext cx="1132113" cy="0"/>
+            </a:xfrm>
+            <a:prstGeom prst="straightConnector1">
+              <a:avLst/>
+            </a:prstGeom>
+            <a:ln w="31750">
+              <a:tailEnd type="triangle"/>
+            </a:ln>
+          </p:spPr>
+          <p:style>
+            <a:lnRef idx="1">
+              <a:schemeClr val="accent1"/>
+            </a:lnRef>
+            <a:fillRef idx="0">
+              <a:schemeClr val="accent1"/>
+            </a:fillRef>
+            <a:effectRef idx="0">
+              <a:schemeClr val="accent1"/>
+            </a:effectRef>
+            <a:fontRef idx="minor">
+              <a:schemeClr val="tx1"/>
+            </a:fontRef>
+          </p:style>
+        </p:cxnSp>
+        <p:cxnSp>
+          <p:nvCxnSpPr>
+            <p:cNvPr id="30" name="Straight Arrow Connector 29">
+              <a:extLst>
+                <a:ext uri="{FF2B5EF4-FFF2-40B4-BE49-F238E27FC236}">
+                  <a16:creationId xmlns:a16="http://schemas.microsoft.com/office/drawing/2014/main" id="{0EC7D43B-7FED-B991-2271-7AB2F4DD7835}"/>
+                </a:ext>
+              </a:extLst>
+            </p:cNvPr>
+            <p:cNvCxnSpPr>
+              <a:cxnSpLocks/>
+              <a:stCxn id="6" idx="5"/>
+              <a:endCxn id="13" idx="1"/>
+            </p:cNvCxnSpPr>
+            <p:nvPr/>
+          </p:nvCxnSpPr>
+          <p:spPr>
+            <a:xfrm>
+              <a:off x="7184778" y="2849154"/>
+              <a:ext cx="1405401" cy="1480047"/>
+            </a:xfrm>
+            <a:prstGeom prst="straightConnector1">
+              <a:avLst/>
+            </a:prstGeom>
+            <a:ln w="31750">
+              <a:tailEnd type="triangle"/>
+            </a:ln>
+          </p:spPr>
+          <p:style>
+            <a:lnRef idx="1">
+              <a:schemeClr val="accent1"/>
+            </a:lnRef>
+            <a:fillRef idx="0">
+              <a:schemeClr val="accent1"/>
+            </a:fillRef>
+            <a:effectRef idx="0">
+              <a:schemeClr val="accent1"/>
+            </a:effectRef>
+            <a:fontRef idx="minor">
+              <a:schemeClr val="tx1"/>
+            </a:fontRef>
+          </p:style>
+        </p:cxnSp>
+        <p:cxnSp>
+          <p:nvCxnSpPr>
+            <p:cNvPr id="34" name="Straight Arrow Connector 33">
+              <a:extLst>
+                <a:ext uri="{FF2B5EF4-FFF2-40B4-BE49-F238E27FC236}">
+                  <a16:creationId xmlns:a16="http://schemas.microsoft.com/office/drawing/2014/main" id="{EC571837-F73C-8066-B123-DB96663D1BD8}"/>
+                </a:ext>
+              </a:extLst>
+            </p:cNvPr>
+            <p:cNvCxnSpPr>
+              <a:cxnSpLocks/>
+              <a:stCxn id="9" idx="4"/>
+              <a:endCxn id="13" idx="0"/>
+            </p:cNvCxnSpPr>
+            <p:nvPr/>
+          </p:nvCxnSpPr>
+          <p:spPr>
+            <a:xfrm>
+              <a:off x="8920066" y="2985798"/>
+              <a:ext cx="0" cy="1206759"/>
+            </a:xfrm>
+            <a:prstGeom prst="straightConnector1">
+              <a:avLst/>
+            </a:prstGeom>
+            <a:ln w="31750">
+              <a:tailEnd type="triangle"/>
+            </a:ln>
+          </p:spPr>
+          <p:style>
+            <a:lnRef idx="1">
+              <a:schemeClr val="accent1"/>
+            </a:lnRef>
+            <a:fillRef idx="0">
+              <a:schemeClr val="accent1"/>
+            </a:fillRef>
+            <a:effectRef idx="0">
+              <a:schemeClr val="accent1"/>
+            </a:effectRef>
+            <a:fontRef idx="minor">
+              <a:schemeClr val="tx1"/>
+            </a:fontRef>
+          </p:style>
+        </p:cxnSp>
+        <p:cxnSp>
+          <p:nvCxnSpPr>
+            <p:cNvPr id="37" name="Straight Arrow Connector 36">
+              <a:extLst>
+                <a:ext uri="{FF2B5EF4-FFF2-40B4-BE49-F238E27FC236}">
+                  <a16:creationId xmlns:a16="http://schemas.microsoft.com/office/drawing/2014/main" id="{303CB26B-ED53-28EF-25EC-6C74CD800EAC}"/>
+                </a:ext>
+              </a:extLst>
+            </p:cNvPr>
+            <p:cNvCxnSpPr>
+              <a:cxnSpLocks/>
+              <a:stCxn id="13" idx="2"/>
+              <a:endCxn id="12" idx="6"/>
+            </p:cNvCxnSpPr>
+            <p:nvPr/>
+          </p:nvCxnSpPr>
+          <p:spPr>
+            <a:xfrm flipH="1">
+              <a:off x="7321422" y="4659088"/>
+              <a:ext cx="1132113" cy="0"/>
+            </a:xfrm>
+            <a:prstGeom prst="straightConnector1">
+              <a:avLst/>
+            </a:prstGeom>
+            <a:ln w="31750">
+              <a:tailEnd type="triangle"/>
+            </a:ln>
+          </p:spPr>
+          <p:style>
+            <a:lnRef idx="1">
+              <a:schemeClr val="accent1"/>
+            </a:lnRef>
+            <a:fillRef idx="0">
+              <a:schemeClr val="accent1"/>
+            </a:fillRef>
+            <a:effectRef idx="0">
+              <a:schemeClr val="accent1"/>
+            </a:effectRef>
+            <a:fontRef idx="minor">
+              <a:schemeClr val="tx1"/>
+            </a:fontRef>
+          </p:style>
+        </p:cxnSp>
+        <p:cxnSp>
+          <p:nvCxnSpPr>
+            <p:cNvPr id="40" name="Straight Arrow Connector 39">
+              <a:extLst>
+                <a:ext uri="{FF2B5EF4-FFF2-40B4-BE49-F238E27FC236}">
+                  <a16:creationId xmlns:a16="http://schemas.microsoft.com/office/drawing/2014/main" id="{738819C0-65F9-B97F-822F-4485E7822B1B}"/>
+                </a:ext>
+              </a:extLst>
+            </p:cNvPr>
+            <p:cNvCxnSpPr>
+              <a:cxnSpLocks/>
+              <a:stCxn id="12" idx="2"/>
+              <a:endCxn id="11" idx="6"/>
+            </p:cNvCxnSpPr>
+            <p:nvPr/>
+          </p:nvCxnSpPr>
+          <p:spPr>
+            <a:xfrm flipH="1">
+              <a:off x="5256247" y="4659088"/>
+              <a:ext cx="1132113" cy="0"/>
+            </a:xfrm>
+            <a:prstGeom prst="straightConnector1">
+              <a:avLst/>
+            </a:prstGeom>
+            <a:ln w="31750">
+              <a:tailEnd type="triangle"/>
+            </a:ln>
+          </p:spPr>
+          <p:style>
+            <a:lnRef idx="1">
+              <a:schemeClr val="accent1"/>
+            </a:lnRef>
+            <a:fillRef idx="0">
+              <a:schemeClr val="accent1"/>
+            </a:fillRef>
+            <a:effectRef idx="0">
+              <a:schemeClr val="accent1"/>
+            </a:effectRef>
+            <a:fontRef idx="minor">
+              <a:schemeClr val="tx1"/>
+            </a:fontRef>
+          </p:style>
+        </p:cxnSp>
+        <p:cxnSp>
+          <p:nvCxnSpPr>
+            <p:cNvPr id="43" name="Straight Arrow Connector 42">
+              <a:extLst>
+                <a:ext uri="{FF2B5EF4-FFF2-40B4-BE49-F238E27FC236}">
+                  <a16:creationId xmlns:a16="http://schemas.microsoft.com/office/drawing/2014/main" id="{AF2A9FCB-2FFD-814D-DBFC-778AAA2C53E4}"/>
+                </a:ext>
+              </a:extLst>
+            </p:cNvPr>
+            <p:cNvCxnSpPr>
+              <a:cxnSpLocks/>
+              <a:stCxn id="11" idx="2"/>
+              <a:endCxn id="10" idx="6"/>
+            </p:cNvCxnSpPr>
+            <p:nvPr/>
+          </p:nvCxnSpPr>
+          <p:spPr>
+            <a:xfrm flipH="1">
+              <a:off x="3191072" y="4659088"/>
+              <a:ext cx="1132113" cy="0"/>
+            </a:xfrm>
+            <a:prstGeom prst="straightConnector1">
+              <a:avLst/>
+            </a:prstGeom>
+            <a:ln w="31750">
+              <a:tailEnd type="triangle"/>
+            </a:ln>
+          </p:spPr>
+          <p:style>
+            <a:lnRef idx="1">
+              <a:schemeClr val="accent1"/>
+            </a:lnRef>
+            <a:fillRef idx="0">
+              <a:schemeClr val="accent1"/>
+            </a:fillRef>
+            <a:effectRef idx="0">
+              <a:schemeClr val="accent1"/>
+            </a:effectRef>
+            <a:fontRef idx="minor">
+              <a:schemeClr val="tx1"/>
+            </a:fontRef>
+          </p:style>
+        </p:cxnSp>
+        <p:sp>
+          <p:nvSpPr>
+            <p:cNvPr id="46" name="TextBox 45">
+              <a:extLst>
+                <a:ext uri="{FF2B5EF4-FFF2-40B4-BE49-F238E27FC236}">
+                  <a16:creationId xmlns:a16="http://schemas.microsoft.com/office/drawing/2014/main" id="{7790CE5C-7C47-4C79-4F37-9298DC2B1A11}"/>
+                </a:ext>
+              </a:extLst>
+            </p:cNvPr>
+            <p:cNvSpPr txBox="1"/>
+            <p:nvPr/>
+          </p:nvSpPr>
+          <p:spPr>
+            <a:xfrm>
+              <a:off x="3349694" y="2101336"/>
+              <a:ext cx="765110" cy="369332"/>
+            </a:xfrm>
+            <a:prstGeom prst="rect">
+              <a:avLst/>
+            </a:prstGeom>
+            <a:noFill/>
+          </p:spPr>
+          <p:txBody>
+            <a:bodyPr wrap="square" rtlCol="0">
+              <a:spAutoFit/>
+            </a:bodyPr>
+            <a:lstStyle/>
+            <a:p>
+              <a:pPr algn="ctr"/>
+              <a:r>
+                <a:rPr lang="en-US" dirty="0"/>
+                <a:t>A-Z</a:t>
+              </a:r>
+            </a:p>
+          </p:txBody>
+        </p:sp>
+        <p:sp>
+          <p:nvSpPr>
+            <p:cNvPr id="47" name="TextBox 46">
+              <a:extLst>
+                <a:ext uri="{FF2B5EF4-FFF2-40B4-BE49-F238E27FC236}">
+                  <a16:creationId xmlns:a16="http://schemas.microsoft.com/office/drawing/2014/main" id="{3447A5DA-2D6A-5C37-3B83-FEE425AB2CCE}"/>
+                </a:ext>
+              </a:extLst>
+            </p:cNvPr>
+            <p:cNvSpPr txBox="1"/>
+            <p:nvPr/>
+          </p:nvSpPr>
+          <p:spPr>
+            <a:xfrm>
+              <a:off x="5464628" y="2060900"/>
+              <a:ext cx="765110" cy="369332"/>
+            </a:xfrm>
+            <a:prstGeom prst="rect">
+              <a:avLst/>
+            </a:prstGeom>
+            <a:noFill/>
+          </p:spPr>
+          <p:txBody>
+            <a:bodyPr wrap="square" rtlCol="0">
+              <a:spAutoFit/>
+            </a:bodyPr>
+            <a:lstStyle/>
+            <a:p>
+              <a:pPr algn="ctr"/>
+              <a:r>
+                <a:rPr lang="en-US" dirty="0"/>
+                <a:t>A-Z</a:t>
+              </a:r>
+            </a:p>
+          </p:txBody>
+        </p:sp>
+        <p:sp>
+          <p:nvSpPr>
+            <p:cNvPr id="48" name="TextBox 47">
+              <a:extLst>
+                <a:ext uri="{FF2B5EF4-FFF2-40B4-BE49-F238E27FC236}">
+                  <a16:creationId xmlns:a16="http://schemas.microsoft.com/office/drawing/2014/main" id="{2ABF87DC-B90B-D97C-8F74-BCF39F3B9421}"/>
+                </a:ext>
+              </a:extLst>
+            </p:cNvPr>
+            <p:cNvSpPr txBox="1"/>
+            <p:nvPr/>
+          </p:nvSpPr>
+          <p:spPr>
+            <a:xfrm>
+              <a:off x="7504923" y="2060900"/>
+              <a:ext cx="765110" cy="369332"/>
+            </a:xfrm>
+            <a:prstGeom prst="rect">
+              <a:avLst/>
+            </a:prstGeom>
+            <a:noFill/>
+          </p:spPr>
+          <p:txBody>
+            <a:bodyPr wrap="square" rtlCol="0">
+              <a:spAutoFit/>
+            </a:bodyPr>
+            <a:lstStyle/>
+            <a:p>
+              <a:pPr algn="ctr"/>
+              <a:r>
+                <a:rPr lang="en-US" dirty="0"/>
+                <a:t>A-Z</a:t>
+              </a:r>
+            </a:p>
+          </p:txBody>
+        </p:sp>
+        <p:sp>
+          <p:nvSpPr>
+            <p:cNvPr id="49" name="TextBox 48">
+              <a:extLst>
+                <a:ext uri="{FF2B5EF4-FFF2-40B4-BE49-F238E27FC236}">
+                  <a16:creationId xmlns:a16="http://schemas.microsoft.com/office/drawing/2014/main" id="{048D07C6-38F1-7473-641D-49A75DFC3EDE}"/>
+                </a:ext>
+              </a:extLst>
+            </p:cNvPr>
+            <p:cNvSpPr txBox="1"/>
+            <p:nvPr/>
+          </p:nvSpPr>
+          <p:spPr>
+            <a:xfrm>
+              <a:off x="3349694" y="4268757"/>
+              <a:ext cx="765110" cy="369332"/>
+            </a:xfrm>
+            <a:prstGeom prst="rect">
+              <a:avLst/>
+            </a:prstGeom>
+            <a:noFill/>
+          </p:spPr>
+          <p:txBody>
+            <a:bodyPr wrap="square" rtlCol="0">
+              <a:spAutoFit/>
+            </a:bodyPr>
+            <a:lstStyle/>
+            <a:p>
+              <a:pPr algn="ctr"/>
+              <a:r>
+                <a:rPr lang="en-US" dirty="0"/>
+                <a:t>A-Z</a:t>
+              </a:r>
+            </a:p>
+          </p:txBody>
+        </p:sp>
+        <p:sp>
+          <p:nvSpPr>
+            <p:cNvPr id="50" name="TextBox 49">
+              <a:extLst>
+                <a:ext uri="{FF2B5EF4-FFF2-40B4-BE49-F238E27FC236}">
+                  <a16:creationId xmlns:a16="http://schemas.microsoft.com/office/drawing/2014/main" id="{EDA8FC6A-763D-D7A3-0972-AD4DF83FE421}"/>
+                </a:ext>
+              </a:extLst>
+            </p:cNvPr>
+            <p:cNvSpPr txBox="1"/>
+            <p:nvPr/>
+          </p:nvSpPr>
+          <p:spPr>
+            <a:xfrm>
+              <a:off x="5439748" y="4241157"/>
+              <a:ext cx="765110" cy="369332"/>
+            </a:xfrm>
+            <a:prstGeom prst="rect">
+              <a:avLst/>
+            </a:prstGeom>
+            <a:noFill/>
+          </p:spPr>
+          <p:txBody>
+            <a:bodyPr wrap="square" rtlCol="0">
+              <a:spAutoFit/>
+            </a:bodyPr>
+            <a:lstStyle/>
+            <a:p>
+              <a:pPr algn="ctr"/>
+              <a:r>
+                <a:rPr lang="en-US" dirty="0"/>
+                <a:t>A-Z</a:t>
+              </a:r>
+            </a:p>
+          </p:txBody>
+        </p:sp>
+        <p:sp>
+          <p:nvSpPr>
+            <p:cNvPr id="51" name="TextBox 50">
+              <a:extLst>
+                <a:ext uri="{FF2B5EF4-FFF2-40B4-BE49-F238E27FC236}">
+                  <a16:creationId xmlns:a16="http://schemas.microsoft.com/office/drawing/2014/main" id="{8FC8F376-9AF8-35CA-76B8-DCB74747E1D3}"/>
+                </a:ext>
+              </a:extLst>
+            </p:cNvPr>
+            <p:cNvSpPr txBox="1"/>
+            <p:nvPr/>
+          </p:nvSpPr>
+          <p:spPr>
+            <a:xfrm>
+              <a:off x="7504923" y="4241157"/>
+              <a:ext cx="765110" cy="369332"/>
+            </a:xfrm>
+            <a:prstGeom prst="rect">
+              <a:avLst/>
+            </a:prstGeom>
+            <a:noFill/>
+          </p:spPr>
+          <p:txBody>
+            <a:bodyPr wrap="square" rtlCol="0">
+              <a:spAutoFit/>
+            </a:bodyPr>
+            <a:lstStyle/>
+            <a:p>
+              <a:pPr algn="ctr"/>
+              <a:r>
+                <a:rPr lang="en-US" dirty="0"/>
+                <a:t>A-Z</a:t>
+              </a:r>
+            </a:p>
+          </p:txBody>
+        </p:sp>
+        <p:sp>
+          <p:nvSpPr>
+            <p:cNvPr id="52" name="TextBox 51">
+              <a:extLst>
+                <a:ext uri="{FF2B5EF4-FFF2-40B4-BE49-F238E27FC236}">
+                  <a16:creationId xmlns:a16="http://schemas.microsoft.com/office/drawing/2014/main" id="{FC118B6E-BD6E-F2EC-DE82-892BF54E9CD4}"/>
+                </a:ext>
+              </a:extLst>
+            </p:cNvPr>
+            <p:cNvSpPr txBox="1"/>
+            <p:nvPr/>
+          </p:nvSpPr>
+          <p:spPr>
+            <a:xfrm>
+              <a:off x="7607458" y="3123412"/>
+              <a:ext cx="765110" cy="369332"/>
+            </a:xfrm>
+            <a:prstGeom prst="rect">
+              <a:avLst/>
+            </a:prstGeom>
+            <a:noFill/>
+          </p:spPr>
+          <p:txBody>
+            <a:bodyPr wrap="square" rtlCol="0">
+              <a:spAutoFit/>
+            </a:bodyPr>
+            <a:lstStyle/>
+            <a:p>
+              <a:pPr algn="ctr"/>
+              <a:r>
+                <a:rPr lang="en-US" dirty="0"/>
+                <a:t>1-9</a:t>
+              </a:r>
+            </a:p>
+          </p:txBody>
+        </p:sp>
+        <p:sp>
+          <p:nvSpPr>
+            <p:cNvPr id="53" name="TextBox 52">
+              <a:extLst>
+                <a:ext uri="{FF2B5EF4-FFF2-40B4-BE49-F238E27FC236}">
+                  <a16:creationId xmlns:a16="http://schemas.microsoft.com/office/drawing/2014/main" id="{B95BFA01-5762-1E11-A7BE-2F5748A06FBB}"/>
+                </a:ext>
+              </a:extLst>
+            </p:cNvPr>
+            <p:cNvSpPr txBox="1"/>
+            <p:nvPr/>
+          </p:nvSpPr>
+          <p:spPr>
+            <a:xfrm>
+              <a:off x="8820539" y="3356694"/>
+              <a:ext cx="765110" cy="369332"/>
+            </a:xfrm>
+            <a:prstGeom prst="rect">
+              <a:avLst/>
+            </a:prstGeom>
+            <a:noFill/>
+          </p:spPr>
+          <p:txBody>
+            <a:bodyPr wrap="square" rtlCol="0">
+              <a:spAutoFit/>
+            </a:bodyPr>
+            <a:lstStyle/>
+            <a:p>
+              <a:pPr algn="ctr"/>
+              <a:r>
+                <a:rPr lang="en-US" dirty="0"/>
+                <a:t>1-9</a:t>
+              </a:r>
+            </a:p>
+          </p:txBody>
+        </p:sp>
+        <p:sp>
+          <p:nvSpPr>
+            <p:cNvPr id="54" name="TextBox 53">
+              <a:extLst>
+                <a:ext uri="{FF2B5EF4-FFF2-40B4-BE49-F238E27FC236}">
+                  <a16:creationId xmlns:a16="http://schemas.microsoft.com/office/drawing/2014/main" id="{A73A09CB-2A2D-8291-57CA-467719447171}"/>
+                </a:ext>
+              </a:extLst>
+            </p:cNvPr>
+            <p:cNvSpPr txBox="1"/>
+            <p:nvPr/>
+          </p:nvSpPr>
+          <p:spPr>
+            <a:xfrm>
+              <a:off x="643814" y="2334601"/>
+              <a:ext cx="765110" cy="369332"/>
+            </a:xfrm>
+            <a:prstGeom prst="rect">
+              <a:avLst/>
+            </a:prstGeom>
+            <a:noFill/>
+          </p:spPr>
+          <p:txBody>
+            <a:bodyPr wrap="square" rtlCol="0">
+              <a:spAutoFit/>
+            </a:bodyPr>
+            <a:lstStyle/>
+            <a:p>
+              <a:pPr algn="ctr"/>
+              <a:r>
+                <a:rPr lang="en-US" dirty="0"/>
+                <a:t>Start</a:t>
+              </a:r>
+            </a:p>
+          </p:txBody>
+        </p:sp>
+      </p:grpSp>
+    </p:spTree>
+    <p:extLst>
+      <p:ext uri="{BB962C8B-B14F-4D97-AF65-F5344CB8AC3E}">
+        <p14:creationId xmlns:p14="http://schemas.microsoft.com/office/powerpoint/2010/main" val="2696261553"/>
+      </p:ext>
+    </p:extLst>
+  </p:cSld>
+  <p:clrMapOvr>
+    <a:masterClrMapping/>
+  </p:clrMapOvr>
+</p:sld>
+</file>
+
+<file path=ppt/slides/slide3.xml><?xml version="1.0" encoding="utf-8"?>
+<p:sld xmlns:a="http://schemas.openxmlformats.org/drawingml/2006/main" xmlns:r="http://schemas.openxmlformats.org/officeDocument/2006/relationships" xmlns:p="http://schemas.openxmlformats.org/presentationml/2006/main">
+  <p:cSld>
+    <p:spTree>
+      <p:nvGrpSpPr>
+        <p:cNvPr id="1" name=""/>
+        <p:cNvGrpSpPr/>
+        <p:nvPr/>
+      </p:nvGrpSpPr>
+      <p:grpSpPr>
+        <a:xfrm>
+          <a:off x="0" y="0"/>
+          <a:ext cx="0" cy="0"/>
+          <a:chOff x="0" y="0"/>
+          <a:chExt cx="0" cy="0"/>
+        </a:xfrm>
+      </p:grpSpPr>
+      <p:sp>
+        <p:nvSpPr>
+          <p:cNvPr id="2" name="Title 1">
+            <a:extLst>
+              <a:ext uri="{FF2B5EF4-FFF2-40B4-BE49-F238E27FC236}">
+                <a16:creationId xmlns:a16="http://schemas.microsoft.com/office/drawing/2014/main" id="{45F6F863-B5F4-DD9E-DF26-EE6DE9E919F3}"/>
+              </a:ext>
+            </a:extLst>
+          </p:cNvPr>
+          <p:cNvSpPr>
+            <a:spLocks noGrp="1"/>
+          </p:cNvSpPr>
+          <p:nvPr>
+            <p:ph type="title"/>
+          </p:nvPr>
+        </p:nvSpPr>
+        <p:spPr>
+          <a:xfrm>
+            <a:off x="1143001" y="2216918"/>
+            <a:ext cx="9905998" cy="1478570"/>
+          </a:xfrm>
+        </p:spPr>
+        <p:txBody>
+          <a:bodyPr/>
+          <a:lstStyle/>
+          <a:p>
+            <a:pPr algn="ctr"/>
+            <a:r>
+              <a:rPr lang="en-US" dirty="0"/>
+              <a:t>Reduction Reminders</a:t>
+            </a:r>
+          </a:p>
+        </p:txBody>
+      </p:sp>
+    </p:spTree>
+    <p:extLst>
+      <p:ext uri="{BB962C8B-B14F-4D97-AF65-F5344CB8AC3E}">
+        <p14:creationId xmlns:p14="http://schemas.microsoft.com/office/powerpoint/2010/main" val="204999578"/>
+      </p:ext>
+    </p:extLst>
+  </p:cSld>
+  <p:clrMapOvr>
+    <a:masterClrMapping/>
+  </p:clrMapOvr>
+</p:sld>
+</file>
+
+<file path=ppt/slides/slide30.xml><?xml version="1.0" encoding="utf-8"?>
+<p:sld xmlns:a="http://schemas.openxmlformats.org/drawingml/2006/main" xmlns:r="http://schemas.openxmlformats.org/officeDocument/2006/relationships" xmlns:p="http://schemas.openxmlformats.org/presentationml/2006/main">
+  <p:cSld>
+    <p:spTree>
+      <p:nvGrpSpPr>
+        <p:cNvPr id="1" name="">
+          <a:extLst>
+            <a:ext uri="{FF2B5EF4-FFF2-40B4-BE49-F238E27FC236}">
+              <a16:creationId xmlns:a16="http://schemas.microsoft.com/office/drawing/2014/main" id="{CB021B2F-5644-5996-294D-77D14BABEFBC}"/>
+            </a:ext>
+          </a:extLst>
+        </p:cNvPr>
+        <p:cNvGrpSpPr/>
+        <p:nvPr/>
+      </p:nvGrpSpPr>
+      <p:grpSpPr>
+        <a:xfrm>
+          <a:off x="0" y="0"/>
+          <a:ext cx="0" cy="0"/>
+          <a:chOff x="0" y="0"/>
+          <a:chExt cx="0" cy="0"/>
+        </a:xfrm>
+      </p:grpSpPr>
+      <p:sp>
+        <p:nvSpPr>
+          <p:cNvPr id="2" name="Title 1">
+            <a:extLst>
+              <a:ext uri="{FF2B5EF4-FFF2-40B4-BE49-F238E27FC236}">
+                <a16:creationId xmlns:a16="http://schemas.microsoft.com/office/drawing/2014/main" id="{EE269530-CD07-010F-8313-4BCF54986D47}"/>
+              </a:ext>
+            </a:extLst>
+          </p:cNvPr>
+          <p:cNvSpPr>
+            <a:spLocks noGrp="1"/>
+          </p:cNvSpPr>
+          <p:nvPr>
+            <p:ph type="title"/>
+          </p:nvPr>
+        </p:nvSpPr>
+        <p:spPr>
+          <a:xfrm>
+            <a:off x="1143001" y="123995"/>
+            <a:ext cx="9905998" cy="448281"/>
+          </a:xfrm>
+        </p:spPr>
+        <p:txBody>
+          <a:bodyPr>
+            <a:normAutofit fontScale="90000"/>
+          </a:bodyPr>
+          <a:lstStyle/>
+          <a:p>
+            <a:pPr algn="ctr"/>
+            <a:r>
+              <a:rPr lang="en-US" dirty="0"/>
+              <a:t>Python Code</a:t>
+            </a:r>
+          </a:p>
+        </p:txBody>
+      </p:sp>
+      <p:sp>
+        <p:nvSpPr>
+          <p:cNvPr id="8" name="TextBox 7">
+            <a:extLst>
+              <a:ext uri="{FF2B5EF4-FFF2-40B4-BE49-F238E27FC236}">
+                <a16:creationId xmlns:a16="http://schemas.microsoft.com/office/drawing/2014/main" id="{6C79373C-ECE7-47B7-6C45-94B1C05CCA60}"/>
+              </a:ext>
+            </a:extLst>
+          </p:cNvPr>
+          <p:cNvSpPr txBox="1"/>
+          <p:nvPr/>
+        </p:nvSpPr>
+        <p:spPr>
+          <a:xfrm>
+            <a:off x="7766613" y="2505670"/>
+            <a:ext cx="4098647" cy="923330"/>
+          </a:xfrm>
+          <a:prstGeom prst="rect">
+            <a:avLst/>
+          </a:prstGeom>
+          <a:noFill/>
+          <a:ln>
+            <a:solidFill>
+              <a:schemeClr val="tx1">
+                <a:lumMod val="95000"/>
+              </a:schemeClr>
+            </a:solidFill>
+          </a:ln>
+        </p:spPr>
+        <p:txBody>
+          <a:bodyPr wrap="square" rtlCol="0">
+            <a:spAutoFit/>
+          </a:bodyPr>
+          <a:lstStyle/>
+          <a:p>
+            <a:r>
+              <a:rPr lang="en-US" b="1" i="1" u="sng" dirty="0"/>
+              <a:t>Main Point</a:t>
+            </a:r>
+            <a:r>
+              <a:rPr lang="en-US" dirty="0"/>
+              <a:t>: Coding up these machines is easy, very general, and works for a wide array of problems!!</a:t>
+            </a:r>
+          </a:p>
+        </p:txBody>
+      </p:sp>
+      <p:pic>
+        <p:nvPicPr>
+          <p:cNvPr id="4" name="Picture 3" descr="A screenshot of a computer code&#10;&#10;AI-generated content may be incorrect.">
+            <a:extLst>
+              <a:ext uri="{FF2B5EF4-FFF2-40B4-BE49-F238E27FC236}">
+                <a16:creationId xmlns:a16="http://schemas.microsoft.com/office/drawing/2014/main" id="{399AE306-F08E-2AE2-B165-24976653C295}"/>
+              </a:ext>
+            </a:extLst>
+          </p:cNvPr>
+          <p:cNvPicPr>
+            <a:picLocks noChangeAspect="1"/>
+          </p:cNvPicPr>
+          <p:nvPr/>
+        </p:nvPicPr>
+        <p:blipFill>
+          <a:blip r:embed="rId2"/>
+          <a:stretch>
+            <a:fillRect/>
+          </a:stretch>
+        </p:blipFill>
+        <p:spPr>
+          <a:xfrm>
+            <a:off x="338315" y="630150"/>
+            <a:ext cx="7275311" cy="3056025"/>
+          </a:xfrm>
+          <a:prstGeom prst="rect">
+            <a:avLst/>
+          </a:prstGeom>
+        </p:spPr>
+      </p:pic>
+      <p:pic>
+        <p:nvPicPr>
+          <p:cNvPr id="9" name="Picture 8" descr="A computer code with red and blue text&#10;&#10;AI-generated content may be incorrect.">
+            <a:extLst>
+              <a:ext uri="{FF2B5EF4-FFF2-40B4-BE49-F238E27FC236}">
+                <a16:creationId xmlns:a16="http://schemas.microsoft.com/office/drawing/2014/main" id="{130D4627-8212-336D-AC77-96ABABFD431E}"/>
+              </a:ext>
+            </a:extLst>
+          </p:cNvPr>
+          <p:cNvPicPr>
+            <a:picLocks noChangeAspect="1"/>
+          </p:cNvPicPr>
+          <p:nvPr/>
+        </p:nvPicPr>
+        <p:blipFill>
+          <a:blip r:embed="rId3"/>
+          <a:stretch>
+            <a:fillRect/>
+          </a:stretch>
+        </p:blipFill>
+        <p:spPr>
+          <a:xfrm>
+            <a:off x="338315" y="3677981"/>
+            <a:ext cx="7275311" cy="3106538"/>
+          </a:xfrm>
+          <a:prstGeom prst="rect">
+            <a:avLst/>
+          </a:prstGeom>
+        </p:spPr>
+      </p:pic>
+    </p:spTree>
+    <p:extLst>
+      <p:ext uri="{BB962C8B-B14F-4D97-AF65-F5344CB8AC3E}">
+        <p14:creationId xmlns:p14="http://schemas.microsoft.com/office/powerpoint/2010/main" val="3898569048"/>
+      </p:ext>
+    </p:extLst>
+  </p:cSld>
+  <p:clrMapOvr>
+    <a:masterClrMapping/>
+  </p:clrMapOvr>
+</p:sld>
+</file>
+
+<file path=ppt/slides/slide31.xml><?xml version="1.0" encoding="utf-8"?>
+<p:sld xmlns:a="http://schemas.openxmlformats.org/drawingml/2006/main" xmlns:r="http://schemas.openxmlformats.org/officeDocument/2006/relationships" xmlns:p="http://schemas.openxmlformats.org/presentationml/2006/main">
+  <p:cSld>
+    <p:spTree>
+      <p:nvGrpSpPr>
+        <p:cNvPr id="1" name="">
+          <a:extLst>
+            <a:ext uri="{FF2B5EF4-FFF2-40B4-BE49-F238E27FC236}">
               <a16:creationId xmlns:a16="http://schemas.microsoft.com/office/drawing/2014/main" id="{21148210-018A-8332-9415-CF7CAAA81646}"/>
             </a:ext>
           </a:extLst>
@@ -32907,7 +35183,7 @@
 </p:sld>
 </file>
 
-<file path=ppt/slides/slide28.xml><?xml version="1.0" encoding="utf-8"?>
+<file path=ppt/slides/slide32.xml><?xml version="1.0" encoding="utf-8"?>
 <p:sld xmlns:a="http://schemas.openxmlformats.org/drawingml/2006/main" xmlns:r="http://schemas.openxmlformats.org/officeDocument/2006/relationships" xmlns:p="http://schemas.openxmlformats.org/presentationml/2006/main">
   <p:cSld>
     <p:spTree>
@@ -33034,7 +35310,7 @@
 </p:sld>
 </file>
 
-<file path=ppt/slides/slide29.xml><?xml version="1.0" encoding="utf-8"?>
+<file path=ppt/slides/slide33.xml><?xml version="1.0" encoding="utf-8"?>
 <p:sld xmlns:a="http://schemas.openxmlformats.org/drawingml/2006/main" xmlns:r="http://schemas.openxmlformats.org/officeDocument/2006/relationships" xmlns:p="http://schemas.openxmlformats.org/presentationml/2006/main">
   <p:cSld>
     <p:spTree>
@@ -33145,70 +35421,6 @@
     <p:extLst>
       <p:ext uri="{BB962C8B-B14F-4D97-AF65-F5344CB8AC3E}">
         <p14:creationId xmlns:p14="http://schemas.microsoft.com/office/powerpoint/2010/main" val="4252656933"/>
-      </p:ext>
-    </p:extLst>
-  </p:cSld>
-  <p:clrMapOvr>
-    <a:masterClrMapping/>
-  </p:clrMapOvr>
-</p:sld>
-</file>
-
-<file path=ppt/slides/slide3.xml><?xml version="1.0" encoding="utf-8"?>
-<p:sld xmlns:a="http://schemas.openxmlformats.org/drawingml/2006/main" xmlns:r="http://schemas.openxmlformats.org/officeDocument/2006/relationships" xmlns:p="http://schemas.openxmlformats.org/presentationml/2006/main">
-  <p:cSld>
-    <p:spTree>
-      <p:nvGrpSpPr>
-        <p:cNvPr id="1" name=""/>
-        <p:cNvGrpSpPr/>
-        <p:nvPr/>
-      </p:nvGrpSpPr>
-      <p:grpSpPr>
-        <a:xfrm>
-          <a:off x="0" y="0"/>
-          <a:ext cx="0" cy="0"/>
-          <a:chOff x="0" y="0"/>
-          <a:chExt cx="0" cy="0"/>
-        </a:xfrm>
-      </p:grpSpPr>
-      <p:sp>
-        <p:nvSpPr>
-          <p:cNvPr id="2" name="Title 1">
-            <a:extLst>
-              <a:ext uri="{FF2B5EF4-FFF2-40B4-BE49-F238E27FC236}">
-                <a16:creationId xmlns:a16="http://schemas.microsoft.com/office/drawing/2014/main" id="{45F6F863-B5F4-DD9E-DF26-EE6DE9E919F3}"/>
-              </a:ext>
-            </a:extLst>
-          </p:cNvPr>
-          <p:cNvSpPr>
-            <a:spLocks noGrp="1"/>
-          </p:cNvSpPr>
-          <p:nvPr>
-            <p:ph type="title"/>
-          </p:nvPr>
-        </p:nvSpPr>
-        <p:spPr>
-          <a:xfrm>
-            <a:off x="1143001" y="2216918"/>
-            <a:ext cx="9905998" cy="1478570"/>
-          </a:xfrm>
-        </p:spPr>
-        <p:txBody>
-          <a:bodyPr/>
-          <a:lstStyle/>
-          <a:p>
-            <a:pPr algn="ctr"/>
-            <a:r>
-              <a:rPr lang="en-US" dirty="0"/>
-              <a:t>Reduction Reminders</a:t>
-            </a:r>
-          </a:p>
-        </p:txBody>
-      </p:sp>
-    </p:spTree>
-    <p:extLst>
-      <p:ext uri="{BB962C8B-B14F-4D97-AF65-F5344CB8AC3E}">
-        <p14:creationId xmlns:p14="http://schemas.microsoft.com/office/powerpoint/2010/main" val="204999578"/>
       </p:ext>
     </p:extLst>
   </p:cSld>
@@ -33816,8 +36028,8 @@
             </a:p>
           </p:txBody>
         </p:sp>
-        <mc:AlternateContent xmlns:mc="http://schemas.openxmlformats.org/markup-compatibility/2006">
-          <mc:Choice xmlns:a14="http://schemas.microsoft.com/office/drawing/2010/main" Requires="a14">
+        <mc:AlternateContent xmlns:mc="http://schemas.openxmlformats.org/markup-compatibility/2006" xmlns:a14="http://schemas.microsoft.com/office/drawing/2010/main">
+          <mc:Choice Requires="a14">
             <p:sp>
               <p:nvSpPr>
                 <p:cNvPr id="3" name="TextBox 2">
@@ -33895,7 +36107,7 @@
               </p:txBody>
             </p:sp>
           </mc:Choice>
-          <mc:Fallback>
+          <mc:Fallback xmlns="">
             <p:sp>
               <p:nvSpPr>
                 <p:cNvPr id="3" name="TextBox 2">
@@ -33940,8 +36152,8 @@
             </p:sp>
           </mc:Fallback>
         </mc:AlternateContent>
-        <mc:AlternateContent xmlns:mc="http://schemas.openxmlformats.org/markup-compatibility/2006">
-          <mc:Choice xmlns:a14="http://schemas.microsoft.com/office/drawing/2010/main" Requires="a14">
+        <mc:AlternateContent xmlns:mc="http://schemas.openxmlformats.org/markup-compatibility/2006" xmlns:a14="http://schemas.microsoft.com/office/drawing/2010/main">
+          <mc:Choice Requires="a14">
             <p:sp>
               <p:nvSpPr>
                 <p:cNvPr id="4" name="TextBox 3">
@@ -34036,7 +36248,7 @@
               </p:txBody>
             </p:sp>
           </mc:Choice>
-          <mc:Fallback>
+          <mc:Fallback xmlns="">
             <p:sp>
               <p:nvSpPr>
                 <p:cNvPr id="4" name="TextBox 3">
@@ -34081,8 +36293,8 @@
             </p:sp>
           </mc:Fallback>
         </mc:AlternateContent>
-        <mc:AlternateContent xmlns:mc="http://schemas.openxmlformats.org/markup-compatibility/2006">
-          <mc:Choice xmlns:a14="http://schemas.microsoft.com/office/drawing/2010/main" Requires="a14">
+        <mc:AlternateContent xmlns:mc="http://schemas.openxmlformats.org/markup-compatibility/2006" xmlns:a14="http://schemas.microsoft.com/office/drawing/2010/main">
+          <mc:Choice Requires="a14">
             <p:sp>
               <p:nvSpPr>
                 <p:cNvPr id="5" name="TextBox 4">
@@ -34160,7 +36372,7 @@
               </p:txBody>
             </p:sp>
           </mc:Choice>
-          <mc:Fallback>
+          <mc:Fallback xmlns="">
             <p:sp>
               <p:nvSpPr>
                 <p:cNvPr id="5" name="TextBox 4">
@@ -34246,8 +36458,8 @@
             </a:fontRef>
           </p:style>
         </p:cxnSp>
-        <mc:AlternateContent xmlns:mc="http://schemas.openxmlformats.org/markup-compatibility/2006">
-          <mc:Choice xmlns:a14="http://schemas.microsoft.com/office/drawing/2010/main" Requires="a14">
+        <mc:AlternateContent xmlns:mc="http://schemas.openxmlformats.org/markup-compatibility/2006" xmlns:a14="http://schemas.microsoft.com/office/drawing/2010/main">
+          <mc:Choice Requires="a14">
             <p:sp>
               <p:nvSpPr>
                 <p:cNvPr id="9" name="TextBox 8">
@@ -34342,7 +36554,7 @@
               </p:txBody>
             </p:sp>
           </mc:Choice>
-          <mc:Fallback>
+          <mc:Fallback xmlns="">
             <p:sp>
               <p:nvSpPr>
                 <p:cNvPr id="9" name="TextBox 8">
@@ -34552,8 +36764,8 @@
           </a:p>
         </p:txBody>
       </p:sp>
-      <mc:AlternateContent xmlns:mc="http://schemas.openxmlformats.org/markup-compatibility/2006">
-        <mc:Choice xmlns:a14="http://schemas.microsoft.com/office/drawing/2010/main" Requires="a14">
+      <mc:AlternateContent xmlns:mc="http://schemas.openxmlformats.org/markup-compatibility/2006" xmlns:a14="http://schemas.microsoft.com/office/drawing/2010/main">
+        <mc:Choice Requires="a14">
           <p:sp>
             <p:nvSpPr>
               <p:cNvPr id="8" name="TextBox 7">
@@ -34738,7 +36950,7 @@
             </p:txBody>
           </p:sp>
         </mc:Choice>
-        <mc:Fallback>
+        <mc:Fallback xmlns="">
           <p:sp>
             <p:nvSpPr>
               <p:cNvPr id="8" name="TextBox 7">
@@ -34788,8 +37000,8 @@
           </p:sp>
         </mc:Fallback>
       </mc:AlternateContent>
-      <mc:AlternateContent xmlns:mc="http://schemas.openxmlformats.org/markup-compatibility/2006">
-        <mc:Choice xmlns:a14="http://schemas.microsoft.com/office/drawing/2010/main" Requires="a14">
+      <mc:AlternateContent xmlns:mc="http://schemas.openxmlformats.org/markup-compatibility/2006" xmlns:a14="http://schemas.microsoft.com/office/drawing/2010/main">
+        <mc:Choice Requires="a14">
           <p:sp>
             <p:nvSpPr>
               <p:cNvPr id="14" name="TextBox 13">
@@ -34860,7 +37072,7 @@
             </p:txBody>
           </p:sp>
         </mc:Choice>
-        <mc:Fallback>
+        <mc:Fallback xmlns="">
           <p:sp>
             <p:nvSpPr>
               <p:cNvPr id="14" name="TextBox 13">
@@ -34974,8 +37186,8 @@
           </a:p>
         </p:txBody>
       </p:sp>
-      <mc:AlternateContent xmlns:mc="http://schemas.openxmlformats.org/markup-compatibility/2006">
-        <mc:Choice xmlns:a14="http://schemas.microsoft.com/office/drawing/2010/main" Requires="a14">
+      <mc:AlternateContent xmlns:mc="http://schemas.openxmlformats.org/markup-compatibility/2006" xmlns:a14="http://schemas.microsoft.com/office/drawing/2010/main">
+        <mc:Choice Requires="a14">
           <p:sp>
             <p:nvSpPr>
               <p:cNvPr id="16" name="TextBox 15">
@@ -35112,7 +37324,7 @@
             </p:txBody>
           </p:sp>
         </mc:Choice>
-        <mc:Fallback>
+        <mc:Fallback xmlns="">
           <p:sp>
             <p:nvSpPr>
               <p:cNvPr id="16" name="TextBox 15">
@@ -35773,8 +37985,8 @@
             </a:p>
           </p:txBody>
         </p:sp>
-        <mc:AlternateContent xmlns:mc="http://schemas.openxmlformats.org/markup-compatibility/2006">
-          <mc:Choice xmlns:a14="http://schemas.microsoft.com/office/drawing/2010/main" Requires="a14">
+        <mc:AlternateContent xmlns:mc="http://schemas.openxmlformats.org/markup-compatibility/2006" xmlns:a14="http://schemas.microsoft.com/office/drawing/2010/main">
+          <mc:Choice Requires="a14">
             <p:sp>
               <p:nvSpPr>
                 <p:cNvPr id="3" name="TextBox 2">
@@ -35852,7 +38064,7 @@
               </p:txBody>
             </p:sp>
           </mc:Choice>
-          <mc:Fallback>
+          <mc:Fallback xmlns="">
             <p:sp>
               <p:nvSpPr>
                 <p:cNvPr id="3" name="TextBox 2">
@@ -35897,8 +38109,8 @@
             </p:sp>
           </mc:Fallback>
         </mc:AlternateContent>
-        <mc:AlternateContent xmlns:mc="http://schemas.openxmlformats.org/markup-compatibility/2006">
-          <mc:Choice xmlns:a14="http://schemas.microsoft.com/office/drawing/2010/main" Requires="a14">
+        <mc:AlternateContent xmlns:mc="http://schemas.openxmlformats.org/markup-compatibility/2006" xmlns:a14="http://schemas.microsoft.com/office/drawing/2010/main">
+          <mc:Choice Requires="a14">
             <p:sp>
               <p:nvSpPr>
                 <p:cNvPr id="4" name="TextBox 3">
@@ -35993,7 +38205,7 @@
               </p:txBody>
             </p:sp>
           </mc:Choice>
-          <mc:Fallback>
+          <mc:Fallback xmlns="">
             <p:sp>
               <p:nvSpPr>
                 <p:cNvPr id="4" name="TextBox 3">
@@ -36038,8 +38250,8 @@
             </p:sp>
           </mc:Fallback>
         </mc:AlternateContent>
-        <mc:AlternateContent xmlns:mc="http://schemas.openxmlformats.org/markup-compatibility/2006">
-          <mc:Choice xmlns:a14="http://schemas.microsoft.com/office/drawing/2010/main" Requires="a14">
+        <mc:AlternateContent xmlns:mc="http://schemas.openxmlformats.org/markup-compatibility/2006" xmlns:a14="http://schemas.microsoft.com/office/drawing/2010/main">
+          <mc:Choice Requires="a14">
             <p:sp>
               <p:nvSpPr>
                 <p:cNvPr id="5" name="TextBox 4">
@@ -36117,7 +38329,7 @@
               </p:txBody>
             </p:sp>
           </mc:Choice>
-          <mc:Fallback>
+          <mc:Fallback xmlns="">
             <p:sp>
               <p:nvSpPr>
                 <p:cNvPr id="5" name="TextBox 4">
@@ -36203,8 +38415,8 @@
             </a:fontRef>
           </p:style>
         </p:cxnSp>
-        <mc:AlternateContent xmlns:mc="http://schemas.openxmlformats.org/markup-compatibility/2006">
-          <mc:Choice xmlns:a14="http://schemas.microsoft.com/office/drawing/2010/main" Requires="a14">
+        <mc:AlternateContent xmlns:mc="http://schemas.openxmlformats.org/markup-compatibility/2006" xmlns:a14="http://schemas.microsoft.com/office/drawing/2010/main">
+          <mc:Choice Requires="a14">
             <p:sp>
               <p:nvSpPr>
                 <p:cNvPr id="9" name="TextBox 8">
@@ -36299,7 +38511,7 @@
               </p:txBody>
             </p:sp>
           </mc:Choice>
-          <mc:Fallback>
+          <mc:Fallback xmlns="">
             <p:sp>
               <p:nvSpPr>
                 <p:cNvPr id="9" name="TextBox 8">
@@ -36589,8 +38801,8 @@
           </a:p>
         </p:txBody>
       </p:sp>
-      <mc:AlternateContent xmlns:mc="http://schemas.openxmlformats.org/markup-compatibility/2006">
-        <mc:Choice xmlns:a14="http://schemas.microsoft.com/office/drawing/2010/main" Requires="a14">
+      <mc:AlternateContent xmlns:mc="http://schemas.openxmlformats.org/markup-compatibility/2006" xmlns:a14="http://schemas.microsoft.com/office/drawing/2010/main">
+        <mc:Choice Requires="a14">
           <p:sp>
             <p:nvSpPr>
               <p:cNvPr id="21" name="TextBox 20">
@@ -36775,7 +38987,7 @@
             </p:txBody>
           </p:sp>
         </mc:Choice>
-        <mc:Fallback>
+        <mc:Fallback xmlns="">
           <p:sp>
             <p:nvSpPr>
               <p:cNvPr id="21" name="TextBox 20">
@@ -36825,8 +39037,8 @@
           </p:sp>
         </mc:Fallback>
       </mc:AlternateContent>
-      <mc:AlternateContent xmlns:mc="http://schemas.openxmlformats.org/markup-compatibility/2006">
-        <mc:Choice xmlns:a14="http://schemas.microsoft.com/office/drawing/2010/main" Requires="a14">
+      <mc:AlternateContent xmlns:mc="http://schemas.openxmlformats.org/markup-compatibility/2006" xmlns:a14="http://schemas.microsoft.com/office/drawing/2010/main">
+        <mc:Choice Requires="a14">
           <p:sp>
             <p:nvSpPr>
               <p:cNvPr id="22" name="TextBox 21">
@@ -36897,7 +39109,7 @@
             </p:txBody>
           </p:sp>
         </mc:Choice>
-        <mc:Fallback>
+        <mc:Fallback xmlns="">
           <p:sp>
             <p:nvSpPr>
               <p:cNvPr id="22" name="TextBox 21">
@@ -37011,8 +39223,8 @@
           </a:p>
         </p:txBody>
       </p:sp>
-      <mc:AlternateContent xmlns:mc="http://schemas.openxmlformats.org/markup-compatibility/2006">
-        <mc:Choice xmlns:a14="http://schemas.microsoft.com/office/drawing/2010/main" Requires="a14">
+      <mc:AlternateContent xmlns:mc="http://schemas.openxmlformats.org/markup-compatibility/2006" xmlns:a14="http://schemas.microsoft.com/office/drawing/2010/main">
+        <mc:Choice Requires="a14">
           <p:sp>
             <p:nvSpPr>
               <p:cNvPr id="24" name="TextBox 23">
@@ -37149,7 +39361,7 @@
             </p:txBody>
           </p:sp>
         </mc:Choice>
-        <mc:Fallback>
+        <mc:Fallback xmlns="">
           <p:sp>
             <p:nvSpPr>
               <p:cNvPr id="24" name="TextBox 23">
@@ -37494,8 +39706,8 @@
           </a:p>
         </p:txBody>
       </p:sp>
-      <mc:AlternateContent xmlns:mc="http://schemas.openxmlformats.org/markup-compatibility/2006">
-        <mc:Choice xmlns:a14="http://schemas.microsoft.com/office/drawing/2010/main" Requires="a14">
+      <mc:AlternateContent xmlns:mc="http://schemas.openxmlformats.org/markup-compatibility/2006" xmlns:a14="http://schemas.microsoft.com/office/drawing/2010/main">
+        <mc:Choice Requires="a14">
           <p:sp>
             <p:nvSpPr>
               <p:cNvPr id="5" name="Content Placeholder 4">
@@ -37616,7 +39828,7 @@
             </p:txBody>
           </p:sp>
         </mc:Choice>
-        <mc:Fallback>
+        <mc:Fallback xmlns="">
           <p:sp>
             <p:nvSpPr>
               <p:cNvPr id="5" name="Content Placeholder 4">

--- a/slides/06-3-Hardness.pptx
+++ b/slides/06-3-Hardness.pptx
@@ -5,7 +5,7 @@
     <p:sldMasterId id="2147484006" r:id="rId1"/>
   </p:sldMasterIdLst>
   <p:notesMasterIdLst>
-    <p:notesMasterId r:id="rId35"/>
+    <p:notesMasterId r:id="rId40"/>
   </p:notesMasterIdLst>
   <p:sldIdLst>
     <p:sldId id="256" r:id="rId2"/>
@@ -37,10 +37,15 @@
     <p:sldId id="882" r:id="rId28"/>
     <p:sldId id="883" r:id="rId29"/>
     <p:sldId id="884" r:id="rId30"/>
-    <p:sldId id="885" r:id="rId31"/>
-    <p:sldId id="789" r:id="rId32"/>
-    <p:sldId id="790" r:id="rId33"/>
-    <p:sldId id="791" r:id="rId34"/>
+    <p:sldId id="886" r:id="rId31"/>
+    <p:sldId id="885" r:id="rId32"/>
+    <p:sldId id="887" r:id="rId33"/>
+    <p:sldId id="888" r:id="rId34"/>
+    <p:sldId id="889" r:id="rId35"/>
+    <p:sldId id="890" r:id="rId36"/>
+    <p:sldId id="891" r:id="rId37"/>
+    <p:sldId id="790" r:id="rId38"/>
+    <p:sldId id="791" r:id="rId39"/>
   </p:sldIdLst>
   <p:sldSz cx="12192000" cy="6858000"/>
   <p:notesSz cx="6858000" cy="9144000"/>
@@ -33385,7 +33390,7 @@
         </p:nvGrpSpPr>
         <p:grpSpPr>
           <a:xfrm>
-            <a:off x="1625082" y="1819471"/>
+            <a:off x="1433806" y="1118514"/>
             <a:ext cx="8941835" cy="3072883"/>
             <a:chOff x="643814" y="2052736"/>
             <a:chExt cx="8941835" cy="3072883"/>
@@ -34798,6 +34803,233 @@
           </p:txBody>
         </p:sp>
       </p:grpSp>
+      <p:sp>
+        <p:nvSpPr>
+          <p:cNvPr id="56" name="TextBox 55">
+            <a:extLst>
+              <a:ext uri="{FF2B5EF4-FFF2-40B4-BE49-F238E27FC236}">
+                <a16:creationId xmlns:a16="http://schemas.microsoft.com/office/drawing/2014/main" id="{0998E107-864B-ECFE-509E-82ACAFE3F8F1}"/>
+              </a:ext>
+            </a:extLst>
+          </p:cNvPr>
+          <p:cNvSpPr txBox="1"/>
+          <p:nvPr/>
+        </p:nvSpPr>
+        <p:spPr>
+          <a:xfrm>
+            <a:off x="1611086" y="4633433"/>
+            <a:ext cx="5607698" cy="369332"/>
+          </a:xfrm>
+          <a:prstGeom prst="rect">
+            <a:avLst/>
+          </a:prstGeom>
+          <a:noFill/>
+        </p:spPr>
+        <p:txBody>
+          <a:bodyPr wrap="square" rtlCol="0">
+            <a:spAutoFit/>
+          </a:bodyPr>
+          <a:lstStyle/>
+          <a:p>
+            <a:r>
+              <a:rPr lang="en-US" dirty="0"/>
+              <a:t>Procedure:</a:t>
+            </a:r>
+          </a:p>
+        </p:txBody>
+      </p:sp>
+      <p:sp>
+        <p:nvSpPr>
+          <p:cNvPr id="57" name="TextBox 56">
+            <a:extLst>
+              <a:ext uri="{FF2B5EF4-FFF2-40B4-BE49-F238E27FC236}">
+                <a16:creationId xmlns:a16="http://schemas.microsoft.com/office/drawing/2014/main" id="{69E10A2E-2584-2CDD-595B-60A23F2FEFC0}"/>
+              </a:ext>
+            </a:extLst>
+          </p:cNvPr>
+          <p:cNvSpPr txBox="1"/>
+          <p:nvPr/>
+        </p:nvSpPr>
+        <p:spPr>
+          <a:xfrm>
+            <a:off x="1611086" y="5023763"/>
+            <a:ext cx="7130144" cy="1600438"/>
+          </a:xfrm>
+          <a:prstGeom prst="rect">
+            <a:avLst/>
+          </a:prstGeom>
+          <a:solidFill>
+            <a:schemeClr val="tx1">
+              <a:lumMod val="95000"/>
+            </a:schemeClr>
+          </a:solidFill>
+          <a:ln>
+            <a:solidFill>
+              <a:schemeClr val="bg1"/>
+            </a:solidFill>
+          </a:ln>
+        </p:spPr>
+        <p:txBody>
+          <a:bodyPr wrap="square" rtlCol="0">
+            <a:spAutoFit/>
+          </a:bodyPr>
+          <a:lstStyle/>
+          <a:p>
+            <a:r>
+              <a:rPr lang="en-US" sz="1400" dirty="0">
+                <a:solidFill>
+                  <a:schemeClr val="bg1"/>
+                </a:solidFill>
+                <a:latin typeface="Courier New" panose="02070309020205020404" pitchFamily="49" charset="0"/>
+                <a:cs typeface="Courier New" panose="02070309020205020404" pitchFamily="49" charset="0"/>
+              </a:rPr>
+              <a:t>Start at the start state</a:t>
+            </a:r>
+          </a:p>
+          <a:p>
+            <a:r>
+              <a:rPr lang="en-US" sz="1400" dirty="0">
+                <a:solidFill>
+                  <a:schemeClr val="bg1"/>
+                </a:solidFill>
+                <a:latin typeface="Courier New" panose="02070309020205020404" pitchFamily="49" charset="0"/>
+                <a:cs typeface="Courier New" panose="02070309020205020404" pitchFamily="49" charset="0"/>
+              </a:rPr>
+              <a:t>For each symbol of the computing id:</a:t>
+            </a:r>
+          </a:p>
+          <a:p>
+            <a:r>
+              <a:rPr lang="en-US" sz="1400" dirty="0">
+                <a:solidFill>
+                  <a:schemeClr val="bg1"/>
+                </a:solidFill>
+                <a:latin typeface="Courier New" panose="02070309020205020404" pitchFamily="49" charset="0"/>
+                <a:cs typeface="Courier New" panose="02070309020205020404" pitchFamily="49" charset="0"/>
+              </a:rPr>
+              <a:t>     Go to the next state as per transition labels</a:t>
+            </a:r>
+          </a:p>
+          <a:p>
+            <a:r>
+              <a:rPr lang="en-US" sz="1400" dirty="0">
+                <a:solidFill>
+                  <a:schemeClr val="bg1"/>
+                </a:solidFill>
+                <a:latin typeface="Courier New" panose="02070309020205020404" pitchFamily="49" charset="0"/>
+                <a:cs typeface="Courier New" panose="02070309020205020404" pitchFamily="49" charset="0"/>
+              </a:rPr>
+              <a:t>If finished and state your end in is accepting (double circles):</a:t>
+            </a:r>
+          </a:p>
+          <a:p>
+            <a:r>
+              <a:rPr lang="en-US" sz="1400" dirty="0">
+                <a:solidFill>
+                  <a:schemeClr val="bg1"/>
+                </a:solidFill>
+                <a:latin typeface="Courier New" panose="02070309020205020404" pitchFamily="49" charset="0"/>
+                <a:cs typeface="Courier New" panose="02070309020205020404" pitchFamily="49" charset="0"/>
+              </a:rPr>
+              <a:t>     Return True (Valid ID)</a:t>
+            </a:r>
+          </a:p>
+          <a:p>
+            <a:r>
+              <a:rPr lang="en-US" sz="1400" dirty="0">
+                <a:solidFill>
+                  <a:schemeClr val="bg1"/>
+                </a:solidFill>
+                <a:latin typeface="Courier New" panose="02070309020205020404" pitchFamily="49" charset="0"/>
+                <a:cs typeface="Courier New" panose="02070309020205020404" pitchFamily="49" charset="0"/>
+              </a:rPr>
+              <a:t>Else:</a:t>
+            </a:r>
+            <a:br>
+              <a:rPr lang="en-US" sz="1400" dirty="0">
+                <a:solidFill>
+                  <a:schemeClr val="bg1"/>
+                </a:solidFill>
+                <a:latin typeface="Courier New" panose="02070309020205020404" pitchFamily="49" charset="0"/>
+                <a:cs typeface="Courier New" panose="02070309020205020404" pitchFamily="49" charset="0"/>
+              </a:rPr>
+            </a:br>
+            <a:r>
+              <a:rPr lang="en-US" sz="1400" dirty="0">
+                <a:solidFill>
+                  <a:schemeClr val="bg1"/>
+                </a:solidFill>
+                <a:latin typeface="Courier New" panose="02070309020205020404" pitchFamily="49" charset="0"/>
+                <a:cs typeface="Courier New" panose="02070309020205020404" pitchFamily="49" charset="0"/>
+              </a:rPr>
+              <a:t>     Return False (Not Valid ID)</a:t>
+            </a:r>
+          </a:p>
+        </p:txBody>
+      </p:sp>
+      <p:sp>
+        <p:nvSpPr>
+          <p:cNvPr id="58" name="TextBox 57">
+            <a:extLst>
+              <a:ext uri="{FF2B5EF4-FFF2-40B4-BE49-F238E27FC236}">
+                <a16:creationId xmlns:a16="http://schemas.microsoft.com/office/drawing/2014/main" id="{C2CD08F2-8AA6-E555-C61F-7034739AB1B1}"/>
+              </a:ext>
+            </a:extLst>
+          </p:cNvPr>
+          <p:cNvSpPr txBox="1"/>
+          <p:nvPr/>
+        </p:nvSpPr>
+        <p:spPr>
+          <a:xfrm>
+            <a:off x="9293186" y="4695249"/>
+            <a:ext cx="1315616" cy="1477328"/>
+          </a:xfrm>
+          <a:prstGeom prst="rect">
+            <a:avLst/>
+          </a:prstGeom>
+          <a:noFill/>
+          <a:ln>
+            <a:solidFill>
+              <a:schemeClr val="tx1">
+                <a:lumMod val="95000"/>
+              </a:schemeClr>
+            </a:solidFill>
+          </a:ln>
+        </p:spPr>
+        <p:txBody>
+          <a:bodyPr wrap="square" rtlCol="0">
+            <a:spAutoFit/>
+          </a:bodyPr>
+          <a:lstStyle/>
+          <a:p>
+            <a:r>
+              <a:rPr lang="en-US" dirty="0"/>
+              <a:t>Try it out:</a:t>
+            </a:r>
+          </a:p>
+          <a:p>
+            <a:endParaRPr lang="en-US" dirty="0"/>
+          </a:p>
+          <a:p>
+            <a:r>
+              <a:rPr lang="en-US" dirty="0"/>
+              <a:t>  mrf8t</a:t>
+            </a:r>
+          </a:p>
+          <a:p>
+            <a:r>
+              <a:rPr lang="en-US" dirty="0"/>
+              <a:t>  as8f</a:t>
+            </a:r>
+          </a:p>
+          <a:p>
+            <a:r>
+              <a:rPr lang="en-US" dirty="0"/>
+              <a:t>  afde9d</a:t>
+            </a:r>
+          </a:p>
+        </p:txBody>
+      </p:sp>
     </p:spTree>
     <p:extLst>
       <p:ext uri="{BB962C8B-B14F-4D97-AF65-F5344CB8AC3E}">
@@ -34876,6 +35108,1630 @@
 </file>
 
 <file path=ppt/slides/slide30.xml><?xml version="1.0" encoding="utf-8"?>
+<p:sld xmlns:a="http://schemas.openxmlformats.org/drawingml/2006/main" xmlns:r="http://schemas.openxmlformats.org/officeDocument/2006/relationships" xmlns:p="http://schemas.openxmlformats.org/presentationml/2006/main">
+  <p:cSld>
+    <p:spTree>
+      <p:nvGrpSpPr>
+        <p:cNvPr id="1" name="">
+          <a:extLst>
+            <a:ext uri="{FF2B5EF4-FFF2-40B4-BE49-F238E27FC236}">
+              <a16:creationId xmlns:a16="http://schemas.microsoft.com/office/drawing/2014/main" id="{4E838F02-31E2-9FFB-336D-81434B8E9AEC}"/>
+            </a:ext>
+          </a:extLst>
+        </p:cNvPr>
+        <p:cNvGrpSpPr/>
+        <p:nvPr/>
+      </p:nvGrpSpPr>
+      <p:grpSpPr>
+        <a:xfrm>
+          <a:off x="0" y="0"/>
+          <a:ext cx="0" cy="0"/>
+          <a:chOff x="0" y="0"/>
+          <a:chExt cx="0" cy="0"/>
+        </a:xfrm>
+      </p:grpSpPr>
+      <p:sp>
+        <p:nvSpPr>
+          <p:cNvPr id="2" name="Title 1">
+            <a:extLst>
+              <a:ext uri="{FF2B5EF4-FFF2-40B4-BE49-F238E27FC236}">
+                <a16:creationId xmlns:a16="http://schemas.microsoft.com/office/drawing/2014/main" id="{79D0F1EB-6D79-C735-1CFD-7BFFAD1EA4D5}"/>
+              </a:ext>
+            </a:extLst>
+          </p:cNvPr>
+          <p:cNvSpPr>
+            <a:spLocks noGrp="1"/>
+          </p:cNvSpPr>
+          <p:nvPr>
+            <p:ph type="title"/>
+          </p:nvPr>
+        </p:nvSpPr>
+        <p:spPr>
+          <a:xfrm>
+            <a:off x="1143001" y="123995"/>
+            <a:ext cx="9905998" cy="448281"/>
+          </a:xfrm>
+        </p:spPr>
+        <p:txBody>
+          <a:bodyPr>
+            <a:normAutofit fontScale="90000"/>
+          </a:bodyPr>
+          <a:lstStyle/>
+          <a:p>
+            <a:pPr algn="ctr"/>
+            <a:r>
+              <a:rPr lang="en-US" dirty="0"/>
+              <a:t>A different Way of “Coding” This…</a:t>
+            </a:r>
+          </a:p>
+        </p:txBody>
+      </p:sp>
+      <p:grpSp>
+        <p:nvGrpSpPr>
+          <p:cNvPr id="55" name="Group 54">
+            <a:extLst>
+              <a:ext uri="{FF2B5EF4-FFF2-40B4-BE49-F238E27FC236}">
+                <a16:creationId xmlns:a16="http://schemas.microsoft.com/office/drawing/2014/main" id="{6F99D950-225F-C14C-731E-5195EA25A5C5}"/>
+              </a:ext>
+            </a:extLst>
+          </p:cNvPr>
+          <p:cNvGrpSpPr/>
+          <p:nvPr/>
+        </p:nvGrpSpPr>
+        <p:grpSpPr>
+          <a:xfrm>
+            <a:off x="1433806" y="1230482"/>
+            <a:ext cx="8941835" cy="3072883"/>
+            <a:chOff x="643814" y="2052736"/>
+            <a:chExt cx="8941835" cy="3072883"/>
+          </a:xfrm>
+        </p:grpSpPr>
+        <p:sp>
+          <p:nvSpPr>
+            <p:cNvPr id="3" name="Oval 2">
+              <a:extLst>
+                <a:ext uri="{FF2B5EF4-FFF2-40B4-BE49-F238E27FC236}">
+                  <a16:creationId xmlns:a16="http://schemas.microsoft.com/office/drawing/2014/main" id="{BFA637F5-A486-40C6-AB2C-B937C629CB07}"/>
+                </a:ext>
+              </a:extLst>
+            </p:cNvPr>
+            <p:cNvSpPr/>
+            <p:nvPr/>
+          </p:nvSpPr>
+          <p:spPr>
+            <a:xfrm>
+              <a:off x="2258010" y="2052736"/>
+              <a:ext cx="933062" cy="933062"/>
+            </a:xfrm>
+            <a:prstGeom prst="ellipse">
+              <a:avLst/>
+            </a:prstGeom>
+            <a:ln>
+              <a:solidFill>
+                <a:schemeClr val="bg1"/>
+              </a:solidFill>
+            </a:ln>
+          </p:spPr>
+          <p:style>
+            <a:lnRef idx="2">
+              <a:schemeClr val="accent1">
+                <a:shade val="15000"/>
+              </a:schemeClr>
+            </a:lnRef>
+            <a:fillRef idx="1">
+              <a:schemeClr val="accent1"/>
+            </a:fillRef>
+            <a:effectRef idx="0">
+              <a:schemeClr val="accent1"/>
+            </a:effectRef>
+            <a:fontRef idx="minor">
+              <a:schemeClr val="lt1"/>
+            </a:fontRef>
+          </p:style>
+          <p:txBody>
+            <a:bodyPr rtlCol="0" anchor="ctr"/>
+            <a:lstStyle/>
+            <a:p>
+              <a:pPr algn="ctr"/>
+              <a:r>
+                <a:rPr lang="en-US" dirty="0">
+                  <a:solidFill>
+                    <a:schemeClr val="bg1"/>
+                  </a:solidFill>
+                </a:rPr>
+                <a:t>1</a:t>
+              </a:r>
+            </a:p>
+          </p:txBody>
+        </p:sp>
+        <p:sp>
+          <p:nvSpPr>
+            <p:cNvPr id="4" name="Oval 3">
+              <a:extLst>
+                <a:ext uri="{FF2B5EF4-FFF2-40B4-BE49-F238E27FC236}">
+                  <a16:creationId xmlns:a16="http://schemas.microsoft.com/office/drawing/2014/main" id="{B0BD413B-4D05-002D-FCBE-B30E025C2469}"/>
+                </a:ext>
+              </a:extLst>
+            </p:cNvPr>
+            <p:cNvSpPr/>
+            <p:nvPr/>
+          </p:nvSpPr>
+          <p:spPr>
+            <a:xfrm>
+              <a:off x="4323185" y="2052736"/>
+              <a:ext cx="933062" cy="933062"/>
+            </a:xfrm>
+            <a:prstGeom prst="ellipse">
+              <a:avLst/>
+            </a:prstGeom>
+            <a:ln>
+              <a:solidFill>
+                <a:schemeClr val="bg1"/>
+              </a:solidFill>
+            </a:ln>
+          </p:spPr>
+          <p:style>
+            <a:lnRef idx="2">
+              <a:schemeClr val="accent1">
+                <a:shade val="15000"/>
+              </a:schemeClr>
+            </a:lnRef>
+            <a:fillRef idx="1">
+              <a:schemeClr val="accent1"/>
+            </a:fillRef>
+            <a:effectRef idx="0">
+              <a:schemeClr val="accent1"/>
+            </a:effectRef>
+            <a:fontRef idx="minor">
+              <a:schemeClr val="lt1"/>
+            </a:fontRef>
+          </p:style>
+          <p:txBody>
+            <a:bodyPr rtlCol="0" anchor="ctr"/>
+            <a:lstStyle/>
+            <a:p>
+              <a:pPr algn="ctr"/>
+              <a:r>
+                <a:rPr lang="en-US" dirty="0">
+                  <a:solidFill>
+                    <a:schemeClr val="bg1"/>
+                  </a:solidFill>
+                </a:rPr>
+                <a:t>2</a:t>
+              </a:r>
+            </a:p>
+          </p:txBody>
+        </p:sp>
+        <p:sp>
+          <p:nvSpPr>
+            <p:cNvPr id="6" name="Oval 5">
+              <a:extLst>
+                <a:ext uri="{FF2B5EF4-FFF2-40B4-BE49-F238E27FC236}">
+                  <a16:creationId xmlns:a16="http://schemas.microsoft.com/office/drawing/2014/main" id="{FBC35632-36DB-6B1C-9CFD-B3C1EDBE454E}"/>
+                </a:ext>
+              </a:extLst>
+            </p:cNvPr>
+            <p:cNvSpPr/>
+            <p:nvPr/>
+          </p:nvSpPr>
+          <p:spPr>
+            <a:xfrm>
+              <a:off x="6388360" y="2052736"/>
+              <a:ext cx="933062" cy="933062"/>
+            </a:xfrm>
+            <a:prstGeom prst="ellipse">
+              <a:avLst/>
+            </a:prstGeom>
+            <a:ln>
+              <a:solidFill>
+                <a:schemeClr val="bg1"/>
+              </a:solidFill>
+            </a:ln>
+          </p:spPr>
+          <p:style>
+            <a:lnRef idx="2">
+              <a:schemeClr val="accent1">
+                <a:shade val="15000"/>
+              </a:schemeClr>
+            </a:lnRef>
+            <a:fillRef idx="1">
+              <a:schemeClr val="accent1"/>
+            </a:fillRef>
+            <a:effectRef idx="0">
+              <a:schemeClr val="accent1"/>
+            </a:effectRef>
+            <a:fontRef idx="minor">
+              <a:schemeClr val="lt1"/>
+            </a:fontRef>
+          </p:style>
+          <p:txBody>
+            <a:bodyPr rtlCol="0" anchor="ctr"/>
+            <a:lstStyle/>
+            <a:p>
+              <a:pPr algn="ctr"/>
+              <a:r>
+                <a:rPr lang="en-US" dirty="0">
+                  <a:solidFill>
+                    <a:schemeClr val="bg1"/>
+                  </a:solidFill>
+                </a:rPr>
+                <a:t>3</a:t>
+              </a:r>
+            </a:p>
+          </p:txBody>
+        </p:sp>
+        <p:sp>
+          <p:nvSpPr>
+            <p:cNvPr id="9" name="Oval 8">
+              <a:extLst>
+                <a:ext uri="{FF2B5EF4-FFF2-40B4-BE49-F238E27FC236}">
+                  <a16:creationId xmlns:a16="http://schemas.microsoft.com/office/drawing/2014/main" id="{A9AED82E-84A4-FFFD-7FC4-7AC95B4801FF}"/>
+                </a:ext>
+              </a:extLst>
+            </p:cNvPr>
+            <p:cNvSpPr/>
+            <p:nvPr/>
+          </p:nvSpPr>
+          <p:spPr>
+            <a:xfrm>
+              <a:off x="8453535" y="2052736"/>
+              <a:ext cx="933062" cy="933062"/>
+            </a:xfrm>
+            <a:prstGeom prst="ellipse">
+              <a:avLst/>
+            </a:prstGeom>
+            <a:ln>
+              <a:solidFill>
+                <a:schemeClr val="bg1"/>
+              </a:solidFill>
+            </a:ln>
+          </p:spPr>
+          <p:style>
+            <a:lnRef idx="2">
+              <a:schemeClr val="accent1">
+                <a:shade val="15000"/>
+              </a:schemeClr>
+            </a:lnRef>
+            <a:fillRef idx="1">
+              <a:schemeClr val="accent1"/>
+            </a:fillRef>
+            <a:effectRef idx="0">
+              <a:schemeClr val="accent1"/>
+            </a:effectRef>
+            <a:fontRef idx="minor">
+              <a:schemeClr val="lt1"/>
+            </a:fontRef>
+          </p:style>
+          <p:txBody>
+            <a:bodyPr rtlCol="0" anchor="ctr"/>
+            <a:lstStyle/>
+            <a:p>
+              <a:pPr algn="ctr"/>
+              <a:r>
+                <a:rPr lang="en-US" dirty="0">
+                  <a:solidFill>
+                    <a:schemeClr val="bg1"/>
+                  </a:solidFill>
+                </a:rPr>
+                <a:t>4</a:t>
+              </a:r>
+            </a:p>
+          </p:txBody>
+        </p:sp>
+        <p:sp>
+          <p:nvSpPr>
+            <p:cNvPr id="10" name="Oval 9">
+              <a:extLst>
+                <a:ext uri="{FF2B5EF4-FFF2-40B4-BE49-F238E27FC236}">
+                  <a16:creationId xmlns:a16="http://schemas.microsoft.com/office/drawing/2014/main" id="{59B57856-B819-0CDF-160D-86DEAE3503B4}"/>
+                </a:ext>
+              </a:extLst>
+            </p:cNvPr>
+            <p:cNvSpPr/>
+            <p:nvPr/>
+          </p:nvSpPr>
+          <p:spPr>
+            <a:xfrm>
+              <a:off x="2258010" y="4192557"/>
+              <a:ext cx="933062" cy="933062"/>
+            </a:xfrm>
+            <a:prstGeom prst="ellipse">
+              <a:avLst/>
+            </a:prstGeom>
+            <a:ln>
+              <a:solidFill>
+                <a:schemeClr val="bg1"/>
+              </a:solidFill>
+            </a:ln>
+          </p:spPr>
+          <p:style>
+            <a:lnRef idx="2">
+              <a:schemeClr val="accent1">
+                <a:shade val="15000"/>
+              </a:schemeClr>
+            </a:lnRef>
+            <a:fillRef idx="1">
+              <a:schemeClr val="accent1"/>
+            </a:fillRef>
+            <a:effectRef idx="0">
+              <a:schemeClr val="accent1"/>
+            </a:effectRef>
+            <a:fontRef idx="minor">
+              <a:schemeClr val="lt1"/>
+            </a:fontRef>
+          </p:style>
+          <p:txBody>
+            <a:bodyPr rtlCol="0" anchor="ctr"/>
+            <a:lstStyle/>
+            <a:p>
+              <a:pPr algn="ctr"/>
+              <a:r>
+                <a:rPr lang="en-US" dirty="0">
+                  <a:solidFill>
+                    <a:schemeClr val="bg1"/>
+                  </a:solidFill>
+                </a:rPr>
+                <a:t>8</a:t>
+              </a:r>
+            </a:p>
+          </p:txBody>
+        </p:sp>
+        <p:sp>
+          <p:nvSpPr>
+            <p:cNvPr id="11" name="Oval 10">
+              <a:extLst>
+                <a:ext uri="{FF2B5EF4-FFF2-40B4-BE49-F238E27FC236}">
+                  <a16:creationId xmlns:a16="http://schemas.microsoft.com/office/drawing/2014/main" id="{9057F5D2-B065-73DF-C90D-0450528B9249}"/>
+                </a:ext>
+              </a:extLst>
+            </p:cNvPr>
+            <p:cNvSpPr/>
+            <p:nvPr/>
+          </p:nvSpPr>
+          <p:spPr>
+            <a:xfrm>
+              <a:off x="4323185" y="4192557"/>
+              <a:ext cx="933062" cy="933062"/>
+            </a:xfrm>
+            <a:prstGeom prst="ellipse">
+              <a:avLst/>
+            </a:prstGeom>
+            <a:ln>
+              <a:solidFill>
+                <a:schemeClr val="bg1"/>
+              </a:solidFill>
+            </a:ln>
+          </p:spPr>
+          <p:style>
+            <a:lnRef idx="2">
+              <a:schemeClr val="accent1">
+                <a:shade val="15000"/>
+              </a:schemeClr>
+            </a:lnRef>
+            <a:fillRef idx="1">
+              <a:schemeClr val="accent1"/>
+            </a:fillRef>
+            <a:effectRef idx="0">
+              <a:schemeClr val="accent1"/>
+            </a:effectRef>
+            <a:fontRef idx="minor">
+              <a:schemeClr val="lt1"/>
+            </a:fontRef>
+          </p:style>
+          <p:txBody>
+            <a:bodyPr rtlCol="0" anchor="ctr"/>
+            <a:lstStyle/>
+            <a:p>
+              <a:pPr algn="ctr"/>
+              <a:r>
+                <a:rPr lang="en-US" dirty="0">
+                  <a:solidFill>
+                    <a:schemeClr val="bg1"/>
+                  </a:solidFill>
+                </a:rPr>
+                <a:t>7</a:t>
+              </a:r>
+            </a:p>
+          </p:txBody>
+        </p:sp>
+        <p:sp>
+          <p:nvSpPr>
+            <p:cNvPr id="12" name="Oval 11">
+              <a:extLst>
+                <a:ext uri="{FF2B5EF4-FFF2-40B4-BE49-F238E27FC236}">
+                  <a16:creationId xmlns:a16="http://schemas.microsoft.com/office/drawing/2014/main" id="{09472DBC-276E-462B-5E05-C5BD221B4344}"/>
+                </a:ext>
+              </a:extLst>
+            </p:cNvPr>
+            <p:cNvSpPr/>
+            <p:nvPr/>
+          </p:nvSpPr>
+          <p:spPr>
+            <a:xfrm>
+              <a:off x="6388360" y="4192557"/>
+              <a:ext cx="933062" cy="933062"/>
+            </a:xfrm>
+            <a:prstGeom prst="ellipse">
+              <a:avLst/>
+            </a:prstGeom>
+            <a:ln>
+              <a:solidFill>
+                <a:schemeClr val="bg1"/>
+              </a:solidFill>
+            </a:ln>
+          </p:spPr>
+          <p:style>
+            <a:lnRef idx="2">
+              <a:schemeClr val="accent1">
+                <a:shade val="15000"/>
+              </a:schemeClr>
+            </a:lnRef>
+            <a:fillRef idx="1">
+              <a:schemeClr val="accent1"/>
+            </a:fillRef>
+            <a:effectRef idx="0">
+              <a:schemeClr val="accent1"/>
+            </a:effectRef>
+            <a:fontRef idx="minor">
+              <a:schemeClr val="lt1"/>
+            </a:fontRef>
+          </p:style>
+          <p:txBody>
+            <a:bodyPr rtlCol="0" anchor="ctr"/>
+            <a:lstStyle/>
+            <a:p>
+              <a:pPr algn="ctr"/>
+              <a:r>
+                <a:rPr lang="en-US" dirty="0">
+                  <a:solidFill>
+                    <a:schemeClr val="bg1"/>
+                  </a:solidFill>
+                </a:rPr>
+                <a:t>6</a:t>
+              </a:r>
+            </a:p>
+          </p:txBody>
+        </p:sp>
+        <p:sp>
+          <p:nvSpPr>
+            <p:cNvPr id="13" name="Oval 12">
+              <a:extLst>
+                <a:ext uri="{FF2B5EF4-FFF2-40B4-BE49-F238E27FC236}">
+                  <a16:creationId xmlns:a16="http://schemas.microsoft.com/office/drawing/2014/main" id="{0ABD015E-301D-5243-2AB3-A936C0361B2C}"/>
+                </a:ext>
+              </a:extLst>
+            </p:cNvPr>
+            <p:cNvSpPr/>
+            <p:nvPr/>
+          </p:nvSpPr>
+          <p:spPr>
+            <a:xfrm>
+              <a:off x="8453535" y="4192557"/>
+              <a:ext cx="933062" cy="933062"/>
+            </a:xfrm>
+            <a:prstGeom prst="ellipse">
+              <a:avLst/>
+            </a:prstGeom>
+            <a:ln>
+              <a:solidFill>
+                <a:schemeClr val="bg1"/>
+              </a:solidFill>
+            </a:ln>
+          </p:spPr>
+          <p:style>
+            <a:lnRef idx="2">
+              <a:schemeClr val="accent1">
+                <a:shade val="15000"/>
+              </a:schemeClr>
+            </a:lnRef>
+            <a:fillRef idx="1">
+              <a:schemeClr val="accent1"/>
+            </a:fillRef>
+            <a:effectRef idx="0">
+              <a:schemeClr val="accent1"/>
+            </a:effectRef>
+            <a:fontRef idx="minor">
+              <a:schemeClr val="lt1"/>
+            </a:fontRef>
+          </p:style>
+          <p:txBody>
+            <a:bodyPr rtlCol="0" anchor="ctr"/>
+            <a:lstStyle/>
+            <a:p>
+              <a:pPr algn="ctr"/>
+              <a:r>
+                <a:rPr lang="en-US" dirty="0">
+                  <a:solidFill>
+                    <a:schemeClr val="bg1"/>
+                  </a:solidFill>
+                </a:rPr>
+                <a:t>5</a:t>
+              </a:r>
+            </a:p>
+          </p:txBody>
+        </p:sp>
+        <p:sp>
+          <p:nvSpPr>
+            <p:cNvPr id="14" name="Oval 13">
+              <a:extLst>
+                <a:ext uri="{FF2B5EF4-FFF2-40B4-BE49-F238E27FC236}">
+                  <a16:creationId xmlns:a16="http://schemas.microsoft.com/office/drawing/2014/main" id="{2CE6A180-7F30-75D5-6654-1F4A5305B9E7}"/>
+                </a:ext>
+              </a:extLst>
+            </p:cNvPr>
+            <p:cNvSpPr/>
+            <p:nvPr/>
+          </p:nvSpPr>
+          <p:spPr>
+            <a:xfrm>
+              <a:off x="6466114" y="2130491"/>
+              <a:ext cx="780662" cy="780662"/>
+            </a:xfrm>
+            <a:prstGeom prst="ellipse">
+              <a:avLst/>
+            </a:prstGeom>
+            <a:ln>
+              <a:solidFill>
+                <a:schemeClr val="bg1"/>
+              </a:solidFill>
+            </a:ln>
+          </p:spPr>
+          <p:style>
+            <a:lnRef idx="2">
+              <a:schemeClr val="accent1">
+                <a:shade val="15000"/>
+              </a:schemeClr>
+            </a:lnRef>
+            <a:fillRef idx="1">
+              <a:schemeClr val="accent1"/>
+            </a:fillRef>
+            <a:effectRef idx="0">
+              <a:schemeClr val="accent1"/>
+            </a:effectRef>
+            <a:fontRef idx="minor">
+              <a:schemeClr val="lt1"/>
+            </a:fontRef>
+          </p:style>
+          <p:txBody>
+            <a:bodyPr rtlCol="0" anchor="ctr"/>
+            <a:lstStyle/>
+            <a:p>
+              <a:pPr algn="ctr"/>
+              <a:r>
+                <a:rPr lang="en-US" dirty="0">
+                  <a:solidFill>
+                    <a:schemeClr val="bg1"/>
+                  </a:solidFill>
+                </a:rPr>
+                <a:t>3</a:t>
+              </a:r>
+            </a:p>
+          </p:txBody>
+        </p:sp>
+        <p:sp>
+          <p:nvSpPr>
+            <p:cNvPr id="15" name="Oval 14">
+              <a:extLst>
+                <a:ext uri="{FF2B5EF4-FFF2-40B4-BE49-F238E27FC236}">
+                  <a16:creationId xmlns:a16="http://schemas.microsoft.com/office/drawing/2014/main" id="{3344F3F3-8BBC-3119-56A9-15F998495A97}"/>
+                </a:ext>
+              </a:extLst>
+            </p:cNvPr>
+            <p:cNvSpPr/>
+            <p:nvPr/>
+          </p:nvSpPr>
+          <p:spPr>
+            <a:xfrm>
+              <a:off x="6466114" y="4268757"/>
+              <a:ext cx="780662" cy="780662"/>
+            </a:xfrm>
+            <a:prstGeom prst="ellipse">
+              <a:avLst/>
+            </a:prstGeom>
+            <a:ln>
+              <a:solidFill>
+                <a:schemeClr val="bg1"/>
+              </a:solidFill>
+            </a:ln>
+          </p:spPr>
+          <p:style>
+            <a:lnRef idx="2">
+              <a:schemeClr val="accent1">
+                <a:shade val="15000"/>
+              </a:schemeClr>
+            </a:lnRef>
+            <a:fillRef idx="1">
+              <a:schemeClr val="accent1"/>
+            </a:fillRef>
+            <a:effectRef idx="0">
+              <a:schemeClr val="accent1"/>
+            </a:effectRef>
+            <a:fontRef idx="minor">
+              <a:schemeClr val="lt1"/>
+            </a:fontRef>
+          </p:style>
+          <p:txBody>
+            <a:bodyPr rtlCol="0" anchor="ctr"/>
+            <a:lstStyle/>
+            <a:p>
+              <a:pPr algn="ctr"/>
+              <a:r>
+                <a:rPr lang="en-US" dirty="0">
+                  <a:solidFill>
+                    <a:schemeClr val="bg1"/>
+                  </a:solidFill>
+                </a:rPr>
+                <a:t>6</a:t>
+              </a:r>
+            </a:p>
+          </p:txBody>
+        </p:sp>
+        <p:sp>
+          <p:nvSpPr>
+            <p:cNvPr id="16" name="Oval 15">
+              <a:extLst>
+                <a:ext uri="{FF2B5EF4-FFF2-40B4-BE49-F238E27FC236}">
+                  <a16:creationId xmlns:a16="http://schemas.microsoft.com/office/drawing/2014/main" id="{444E7620-1D81-31CB-7E30-1D080C2BD070}"/>
+                </a:ext>
+              </a:extLst>
+            </p:cNvPr>
+            <p:cNvSpPr/>
+            <p:nvPr/>
+          </p:nvSpPr>
+          <p:spPr>
+            <a:xfrm>
+              <a:off x="4400940" y="4268757"/>
+              <a:ext cx="780662" cy="780662"/>
+            </a:xfrm>
+            <a:prstGeom prst="ellipse">
+              <a:avLst/>
+            </a:prstGeom>
+            <a:ln>
+              <a:solidFill>
+                <a:schemeClr val="bg1"/>
+              </a:solidFill>
+            </a:ln>
+          </p:spPr>
+          <p:style>
+            <a:lnRef idx="2">
+              <a:schemeClr val="accent1">
+                <a:shade val="15000"/>
+              </a:schemeClr>
+            </a:lnRef>
+            <a:fillRef idx="1">
+              <a:schemeClr val="accent1"/>
+            </a:fillRef>
+            <a:effectRef idx="0">
+              <a:schemeClr val="accent1"/>
+            </a:effectRef>
+            <a:fontRef idx="minor">
+              <a:schemeClr val="lt1"/>
+            </a:fontRef>
+          </p:style>
+          <p:txBody>
+            <a:bodyPr rtlCol="0" anchor="ctr"/>
+            <a:lstStyle/>
+            <a:p>
+              <a:pPr algn="ctr"/>
+              <a:r>
+                <a:rPr lang="en-US" dirty="0">
+                  <a:solidFill>
+                    <a:schemeClr val="bg1"/>
+                  </a:solidFill>
+                </a:rPr>
+                <a:t>5</a:t>
+              </a:r>
+            </a:p>
+          </p:txBody>
+        </p:sp>
+        <p:sp>
+          <p:nvSpPr>
+            <p:cNvPr id="17" name="Oval 16">
+              <a:extLst>
+                <a:ext uri="{FF2B5EF4-FFF2-40B4-BE49-F238E27FC236}">
+                  <a16:creationId xmlns:a16="http://schemas.microsoft.com/office/drawing/2014/main" id="{7E26C91D-22EB-2AF2-3786-9FCAE21B8D81}"/>
+                </a:ext>
+              </a:extLst>
+            </p:cNvPr>
+            <p:cNvSpPr/>
+            <p:nvPr/>
+          </p:nvSpPr>
+          <p:spPr>
+            <a:xfrm>
+              <a:off x="2334210" y="4268757"/>
+              <a:ext cx="780662" cy="780662"/>
+            </a:xfrm>
+            <a:prstGeom prst="ellipse">
+              <a:avLst/>
+            </a:prstGeom>
+            <a:ln>
+              <a:solidFill>
+                <a:schemeClr val="bg1"/>
+              </a:solidFill>
+            </a:ln>
+          </p:spPr>
+          <p:style>
+            <a:lnRef idx="2">
+              <a:schemeClr val="accent1">
+                <a:shade val="15000"/>
+              </a:schemeClr>
+            </a:lnRef>
+            <a:fillRef idx="1">
+              <a:schemeClr val="accent1"/>
+            </a:fillRef>
+            <a:effectRef idx="0">
+              <a:schemeClr val="accent1"/>
+            </a:effectRef>
+            <a:fontRef idx="minor">
+              <a:schemeClr val="lt1"/>
+            </a:fontRef>
+          </p:style>
+          <p:txBody>
+            <a:bodyPr rtlCol="0" anchor="ctr"/>
+            <a:lstStyle/>
+            <a:p>
+              <a:pPr algn="ctr"/>
+              <a:r>
+                <a:rPr lang="en-US" dirty="0">
+                  <a:solidFill>
+                    <a:schemeClr val="bg1"/>
+                  </a:solidFill>
+                </a:rPr>
+                <a:t>8</a:t>
+              </a:r>
+            </a:p>
+          </p:txBody>
+        </p:sp>
+        <p:cxnSp>
+          <p:nvCxnSpPr>
+            <p:cNvPr id="19" name="Straight Arrow Connector 18">
+              <a:extLst>
+                <a:ext uri="{FF2B5EF4-FFF2-40B4-BE49-F238E27FC236}">
+                  <a16:creationId xmlns:a16="http://schemas.microsoft.com/office/drawing/2014/main" id="{6493A0B8-5789-57C6-31AF-31C35F554AD2}"/>
+                </a:ext>
+              </a:extLst>
+            </p:cNvPr>
+            <p:cNvCxnSpPr>
+              <a:cxnSpLocks/>
+              <a:endCxn id="3" idx="2"/>
+            </p:cNvCxnSpPr>
+            <p:nvPr/>
+          </p:nvCxnSpPr>
+          <p:spPr>
+            <a:xfrm>
+              <a:off x="1334278" y="2519267"/>
+              <a:ext cx="923732" cy="0"/>
+            </a:xfrm>
+            <a:prstGeom prst="straightConnector1">
+              <a:avLst/>
+            </a:prstGeom>
+            <a:ln w="31750">
+              <a:tailEnd type="triangle"/>
+            </a:ln>
+          </p:spPr>
+          <p:style>
+            <a:lnRef idx="1">
+              <a:schemeClr val="accent1"/>
+            </a:lnRef>
+            <a:fillRef idx="0">
+              <a:schemeClr val="accent1"/>
+            </a:fillRef>
+            <a:effectRef idx="0">
+              <a:schemeClr val="accent1"/>
+            </a:effectRef>
+            <a:fontRef idx="minor">
+              <a:schemeClr val="tx1"/>
+            </a:fontRef>
+          </p:style>
+        </p:cxnSp>
+        <p:cxnSp>
+          <p:nvCxnSpPr>
+            <p:cNvPr id="21" name="Straight Arrow Connector 20">
+              <a:extLst>
+                <a:ext uri="{FF2B5EF4-FFF2-40B4-BE49-F238E27FC236}">
+                  <a16:creationId xmlns:a16="http://schemas.microsoft.com/office/drawing/2014/main" id="{97DC03C8-00EF-1869-9221-943BA2F42DE4}"/>
+                </a:ext>
+              </a:extLst>
+            </p:cNvPr>
+            <p:cNvCxnSpPr>
+              <a:cxnSpLocks/>
+              <a:stCxn id="3" idx="6"/>
+              <a:endCxn id="4" idx="2"/>
+            </p:cNvCxnSpPr>
+            <p:nvPr/>
+          </p:nvCxnSpPr>
+          <p:spPr>
+            <a:xfrm>
+              <a:off x="3191072" y="2519267"/>
+              <a:ext cx="1132113" cy="0"/>
+            </a:xfrm>
+            <a:prstGeom prst="straightConnector1">
+              <a:avLst/>
+            </a:prstGeom>
+            <a:ln w="31750">
+              <a:tailEnd type="triangle"/>
+            </a:ln>
+          </p:spPr>
+          <p:style>
+            <a:lnRef idx="1">
+              <a:schemeClr val="accent1"/>
+            </a:lnRef>
+            <a:fillRef idx="0">
+              <a:schemeClr val="accent1"/>
+            </a:fillRef>
+            <a:effectRef idx="0">
+              <a:schemeClr val="accent1"/>
+            </a:effectRef>
+            <a:fontRef idx="minor">
+              <a:schemeClr val="tx1"/>
+            </a:fontRef>
+          </p:style>
+        </p:cxnSp>
+        <p:cxnSp>
+          <p:nvCxnSpPr>
+            <p:cNvPr id="24" name="Straight Arrow Connector 23">
+              <a:extLst>
+                <a:ext uri="{FF2B5EF4-FFF2-40B4-BE49-F238E27FC236}">
+                  <a16:creationId xmlns:a16="http://schemas.microsoft.com/office/drawing/2014/main" id="{39E37C28-B49B-B0A6-E2D4-894F0E494160}"/>
+                </a:ext>
+              </a:extLst>
+            </p:cNvPr>
+            <p:cNvCxnSpPr>
+              <a:cxnSpLocks/>
+              <a:stCxn id="4" idx="6"/>
+              <a:endCxn id="6" idx="2"/>
+            </p:cNvCxnSpPr>
+            <p:nvPr/>
+          </p:nvCxnSpPr>
+          <p:spPr>
+            <a:xfrm>
+              <a:off x="5256247" y="2519267"/>
+              <a:ext cx="1132113" cy="0"/>
+            </a:xfrm>
+            <a:prstGeom prst="straightConnector1">
+              <a:avLst/>
+            </a:prstGeom>
+            <a:ln w="31750">
+              <a:tailEnd type="triangle"/>
+            </a:ln>
+          </p:spPr>
+          <p:style>
+            <a:lnRef idx="1">
+              <a:schemeClr val="accent1"/>
+            </a:lnRef>
+            <a:fillRef idx="0">
+              <a:schemeClr val="accent1"/>
+            </a:fillRef>
+            <a:effectRef idx="0">
+              <a:schemeClr val="accent1"/>
+            </a:effectRef>
+            <a:fontRef idx="minor">
+              <a:schemeClr val="tx1"/>
+            </a:fontRef>
+          </p:style>
+        </p:cxnSp>
+        <p:cxnSp>
+          <p:nvCxnSpPr>
+            <p:cNvPr id="27" name="Straight Arrow Connector 26">
+              <a:extLst>
+                <a:ext uri="{FF2B5EF4-FFF2-40B4-BE49-F238E27FC236}">
+                  <a16:creationId xmlns:a16="http://schemas.microsoft.com/office/drawing/2014/main" id="{CC5E24C0-D309-D6ED-C739-B9F710677157}"/>
+                </a:ext>
+              </a:extLst>
+            </p:cNvPr>
+            <p:cNvCxnSpPr>
+              <a:cxnSpLocks/>
+              <a:stCxn id="6" idx="6"/>
+              <a:endCxn id="9" idx="2"/>
+            </p:cNvCxnSpPr>
+            <p:nvPr/>
+          </p:nvCxnSpPr>
+          <p:spPr>
+            <a:xfrm>
+              <a:off x="7321422" y="2519267"/>
+              <a:ext cx="1132113" cy="0"/>
+            </a:xfrm>
+            <a:prstGeom prst="straightConnector1">
+              <a:avLst/>
+            </a:prstGeom>
+            <a:ln w="31750">
+              <a:tailEnd type="triangle"/>
+            </a:ln>
+          </p:spPr>
+          <p:style>
+            <a:lnRef idx="1">
+              <a:schemeClr val="accent1"/>
+            </a:lnRef>
+            <a:fillRef idx="0">
+              <a:schemeClr val="accent1"/>
+            </a:fillRef>
+            <a:effectRef idx="0">
+              <a:schemeClr val="accent1"/>
+            </a:effectRef>
+            <a:fontRef idx="minor">
+              <a:schemeClr val="tx1"/>
+            </a:fontRef>
+          </p:style>
+        </p:cxnSp>
+        <p:cxnSp>
+          <p:nvCxnSpPr>
+            <p:cNvPr id="30" name="Straight Arrow Connector 29">
+              <a:extLst>
+                <a:ext uri="{FF2B5EF4-FFF2-40B4-BE49-F238E27FC236}">
+                  <a16:creationId xmlns:a16="http://schemas.microsoft.com/office/drawing/2014/main" id="{06A86300-8698-325B-392D-E5883F1DF541}"/>
+                </a:ext>
+              </a:extLst>
+            </p:cNvPr>
+            <p:cNvCxnSpPr>
+              <a:cxnSpLocks/>
+              <a:stCxn id="6" idx="5"/>
+              <a:endCxn id="13" idx="1"/>
+            </p:cNvCxnSpPr>
+            <p:nvPr/>
+          </p:nvCxnSpPr>
+          <p:spPr>
+            <a:xfrm>
+              <a:off x="7184778" y="2849154"/>
+              <a:ext cx="1405401" cy="1480047"/>
+            </a:xfrm>
+            <a:prstGeom prst="straightConnector1">
+              <a:avLst/>
+            </a:prstGeom>
+            <a:ln w="31750">
+              <a:tailEnd type="triangle"/>
+            </a:ln>
+          </p:spPr>
+          <p:style>
+            <a:lnRef idx="1">
+              <a:schemeClr val="accent1"/>
+            </a:lnRef>
+            <a:fillRef idx="0">
+              <a:schemeClr val="accent1"/>
+            </a:fillRef>
+            <a:effectRef idx="0">
+              <a:schemeClr val="accent1"/>
+            </a:effectRef>
+            <a:fontRef idx="minor">
+              <a:schemeClr val="tx1"/>
+            </a:fontRef>
+          </p:style>
+        </p:cxnSp>
+        <p:cxnSp>
+          <p:nvCxnSpPr>
+            <p:cNvPr id="34" name="Straight Arrow Connector 33">
+              <a:extLst>
+                <a:ext uri="{FF2B5EF4-FFF2-40B4-BE49-F238E27FC236}">
+                  <a16:creationId xmlns:a16="http://schemas.microsoft.com/office/drawing/2014/main" id="{12516DEF-A58C-F2F4-F635-7989A1F1FCEC}"/>
+                </a:ext>
+              </a:extLst>
+            </p:cNvPr>
+            <p:cNvCxnSpPr>
+              <a:cxnSpLocks/>
+              <a:stCxn id="9" idx="4"/>
+              <a:endCxn id="13" idx="0"/>
+            </p:cNvCxnSpPr>
+            <p:nvPr/>
+          </p:nvCxnSpPr>
+          <p:spPr>
+            <a:xfrm>
+              <a:off x="8920066" y="2985798"/>
+              <a:ext cx="0" cy="1206759"/>
+            </a:xfrm>
+            <a:prstGeom prst="straightConnector1">
+              <a:avLst/>
+            </a:prstGeom>
+            <a:ln w="31750">
+              <a:tailEnd type="triangle"/>
+            </a:ln>
+          </p:spPr>
+          <p:style>
+            <a:lnRef idx="1">
+              <a:schemeClr val="accent1"/>
+            </a:lnRef>
+            <a:fillRef idx="0">
+              <a:schemeClr val="accent1"/>
+            </a:fillRef>
+            <a:effectRef idx="0">
+              <a:schemeClr val="accent1"/>
+            </a:effectRef>
+            <a:fontRef idx="minor">
+              <a:schemeClr val="tx1"/>
+            </a:fontRef>
+          </p:style>
+        </p:cxnSp>
+        <p:cxnSp>
+          <p:nvCxnSpPr>
+            <p:cNvPr id="37" name="Straight Arrow Connector 36">
+              <a:extLst>
+                <a:ext uri="{FF2B5EF4-FFF2-40B4-BE49-F238E27FC236}">
+                  <a16:creationId xmlns:a16="http://schemas.microsoft.com/office/drawing/2014/main" id="{0A4EDB28-65A4-3A81-544B-FE2221C271CB}"/>
+                </a:ext>
+              </a:extLst>
+            </p:cNvPr>
+            <p:cNvCxnSpPr>
+              <a:cxnSpLocks/>
+              <a:stCxn id="13" idx="2"/>
+              <a:endCxn id="12" idx="6"/>
+            </p:cNvCxnSpPr>
+            <p:nvPr/>
+          </p:nvCxnSpPr>
+          <p:spPr>
+            <a:xfrm flipH="1">
+              <a:off x="7321422" y="4659088"/>
+              <a:ext cx="1132113" cy="0"/>
+            </a:xfrm>
+            <a:prstGeom prst="straightConnector1">
+              <a:avLst/>
+            </a:prstGeom>
+            <a:ln w="31750">
+              <a:tailEnd type="triangle"/>
+            </a:ln>
+          </p:spPr>
+          <p:style>
+            <a:lnRef idx="1">
+              <a:schemeClr val="accent1"/>
+            </a:lnRef>
+            <a:fillRef idx="0">
+              <a:schemeClr val="accent1"/>
+            </a:fillRef>
+            <a:effectRef idx="0">
+              <a:schemeClr val="accent1"/>
+            </a:effectRef>
+            <a:fontRef idx="minor">
+              <a:schemeClr val="tx1"/>
+            </a:fontRef>
+          </p:style>
+        </p:cxnSp>
+        <p:cxnSp>
+          <p:nvCxnSpPr>
+            <p:cNvPr id="40" name="Straight Arrow Connector 39">
+              <a:extLst>
+                <a:ext uri="{FF2B5EF4-FFF2-40B4-BE49-F238E27FC236}">
+                  <a16:creationId xmlns:a16="http://schemas.microsoft.com/office/drawing/2014/main" id="{24442ACD-AEC4-7316-B010-10B52AA1442D}"/>
+                </a:ext>
+              </a:extLst>
+            </p:cNvPr>
+            <p:cNvCxnSpPr>
+              <a:cxnSpLocks/>
+              <a:stCxn id="12" idx="2"/>
+              <a:endCxn id="11" idx="6"/>
+            </p:cNvCxnSpPr>
+            <p:nvPr/>
+          </p:nvCxnSpPr>
+          <p:spPr>
+            <a:xfrm flipH="1">
+              <a:off x="5256247" y="4659088"/>
+              <a:ext cx="1132113" cy="0"/>
+            </a:xfrm>
+            <a:prstGeom prst="straightConnector1">
+              <a:avLst/>
+            </a:prstGeom>
+            <a:ln w="31750">
+              <a:tailEnd type="triangle"/>
+            </a:ln>
+          </p:spPr>
+          <p:style>
+            <a:lnRef idx="1">
+              <a:schemeClr val="accent1"/>
+            </a:lnRef>
+            <a:fillRef idx="0">
+              <a:schemeClr val="accent1"/>
+            </a:fillRef>
+            <a:effectRef idx="0">
+              <a:schemeClr val="accent1"/>
+            </a:effectRef>
+            <a:fontRef idx="minor">
+              <a:schemeClr val="tx1"/>
+            </a:fontRef>
+          </p:style>
+        </p:cxnSp>
+        <p:cxnSp>
+          <p:nvCxnSpPr>
+            <p:cNvPr id="43" name="Straight Arrow Connector 42">
+              <a:extLst>
+                <a:ext uri="{FF2B5EF4-FFF2-40B4-BE49-F238E27FC236}">
+                  <a16:creationId xmlns:a16="http://schemas.microsoft.com/office/drawing/2014/main" id="{17D01004-90F4-BF13-FAE1-158C48392A4E}"/>
+                </a:ext>
+              </a:extLst>
+            </p:cNvPr>
+            <p:cNvCxnSpPr>
+              <a:cxnSpLocks/>
+              <a:stCxn id="11" idx="2"/>
+              <a:endCxn id="10" idx="6"/>
+            </p:cNvCxnSpPr>
+            <p:nvPr/>
+          </p:nvCxnSpPr>
+          <p:spPr>
+            <a:xfrm flipH="1">
+              <a:off x="3191072" y="4659088"/>
+              <a:ext cx="1132113" cy="0"/>
+            </a:xfrm>
+            <a:prstGeom prst="straightConnector1">
+              <a:avLst/>
+            </a:prstGeom>
+            <a:ln w="31750">
+              <a:tailEnd type="triangle"/>
+            </a:ln>
+          </p:spPr>
+          <p:style>
+            <a:lnRef idx="1">
+              <a:schemeClr val="accent1"/>
+            </a:lnRef>
+            <a:fillRef idx="0">
+              <a:schemeClr val="accent1"/>
+            </a:fillRef>
+            <a:effectRef idx="0">
+              <a:schemeClr val="accent1"/>
+            </a:effectRef>
+            <a:fontRef idx="minor">
+              <a:schemeClr val="tx1"/>
+            </a:fontRef>
+          </p:style>
+        </p:cxnSp>
+        <p:sp>
+          <p:nvSpPr>
+            <p:cNvPr id="46" name="TextBox 45">
+              <a:extLst>
+                <a:ext uri="{FF2B5EF4-FFF2-40B4-BE49-F238E27FC236}">
+                  <a16:creationId xmlns:a16="http://schemas.microsoft.com/office/drawing/2014/main" id="{BE2B78FB-35F0-EF48-0F21-99237F89431C}"/>
+                </a:ext>
+              </a:extLst>
+            </p:cNvPr>
+            <p:cNvSpPr txBox="1"/>
+            <p:nvPr/>
+          </p:nvSpPr>
+          <p:spPr>
+            <a:xfrm>
+              <a:off x="3349694" y="2101336"/>
+              <a:ext cx="765110" cy="369332"/>
+            </a:xfrm>
+            <a:prstGeom prst="rect">
+              <a:avLst/>
+            </a:prstGeom>
+            <a:noFill/>
+          </p:spPr>
+          <p:txBody>
+            <a:bodyPr wrap="square" rtlCol="0">
+              <a:spAutoFit/>
+            </a:bodyPr>
+            <a:lstStyle/>
+            <a:p>
+              <a:pPr algn="ctr"/>
+              <a:r>
+                <a:rPr lang="en-US" dirty="0"/>
+                <a:t>A-Z</a:t>
+              </a:r>
+            </a:p>
+          </p:txBody>
+        </p:sp>
+        <p:sp>
+          <p:nvSpPr>
+            <p:cNvPr id="47" name="TextBox 46">
+              <a:extLst>
+                <a:ext uri="{FF2B5EF4-FFF2-40B4-BE49-F238E27FC236}">
+                  <a16:creationId xmlns:a16="http://schemas.microsoft.com/office/drawing/2014/main" id="{25D3C0DA-6B94-BFEA-A9F3-8603A3E400CC}"/>
+                </a:ext>
+              </a:extLst>
+            </p:cNvPr>
+            <p:cNvSpPr txBox="1"/>
+            <p:nvPr/>
+          </p:nvSpPr>
+          <p:spPr>
+            <a:xfrm>
+              <a:off x="5464628" y="2060900"/>
+              <a:ext cx="765110" cy="369332"/>
+            </a:xfrm>
+            <a:prstGeom prst="rect">
+              <a:avLst/>
+            </a:prstGeom>
+            <a:noFill/>
+          </p:spPr>
+          <p:txBody>
+            <a:bodyPr wrap="square" rtlCol="0">
+              <a:spAutoFit/>
+            </a:bodyPr>
+            <a:lstStyle/>
+            <a:p>
+              <a:pPr algn="ctr"/>
+              <a:r>
+                <a:rPr lang="en-US" dirty="0"/>
+                <a:t>A-Z</a:t>
+              </a:r>
+            </a:p>
+          </p:txBody>
+        </p:sp>
+        <p:sp>
+          <p:nvSpPr>
+            <p:cNvPr id="48" name="TextBox 47">
+              <a:extLst>
+                <a:ext uri="{FF2B5EF4-FFF2-40B4-BE49-F238E27FC236}">
+                  <a16:creationId xmlns:a16="http://schemas.microsoft.com/office/drawing/2014/main" id="{0715757A-23AE-E95C-A6DF-5CEC5AF549D6}"/>
+                </a:ext>
+              </a:extLst>
+            </p:cNvPr>
+            <p:cNvSpPr txBox="1"/>
+            <p:nvPr/>
+          </p:nvSpPr>
+          <p:spPr>
+            <a:xfrm>
+              <a:off x="7504923" y="2060900"/>
+              <a:ext cx="765110" cy="369332"/>
+            </a:xfrm>
+            <a:prstGeom prst="rect">
+              <a:avLst/>
+            </a:prstGeom>
+            <a:noFill/>
+          </p:spPr>
+          <p:txBody>
+            <a:bodyPr wrap="square" rtlCol="0">
+              <a:spAutoFit/>
+            </a:bodyPr>
+            <a:lstStyle/>
+            <a:p>
+              <a:pPr algn="ctr"/>
+              <a:r>
+                <a:rPr lang="en-US" dirty="0"/>
+                <a:t>A-Z</a:t>
+              </a:r>
+            </a:p>
+          </p:txBody>
+        </p:sp>
+        <p:sp>
+          <p:nvSpPr>
+            <p:cNvPr id="49" name="TextBox 48">
+              <a:extLst>
+                <a:ext uri="{FF2B5EF4-FFF2-40B4-BE49-F238E27FC236}">
+                  <a16:creationId xmlns:a16="http://schemas.microsoft.com/office/drawing/2014/main" id="{5AEF2829-0E25-4DBB-53D3-E781BE47A73A}"/>
+                </a:ext>
+              </a:extLst>
+            </p:cNvPr>
+            <p:cNvSpPr txBox="1"/>
+            <p:nvPr/>
+          </p:nvSpPr>
+          <p:spPr>
+            <a:xfrm>
+              <a:off x="3349694" y="4268757"/>
+              <a:ext cx="765110" cy="369332"/>
+            </a:xfrm>
+            <a:prstGeom prst="rect">
+              <a:avLst/>
+            </a:prstGeom>
+            <a:noFill/>
+          </p:spPr>
+          <p:txBody>
+            <a:bodyPr wrap="square" rtlCol="0">
+              <a:spAutoFit/>
+            </a:bodyPr>
+            <a:lstStyle/>
+            <a:p>
+              <a:pPr algn="ctr"/>
+              <a:r>
+                <a:rPr lang="en-US" dirty="0"/>
+                <a:t>A-Z</a:t>
+              </a:r>
+            </a:p>
+          </p:txBody>
+        </p:sp>
+        <p:sp>
+          <p:nvSpPr>
+            <p:cNvPr id="50" name="TextBox 49">
+              <a:extLst>
+                <a:ext uri="{FF2B5EF4-FFF2-40B4-BE49-F238E27FC236}">
+                  <a16:creationId xmlns:a16="http://schemas.microsoft.com/office/drawing/2014/main" id="{B7D5E8C5-610C-D5DD-128C-A6B68CC6AC3A}"/>
+                </a:ext>
+              </a:extLst>
+            </p:cNvPr>
+            <p:cNvSpPr txBox="1"/>
+            <p:nvPr/>
+          </p:nvSpPr>
+          <p:spPr>
+            <a:xfrm>
+              <a:off x="5439748" y="4241157"/>
+              <a:ext cx="765110" cy="369332"/>
+            </a:xfrm>
+            <a:prstGeom prst="rect">
+              <a:avLst/>
+            </a:prstGeom>
+            <a:noFill/>
+          </p:spPr>
+          <p:txBody>
+            <a:bodyPr wrap="square" rtlCol="0">
+              <a:spAutoFit/>
+            </a:bodyPr>
+            <a:lstStyle/>
+            <a:p>
+              <a:pPr algn="ctr"/>
+              <a:r>
+                <a:rPr lang="en-US" dirty="0"/>
+                <a:t>A-Z</a:t>
+              </a:r>
+            </a:p>
+          </p:txBody>
+        </p:sp>
+        <p:sp>
+          <p:nvSpPr>
+            <p:cNvPr id="51" name="TextBox 50">
+              <a:extLst>
+                <a:ext uri="{FF2B5EF4-FFF2-40B4-BE49-F238E27FC236}">
+                  <a16:creationId xmlns:a16="http://schemas.microsoft.com/office/drawing/2014/main" id="{197EFCDD-E6C0-501F-1977-4B0DC5AB214F}"/>
+                </a:ext>
+              </a:extLst>
+            </p:cNvPr>
+            <p:cNvSpPr txBox="1"/>
+            <p:nvPr/>
+          </p:nvSpPr>
+          <p:spPr>
+            <a:xfrm>
+              <a:off x="7504923" y="4241157"/>
+              <a:ext cx="765110" cy="369332"/>
+            </a:xfrm>
+            <a:prstGeom prst="rect">
+              <a:avLst/>
+            </a:prstGeom>
+            <a:noFill/>
+          </p:spPr>
+          <p:txBody>
+            <a:bodyPr wrap="square" rtlCol="0">
+              <a:spAutoFit/>
+            </a:bodyPr>
+            <a:lstStyle/>
+            <a:p>
+              <a:pPr algn="ctr"/>
+              <a:r>
+                <a:rPr lang="en-US" dirty="0"/>
+                <a:t>A-Z</a:t>
+              </a:r>
+            </a:p>
+          </p:txBody>
+        </p:sp>
+        <p:sp>
+          <p:nvSpPr>
+            <p:cNvPr id="52" name="TextBox 51">
+              <a:extLst>
+                <a:ext uri="{FF2B5EF4-FFF2-40B4-BE49-F238E27FC236}">
+                  <a16:creationId xmlns:a16="http://schemas.microsoft.com/office/drawing/2014/main" id="{223AC633-91CF-1792-7D2C-E77D70DE52B3}"/>
+                </a:ext>
+              </a:extLst>
+            </p:cNvPr>
+            <p:cNvSpPr txBox="1"/>
+            <p:nvPr/>
+          </p:nvSpPr>
+          <p:spPr>
+            <a:xfrm>
+              <a:off x="7607458" y="3123412"/>
+              <a:ext cx="765110" cy="369332"/>
+            </a:xfrm>
+            <a:prstGeom prst="rect">
+              <a:avLst/>
+            </a:prstGeom>
+            <a:noFill/>
+          </p:spPr>
+          <p:txBody>
+            <a:bodyPr wrap="square" rtlCol="0">
+              <a:spAutoFit/>
+            </a:bodyPr>
+            <a:lstStyle/>
+            <a:p>
+              <a:pPr algn="ctr"/>
+              <a:r>
+                <a:rPr lang="en-US" dirty="0"/>
+                <a:t>1-9</a:t>
+              </a:r>
+            </a:p>
+          </p:txBody>
+        </p:sp>
+        <p:sp>
+          <p:nvSpPr>
+            <p:cNvPr id="53" name="TextBox 52">
+              <a:extLst>
+                <a:ext uri="{FF2B5EF4-FFF2-40B4-BE49-F238E27FC236}">
+                  <a16:creationId xmlns:a16="http://schemas.microsoft.com/office/drawing/2014/main" id="{A2C3A2DE-0FBB-57B5-A254-D8C9A9ED7F00}"/>
+                </a:ext>
+              </a:extLst>
+            </p:cNvPr>
+            <p:cNvSpPr txBox="1"/>
+            <p:nvPr/>
+          </p:nvSpPr>
+          <p:spPr>
+            <a:xfrm>
+              <a:off x="8820539" y="3356694"/>
+              <a:ext cx="765110" cy="369332"/>
+            </a:xfrm>
+            <a:prstGeom prst="rect">
+              <a:avLst/>
+            </a:prstGeom>
+            <a:noFill/>
+          </p:spPr>
+          <p:txBody>
+            <a:bodyPr wrap="square" rtlCol="0">
+              <a:spAutoFit/>
+            </a:bodyPr>
+            <a:lstStyle/>
+            <a:p>
+              <a:pPr algn="ctr"/>
+              <a:r>
+                <a:rPr lang="en-US" dirty="0"/>
+                <a:t>1-9</a:t>
+              </a:r>
+            </a:p>
+          </p:txBody>
+        </p:sp>
+        <p:sp>
+          <p:nvSpPr>
+            <p:cNvPr id="54" name="TextBox 53">
+              <a:extLst>
+                <a:ext uri="{FF2B5EF4-FFF2-40B4-BE49-F238E27FC236}">
+                  <a16:creationId xmlns:a16="http://schemas.microsoft.com/office/drawing/2014/main" id="{1553CF3B-1657-974B-2A6F-E15C471F1279}"/>
+                </a:ext>
+              </a:extLst>
+            </p:cNvPr>
+            <p:cNvSpPr txBox="1"/>
+            <p:nvPr/>
+          </p:nvSpPr>
+          <p:spPr>
+            <a:xfrm>
+              <a:off x="643814" y="2334601"/>
+              <a:ext cx="765110" cy="369332"/>
+            </a:xfrm>
+            <a:prstGeom prst="rect">
+              <a:avLst/>
+            </a:prstGeom>
+            <a:noFill/>
+          </p:spPr>
+          <p:txBody>
+            <a:bodyPr wrap="square" rtlCol="0">
+              <a:spAutoFit/>
+            </a:bodyPr>
+            <a:lstStyle/>
+            <a:p>
+              <a:pPr algn="ctr"/>
+              <a:r>
+                <a:rPr lang="en-US" dirty="0"/>
+                <a:t>Start</a:t>
+              </a:r>
+            </a:p>
+          </p:txBody>
+        </p:sp>
+      </p:grpSp>
+      <p:sp>
+        <p:nvSpPr>
+          <p:cNvPr id="56" name="TextBox 55">
+            <a:extLst>
+              <a:ext uri="{FF2B5EF4-FFF2-40B4-BE49-F238E27FC236}">
+                <a16:creationId xmlns:a16="http://schemas.microsoft.com/office/drawing/2014/main" id="{4185741C-CCF5-0A64-97FB-2FBB08066885}"/>
+              </a:ext>
+            </a:extLst>
+          </p:cNvPr>
+          <p:cNvSpPr txBox="1"/>
+          <p:nvPr/>
+        </p:nvSpPr>
+        <p:spPr>
+          <a:xfrm>
+            <a:off x="2920483" y="4849024"/>
+            <a:ext cx="5607698" cy="369332"/>
+          </a:xfrm>
+          <a:prstGeom prst="rect">
+            <a:avLst/>
+          </a:prstGeom>
+          <a:noFill/>
+        </p:spPr>
+        <p:txBody>
+          <a:bodyPr wrap="square" rtlCol="0">
+            <a:spAutoFit/>
+          </a:bodyPr>
+          <a:lstStyle/>
+          <a:p>
+            <a:r>
+              <a:rPr lang="en-US" dirty="0"/>
+              <a:t>Definition:</a:t>
+            </a:r>
+          </a:p>
+        </p:txBody>
+      </p:sp>
+      <p:sp>
+        <p:nvSpPr>
+          <p:cNvPr id="57" name="TextBox 56">
+            <a:extLst>
+              <a:ext uri="{FF2B5EF4-FFF2-40B4-BE49-F238E27FC236}">
+                <a16:creationId xmlns:a16="http://schemas.microsoft.com/office/drawing/2014/main" id="{B12BE394-FF8F-40C2-CB94-5FD272586443}"/>
+              </a:ext>
+            </a:extLst>
+          </p:cNvPr>
+          <p:cNvSpPr txBox="1"/>
+          <p:nvPr/>
+        </p:nvSpPr>
+        <p:spPr>
+          <a:xfrm>
+            <a:off x="2920482" y="5239354"/>
+            <a:ext cx="6618515" cy="1015663"/>
+          </a:xfrm>
+          <a:prstGeom prst="rect">
+            <a:avLst/>
+          </a:prstGeom>
+          <a:solidFill>
+            <a:schemeClr val="tx1">
+              <a:lumMod val="95000"/>
+            </a:schemeClr>
+          </a:solidFill>
+          <a:ln>
+            <a:solidFill>
+              <a:schemeClr val="bg1"/>
+            </a:solidFill>
+          </a:ln>
+        </p:spPr>
+        <p:txBody>
+          <a:bodyPr wrap="square" rtlCol="0">
+            <a:spAutoFit/>
+          </a:bodyPr>
+          <a:lstStyle/>
+          <a:p>
+            <a:r>
+              <a:rPr lang="en-US" sz="2000" dirty="0">
+                <a:solidFill>
+                  <a:schemeClr val="bg1"/>
+                </a:solidFill>
+                <a:latin typeface="Arial" panose="020B0604020202020204" pitchFamily="34" charset="0"/>
+                <a:cs typeface="Arial" panose="020B0604020202020204" pitchFamily="34" charset="0"/>
+              </a:rPr>
+              <a:t>By the way, this is called a </a:t>
+            </a:r>
+            <a:r>
+              <a:rPr lang="en-US" sz="2000" dirty="0">
+                <a:solidFill>
+                  <a:schemeClr val="accent1"/>
+                </a:solidFill>
+                <a:latin typeface="Arial" panose="020B0604020202020204" pitchFamily="34" charset="0"/>
+                <a:cs typeface="Arial" panose="020B0604020202020204" pitchFamily="34" charset="0"/>
+              </a:rPr>
+              <a:t>Deterministic Finite Automata</a:t>
+            </a:r>
+            <a:r>
+              <a:rPr lang="en-US" sz="2000" dirty="0">
+                <a:solidFill>
+                  <a:schemeClr val="bg1"/>
+                </a:solidFill>
+                <a:latin typeface="Arial" panose="020B0604020202020204" pitchFamily="34" charset="0"/>
+                <a:cs typeface="Arial" panose="020B0604020202020204" pitchFamily="34" charset="0"/>
+              </a:rPr>
+              <a:t>. You’ll learn more about these in DMT2! A lot (but not all) programs can be expressed as a </a:t>
+            </a:r>
+            <a:r>
+              <a:rPr lang="en-US" sz="2000" dirty="0">
+                <a:solidFill>
+                  <a:schemeClr val="accent1"/>
+                </a:solidFill>
+                <a:latin typeface="Arial" panose="020B0604020202020204" pitchFamily="34" charset="0"/>
+                <a:cs typeface="Arial" panose="020B0604020202020204" pitchFamily="34" charset="0"/>
+              </a:rPr>
+              <a:t>DFA</a:t>
+            </a:r>
+            <a:r>
+              <a:rPr lang="en-US" sz="2000" dirty="0">
+                <a:solidFill>
+                  <a:schemeClr val="bg1"/>
+                </a:solidFill>
+                <a:latin typeface="Arial" panose="020B0604020202020204" pitchFamily="34" charset="0"/>
+                <a:cs typeface="Arial" panose="020B0604020202020204" pitchFamily="34" charset="0"/>
+              </a:rPr>
+              <a:t>.</a:t>
+            </a:r>
+          </a:p>
+        </p:txBody>
+      </p:sp>
+    </p:spTree>
+    <p:extLst>
+      <p:ext uri="{BB962C8B-B14F-4D97-AF65-F5344CB8AC3E}">
+        <p14:creationId xmlns:p14="http://schemas.microsoft.com/office/powerpoint/2010/main" val="2973855690"/>
+      </p:ext>
+    </p:extLst>
+  </p:cSld>
+  <p:clrMapOvr>
+    <a:masterClrMapping/>
+  </p:clrMapOvr>
+</p:sld>
+</file>
+
+<file path=ppt/slides/slide31.xml><?xml version="1.0" encoding="utf-8"?>
 <p:sld xmlns:a="http://schemas.openxmlformats.org/drawingml/2006/main" xmlns:r="http://schemas.openxmlformats.org/officeDocument/2006/relationships" xmlns:p="http://schemas.openxmlformats.org/presentationml/2006/main">
   <p:cSld>
     <p:spTree>
@@ -35053,7 +36909,7 @@
 </p:sld>
 </file>
 
-<file path=ppt/slides/slide31.xml><?xml version="1.0" encoding="utf-8"?>
+<file path=ppt/slides/slide32.xml><?xml version="1.0" encoding="utf-8"?>
 <p:sld xmlns:a="http://schemas.openxmlformats.org/drawingml/2006/main" xmlns:r="http://schemas.openxmlformats.org/officeDocument/2006/relationships" xmlns:p="http://schemas.openxmlformats.org/presentationml/2006/main">
   <p:cSld>
     <p:spTree>
@@ -35061,7 +36917,7 @@
         <p:cNvPr id="1" name="">
           <a:extLst>
             <a:ext uri="{FF2B5EF4-FFF2-40B4-BE49-F238E27FC236}">
-              <a16:creationId xmlns:a16="http://schemas.microsoft.com/office/drawing/2014/main" id="{21148210-018A-8332-9415-CF7CAAA81646}"/>
+              <a16:creationId xmlns:a16="http://schemas.microsoft.com/office/drawing/2014/main" id="{2BA90FE2-5A76-649E-B271-81120CD75FB7}"/>
             </a:ext>
           </a:extLst>
         </p:cNvPr>
@@ -35081,7 +36937,7 @@
           <p:cNvPr id="2" name="Title 1">
             <a:extLst>
               <a:ext uri="{FF2B5EF4-FFF2-40B4-BE49-F238E27FC236}">
-                <a16:creationId xmlns:a16="http://schemas.microsoft.com/office/drawing/2014/main" id="{D84C0864-CA49-5174-9ECF-52825ACEB79B}"/>
+                <a16:creationId xmlns:a16="http://schemas.microsoft.com/office/drawing/2014/main" id="{52E730EC-3BD2-2D4C-7C66-F60BF136715F}"/>
               </a:ext>
             </a:extLst>
           </p:cNvPr>
@@ -35092,80 +36948,2411 @@
             <p:ph type="title"/>
           </p:nvPr>
         </p:nvSpPr>
-        <p:spPr/>
+        <p:spPr>
+          <a:xfrm>
+            <a:off x="1143001" y="123995"/>
+            <a:ext cx="9905998" cy="448281"/>
+          </a:xfrm>
+        </p:spPr>
         <p:txBody>
-          <a:bodyPr/>
+          <a:bodyPr>
+            <a:normAutofit fontScale="90000"/>
+          </a:bodyPr>
           <a:lstStyle/>
           <a:p>
+            <a:pPr algn="ctr"/>
             <a:r>
               <a:rPr lang="en-US" dirty="0"/>
-              <a:t>DFA / NFA</a:t>
+              <a:t>Aside: More Machine Types</a:t>
             </a:r>
           </a:p>
         </p:txBody>
       </p:sp>
-      <p:sp>
-        <p:nvSpPr>
-          <p:cNvPr id="3" name="Content Placeholder 2">
+      <p:grpSp>
+        <p:nvGrpSpPr>
+          <p:cNvPr id="55" name="Group 54">
             <a:extLst>
               <a:ext uri="{FF2B5EF4-FFF2-40B4-BE49-F238E27FC236}">
-                <a16:creationId xmlns:a16="http://schemas.microsoft.com/office/drawing/2014/main" id="{AE084A8B-3280-0F34-74B0-2A761104F99E}"/>
+                <a16:creationId xmlns:a16="http://schemas.microsoft.com/office/drawing/2014/main" id="{88D24BCD-09DD-308F-F1DF-D2982309BC74}"/>
               </a:ext>
             </a:extLst>
           </p:cNvPr>
-          <p:cNvSpPr>
-            <a:spLocks noGrp="1"/>
-          </p:cNvSpPr>
-          <p:nvPr>
-            <p:ph idx="1"/>
-          </p:nvPr>
+          <p:cNvGrpSpPr/>
+          <p:nvPr/>
+        </p:nvGrpSpPr>
+        <p:grpSpPr>
+          <a:xfrm>
+            <a:off x="1054354" y="1632347"/>
+            <a:ext cx="3192643" cy="1218360"/>
+            <a:chOff x="1334278" y="2052736"/>
+            <a:chExt cx="8052319" cy="3072883"/>
+          </a:xfrm>
+        </p:grpSpPr>
+        <p:sp>
+          <p:nvSpPr>
+            <p:cNvPr id="3" name="Oval 2">
+              <a:extLst>
+                <a:ext uri="{FF2B5EF4-FFF2-40B4-BE49-F238E27FC236}">
+                  <a16:creationId xmlns:a16="http://schemas.microsoft.com/office/drawing/2014/main" id="{0D286DFE-3919-0121-89D3-F3BE6FB4F3B7}"/>
+                </a:ext>
+              </a:extLst>
+            </p:cNvPr>
+            <p:cNvSpPr/>
+            <p:nvPr/>
+          </p:nvSpPr>
+          <p:spPr>
+            <a:xfrm>
+              <a:off x="2258010" y="2052736"/>
+              <a:ext cx="933062" cy="933062"/>
+            </a:xfrm>
+            <a:prstGeom prst="ellipse">
+              <a:avLst/>
+            </a:prstGeom>
+            <a:ln>
+              <a:solidFill>
+                <a:schemeClr val="bg1"/>
+              </a:solidFill>
+            </a:ln>
+          </p:spPr>
+          <p:style>
+            <a:lnRef idx="2">
+              <a:schemeClr val="accent1">
+                <a:shade val="15000"/>
+              </a:schemeClr>
+            </a:lnRef>
+            <a:fillRef idx="1">
+              <a:schemeClr val="accent1"/>
+            </a:fillRef>
+            <a:effectRef idx="0">
+              <a:schemeClr val="accent1"/>
+            </a:effectRef>
+            <a:fontRef idx="minor">
+              <a:schemeClr val="lt1"/>
+            </a:fontRef>
+          </p:style>
+          <p:txBody>
+            <a:bodyPr rtlCol="0" anchor="ctr"/>
+            <a:lstStyle/>
+            <a:p>
+              <a:pPr algn="ctr"/>
+              <a:r>
+                <a:rPr lang="en-US" dirty="0">
+                  <a:solidFill>
+                    <a:schemeClr val="bg1"/>
+                  </a:solidFill>
+                </a:rPr>
+                <a:t>1</a:t>
+              </a:r>
+            </a:p>
+          </p:txBody>
+        </p:sp>
+        <p:sp>
+          <p:nvSpPr>
+            <p:cNvPr id="4" name="Oval 3">
+              <a:extLst>
+                <a:ext uri="{FF2B5EF4-FFF2-40B4-BE49-F238E27FC236}">
+                  <a16:creationId xmlns:a16="http://schemas.microsoft.com/office/drawing/2014/main" id="{44C625BC-CDCA-C5CD-D406-23CB2BEEEC37}"/>
+                </a:ext>
+              </a:extLst>
+            </p:cNvPr>
+            <p:cNvSpPr/>
+            <p:nvPr/>
+          </p:nvSpPr>
+          <p:spPr>
+            <a:xfrm>
+              <a:off x="4323185" y="2052736"/>
+              <a:ext cx="933062" cy="933062"/>
+            </a:xfrm>
+            <a:prstGeom prst="ellipse">
+              <a:avLst/>
+            </a:prstGeom>
+            <a:ln>
+              <a:solidFill>
+                <a:schemeClr val="bg1"/>
+              </a:solidFill>
+            </a:ln>
+          </p:spPr>
+          <p:style>
+            <a:lnRef idx="2">
+              <a:schemeClr val="accent1">
+                <a:shade val="15000"/>
+              </a:schemeClr>
+            </a:lnRef>
+            <a:fillRef idx="1">
+              <a:schemeClr val="accent1"/>
+            </a:fillRef>
+            <a:effectRef idx="0">
+              <a:schemeClr val="accent1"/>
+            </a:effectRef>
+            <a:fontRef idx="minor">
+              <a:schemeClr val="lt1"/>
+            </a:fontRef>
+          </p:style>
+          <p:txBody>
+            <a:bodyPr rtlCol="0" anchor="ctr"/>
+            <a:lstStyle/>
+            <a:p>
+              <a:pPr algn="ctr"/>
+              <a:r>
+                <a:rPr lang="en-US" dirty="0">
+                  <a:solidFill>
+                    <a:schemeClr val="bg1"/>
+                  </a:solidFill>
+                </a:rPr>
+                <a:t>2</a:t>
+              </a:r>
+            </a:p>
+          </p:txBody>
+        </p:sp>
+        <p:sp>
+          <p:nvSpPr>
+            <p:cNvPr id="6" name="Oval 5">
+              <a:extLst>
+                <a:ext uri="{FF2B5EF4-FFF2-40B4-BE49-F238E27FC236}">
+                  <a16:creationId xmlns:a16="http://schemas.microsoft.com/office/drawing/2014/main" id="{EF5E5CFF-0FF5-B264-32EA-A6A9C60F1B0F}"/>
+                </a:ext>
+              </a:extLst>
+            </p:cNvPr>
+            <p:cNvSpPr/>
+            <p:nvPr/>
+          </p:nvSpPr>
+          <p:spPr>
+            <a:xfrm>
+              <a:off x="6388360" y="2052736"/>
+              <a:ext cx="933062" cy="933062"/>
+            </a:xfrm>
+            <a:prstGeom prst="ellipse">
+              <a:avLst/>
+            </a:prstGeom>
+            <a:ln>
+              <a:solidFill>
+                <a:schemeClr val="bg1"/>
+              </a:solidFill>
+            </a:ln>
+          </p:spPr>
+          <p:style>
+            <a:lnRef idx="2">
+              <a:schemeClr val="accent1">
+                <a:shade val="15000"/>
+              </a:schemeClr>
+            </a:lnRef>
+            <a:fillRef idx="1">
+              <a:schemeClr val="accent1"/>
+            </a:fillRef>
+            <a:effectRef idx="0">
+              <a:schemeClr val="accent1"/>
+            </a:effectRef>
+            <a:fontRef idx="minor">
+              <a:schemeClr val="lt1"/>
+            </a:fontRef>
+          </p:style>
+          <p:txBody>
+            <a:bodyPr rtlCol="0" anchor="ctr"/>
+            <a:lstStyle/>
+            <a:p>
+              <a:pPr algn="ctr"/>
+              <a:r>
+                <a:rPr lang="en-US" dirty="0">
+                  <a:solidFill>
+                    <a:schemeClr val="bg1"/>
+                  </a:solidFill>
+                </a:rPr>
+                <a:t>3</a:t>
+              </a:r>
+            </a:p>
+          </p:txBody>
+        </p:sp>
+        <p:sp>
+          <p:nvSpPr>
+            <p:cNvPr id="9" name="Oval 8">
+              <a:extLst>
+                <a:ext uri="{FF2B5EF4-FFF2-40B4-BE49-F238E27FC236}">
+                  <a16:creationId xmlns:a16="http://schemas.microsoft.com/office/drawing/2014/main" id="{55B3D2AC-C713-D145-FA7A-350B3E310121}"/>
+                </a:ext>
+              </a:extLst>
+            </p:cNvPr>
+            <p:cNvSpPr/>
+            <p:nvPr/>
+          </p:nvSpPr>
+          <p:spPr>
+            <a:xfrm>
+              <a:off x="8453535" y="2052736"/>
+              <a:ext cx="933062" cy="933062"/>
+            </a:xfrm>
+            <a:prstGeom prst="ellipse">
+              <a:avLst/>
+            </a:prstGeom>
+            <a:ln>
+              <a:solidFill>
+                <a:schemeClr val="bg1"/>
+              </a:solidFill>
+            </a:ln>
+          </p:spPr>
+          <p:style>
+            <a:lnRef idx="2">
+              <a:schemeClr val="accent1">
+                <a:shade val="15000"/>
+              </a:schemeClr>
+            </a:lnRef>
+            <a:fillRef idx="1">
+              <a:schemeClr val="accent1"/>
+            </a:fillRef>
+            <a:effectRef idx="0">
+              <a:schemeClr val="accent1"/>
+            </a:effectRef>
+            <a:fontRef idx="minor">
+              <a:schemeClr val="lt1"/>
+            </a:fontRef>
+          </p:style>
+          <p:txBody>
+            <a:bodyPr rtlCol="0" anchor="ctr"/>
+            <a:lstStyle/>
+            <a:p>
+              <a:pPr algn="ctr"/>
+              <a:r>
+                <a:rPr lang="en-US" dirty="0">
+                  <a:solidFill>
+                    <a:schemeClr val="bg1"/>
+                  </a:solidFill>
+                </a:rPr>
+                <a:t>4</a:t>
+              </a:r>
+            </a:p>
+          </p:txBody>
+        </p:sp>
+        <p:sp>
+          <p:nvSpPr>
+            <p:cNvPr id="10" name="Oval 9">
+              <a:extLst>
+                <a:ext uri="{FF2B5EF4-FFF2-40B4-BE49-F238E27FC236}">
+                  <a16:creationId xmlns:a16="http://schemas.microsoft.com/office/drawing/2014/main" id="{443DC545-8BB8-46D0-6E6E-3470D7A28027}"/>
+                </a:ext>
+              </a:extLst>
+            </p:cNvPr>
+            <p:cNvSpPr/>
+            <p:nvPr/>
+          </p:nvSpPr>
+          <p:spPr>
+            <a:xfrm>
+              <a:off x="2258010" y="4192557"/>
+              <a:ext cx="933062" cy="933062"/>
+            </a:xfrm>
+            <a:prstGeom prst="ellipse">
+              <a:avLst/>
+            </a:prstGeom>
+            <a:ln>
+              <a:solidFill>
+                <a:schemeClr val="bg1"/>
+              </a:solidFill>
+            </a:ln>
+          </p:spPr>
+          <p:style>
+            <a:lnRef idx="2">
+              <a:schemeClr val="accent1">
+                <a:shade val="15000"/>
+              </a:schemeClr>
+            </a:lnRef>
+            <a:fillRef idx="1">
+              <a:schemeClr val="accent1"/>
+            </a:fillRef>
+            <a:effectRef idx="0">
+              <a:schemeClr val="accent1"/>
+            </a:effectRef>
+            <a:fontRef idx="minor">
+              <a:schemeClr val="lt1"/>
+            </a:fontRef>
+          </p:style>
+          <p:txBody>
+            <a:bodyPr rtlCol="0" anchor="ctr"/>
+            <a:lstStyle/>
+            <a:p>
+              <a:pPr algn="ctr"/>
+              <a:r>
+                <a:rPr lang="en-US" dirty="0">
+                  <a:solidFill>
+                    <a:schemeClr val="bg1"/>
+                  </a:solidFill>
+                </a:rPr>
+                <a:t>8</a:t>
+              </a:r>
+            </a:p>
+          </p:txBody>
+        </p:sp>
+        <p:sp>
+          <p:nvSpPr>
+            <p:cNvPr id="11" name="Oval 10">
+              <a:extLst>
+                <a:ext uri="{FF2B5EF4-FFF2-40B4-BE49-F238E27FC236}">
+                  <a16:creationId xmlns:a16="http://schemas.microsoft.com/office/drawing/2014/main" id="{950AA15F-493B-F4D6-1A48-A7A558FECCC9}"/>
+                </a:ext>
+              </a:extLst>
+            </p:cNvPr>
+            <p:cNvSpPr/>
+            <p:nvPr/>
+          </p:nvSpPr>
+          <p:spPr>
+            <a:xfrm>
+              <a:off x="4323185" y="4192557"/>
+              <a:ext cx="933062" cy="933062"/>
+            </a:xfrm>
+            <a:prstGeom prst="ellipse">
+              <a:avLst/>
+            </a:prstGeom>
+            <a:ln>
+              <a:solidFill>
+                <a:schemeClr val="bg1"/>
+              </a:solidFill>
+            </a:ln>
+          </p:spPr>
+          <p:style>
+            <a:lnRef idx="2">
+              <a:schemeClr val="accent1">
+                <a:shade val="15000"/>
+              </a:schemeClr>
+            </a:lnRef>
+            <a:fillRef idx="1">
+              <a:schemeClr val="accent1"/>
+            </a:fillRef>
+            <a:effectRef idx="0">
+              <a:schemeClr val="accent1"/>
+            </a:effectRef>
+            <a:fontRef idx="minor">
+              <a:schemeClr val="lt1"/>
+            </a:fontRef>
+          </p:style>
+          <p:txBody>
+            <a:bodyPr rtlCol="0" anchor="ctr"/>
+            <a:lstStyle/>
+            <a:p>
+              <a:pPr algn="ctr"/>
+              <a:r>
+                <a:rPr lang="en-US" dirty="0">
+                  <a:solidFill>
+                    <a:schemeClr val="bg1"/>
+                  </a:solidFill>
+                </a:rPr>
+                <a:t>7</a:t>
+              </a:r>
+            </a:p>
+          </p:txBody>
+        </p:sp>
+        <p:sp>
+          <p:nvSpPr>
+            <p:cNvPr id="12" name="Oval 11">
+              <a:extLst>
+                <a:ext uri="{FF2B5EF4-FFF2-40B4-BE49-F238E27FC236}">
+                  <a16:creationId xmlns:a16="http://schemas.microsoft.com/office/drawing/2014/main" id="{786C49AD-A05A-FC71-CEB5-431CD7916C3D}"/>
+                </a:ext>
+              </a:extLst>
+            </p:cNvPr>
+            <p:cNvSpPr/>
+            <p:nvPr/>
+          </p:nvSpPr>
+          <p:spPr>
+            <a:xfrm>
+              <a:off x="6388360" y="4192557"/>
+              <a:ext cx="933062" cy="933062"/>
+            </a:xfrm>
+            <a:prstGeom prst="ellipse">
+              <a:avLst/>
+            </a:prstGeom>
+            <a:ln>
+              <a:solidFill>
+                <a:schemeClr val="bg1"/>
+              </a:solidFill>
+            </a:ln>
+          </p:spPr>
+          <p:style>
+            <a:lnRef idx="2">
+              <a:schemeClr val="accent1">
+                <a:shade val="15000"/>
+              </a:schemeClr>
+            </a:lnRef>
+            <a:fillRef idx="1">
+              <a:schemeClr val="accent1"/>
+            </a:fillRef>
+            <a:effectRef idx="0">
+              <a:schemeClr val="accent1"/>
+            </a:effectRef>
+            <a:fontRef idx="minor">
+              <a:schemeClr val="lt1"/>
+            </a:fontRef>
+          </p:style>
+          <p:txBody>
+            <a:bodyPr rtlCol="0" anchor="ctr"/>
+            <a:lstStyle/>
+            <a:p>
+              <a:pPr algn="ctr"/>
+              <a:r>
+                <a:rPr lang="en-US" dirty="0">
+                  <a:solidFill>
+                    <a:schemeClr val="bg1"/>
+                  </a:solidFill>
+                </a:rPr>
+                <a:t>6</a:t>
+              </a:r>
+            </a:p>
+          </p:txBody>
+        </p:sp>
+        <p:sp>
+          <p:nvSpPr>
+            <p:cNvPr id="13" name="Oval 12">
+              <a:extLst>
+                <a:ext uri="{FF2B5EF4-FFF2-40B4-BE49-F238E27FC236}">
+                  <a16:creationId xmlns:a16="http://schemas.microsoft.com/office/drawing/2014/main" id="{A9C8E991-FA0C-0D0E-D3A4-5B944B08A18E}"/>
+                </a:ext>
+              </a:extLst>
+            </p:cNvPr>
+            <p:cNvSpPr/>
+            <p:nvPr/>
+          </p:nvSpPr>
+          <p:spPr>
+            <a:xfrm>
+              <a:off x="8453535" y="4192557"/>
+              <a:ext cx="933062" cy="933062"/>
+            </a:xfrm>
+            <a:prstGeom prst="ellipse">
+              <a:avLst/>
+            </a:prstGeom>
+            <a:ln>
+              <a:solidFill>
+                <a:schemeClr val="bg1"/>
+              </a:solidFill>
+            </a:ln>
+          </p:spPr>
+          <p:style>
+            <a:lnRef idx="2">
+              <a:schemeClr val="accent1">
+                <a:shade val="15000"/>
+              </a:schemeClr>
+            </a:lnRef>
+            <a:fillRef idx="1">
+              <a:schemeClr val="accent1"/>
+            </a:fillRef>
+            <a:effectRef idx="0">
+              <a:schemeClr val="accent1"/>
+            </a:effectRef>
+            <a:fontRef idx="minor">
+              <a:schemeClr val="lt1"/>
+            </a:fontRef>
+          </p:style>
+          <p:txBody>
+            <a:bodyPr rtlCol="0" anchor="ctr"/>
+            <a:lstStyle/>
+            <a:p>
+              <a:pPr algn="ctr"/>
+              <a:r>
+                <a:rPr lang="en-US" dirty="0">
+                  <a:solidFill>
+                    <a:schemeClr val="bg1"/>
+                  </a:solidFill>
+                </a:rPr>
+                <a:t>5</a:t>
+              </a:r>
+            </a:p>
+          </p:txBody>
+        </p:sp>
+        <p:sp>
+          <p:nvSpPr>
+            <p:cNvPr id="14" name="Oval 13">
+              <a:extLst>
+                <a:ext uri="{FF2B5EF4-FFF2-40B4-BE49-F238E27FC236}">
+                  <a16:creationId xmlns:a16="http://schemas.microsoft.com/office/drawing/2014/main" id="{A02BDFD3-B06F-0819-E960-DA8B7B1B4B51}"/>
+                </a:ext>
+              </a:extLst>
+            </p:cNvPr>
+            <p:cNvSpPr/>
+            <p:nvPr/>
+          </p:nvSpPr>
+          <p:spPr>
+            <a:xfrm>
+              <a:off x="6466114" y="2130491"/>
+              <a:ext cx="780662" cy="780662"/>
+            </a:xfrm>
+            <a:prstGeom prst="ellipse">
+              <a:avLst/>
+            </a:prstGeom>
+            <a:ln>
+              <a:solidFill>
+                <a:schemeClr val="bg1"/>
+              </a:solidFill>
+            </a:ln>
+          </p:spPr>
+          <p:style>
+            <a:lnRef idx="2">
+              <a:schemeClr val="accent1">
+                <a:shade val="15000"/>
+              </a:schemeClr>
+            </a:lnRef>
+            <a:fillRef idx="1">
+              <a:schemeClr val="accent1"/>
+            </a:fillRef>
+            <a:effectRef idx="0">
+              <a:schemeClr val="accent1"/>
+            </a:effectRef>
+            <a:fontRef idx="minor">
+              <a:schemeClr val="lt1"/>
+            </a:fontRef>
+          </p:style>
+          <p:txBody>
+            <a:bodyPr rtlCol="0" anchor="ctr"/>
+            <a:lstStyle/>
+            <a:p>
+              <a:pPr algn="ctr"/>
+              <a:r>
+                <a:rPr lang="en-US" dirty="0">
+                  <a:solidFill>
+                    <a:schemeClr val="bg1"/>
+                  </a:solidFill>
+                </a:rPr>
+                <a:t>3</a:t>
+              </a:r>
+            </a:p>
+          </p:txBody>
+        </p:sp>
+        <p:sp>
+          <p:nvSpPr>
+            <p:cNvPr id="15" name="Oval 14">
+              <a:extLst>
+                <a:ext uri="{FF2B5EF4-FFF2-40B4-BE49-F238E27FC236}">
+                  <a16:creationId xmlns:a16="http://schemas.microsoft.com/office/drawing/2014/main" id="{FB821B24-ED64-F500-033C-F8EA83038B11}"/>
+                </a:ext>
+              </a:extLst>
+            </p:cNvPr>
+            <p:cNvSpPr/>
+            <p:nvPr/>
+          </p:nvSpPr>
+          <p:spPr>
+            <a:xfrm>
+              <a:off x="6466114" y="4268757"/>
+              <a:ext cx="780662" cy="780662"/>
+            </a:xfrm>
+            <a:prstGeom prst="ellipse">
+              <a:avLst/>
+            </a:prstGeom>
+            <a:ln>
+              <a:solidFill>
+                <a:schemeClr val="bg1"/>
+              </a:solidFill>
+            </a:ln>
+          </p:spPr>
+          <p:style>
+            <a:lnRef idx="2">
+              <a:schemeClr val="accent1">
+                <a:shade val="15000"/>
+              </a:schemeClr>
+            </a:lnRef>
+            <a:fillRef idx="1">
+              <a:schemeClr val="accent1"/>
+            </a:fillRef>
+            <a:effectRef idx="0">
+              <a:schemeClr val="accent1"/>
+            </a:effectRef>
+            <a:fontRef idx="minor">
+              <a:schemeClr val="lt1"/>
+            </a:fontRef>
+          </p:style>
+          <p:txBody>
+            <a:bodyPr rtlCol="0" anchor="ctr"/>
+            <a:lstStyle/>
+            <a:p>
+              <a:pPr algn="ctr"/>
+              <a:r>
+                <a:rPr lang="en-US" dirty="0">
+                  <a:solidFill>
+                    <a:schemeClr val="bg1"/>
+                  </a:solidFill>
+                </a:rPr>
+                <a:t>6</a:t>
+              </a:r>
+            </a:p>
+          </p:txBody>
+        </p:sp>
+        <p:sp>
+          <p:nvSpPr>
+            <p:cNvPr id="16" name="Oval 15">
+              <a:extLst>
+                <a:ext uri="{FF2B5EF4-FFF2-40B4-BE49-F238E27FC236}">
+                  <a16:creationId xmlns:a16="http://schemas.microsoft.com/office/drawing/2014/main" id="{7F239208-2B34-DBBB-9A11-1E247F2603C5}"/>
+                </a:ext>
+              </a:extLst>
+            </p:cNvPr>
+            <p:cNvSpPr/>
+            <p:nvPr/>
+          </p:nvSpPr>
+          <p:spPr>
+            <a:xfrm>
+              <a:off x="4400940" y="4268757"/>
+              <a:ext cx="780662" cy="780662"/>
+            </a:xfrm>
+            <a:prstGeom prst="ellipse">
+              <a:avLst/>
+            </a:prstGeom>
+            <a:ln>
+              <a:solidFill>
+                <a:schemeClr val="bg1"/>
+              </a:solidFill>
+            </a:ln>
+          </p:spPr>
+          <p:style>
+            <a:lnRef idx="2">
+              <a:schemeClr val="accent1">
+                <a:shade val="15000"/>
+              </a:schemeClr>
+            </a:lnRef>
+            <a:fillRef idx="1">
+              <a:schemeClr val="accent1"/>
+            </a:fillRef>
+            <a:effectRef idx="0">
+              <a:schemeClr val="accent1"/>
+            </a:effectRef>
+            <a:fontRef idx="minor">
+              <a:schemeClr val="lt1"/>
+            </a:fontRef>
+          </p:style>
+          <p:txBody>
+            <a:bodyPr rtlCol="0" anchor="ctr"/>
+            <a:lstStyle/>
+            <a:p>
+              <a:pPr algn="ctr"/>
+              <a:r>
+                <a:rPr lang="en-US" dirty="0">
+                  <a:solidFill>
+                    <a:schemeClr val="bg1"/>
+                  </a:solidFill>
+                </a:rPr>
+                <a:t>5</a:t>
+              </a:r>
+            </a:p>
+          </p:txBody>
+        </p:sp>
+        <p:sp>
+          <p:nvSpPr>
+            <p:cNvPr id="17" name="Oval 16">
+              <a:extLst>
+                <a:ext uri="{FF2B5EF4-FFF2-40B4-BE49-F238E27FC236}">
+                  <a16:creationId xmlns:a16="http://schemas.microsoft.com/office/drawing/2014/main" id="{3B5CB8D8-6AD3-45B0-8D62-C58D68D00A5B}"/>
+                </a:ext>
+              </a:extLst>
+            </p:cNvPr>
+            <p:cNvSpPr/>
+            <p:nvPr/>
+          </p:nvSpPr>
+          <p:spPr>
+            <a:xfrm>
+              <a:off x="2334210" y="4268757"/>
+              <a:ext cx="780662" cy="780662"/>
+            </a:xfrm>
+            <a:prstGeom prst="ellipse">
+              <a:avLst/>
+            </a:prstGeom>
+            <a:ln>
+              <a:solidFill>
+                <a:schemeClr val="bg1"/>
+              </a:solidFill>
+            </a:ln>
+          </p:spPr>
+          <p:style>
+            <a:lnRef idx="2">
+              <a:schemeClr val="accent1">
+                <a:shade val="15000"/>
+              </a:schemeClr>
+            </a:lnRef>
+            <a:fillRef idx="1">
+              <a:schemeClr val="accent1"/>
+            </a:fillRef>
+            <a:effectRef idx="0">
+              <a:schemeClr val="accent1"/>
+            </a:effectRef>
+            <a:fontRef idx="minor">
+              <a:schemeClr val="lt1"/>
+            </a:fontRef>
+          </p:style>
+          <p:txBody>
+            <a:bodyPr rtlCol="0" anchor="ctr"/>
+            <a:lstStyle/>
+            <a:p>
+              <a:pPr algn="ctr"/>
+              <a:r>
+                <a:rPr lang="en-US" dirty="0">
+                  <a:solidFill>
+                    <a:schemeClr val="bg1"/>
+                  </a:solidFill>
+                </a:rPr>
+                <a:t>8</a:t>
+              </a:r>
+            </a:p>
+          </p:txBody>
+        </p:sp>
+        <p:cxnSp>
+          <p:nvCxnSpPr>
+            <p:cNvPr id="19" name="Straight Arrow Connector 18">
+              <a:extLst>
+                <a:ext uri="{FF2B5EF4-FFF2-40B4-BE49-F238E27FC236}">
+                  <a16:creationId xmlns:a16="http://schemas.microsoft.com/office/drawing/2014/main" id="{2DE9EE7D-838E-EA5E-1BCB-A9C99EA3EB99}"/>
+                </a:ext>
+              </a:extLst>
+            </p:cNvPr>
+            <p:cNvCxnSpPr>
+              <a:cxnSpLocks/>
+              <a:endCxn id="3" idx="2"/>
+            </p:cNvCxnSpPr>
+            <p:nvPr/>
+          </p:nvCxnSpPr>
+          <p:spPr>
+            <a:xfrm>
+              <a:off x="1334278" y="2519267"/>
+              <a:ext cx="923732" cy="0"/>
+            </a:xfrm>
+            <a:prstGeom prst="straightConnector1">
+              <a:avLst/>
+            </a:prstGeom>
+            <a:ln w="31750">
+              <a:tailEnd type="triangle"/>
+            </a:ln>
+          </p:spPr>
+          <p:style>
+            <a:lnRef idx="1">
+              <a:schemeClr val="accent1"/>
+            </a:lnRef>
+            <a:fillRef idx="0">
+              <a:schemeClr val="accent1"/>
+            </a:fillRef>
+            <a:effectRef idx="0">
+              <a:schemeClr val="accent1"/>
+            </a:effectRef>
+            <a:fontRef idx="minor">
+              <a:schemeClr val="tx1"/>
+            </a:fontRef>
+          </p:style>
+        </p:cxnSp>
+        <p:cxnSp>
+          <p:nvCxnSpPr>
+            <p:cNvPr id="21" name="Straight Arrow Connector 20">
+              <a:extLst>
+                <a:ext uri="{FF2B5EF4-FFF2-40B4-BE49-F238E27FC236}">
+                  <a16:creationId xmlns:a16="http://schemas.microsoft.com/office/drawing/2014/main" id="{3AB3B105-95AA-03BC-F574-F638B0AA716B}"/>
+                </a:ext>
+              </a:extLst>
+            </p:cNvPr>
+            <p:cNvCxnSpPr>
+              <a:cxnSpLocks/>
+              <a:stCxn id="3" idx="6"/>
+              <a:endCxn id="4" idx="2"/>
+            </p:cNvCxnSpPr>
+            <p:nvPr/>
+          </p:nvCxnSpPr>
+          <p:spPr>
+            <a:xfrm>
+              <a:off x="3191072" y="2519267"/>
+              <a:ext cx="1132113" cy="0"/>
+            </a:xfrm>
+            <a:prstGeom prst="straightConnector1">
+              <a:avLst/>
+            </a:prstGeom>
+            <a:ln w="31750">
+              <a:tailEnd type="triangle"/>
+            </a:ln>
+          </p:spPr>
+          <p:style>
+            <a:lnRef idx="1">
+              <a:schemeClr val="accent1"/>
+            </a:lnRef>
+            <a:fillRef idx="0">
+              <a:schemeClr val="accent1"/>
+            </a:fillRef>
+            <a:effectRef idx="0">
+              <a:schemeClr val="accent1"/>
+            </a:effectRef>
+            <a:fontRef idx="minor">
+              <a:schemeClr val="tx1"/>
+            </a:fontRef>
+          </p:style>
+        </p:cxnSp>
+        <p:cxnSp>
+          <p:nvCxnSpPr>
+            <p:cNvPr id="24" name="Straight Arrow Connector 23">
+              <a:extLst>
+                <a:ext uri="{FF2B5EF4-FFF2-40B4-BE49-F238E27FC236}">
+                  <a16:creationId xmlns:a16="http://schemas.microsoft.com/office/drawing/2014/main" id="{2B6C2F1D-4E6A-6037-66F5-B403F5B66E1B}"/>
+                </a:ext>
+              </a:extLst>
+            </p:cNvPr>
+            <p:cNvCxnSpPr>
+              <a:cxnSpLocks/>
+              <a:stCxn id="4" idx="6"/>
+              <a:endCxn id="6" idx="2"/>
+            </p:cNvCxnSpPr>
+            <p:nvPr/>
+          </p:nvCxnSpPr>
+          <p:spPr>
+            <a:xfrm>
+              <a:off x="5256247" y="2519267"/>
+              <a:ext cx="1132113" cy="0"/>
+            </a:xfrm>
+            <a:prstGeom prst="straightConnector1">
+              <a:avLst/>
+            </a:prstGeom>
+            <a:ln w="31750">
+              <a:tailEnd type="triangle"/>
+            </a:ln>
+          </p:spPr>
+          <p:style>
+            <a:lnRef idx="1">
+              <a:schemeClr val="accent1"/>
+            </a:lnRef>
+            <a:fillRef idx="0">
+              <a:schemeClr val="accent1"/>
+            </a:fillRef>
+            <a:effectRef idx="0">
+              <a:schemeClr val="accent1"/>
+            </a:effectRef>
+            <a:fontRef idx="minor">
+              <a:schemeClr val="tx1"/>
+            </a:fontRef>
+          </p:style>
+        </p:cxnSp>
+        <p:cxnSp>
+          <p:nvCxnSpPr>
+            <p:cNvPr id="27" name="Straight Arrow Connector 26">
+              <a:extLst>
+                <a:ext uri="{FF2B5EF4-FFF2-40B4-BE49-F238E27FC236}">
+                  <a16:creationId xmlns:a16="http://schemas.microsoft.com/office/drawing/2014/main" id="{1DFB0B23-FE13-6159-FAB8-A0D68F3F527C}"/>
+                </a:ext>
+              </a:extLst>
+            </p:cNvPr>
+            <p:cNvCxnSpPr>
+              <a:cxnSpLocks/>
+              <a:stCxn id="6" idx="6"/>
+              <a:endCxn id="9" idx="2"/>
+            </p:cNvCxnSpPr>
+            <p:nvPr/>
+          </p:nvCxnSpPr>
+          <p:spPr>
+            <a:xfrm>
+              <a:off x="7321422" y="2519267"/>
+              <a:ext cx="1132113" cy="0"/>
+            </a:xfrm>
+            <a:prstGeom prst="straightConnector1">
+              <a:avLst/>
+            </a:prstGeom>
+            <a:ln w="31750">
+              <a:tailEnd type="triangle"/>
+            </a:ln>
+          </p:spPr>
+          <p:style>
+            <a:lnRef idx="1">
+              <a:schemeClr val="accent1"/>
+            </a:lnRef>
+            <a:fillRef idx="0">
+              <a:schemeClr val="accent1"/>
+            </a:fillRef>
+            <a:effectRef idx="0">
+              <a:schemeClr val="accent1"/>
+            </a:effectRef>
+            <a:fontRef idx="minor">
+              <a:schemeClr val="tx1"/>
+            </a:fontRef>
+          </p:style>
+        </p:cxnSp>
+        <p:cxnSp>
+          <p:nvCxnSpPr>
+            <p:cNvPr id="30" name="Straight Arrow Connector 29">
+              <a:extLst>
+                <a:ext uri="{FF2B5EF4-FFF2-40B4-BE49-F238E27FC236}">
+                  <a16:creationId xmlns:a16="http://schemas.microsoft.com/office/drawing/2014/main" id="{65A9D3E6-1121-866E-D601-4BDE37465309}"/>
+                </a:ext>
+              </a:extLst>
+            </p:cNvPr>
+            <p:cNvCxnSpPr>
+              <a:cxnSpLocks/>
+              <a:stCxn id="6" idx="5"/>
+              <a:endCxn id="13" idx="1"/>
+            </p:cNvCxnSpPr>
+            <p:nvPr/>
+          </p:nvCxnSpPr>
+          <p:spPr>
+            <a:xfrm>
+              <a:off x="7184778" y="2849154"/>
+              <a:ext cx="1405401" cy="1480047"/>
+            </a:xfrm>
+            <a:prstGeom prst="straightConnector1">
+              <a:avLst/>
+            </a:prstGeom>
+            <a:ln w="31750">
+              <a:tailEnd type="triangle"/>
+            </a:ln>
+          </p:spPr>
+          <p:style>
+            <a:lnRef idx="1">
+              <a:schemeClr val="accent1"/>
+            </a:lnRef>
+            <a:fillRef idx="0">
+              <a:schemeClr val="accent1"/>
+            </a:fillRef>
+            <a:effectRef idx="0">
+              <a:schemeClr val="accent1"/>
+            </a:effectRef>
+            <a:fontRef idx="minor">
+              <a:schemeClr val="tx1"/>
+            </a:fontRef>
+          </p:style>
+        </p:cxnSp>
+        <p:cxnSp>
+          <p:nvCxnSpPr>
+            <p:cNvPr id="34" name="Straight Arrow Connector 33">
+              <a:extLst>
+                <a:ext uri="{FF2B5EF4-FFF2-40B4-BE49-F238E27FC236}">
+                  <a16:creationId xmlns:a16="http://schemas.microsoft.com/office/drawing/2014/main" id="{10B8F940-9746-6D0A-CEB6-E16A35C54C71}"/>
+                </a:ext>
+              </a:extLst>
+            </p:cNvPr>
+            <p:cNvCxnSpPr>
+              <a:cxnSpLocks/>
+              <a:stCxn id="9" idx="4"/>
+              <a:endCxn id="13" idx="0"/>
+            </p:cNvCxnSpPr>
+            <p:nvPr/>
+          </p:nvCxnSpPr>
+          <p:spPr>
+            <a:xfrm>
+              <a:off x="8920066" y="2985798"/>
+              <a:ext cx="0" cy="1206759"/>
+            </a:xfrm>
+            <a:prstGeom prst="straightConnector1">
+              <a:avLst/>
+            </a:prstGeom>
+            <a:ln w="31750">
+              <a:tailEnd type="triangle"/>
+            </a:ln>
+          </p:spPr>
+          <p:style>
+            <a:lnRef idx="1">
+              <a:schemeClr val="accent1"/>
+            </a:lnRef>
+            <a:fillRef idx="0">
+              <a:schemeClr val="accent1"/>
+            </a:fillRef>
+            <a:effectRef idx="0">
+              <a:schemeClr val="accent1"/>
+            </a:effectRef>
+            <a:fontRef idx="minor">
+              <a:schemeClr val="tx1"/>
+            </a:fontRef>
+          </p:style>
+        </p:cxnSp>
+        <p:cxnSp>
+          <p:nvCxnSpPr>
+            <p:cNvPr id="37" name="Straight Arrow Connector 36">
+              <a:extLst>
+                <a:ext uri="{FF2B5EF4-FFF2-40B4-BE49-F238E27FC236}">
+                  <a16:creationId xmlns:a16="http://schemas.microsoft.com/office/drawing/2014/main" id="{06591B09-F9B9-02E5-48D6-7CC1FC3D0E65}"/>
+                </a:ext>
+              </a:extLst>
+            </p:cNvPr>
+            <p:cNvCxnSpPr>
+              <a:cxnSpLocks/>
+              <a:stCxn id="13" idx="2"/>
+              <a:endCxn id="12" idx="6"/>
+            </p:cNvCxnSpPr>
+            <p:nvPr/>
+          </p:nvCxnSpPr>
+          <p:spPr>
+            <a:xfrm flipH="1">
+              <a:off x="7321422" y="4659088"/>
+              <a:ext cx="1132113" cy="0"/>
+            </a:xfrm>
+            <a:prstGeom prst="straightConnector1">
+              <a:avLst/>
+            </a:prstGeom>
+            <a:ln w="31750">
+              <a:tailEnd type="triangle"/>
+            </a:ln>
+          </p:spPr>
+          <p:style>
+            <a:lnRef idx="1">
+              <a:schemeClr val="accent1"/>
+            </a:lnRef>
+            <a:fillRef idx="0">
+              <a:schemeClr val="accent1"/>
+            </a:fillRef>
+            <a:effectRef idx="0">
+              <a:schemeClr val="accent1"/>
+            </a:effectRef>
+            <a:fontRef idx="minor">
+              <a:schemeClr val="tx1"/>
+            </a:fontRef>
+          </p:style>
+        </p:cxnSp>
+        <p:cxnSp>
+          <p:nvCxnSpPr>
+            <p:cNvPr id="40" name="Straight Arrow Connector 39">
+              <a:extLst>
+                <a:ext uri="{FF2B5EF4-FFF2-40B4-BE49-F238E27FC236}">
+                  <a16:creationId xmlns:a16="http://schemas.microsoft.com/office/drawing/2014/main" id="{DEB6DA79-F0E1-72E2-D4FE-5AF8F7D59301}"/>
+                </a:ext>
+              </a:extLst>
+            </p:cNvPr>
+            <p:cNvCxnSpPr>
+              <a:cxnSpLocks/>
+              <a:stCxn id="12" idx="2"/>
+              <a:endCxn id="11" idx="6"/>
+            </p:cNvCxnSpPr>
+            <p:nvPr/>
+          </p:nvCxnSpPr>
+          <p:spPr>
+            <a:xfrm flipH="1">
+              <a:off x="5256247" y="4659088"/>
+              <a:ext cx="1132113" cy="0"/>
+            </a:xfrm>
+            <a:prstGeom prst="straightConnector1">
+              <a:avLst/>
+            </a:prstGeom>
+            <a:ln w="31750">
+              <a:tailEnd type="triangle"/>
+            </a:ln>
+          </p:spPr>
+          <p:style>
+            <a:lnRef idx="1">
+              <a:schemeClr val="accent1"/>
+            </a:lnRef>
+            <a:fillRef idx="0">
+              <a:schemeClr val="accent1"/>
+            </a:fillRef>
+            <a:effectRef idx="0">
+              <a:schemeClr val="accent1"/>
+            </a:effectRef>
+            <a:fontRef idx="minor">
+              <a:schemeClr val="tx1"/>
+            </a:fontRef>
+          </p:style>
+        </p:cxnSp>
+        <p:cxnSp>
+          <p:nvCxnSpPr>
+            <p:cNvPr id="43" name="Straight Arrow Connector 42">
+              <a:extLst>
+                <a:ext uri="{FF2B5EF4-FFF2-40B4-BE49-F238E27FC236}">
+                  <a16:creationId xmlns:a16="http://schemas.microsoft.com/office/drawing/2014/main" id="{6FBF8D3B-0381-F6BA-131D-F97B85DD5695}"/>
+                </a:ext>
+              </a:extLst>
+            </p:cNvPr>
+            <p:cNvCxnSpPr>
+              <a:cxnSpLocks/>
+              <a:stCxn id="11" idx="2"/>
+              <a:endCxn id="10" idx="6"/>
+            </p:cNvCxnSpPr>
+            <p:nvPr/>
+          </p:nvCxnSpPr>
+          <p:spPr>
+            <a:xfrm flipH="1">
+              <a:off x="3191072" y="4659088"/>
+              <a:ext cx="1132113" cy="0"/>
+            </a:xfrm>
+            <a:prstGeom prst="straightConnector1">
+              <a:avLst/>
+            </a:prstGeom>
+            <a:ln w="31750">
+              <a:tailEnd type="triangle"/>
+            </a:ln>
+          </p:spPr>
+          <p:style>
+            <a:lnRef idx="1">
+              <a:schemeClr val="accent1"/>
+            </a:lnRef>
+            <a:fillRef idx="0">
+              <a:schemeClr val="accent1"/>
+            </a:fillRef>
+            <a:effectRef idx="0">
+              <a:schemeClr val="accent1"/>
+            </a:effectRef>
+            <a:fontRef idx="minor">
+              <a:schemeClr val="tx1"/>
+            </a:fontRef>
+          </p:style>
+        </p:cxnSp>
+      </p:grpSp>
+      <p:sp>
+        <p:nvSpPr>
+          <p:cNvPr id="57" name="TextBox 56">
+            <a:extLst>
+              <a:ext uri="{FF2B5EF4-FFF2-40B4-BE49-F238E27FC236}">
+                <a16:creationId xmlns:a16="http://schemas.microsoft.com/office/drawing/2014/main" id="{D8CB4FBB-6E83-C2FD-04D3-757D4D1D5ED9}"/>
+              </a:ext>
+            </a:extLst>
+          </p:cNvPr>
+          <p:cNvSpPr txBox="1"/>
+          <p:nvPr/>
         </p:nvSpPr>
         <p:spPr>
           <a:xfrm>
-            <a:off x="1141412" y="2249486"/>
-            <a:ext cx="9905999" cy="3768541"/>
+            <a:off x="5514683" y="1839805"/>
+            <a:ext cx="5771163" cy="646331"/>
           </a:xfrm>
+          <a:prstGeom prst="rect">
+            <a:avLst/>
+          </a:prstGeom>
+          <a:solidFill>
+            <a:schemeClr val="tx1">
+              <a:lumMod val="95000"/>
+            </a:schemeClr>
+          </a:solidFill>
+          <a:ln>
+            <a:solidFill>
+              <a:schemeClr val="bg1"/>
+            </a:solidFill>
+          </a:ln>
         </p:spPr>
         <p:txBody>
-          <a:bodyPr/>
+          <a:bodyPr wrap="square" rtlCol="0">
+            <a:spAutoFit/>
+          </a:bodyPr>
           <a:lstStyle/>
           <a:p>
             <a:r>
-              <a:rPr lang="en-US" dirty="0"/>
-              <a:t>How to represent anything?</a:t>
+              <a:rPr lang="en-US" dirty="0">
+                <a:solidFill>
+                  <a:schemeClr val="accent1"/>
+                </a:solidFill>
+                <a:latin typeface="Arial" panose="020B0604020202020204" pitchFamily="34" charset="0"/>
+                <a:cs typeface="Arial" panose="020B0604020202020204" pitchFamily="34" charset="0"/>
+              </a:rPr>
+              <a:t>Deterministic Finite Automata</a:t>
+            </a:r>
+            <a:r>
+              <a:rPr lang="en-US" dirty="0">
+                <a:solidFill>
+                  <a:schemeClr val="bg1"/>
+                </a:solidFill>
+                <a:latin typeface="Arial" panose="020B0604020202020204" pitchFamily="34" charset="0"/>
+                <a:cs typeface="Arial" panose="020B0604020202020204" pitchFamily="34" charset="0"/>
+              </a:rPr>
+              <a:t>. Machine that processes input with no memory (except the current state)</a:t>
             </a:r>
           </a:p>
-          <a:p>
-            <a:pPr lvl="1"/>
-            <a:r>
-              <a:rPr lang="en-US" dirty="0"/>
-              <a:t>It has a working “computer program”</a:t>
-            </a:r>
-          </a:p>
+        </p:txBody>
+      </p:sp>
+      <p:grpSp>
+        <p:nvGrpSpPr>
+          <p:cNvPr id="81" name="Group 80">
+            <a:extLst>
+              <a:ext uri="{FF2B5EF4-FFF2-40B4-BE49-F238E27FC236}">
+                <a16:creationId xmlns:a16="http://schemas.microsoft.com/office/drawing/2014/main" id="{AD04A1C7-130F-3FBC-D7CF-A0026EF7FE09}"/>
+              </a:ext>
+            </a:extLst>
+          </p:cNvPr>
+          <p:cNvGrpSpPr/>
+          <p:nvPr/>
+        </p:nvGrpSpPr>
+        <p:grpSpPr>
+          <a:xfrm>
+            <a:off x="1054358" y="3822319"/>
+            <a:ext cx="3192643" cy="1218360"/>
+            <a:chOff x="1110337" y="2641816"/>
+            <a:chExt cx="3192643" cy="1218360"/>
+          </a:xfrm>
+        </p:grpSpPr>
+        <p:sp>
+          <p:nvSpPr>
+            <p:cNvPr id="7" name="Oval 6">
+              <a:extLst>
+                <a:ext uri="{FF2B5EF4-FFF2-40B4-BE49-F238E27FC236}">
+                  <a16:creationId xmlns:a16="http://schemas.microsoft.com/office/drawing/2014/main" id="{81528461-A7E4-0385-79AC-5A7751151D4C}"/>
+                </a:ext>
+              </a:extLst>
+            </p:cNvPr>
+            <p:cNvSpPr/>
+            <p:nvPr/>
+          </p:nvSpPr>
+          <p:spPr>
+            <a:xfrm>
+              <a:off x="1476585" y="2641816"/>
+              <a:ext cx="369947" cy="369948"/>
+            </a:xfrm>
+            <a:prstGeom prst="ellipse">
+              <a:avLst/>
+            </a:prstGeom>
+            <a:solidFill>
+              <a:schemeClr val="accent3"/>
+            </a:solidFill>
+            <a:ln>
+              <a:solidFill>
+                <a:schemeClr val="bg1"/>
+              </a:solidFill>
+            </a:ln>
+          </p:spPr>
+          <p:style>
+            <a:lnRef idx="2">
+              <a:schemeClr val="accent1">
+                <a:shade val="15000"/>
+              </a:schemeClr>
+            </a:lnRef>
+            <a:fillRef idx="1">
+              <a:schemeClr val="accent1"/>
+            </a:fillRef>
+            <a:effectRef idx="0">
+              <a:schemeClr val="accent1"/>
+            </a:effectRef>
+            <a:fontRef idx="minor">
+              <a:schemeClr val="lt1"/>
+            </a:fontRef>
+          </p:style>
+          <p:txBody>
+            <a:bodyPr rtlCol="0" anchor="ctr"/>
+            <a:lstStyle/>
+            <a:p>
+              <a:pPr algn="ctr"/>
+              <a:r>
+                <a:rPr lang="en-US" dirty="0">
+                  <a:solidFill>
+                    <a:schemeClr val="bg1"/>
+                  </a:solidFill>
+                </a:rPr>
+                <a:t>1</a:t>
+              </a:r>
+            </a:p>
+          </p:txBody>
+        </p:sp>
+        <p:sp>
+          <p:nvSpPr>
+            <p:cNvPr id="8" name="Oval 7">
+              <a:extLst>
+                <a:ext uri="{FF2B5EF4-FFF2-40B4-BE49-F238E27FC236}">
+                  <a16:creationId xmlns:a16="http://schemas.microsoft.com/office/drawing/2014/main" id="{20C7AAEC-11C6-54EA-DD82-BF4EBFC444D8}"/>
+                </a:ext>
+              </a:extLst>
+            </p:cNvPr>
+            <p:cNvSpPr/>
+            <p:nvPr/>
+          </p:nvSpPr>
+          <p:spPr>
+            <a:xfrm>
+              <a:off x="2295401" y="2641816"/>
+              <a:ext cx="369947" cy="369948"/>
+            </a:xfrm>
+            <a:prstGeom prst="ellipse">
+              <a:avLst/>
+            </a:prstGeom>
+            <a:solidFill>
+              <a:schemeClr val="accent3"/>
+            </a:solidFill>
+            <a:ln>
+              <a:solidFill>
+                <a:schemeClr val="bg1"/>
+              </a:solidFill>
+            </a:ln>
+          </p:spPr>
+          <p:style>
+            <a:lnRef idx="2">
+              <a:schemeClr val="accent1">
+                <a:shade val="15000"/>
+              </a:schemeClr>
+            </a:lnRef>
+            <a:fillRef idx="1">
+              <a:schemeClr val="accent1"/>
+            </a:fillRef>
+            <a:effectRef idx="0">
+              <a:schemeClr val="accent1"/>
+            </a:effectRef>
+            <a:fontRef idx="minor">
+              <a:schemeClr val="lt1"/>
+            </a:fontRef>
+          </p:style>
+          <p:txBody>
+            <a:bodyPr rtlCol="0" anchor="ctr"/>
+            <a:lstStyle/>
+            <a:p>
+              <a:pPr algn="ctr"/>
+              <a:r>
+                <a:rPr lang="en-US" dirty="0">
+                  <a:solidFill>
+                    <a:schemeClr val="bg1"/>
+                  </a:solidFill>
+                </a:rPr>
+                <a:t>2</a:t>
+              </a:r>
+            </a:p>
+          </p:txBody>
+        </p:sp>
+        <p:sp>
+          <p:nvSpPr>
+            <p:cNvPr id="18" name="Oval 17">
+              <a:extLst>
+                <a:ext uri="{FF2B5EF4-FFF2-40B4-BE49-F238E27FC236}">
+                  <a16:creationId xmlns:a16="http://schemas.microsoft.com/office/drawing/2014/main" id="{F333F8AC-1EE3-819A-FD81-C06384A007EA}"/>
+                </a:ext>
+              </a:extLst>
+            </p:cNvPr>
+            <p:cNvSpPr/>
+            <p:nvPr/>
+          </p:nvSpPr>
+          <p:spPr>
+            <a:xfrm>
+              <a:off x="3114217" y="2641816"/>
+              <a:ext cx="369947" cy="369948"/>
+            </a:xfrm>
+            <a:prstGeom prst="ellipse">
+              <a:avLst/>
+            </a:prstGeom>
+            <a:solidFill>
+              <a:schemeClr val="accent3"/>
+            </a:solidFill>
+            <a:ln>
+              <a:solidFill>
+                <a:schemeClr val="bg1"/>
+              </a:solidFill>
+            </a:ln>
+          </p:spPr>
+          <p:style>
+            <a:lnRef idx="2">
+              <a:schemeClr val="accent1">
+                <a:shade val="15000"/>
+              </a:schemeClr>
+            </a:lnRef>
+            <a:fillRef idx="1">
+              <a:schemeClr val="accent1"/>
+            </a:fillRef>
+            <a:effectRef idx="0">
+              <a:schemeClr val="accent1"/>
+            </a:effectRef>
+            <a:fontRef idx="minor">
+              <a:schemeClr val="lt1"/>
+            </a:fontRef>
+          </p:style>
+          <p:txBody>
+            <a:bodyPr rtlCol="0" anchor="ctr"/>
+            <a:lstStyle/>
+            <a:p>
+              <a:pPr algn="ctr"/>
+              <a:r>
+                <a:rPr lang="en-US" dirty="0">
+                  <a:solidFill>
+                    <a:schemeClr val="bg1"/>
+                  </a:solidFill>
+                </a:rPr>
+                <a:t>3</a:t>
+              </a:r>
+            </a:p>
+          </p:txBody>
+        </p:sp>
+        <p:sp>
+          <p:nvSpPr>
+            <p:cNvPr id="20" name="Oval 19">
+              <a:extLst>
+                <a:ext uri="{FF2B5EF4-FFF2-40B4-BE49-F238E27FC236}">
+                  <a16:creationId xmlns:a16="http://schemas.microsoft.com/office/drawing/2014/main" id="{CB75BC07-75AF-7ED1-3156-696BF72A53D4}"/>
+                </a:ext>
+              </a:extLst>
+            </p:cNvPr>
+            <p:cNvSpPr/>
+            <p:nvPr/>
+          </p:nvSpPr>
+          <p:spPr>
+            <a:xfrm>
+              <a:off x="3933033" y="2641816"/>
+              <a:ext cx="369947" cy="369948"/>
+            </a:xfrm>
+            <a:prstGeom prst="ellipse">
+              <a:avLst/>
+            </a:prstGeom>
+            <a:solidFill>
+              <a:schemeClr val="accent3"/>
+            </a:solidFill>
+            <a:ln>
+              <a:solidFill>
+                <a:schemeClr val="bg1"/>
+              </a:solidFill>
+            </a:ln>
+          </p:spPr>
+          <p:style>
+            <a:lnRef idx="2">
+              <a:schemeClr val="accent1">
+                <a:shade val="15000"/>
+              </a:schemeClr>
+            </a:lnRef>
+            <a:fillRef idx="1">
+              <a:schemeClr val="accent1"/>
+            </a:fillRef>
+            <a:effectRef idx="0">
+              <a:schemeClr val="accent1"/>
+            </a:effectRef>
+            <a:fontRef idx="minor">
+              <a:schemeClr val="lt1"/>
+            </a:fontRef>
+          </p:style>
+          <p:txBody>
+            <a:bodyPr rtlCol="0" anchor="ctr"/>
+            <a:lstStyle/>
+            <a:p>
+              <a:pPr algn="ctr"/>
+              <a:r>
+                <a:rPr lang="en-US" dirty="0">
+                  <a:solidFill>
+                    <a:schemeClr val="bg1"/>
+                  </a:solidFill>
+                </a:rPr>
+                <a:t>4</a:t>
+              </a:r>
+            </a:p>
+          </p:txBody>
+        </p:sp>
+        <p:sp>
+          <p:nvSpPr>
+            <p:cNvPr id="22" name="Oval 21">
+              <a:extLst>
+                <a:ext uri="{FF2B5EF4-FFF2-40B4-BE49-F238E27FC236}">
+                  <a16:creationId xmlns:a16="http://schemas.microsoft.com/office/drawing/2014/main" id="{A19B7AC0-737C-52C1-786C-C43F21A366E9}"/>
+                </a:ext>
+              </a:extLst>
+            </p:cNvPr>
+            <p:cNvSpPr/>
+            <p:nvPr/>
+          </p:nvSpPr>
+          <p:spPr>
+            <a:xfrm>
+              <a:off x="1476585" y="3490228"/>
+              <a:ext cx="369947" cy="369948"/>
+            </a:xfrm>
+            <a:prstGeom prst="ellipse">
+              <a:avLst/>
+            </a:prstGeom>
+            <a:solidFill>
+              <a:schemeClr val="accent3"/>
+            </a:solidFill>
+            <a:ln>
+              <a:solidFill>
+                <a:schemeClr val="bg1"/>
+              </a:solidFill>
+            </a:ln>
+          </p:spPr>
+          <p:style>
+            <a:lnRef idx="2">
+              <a:schemeClr val="accent1">
+                <a:shade val="15000"/>
+              </a:schemeClr>
+            </a:lnRef>
+            <a:fillRef idx="1">
+              <a:schemeClr val="accent1"/>
+            </a:fillRef>
+            <a:effectRef idx="0">
+              <a:schemeClr val="accent1"/>
+            </a:effectRef>
+            <a:fontRef idx="minor">
+              <a:schemeClr val="lt1"/>
+            </a:fontRef>
+          </p:style>
+          <p:txBody>
+            <a:bodyPr rtlCol="0" anchor="ctr"/>
+            <a:lstStyle/>
+            <a:p>
+              <a:pPr algn="ctr"/>
+              <a:r>
+                <a:rPr lang="en-US" dirty="0">
+                  <a:solidFill>
+                    <a:schemeClr val="bg1"/>
+                  </a:solidFill>
+                </a:rPr>
+                <a:t>8</a:t>
+              </a:r>
+            </a:p>
+          </p:txBody>
+        </p:sp>
+        <p:sp>
+          <p:nvSpPr>
+            <p:cNvPr id="23" name="Oval 22">
+              <a:extLst>
+                <a:ext uri="{FF2B5EF4-FFF2-40B4-BE49-F238E27FC236}">
+                  <a16:creationId xmlns:a16="http://schemas.microsoft.com/office/drawing/2014/main" id="{6A5484A8-4425-DFD7-065E-C58B782F92D1}"/>
+                </a:ext>
+              </a:extLst>
+            </p:cNvPr>
+            <p:cNvSpPr/>
+            <p:nvPr/>
+          </p:nvSpPr>
+          <p:spPr>
+            <a:xfrm>
+              <a:off x="2295401" y="3490228"/>
+              <a:ext cx="369947" cy="369948"/>
+            </a:xfrm>
+            <a:prstGeom prst="ellipse">
+              <a:avLst/>
+            </a:prstGeom>
+            <a:solidFill>
+              <a:schemeClr val="accent3"/>
+            </a:solidFill>
+            <a:ln>
+              <a:solidFill>
+                <a:schemeClr val="bg1"/>
+              </a:solidFill>
+            </a:ln>
+          </p:spPr>
+          <p:style>
+            <a:lnRef idx="2">
+              <a:schemeClr val="accent1">
+                <a:shade val="15000"/>
+              </a:schemeClr>
+            </a:lnRef>
+            <a:fillRef idx="1">
+              <a:schemeClr val="accent1"/>
+            </a:fillRef>
+            <a:effectRef idx="0">
+              <a:schemeClr val="accent1"/>
+            </a:effectRef>
+            <a:fontRef idx="minor">
+              <a:schemeClr val="lt1"/>
+            </a:fontRef>
+          </p:style>
+          <p:txBody>
+            <a:bodyPr rtlCol="0" anchor="ctr"/>
+            <a:lstStyle/>
+            <a:p>
+              <a:pPr algn="ctr"/>
+              <a:r>
+                <a:rPr lang="en-US" dirty="0">
+                  <a:solidFill>
+                    <a:schemeClr val="bg1"/>
+                  </a:solidFill>
+                </a:rPr>
+                <a:t>7</a:t>
+              </a:r>
+            </a:p>
+          </p:txBody>
+        </p:sp>
+        <p:sp>
+          <p:nvSpPr>
+            <p:cNvPr id="25" name="Oval 24">
+              <a:extLst>
+                <a:ext uri="{FF2B5EF4-FFF2-40B4-BE49-F238E27FC236}">
+                  <a16:creationId xmlns:a16="http://schemas.microsoft.com/office/drawing/2014/main" id="{D16B0D63-5EAA-5D50-53D5-F97E682376E2}"/>
+                </a:ext>
+              </a:extLst>
+            </p:cNvPr>
+            <p:cNvSpPr/>
+            <p:nvPr/>
+          </p:nvSpPr>
+          <p:spPr>
+            <a:xfrm>
+              <a:off x="3114217" y="3490228"/>
+              <a:ext cx="369947" cy="369948"/>
+            </a:xfrm>
+            <a:prstGeom prst="ellipse">
+              <a:avLst/>
+            </a:prstGeom>
+            <a:solidFill>
+              <a:schemeClr val="accent3"/>
+            </a:solidFill>
+            <a:ln>
+              <a:solidFill>
+                <a:schemeClr val="bg1"/>
+              </a:solidFill>
+            </a:ln>
+          </p:spPr>
+          <p:style>
+            <a:lnRef idx="2">
+              <a:schemeClr val="accent1">
+                <a:shade val="15000"/>
+              </a:schemeClr>
+            </a:lnRef>
+            <a:fillRef idx="1">
+              <a:schemeClr val="accent1"/>
+            </a:fillRef>
+            <a:effectRef idx="0">
+              <a:schemeClr val="accent1"/>
+            </a:effectRef>
+            <a:fontRef idx="minor">
+              <a:schemeClr val="lt1"/>
+            </a:fontRef>
+          </p:style>
+          <p:txBody>
+            <a:bodyPr rtlCol="0" anchor="ctr"/>
+            <a:lstStyle/>
+            <a:p>
+              <a:pPr algn="ctr"/>
+              <a:r>
+                <a:rPr lang="en-US" dirty="0">
+                  <a:solidFill>
+                    <a:schemeClr val="bg1"/>
+                  </a:solidFill>
+                </a:rPr>
+                <a:t>6</a:t>
+              </a:r>
+            </a:p>
+          </p:txBody>
+        </p:sp>
+        <p:sp>
+          <p:nvSpPr>
+            <p:cNvPr id="26" name="Oval 25">
+              <a:extLst>
+                <a:ext uri="{FF2B5EF4-FFF2-40B4-BE49-F238E27FC236}">
+                  <a16:creationId xmlns:a16="http://schemas.microsoft.com/office/drawing/2014/main" id="{A603CE8F-E2E5-1193-9AC8-24B60DA9BE40}"/>
+                </a:ext>
+              </a:extLst>
+            </p:cNvPr>
+            <p:cNvSpPr/>
+            <p:nvPr/>
+          </p:nvSpPr>
+          <p:spPr>
+            <a:xfrm>
+              <a:off x="3933033" y="3490228"/>
+              <a:ext cx="369947" cy="369948"/>
+            </a:xfrm>
+            <a:prstGeom prst="ellipse">
+              <a:avLst/>
+            </a:prstGeom>
+            <a:solidFill>
+              <a:schemeClr val="accent3"/>
+            </a:solidFill>
+            <a:ln>
+              <a:solidFill>
+                <a:schemeClr val="bg1"/>
+              </a:solidFill>
+            </a:ln>
+          </p:spPr>
+          <p:style>
+            <a:lnRef idx="2">
+              <a:schemeClr val="accent1">
+                <a:shade val="15000"/>
+              </a:schemeClr>
+            </a:lnRef>
+            <a:fillRef idx="1">
+              <a:schemeClr val="accent1"/>
+            </a:fillRef>
+            <a:effectRef idx="0">
+              <a:schemeClr val="accent1"/>
+            </a:effectRef>
+            <a:fontRef idx="minor">
+              <a:schemeClr val="lt1"/>
+            </a:fontRef>
+          </p:style>
+          <p:txBody>
+            <a:bodyPr rtlCol="0" anchor="ctr"/>
+            <a:lstStyle/>
+            <a:p>
+              <a:pPr algn="ctr"/>
+              <a:r>
+                <a:rPr lang="en-US" dirty="0">
+                  <a:solidFill>
+                    <a:schemeClr val="bg1"/>
+                  </a:solidFill>
+                </a:rPr>
+                <a:t>5</a:t>
+              </a:r>
+            </a:p>
+          </p:txBody>
+        </p:sp>
+        <p:sp>
+          <p:nvSpPr>
+            <p:cNvPr id="28" name="Oval 27">
+              <a:extLst>
+                <a:ext uri="{FF2B5EF4-FFF2-40B4-BE49-F238E27FC236}">
+                  <a16:creationId xmlns:a16="http://schemas.microsoft.com/office/drawing/2014/main" id="{C70C7ADC-1911-A9D6-A36C-C429E16945C8}"/>
+                </a:ext>
+              </a:extLst>
+            </p:cNvPr>
+            <p:cNvSpPr/>
+            <p:nvPr/>
+          </p:nvSpPr>
+          <p:spPr>
+            <a:xfrm>
+              <a:off x="3145045" y="2672645"/>
+              <a:ext cx="309523" cy="309523"/>
+            </a:xfrm>
+            <a:prstGeom prst="ellipse">
+              <a:avLst/>
+            </a:prstGeom>
+            <a:solidFill>
+              <a:schemeClr val="accent3"/>
+            </a:solidFill>
+            <a:ln>
+              <a:solidFill>
+                <a:schemeClr val="bg1"/>
+              </a:solidFill>
+            </a:ln>
+          </p:spPr>
+          <p:style>
+            <a:lnRef idx="2">
+              <a:schemeClr val="accent1">
+                <a:shade val="15000"/>
+              </a:schemeClr>
+            </a:lnRef>
+            <a:fillRef idx="1">
+              <a:schemeClr val="accent1"/>
+            </a:fillRef>
+            <a:effectRef idx="0">
+              <a:schemeClr val="accent1"/>
+            </a:effectRef>
+            <a:fontRef idx="minor">
+              <a:schemeClr val="lt1"/>
+            </a:fontRef>
+          </p:style>
+          <p:txBody>
+            <a:bodyPr rtlCol="0" anchor="ctr"/>
+            <a:lstStyle/>
+            <a:p>
+              <a:pPr algn="ctr"/>
+              <a:r>
+                <a:rPr lang="en-US" dirty="0">
+                  <a:solidFill>
+                    <a:schemeClr val="bg1"/>
+                  </a:solidFill>
+                </a:rPr>
+                <a:t>3</a:t>
+              </a:r>
+            </a:p>
+          </p:txBody>
+        </p:sp>
+        <p:sp>
+          <p:nvSpPr>
+            <p:cNvPr id="29" name="Oval 28">
+              <a:extLst>
+                <a:ext uri="{FF2B5EF4-FFF2-40B4-BE49-F238E27FC236}">
+                  <a16:creationId xmlns:a16="http://schemas.microsoft.com/office/drawing/2014/main" id="{4ECF55F3-ACCA-2184-7E02-9A141D262E4D}"/>
+                </a:ext>
+              </a:extLst>
+            </p:cNvPr>
+            <p:cNvSpPr/>
+            <p:nvPr/>
+          </p:nvSpPr>
+          <p:spPr>
+            <a:xfrm>
+              <a:off x="3145045" y="3520441"/>
+              <a:ext cx="309523" cy="309523"/>
+            </a:xfrm>
+            <a:prstGeom prst="ellipse">
+              <a:avLst/>
+            </a:prstGeom>
+            <a:solidFill>
+              <a:schemeClr val="accent3"/>
+            </a:solidFill>
+            <a:ln>
+              <a:solidFill>
+                <a:schemeClr val="bg1"/>
+              </a:solidFill>
+            </a:ln>
+          </p:spPr>
+          <p:style>
+            <a:lnRef idx="2">
+              <a:schemeClr val="accent1">
+                <a:shade val="15000"/>
+              </a:schemeClr>
+            </a:lnRef>
+            <a:fillRef idx="1">
+              <a:schemeClr val="accent1"/>
+            </a:fillRef>
+            <a:effectRef idx="0">
+              <a:schemeClr val="accent1"/>
+            </a:effectRef>
+            <a:fontRef idx="minor">
+              <a:schemeClr val="lt1"/>
+            </a:fontRef>
+          </p:style>
+          <p:txBody>
+            <a:bodyPr rtlCol="0" anchor="ctr"/>
+            <a:lstStyle/>
+            <a:p>
+              <a:pPr algn="ctr"/>
+              <a:r>
+                <a:rPr lang="en-US" dirty="0">
+                  <a:solidFill>
+                    <a:schemeClr val="bg1"/>
+                  </a:solidFill>
+                </a:rPr>
+                <a:t>6</a:t>
+              </a:r>
+            </a:p>
+          </p:txBody>
+        </p:sp>
+        <p:sp>
+          <p:nvSpPr>
+            <p:cNvPr id="31" name="Oval 30">
+              <a:extLst>
+                <a:ext uri="{FF2B5EF4-FFF2-40B4-BE49-F238E27FC236}">
+                  <a16:creationId xmlns:a16="http://schemas.microsoft.com/office/drawing/2014/main" id="{2CCC7723-7EA8-921E-1F0E-394F93F42CB5}"/>
+                </a:ext>
+              </a:extLst>
+            </p:cNvPr>
+            <p:cNvSpPr/>
+            <p:nvPr/>
+          </p:nvSpPr>
+          <p:spPr>
+            <a:xfrm>
+              <a:off x="2326230" y="3520441"/>
+              <a:ext cx="309523" cy="309523"/>
+            </a:xfrm>
+            <a:prstGeom prst="ellipse">
+              <a:avLst/>
+            </a:prstGeom>
+            <a:solidFill>
+              <a:schemeClr val="accent3"/>
+            </a:solidFill>
+            <a:ln>
+              <a:solidFill>
+                <a:schemeClr val="bg1"/>
+              </a:solidFill>
+            </a:ln>
+          </p:spPr>
+          <p:style>
+            <a:lnRef idx="2">
+              <a:schemeClr val="accent1">
+                <a:shade val="15000"/>
+              </a:schemeClr>
+            </a:lnRef>
+            <a:fillRef idx="1">
+              <a:schemeClr val="accent1"/>
+            </a:fillRef>
+            <a:effectRef idx="0">
+              <a:schemeClr val="accent1"/>
+            </a:effectRef>
+            <a:fontRef idx="minor">
+              <a:schemeClr val="lt1"/>
+            </a:fontRef>
+          </p:style>
+          <p:txBody>
+            <a:bodyPr rtlCol="0" anchor="ctr"/>
+            <a:lstStyle/>
+            <a:p>
+              <a:pPr algn="ctr"/>
+              <a:r>
+                <a:rPr lang="en-US" dirty="0">
+                  <a:solidFill>
+                    <a:schemeClr val="bg1"/>
+                  </a:solidFill>
+                </a:rPr>
+                <a:t>5</a:t>
+              </a:r>
+            </a:p>
+          </p:txBody>
+        </p:sp>
+        <p:sp>
+          <p:nvSpPr>
+            <p:cNvPr id="32" name="Oval 31">
+              <a:extLst>
+                <a:ext uri="{FF2B5EF4-FFF2-40B4-BE49-F238E27FC236}">
+                  <a16:creationId xmlns:a16="http://schemas.microsoft.com/office/drawing/2014/main" id="{492A26D1-CA3E-D9DC-5785-C6EDE6E84866}"/>
+                </a:ext>
+              </a:extLst>
+            </p:cNvPr>
+            <p:cNvSpPr/>
+            <p:nvPr/>
+          </p:nvSpPr>
+          <p:spPr>
+            <a:xfrm>
+              <a:off x="1506797" y="3520441"/>
+              <a:ext cx="309523" cy="309523"/>
+            </a:xfrm>
+            <a:prstGeom prst="ellipse">
+              <a:avLst/>
+            </a:prstGeom>
+            <a:solidFill>
+              <a:schemeClr val="accent3"/>
+            </a:solidFill>
+            <a:ln>
+              <a:solidFill>
+                <a:schemeClr val="bg1"/>
+              </a:solidFill>
+            </a:ln>
+          </p:spPr>
+          <p:style>
+            <a:lnRef idx="2">
+              <a:schemeClr val="accent1">
+                <a:shade val="15000"/>
+              </a:schemeClr>
+            </a:lnRef>
+            <a:fillRef idx="1">
+              <a:schemeClr val="accent1"/>
+            </a:fillRef>
+            <a:effectRef idx="0">
+              <a:schemeClr val="accent1"/>
+            </a:effectRef>
+            <a:fontRef idx="minor">
+              <a:schemeClr val="lt1"/>
+            </a:fontRef>
+          </p:style>
+          <p:txBody>
+            <a:bodyPr rtlCol="0" anchor="ctr"/>
+            <a:lstStyle/>
+            <a:p>
+              <a:pPr algn="ctr"/>
+              <a:r>
+                <a:rPr lang="en-US" dirty="0">
+                  <a:solidFill>
+                    <a:schemeClr val="bg1"/>
+                  </a:solidFill>
+                </a:rPr>
+                <a:t>8</a:t>
+              </a:r>
+            </a:p>
+          </p:txBody>
+        </p:sp>
+        <p:cxnSp>
+          <p:nvCxnSpPr>
+            <p:cNvPr id="33" name="Straight Arrow Connector 32">
+              <a:extLst>
+                <a:ext uri="{FF2B5EF4-FFF2-40B4-BE49-F238E27FC236}">
+                  <a16:creationId xmlns:a16="http://schemas.microsoft.com/office/drawing/2014/main" id="{13A9C85F-F1FF-C062-ED67-8EABAE380E4F}"/>
+                </a:ext>
+              </a:extLst>
+            </p:cNvPr>
+            <p:cNvCxnSpPr>
+              <a:cxnSpLocks/>
+              <a:endCxn id="7" idx="2"/>
+            </p:cNvCxnSpPr>
+            <p:nvPr/>
+          </p:nvCxnSpPr>
+          <p:spPr>
+            <a:xfrm>
+              <a:off x="1110337" y="2826790"/>
+              <a:ext cx="366248" cy="0"/>
+            </a:xfrm>
+            <a:prstGeom prst="straightConnector1">
+              <a:avLst/>
+            </a:prstGeom>
+            <a:ln w="31750">
+              <a:solidFill>
+                <a:schemeClr val="accent3"/>
+              </a:solidFill>
+              <a:tailEnd type="triangle"/>
+            </a:ln>
+          </p:spPr>
+          <p:style>
+            <a:lnRef idx="1">
+              <a:schemeClr val="accent1"/>
+            </a:lnRef>
+            <a:fillRef idx="0">
+              <a:schemeClr val="accent1"/>
+            </a:fillRef>
+            <a:effectRef idx="0">
+              <a:schemeClr val="accent1"/>
+            </a:effectRef>
+            <a:fontRef idx="minor">
+              <a:schemeClr val="tx1"/>
+            </a:fontRef>
+          </p:style>
+        </p:cxnSp>
+        <p:cxnSp>
+          <p:nvCxnSpPr>
+            <p:cNvPr id="35" name="Straight Arrow Connector 34">
+              <a:extLst>
+                <a:ext uri="{FF2B5EF4-FFF2-40B4-BE49-F238E27FC236}">
+                  <a16:creationId xmlns:a16="http://schemas.microsoft.com/office/drawing/2014/main" id="{509EB00B-7D8C-5237-CA27-0E74F33CFE1D}"/>
+                </a:ext>
+              </a:extLst>
+            </p:cNvPr>
+            <p:cNvCxnSpPr>
+              <a:cxnSpLocks/>
+              <a:stCxn id="7" idx="6"/>
+              <a:endCxn id="8" idx="2"/>
+            </p:cNvCxnSpPr>
+            <p:nvPr/>
+          </p:nvCxnSpPr>
+          <p:spPr>
+            <a:xfrm>
+              <a:off x="1846532" y="2826790"/>
+              <a:ext cx="448869" cy="0"/>
+            </a:xfrm>
+            <a:prstGeom prst="straightConnector1">
+              <a:avLst/>
+            </a:prstGeom>
+            <a:ln w="31750">
+              <a:solidFill>
+                <a:schemeClr val="accent3"/>
+              </a:solidFill>
+              <a:tailEnd type="triangle"/>
+            </a:ln>
+          </p:spPr>
+          <p:style>
+            <a:lnRef idx="1">
+              <a:schemeClr val="accent1"/>
+            </a:lnRef>
+            <a:fillRef idx="0">
+              <a:schemeClr val="accent1"/>
+            </a:fillRef>
+            <a:effectRef idx="0">
+              <a:schemeClr val="accent1"/>
+            </a:effectRef>
+            <a:fontRef idx="minor">
+              <a:schemeClr val="tx1"/>
+            </a:fontRef>
+          </p:style>
+        </p:cxnSp>
+        <p:cxnSp>
+          <p:nvCxnSpPr>
+            <p:cNvPr id="36" name="Straight Arrow Connector 35">
+              <a:extLst>
+                <a:ext uri="{FF2B5EF4-FFF2-40B4-BE49-F238E27FC236}">
+                  <a16:creationId xmlns:a16="http://schemas.microsoft.com/office/drawing/2014/main" id="{22A46C6F-DA6B-E85A-C57B-3285520333ED}"/>
+                </a:ext>
+              </a:extLst>
+            </p:cNvPr>
+            <p:cNvCxnSpPr>
+              <a:cxnSpLocks/>
+              <a:stCxn id="8" idx="6"/>
+              <a:endCxn id="18" idx="2"/>
+            </p:cNvCxnSpPr>
+            <p:nvPr/>
+          </p:nvCxnSpPr>
+          <p:spPr>
+            <a:xfrm>
+              <a:off x="2665348" y="2826790"/>
+              <a:ext cx="448869" cy="0"/>
+            </a:xfrm>
+            <a:prstGeom prst="straightConnector1">
+              <a:avLst/>
+            </a:prstGeom>
+            <a:ln w="31750">
+              <a:solidFill>
+                <a:schemeClr val="accent3"/>
+              </a:solidFill>
+              <a:tailEnd type="triangle"/>
+            </a:ln>
+          </p:spPr>
+          <p:style>
+            <a:lnRef idx="1">
+              <a:schemeClr val="accent1"/>
+            </a:lnRef>
+            <a:fillRef idx="0">
+              <a:schemeClr val="accent1"/>
+            </a:fillRef>
+            <a:effectRef idx="0">
+              <a:schemeClr val="accent1"/>
+            </a:effectRef>
+            <a:fontRef idx="minor">
+              <a:schemeClr val="tx1"/>
+            </a:fontRef>
+          </p:style>
+        </p:cxnSp>
+        <p:cxnSp>
+          <p:nvCxnSpPr>
+            <p:cNvPr id="38" name="Straight Arrow Connector 37">
+              <a:extLst>
+                <a:ext uri="{FF2B5EF4-FFF2-40B4-BE49-F238E27FC236}">
+                  <a16:creationId xmlns:a16="http://schemas.microsoft.com/office/drawing/2014/main" id="{A8D0FB16-7D16-FBB9-969F-D1B149563D03}"/>
+                </a:ext>
+              </a:extLst>
+            </p:cNvPr>
+            <p:cNvCxnSpPr>
+              <a:cxnSpLocks/>
+              <a:stCxn id="18" idx="6"/>
+              <a:endCxn id="20" idx="2"/>
+            </p:cNvCxnSpPr>
+            <p:nvPr/>
+          </p:nvCxnSpPr>
+          <p:spPr>
+            <a:xfrm>
+              <a:off x="3484164" y="2826790"/>
+              <a:ext cx="448869" cy="0"/>
+            </a:xfrm>
+            <a:prstGeom prst="straightConnector1">
+              <a:avLst/>
+            </a:prstGeom>
+            <a:ln w="31750">
+              <a:solidFill>
+                <a:schemeClr val="accent3"/>
+              </a:solidFill>
+              <a:tailEnd type="triangle"/>
+            </a:ln>
+          </p:spPr>
+          <p:style>
+            <a:lnRef idx="1">
+              <a:schemeClr val="accent1"/>
+            </a:lnRef>
+            <a:fillRef idx="0">
+              <a:schemeClr val="accent1"/>
+            </a:fillRef>
+            <a:effectRef idx="0">
+              <a:schemeClr val="accent1"/>
+            </a:effectRef>
+            <a:fontRef idx="minor">
+              <a:schemeClr val="tx1"/>
+            </a:fontRef>
+          </p:style>
+        </p:cxnSp>
+        <p:cxnSp>
+          <p:nvCxnSpPr>
+            <p:cNvPr id="39" name="Straight Arrow Connector 38">
+              <a:extLst>
+                <a:ext uri="{FF2B5EF4-FFF2-40B4-BE49-F238E27FC236}">
+                  <a16:creationId xmlns:a16="http://schemas.microsoft.com/office/drawing/2014/main" id="{60ACD7C9-5CE9-EB76-2BE1-F4F50EA07D79}"/>
+                </a:ext>
+              </a:extLst>
+            </p:cNvPr>
+            <p:cNvCxnSpPr>
+              <a:cxnSpLocks/>
+              <a:stCxn id="18" idx="5"/>
+              <a:endCxn id="26" idx="1"/>
+            </p:cNvCxnSpPr>
+            <p:nvPr/>
+          </p:nvCxnSpPr>
+          <p:spPr>
+            <a:xfrm>
+              <a:off x="3429987" y="2957586"/>
+              <a:ext cx="557224" cy="586820"/>
+            </a:xfrm>
+            <a:prstGeom prst="straightConnector1">
+              <a:avLst/>
+            </a:prstGeom>
+            <a:ln w="31750">
+              <a:solidFill>
+                <a:schemeClr val="accent3"/>
+              </a:solidFill>
+              <a:tailEnd type="triangle"/>
+            </a:ln>
+          </p:spPr>
+          <p:style>
+            <a:lnRef idx="1">
+              <a:schemeClr val="accent1"/>
+            </a:lnRef>
+            <a:fillRef idx="0">
+              <a:schemeClr val="accent1"/>
+            </a:fillRef>
+            <a:effectRef idx="0">
+              <a:schemeClr val="accent1"/>
+            </a:effectRef>
+            <a:fontRef idx="minor">
+              <a:schemeClr val="tx1"/>
+            </a:fontRef>
+          </p:style>
+        </p:cxnSp>
+        <p:cxnSp>
+          <p:nvCxnSpPr>
+            <p:cNvPr id="41" name="Straight Arrow Connector 40">
+              <a:extLst>
+                <a:ext uri="{FF2B5EF4-FFF2-40B4-BE49-F238E27FC236}">
+                  <a16:creationId xmlns:a16="http://schemas.microsoft.com/office/drawing/2014/main" id="{408D750C-1797-980B-0A69-1D515C065FCA}"/>
+                </a:ext>
+              </a:extLst>
+            </p:cNvPr>
+            <p:cNvCxnSpPr>
+              <a:cxnSpLocks/>
+              <a:stCxn id="20" idx="4"/>
+              <a:endCxn id="26" idx="0"/>
+            </p:cNvCxnSpPr>
+            <p:nvPr/>
+          </p:nvCxnSpPr>
+          <p:spPr>
+            <a:xfrm>
+              <a:off x="4118006" y="3011764"/>
+              <a:ext cx="0" cy="478465"/>
+            </a:xfrm>
+            <a:prstGeom prst="straightConnector1">
+              <a:avLst/>
+            </a:prstGeom>
+            <a:ln w="31750">
+              <a:solidFill>
+                <a:schemeClr val="accent3"/>
+              </a:solidFill>
+              <a:tailEnd type="triangle"/>
+            </a:ln>
+          </p:spPr>
+          <p:style>
+            <a:lnRef idx="1">
+              <a:schemeClr val="accent1"/>
+            </a:lnRef>
+            <a:fillRef idx="0">
+              <a:schemeClr val="accent1"/>
+            </a:fillRef>
+            <a:effectRef idx="0">
+              <a:schemeClr val="accent1"/>
+            </a:effectRef>
+            <a:fontRef idx="minor">
+              <a:schemeClr val="tx1"/>
+            </a:fontRef>
+          </p:style>
+        </p:cxnSp>
+        <p:cxnSp>
+          <p:nvCxnSpPr>
+            <p:cNvPr id="42" name="Straight Arrow Connector 41">
+              <a:extLst>
+                <a:ext uri="{FF2B5EF4-FFF2-40B4-BE49-F238E27FC236}">
+                  <a16:creationId xmlns:a16="http://schemas.microsoft.com/office/drawing/2014/main" id="{15D4C9B5-F9AE-35DA-8C15-5C2ABC06FBBA}"/>
+                </a:ext>
+              </a:extLst>
+            </p:cNvPr>
+            <p:cNvCxnSpPr>
+              <a:cxnSpLocks/>
+              <a:stCxn id="26" idx="2"/>
+              <a:endCxn id="25" idx="6"/>
+            </p:cNvCxnSpPr>
+            <p:nvPr/>
+          </p:nvCxnSpPr>
+          <p:spPr>
+            <a:xfrm flipH="1">
+              <a:off x="3484164" y="3675202"/>
+              <a:ext cx="448869" cy="0"/>
+            </a:xfrm>
+            <a:prstGeom prst="straightConnector1">
+              <a:avLst/>
+            </a:prstGeom>
+            <a:ln w="31750">
+              <a:solidFill>
+                <a:schemeClr val="accent3"/>
+              </a:solidFill>
+              <a:tailEnd type="triangle"/>
+            </a:ln>
+          </p:spPr>
+          <p:style>
+            <a:lnRef idx="1">
+              <a:schemeClr val="accent1"/>
+            </a:lnRef>
+            <a:fillRef idx="0">
+              <a:schemeClr val="accent1"/>
+            </a:fillRef>
+            <a:effectRef idx="0">
+              <a:schemeClr val="accent1"/>
+            </a:effectRef>
+            <a:fontRef idx="minor">
+              <a:schemeClr val="tx1"/>
+            </a:fontRef>
+          </p:style>
+        </p:cxnSp>
+        <p:cxnSp>
+          <p:nvCxnSpPr>
+            <p:cNvPr id="44" name="Straight Arrow Connector 43">
+              <a:extLst>
+                <a:ext uri="{FF2B5EF4-FFF2-40B4-BE49-F238E27FC236}">
+                  <a16:creationId xmlns:a16="http://schemas.microsoft.com/office/drawing/2014/main" id="{377B3346-CF95-3DCA-6632-F57335BA3450}"/>
+                </a:ext>
+              </a:extLst>
+            </p:cNvPr>
+            <p:cNvCxnSpPr>
+              <a:cxnSpLocks/>
+              <a:stCxn id="25" idx="2"/>
+              <a:endCxn id="23" idx="6"/>
+            </p:cNvCxnSpPr>
+            <p:nvPr/>
+          </p:nvCxnSpPr>
+          <p:spPr>
+            <a:xfrm flipH="1">
+              <a:off x="2665348" y="3675202"/>
+              <a:ext cx="448869" cy="0"/>
+            </a:xfrm>
+            <a:prstGeom prst="straightConnector1">
+              <a:avLst/>
+            </a:prstGeom>
+            <a:ln w="31750">
+              <a:solidFill>
+                <a:schemeClr val="accent3"/>
+              </a:solidFill>
+              <a:tailEnd type="triangle"/>
+            </a:ln>
+          </p:spPr>
+          <p:style>
+            <a:lnRef idx="1">
+              <a:schemeClr val="accent1"/>
+            </a:lnRef>
+            <a:fillRef idx="0">
+              <a:schemeClr val="accent1"/>
+            </a:fillRef>
+            <a:effectRef idx="0">
+              <a:schemeClr val="accent1"/>
+            </a:effectRef>
+            <a:fontRef idx="minor">
+              <a:schemeClr val="tx1"/>
+            </a:fontRef>
+          </p:style>
+        </p:cxnSp>
+        <p:cxnSp>
+          <p:nvCxnSpPr>
+            <p:cNvPr id="45" name="Straight Arrow Connector 44">
+              <a:extLst>
+                <a:ext uri="{FF2B5EF4-FFF2-40B4-BE49-F238E27FC236}">
+                  <a16:creationId xmlns:a16="http://schemas.microsoft.com/office/drawing/2014/main" id="{2BCA1138-4EDE-2E55-FEDF-6A7A5917C66C}"/>
+                </a:ext>
+              </a:extLst>
+            </p:cNvPr>
+            <p:cNvCxnSpPr>
+              <a:cxnSpLocks/>
+              <a:stCxn id="23" idx="2"/>
+              <a:endCxn id="22" idx="6"/>
+            </p:cNvCxnSpPr>
+            <p:nvPr/>
+          </p:nvCxnSpPr>
+          <p:spPr>
+            <a:xfrm flipH="1">
+              <a:off x="1846532" y="3675202"/>
+              <a:ext cx="448869" cy="0"/>
+            </a:xfrm>
+            <a:prstGeom prst="straightConnector1">
+              <a:avLst/>
+            </a:prstGeom>
+            <a:ln w="31750">
+              <a:solidFill>
+                <a:schemeClr val="accent3"/>
+              </a:solidFill>
+              <a:tailEnd type="triangle"/>
+            </a:ln>
+          </p:spPr>
+          <p:style>
+            <a:lnRef idx="1">
+              <a:schemeClr val="accent1"/>
+            </a:lnRef>
+            <a:fillRef idx="0">
+              <a:schemeClr val="accent1"/>
+            </a:fillRef>
+            <a:effectRef idx="0">
+              <a:schemeClr val="accent1"/>
+            </a:effectRef>
+            <a:fontRef idx="minor">
+              <a:schemeClr val="tx1"/>
+            </a:fontRef>
+          </p:style>
+        </p:cxnSp>
+      </p:grpSp>
+      <p:sp>
+        <p:nvSpPr>
+          <p:cNvPr id="58" name="TextBox 57">
+            <a:extLst>
+              <a:ext uri="{FF2B5EF4-FFF2-40B4-BE49-F238E27FC236}">
+                <a16:creationId xmlns:a16="http://schemas.microsoft.com/office/drawing/2014/main" id="{01467553-929B-BA0B-53ED-8DD7F0768118}"/>
+              </a:ext>
+            </a:extLst>
+          </p:cNvPr>
+          <p:cNvSpPr txBox="1"/>
+          <p:nvPr/>
+        </p:nvSpPr>
+        <p:spPr>
+          <a:xfrm>
+            <a:off x="5514687" y="4077556"/>
+            <a:ext cx="5771159" cy="646331"/>
+          </a:xfrm>
+          <a:prstGeom prst="rect">
+            <a:avLst/>
+          </a:prstGeom>
+          <a:solidFill>
+            <a:schemeClr val="tx1">
+              <a:lumMod val="95000"/>
+            </a:schemeClr>
+          </a:solidFill>
+          <a:ln>
+            <a:solidFill>
+              <a:schemeClr val="bg1"/>
+            </a:solidFill>
+          </a:ln>
+        </p:spPr>
+        <p:txBody>
+          <a:bodyPr wrap="square" rtlCol="0">
+            <a:spAutoFit/>
+          </a:bodyPr>
+          <a:lstStyle/>
           <a:p>
             <a:r>
-              <a:rPr lang="en-US" dirty="0"/>
-              <a:t>What is a computer program?</a:t>
+              <a:rPr lang="en-US" dirty="0">
+                <a:solidFill>
+                  <a:schemeClr val="accent3"/>
+                </a:solidFill>
+                <a:latin typeface="Arial" panose="020B0604020202020204" pitchFamily="34" charset="0"/>
+                <a:cs typeface="Arial" panose="020B0604020202020204" pitchFamily="34" charset="0"/>
+              </a:rPr>
+              <a:t>Non-deterministic Finite Automata</a:t>
             </a:r>
-          </a:p>
-          <a:p>
-            <a:pPr lvl="1"/>
             <a:r>
-              <a:rPr lang="en-US" dirty="0"/>
-              <a:t>Introduce DFA (and NFA?)</a:t>
-            </a:r>
-          </a:p>
-          <a:p>
-            <a:pPr lvl="1"/>
-            <a:r>
-              <a:rPr lang="en-US" dirty="0"/>
-              <a:t>Only briefly mention the other ones</a:t>
-            </a:r>
-          </a:p>
-          <a:p>
-            <a:r>
-              <a:rPr lang="en-US" dirty="0"/>
-              <a:t>How do we represent a “computer program”?</a:t>
+              <a:rPr lang="en-US" dirty="0">
+                <a:solidFill>
+                  <a:schemeClr val="bg1"/>
+                </a:solidFill>
+                <a:latin typeface="Arial" panose="020B0604020202020204" pitchFamily="34" charset="0"/>
+                <a:cs typeface="Arial" panose="020B0604020202020204" pitchFamily="34" charset="0"/>
+              </a:rPr>
+              <a:t>. DFA that can be in multiple states at once (more in a moment)</a:t>
             </a:r>
           </a:p>
         </p:txBody>
@@ -35173,7 +39360,7 @@
     </p:spTree>
     <p:extLst>
       <p:ext uri="{BB962C8B-B14F-4D97-AF65-F5344CB8AC3E}">
-        <p14:creationId xmlns:p14="http://schemas.microsoft.com/office/powerpoint/2010/main" val="1613607325"/>
+        <p14:creationId xmlns:p14="http://schemas.microsoft.com/office/powerpoint/2010/main" val="2908740732"/>
       </p:ext>
     </p:extLst>
   </p:cSld>
@@ -35183,7 +39370,4879 @@
 </p:sld>
 </file>
 
-<file path=ppt/slides/slide32.xml><?xml version="1.0" encoding="utf-8"?>
+<file path=ppt/slides/slide33.xml><?xml version="1.0" encoding="utf-8"?>
+<p:sld xmlns:a="http://schemas.openxmlformats.org/drawingml/2006/main" xmlns:r="http://schemas.openxmlformats.org/officeDocument/2006/relationships" xmlns:p="http://schemas.openxmlformats.org/presentationml/2006/main">
+  <p:cSld>
+    <p:spTree>
+      <p:nvGrpSpPr>
+        <p:cNvPr id="1" name="">
+          <a:extLst>
+            <a:ext uri="{FF2B5EF4-FFF2-40B4-BE49-F238E27FC236}">
+              <a16:creationId xmlns:a16="http://schemas.microsoft.com/office/drawing/2014/main" id="{7C7DDC2C-1563-84D5-29C9-6ED3AA04E0CD}"/>
+            </a:ext>
+          </a:extLst>
+        </p:cNvPr>
+        <p:cNvGrpSpPr/>
+        <p:nvPr/>
+      </p:nvGrpSpPr>
+      <p:grpSpPr>
+        <a:xfrm>
+          <a:off x="0" y="0"/>
+          <a:ext cx="0" cy="0"/>
+          <a:chOff x="0" y="0"/>
+          <a:chExt cx="0" cy="0"/>
+        </a:xfrm>
+      </p:grpSpPr>
+      <p:sp>
+        <p:nvSpPr>
+          <p:cNvPr id="2" name="Title 1">
+            <a:extLst>
+              <a:ext uri="{FF2B5EF4-FFF2-40B4-BE49-F238E27FC236}">
+                <a16:creationId xmlns:a16="http://schemas.microsoft.com/office/drawing/2014/main" id="{3515E425-C402-F163-9778-D77E02171E06}"/>
+              </a:ext>
+            </a:extLst>
+          </p:cNvPr>
+          <p:cNvSpPr>
+            <a:spLocks noGrp="1"/>
+          </p:cNvSpPr>
+          <p:nvPr>
+            <p:ph type="title"/>
+          </p:nvPr>
+        </p:nvSpPr>
+        <p:spPr>
+          <a:xfrm>
+            <a:off x="1143001" y="123995"/>
+            <a:ext cx="9905998" cy="448281"/>
+          </a:xfrm>
+        </p:spPr>
+        <p:txBody>
+          <a:bodyPr>
+            <a:normAutofit fontScale="90000"/>
+          </a:bodyPr>
+          <a:lstStyle/>
+          <a:p>
+            <a:pPr algn="ctr"/>
+            <a:r>
+              <a:rPr lang="en-US" dirty="0"/>
+              <a:t>Aside: More Machine Types</a:t>
+            </a:r>
+          </a:p>
+        </p:txBody>
+      </p:sp>
+      <p:sp>
+        <p:nvSpPr>
+          <p:cNvPr id="80" name="TextBox 79">
+            <a:extLst>
+              <a:ext uri="{FF2B5EF4-FFF2-40B4-BE49-F238E27FC236}">
+                <a16:creationId xmlns:a16="http://schemas.microsoft.com/office/drawing/2014/main" id="{965104E6-DE96-F46B-42F9-8B3AC8E08BDF}"/>
+              </a:ext>
+            </a:extLst>
+          </p:cNvPr>
+          <p:cNvSpPr txBox="1"/>
+          <p:nvPr/>
+        </p:nvSpPr>
+        <p:spPr>
+          <a:xfrm>
+            <a:off x="5673302" y="1744598"/>
+            <a:ext cx="5771148" cy="369332"/>
+          </a:xfrm>
+          <a:prstGeom prst="rect">
+            <a:avLst/>
+          </a:prstGeom>
+          <a:solidFill>
+            <a:schemeClr val="tx1">
+              <a:lumMod val="95000"/>
+            </a:schemeClr>
+          </a:solidFill>
+          <a:ln>
+            <a:solidFill>
+              <a:schemeClr val="bg1"/>
+            </a:solidFill>
+          </a:ln>
+        </p:spPr>
+        <p:txBody>
+          <a:bodyPr wrap="square" rtlCol="0">
+            <a:spAutoFit/>
+          </a:bodyPr>
+          <a:lstStyle/>
+          <a:p>
+            <a:r>
+              <a:rPr lang="en-US" dirty="0">
+                <a:solidFill>
+                  <a:schemeClr val="accent4"/>
+                </a:solidFill>
+                <a:latin typeface="Arial" panose="020B0604020202020204" pitchFamily="34" charset="0"/>
+                <a:cs typeface="Arial" panose="020B0604020202020204" pitchFamily="34" charset="0"/>
+              </a:rPr>
+              <a:t>Pushdown Automata</a:t>
+            </a:r>
+            <a:r>
+              <a:rPr lang="en-US" dirty="0">
+                <a:solidFill>
+                  <a:schemeClr val="bg1"/>
+                </a:solidFill>
+                <a:latin typeface="Arial" panose="020B0604020202020204" pitchFamily="34" charset="0"/>
+                <a:cs typeface="Arial" panose="020B0604020202020204" pitchFamily="34" charset="0"/>
+              </a:rPr>
+              <a:t>. An NFA with a </a:t>
+            </a:r>
+            <a:r>
+              <a:rPr lang="en-US" dirty="0">
+                <a:solidFill>
+                  <a:schemeClr val="accent4"/>
+                </a:solidFill>
+                <a:latin typeface="Arial" panose="020B0604020202020204" pitchFamily="34" charset="0"/>
+                <a:cs typeface="Arial" panose="020B0604020202020204" pitchFamily="34" charset="0"/>
+              </a:rPr>
+              <a:t>stack</a:t>
+            </a:r>
+          </a:p>
+        </p:txBody>
+      </p:sp>
+      <p:grpSp>
+        <p:nvGrpSpPr>
+          <p:cNvPr id="99" name="Group 98">
+            <a:extLst>
+              <a:ext uri="{FF2B5EF4-FFF2-40B4-BE49-F238E27FC236}">
+                <a16:creationId xmlns:a16="http://schemas.microsoft.com/office/drawing/2014/main" id="{F556DD3B-AFB2-2814-A3F2-E1BC4ADE2FFF}"/>
+              </a:ext>
+            </a:extLst>
+          </p:cNvPr>
+          <p:cNvGrpSpPr/>
+          <p:nvPr/>
+        </p:nvGrpSpPr>
+        <p:grpSpPr>
+          <a:xfrm>
+            <a:off x="1212973" y="1300528"/>
+            <a:ext cx="3999463" cy="1522377"/>
+            <a:chOff x="1212973" y="1300528"/>
+            <a:chExt cx="3999463" cy="1522377"/>
+          </a:xfrm>
+        </p:grpSpPr>
+        <p:sp>
+          <p:nvSpPr>
+            <p:cNvPr id="59" name="Oval 58">
+              <a:extLst>
+                <a:ext uri="{FF2B5EF4-FFF2-40B4-BE49-F238E27FC236}">
+                  <a16:creationId xmlns:a16="http://schemas.microsoft.com/office/drawing/2014/main" id="{91F609F4-4C50-6860-B5B4-9E10D99868EA}"/>
+                </a:ext>
+              </a:extLst>
+            </p:cNvPr>
+            <p:cNvSpPr/>
+            <p:nvPr/>
+          </p:nvSpPr>
+          <p:spPr>
+            <a:xfrm>
+              <a:off x="1579221" y="1330740"/>
+              <a:ext cx="369947" cy="369948"/>
+            </a:xfrm>
+            <a:prstGeom prst="ellipse">
+              <a:avLst/>
+            </a:prstGeom>
+            <a:solidFill>
+              <a:schemeClr val="accent4"/>
+            </a:solidFill>
+            <a:ln>
+              <a:solidFill>
+                <a:schemeClr val="bg1"/>
+              </a:solidFill>
+            </a:ln>
+          </p:spPr>
+          <p:style>
+            <a:lnRef idx="2">
+              <a:schemeClr val="accent1">
+                <a:shade val="15000"/>
+              </a:schemeClr>
+            </a:lnRef>
+            <a:fillRef idx="1">
+              <a:schemeClr val="accent1"/>
+            </a:fillRef>
+            <a:effectRef idx="0">
+              <a:schemeClr val="accent1"/>
+            </a:effectRef>
+            <a:fontRef idx="minor">
+              <a:schemeClr val="lt1"/>
+            </a:fontRef>
+          </p:style>
+          <p:txBody>
+            <a:bodyPr rtlCol="0" anchor="ctr"/>
+            <a:lstStyle/>
+            <a:p>
+              <a:pPr algn="ctr"/>
+              <a:r>
+                <a:rPr lang="en-US" dirty="0">
+                  <a:solidFill>
+                    <a:schemeClr val="bg1"/>
+                  </a:solidFill>
+                </a:rPr>
+                <a:t>1</a:t>
+              </a:r>
+            </a:p>
+          </p:txBody>
+        </p:sp>
+        <p:sp>
+          <p:nvSpPr>
+            <p:cNvPr id="60" name="Oval 59">
+              <a:extLst>
+                <a:ext uri="{FF2B5EF4-FFF2-40B4-BE49-F238E27FC236}">
+                  <a16:creationId xmlns:a16="http://schemas.microsoft.com/office/drawing/2014/main" id="{BBAFFAE4-9FA1-525F-433C-73F35D2BDF46}"/>
+                </a:ext>
+              </a:extLst>
+            </p:cNvPr>
+            <p:cNvSpPr/>
+            <p:nvPr/>
+          </p:nvSpPr>
+          <p:spPr>
+            <a:xfrm>
+              <a:off x="2398037" y="1330740"/>
+              <a:ext cx="369947" cy="369948"/>
+            </a:xfrm>
+            <a:prstGeom prst="ellipse">
+              <a:avLst/>
+            </a:prstGeom>
+            <a:solidFill>
+              <a:schemeClr val="accent4"/>
+            </a:solidFill>
+            <a:ln>
+              <a:solidFill>
+                <a:schemeClr val="bg1"/>
+              </a:solidFill>
+            </a:ln>
+          </p:spPr>
+          <p:style>
+            <a:lnRef idx="2">
+              <a:schemeClr val="accent1">
+                <a:shade val="15000"/>
+              </a:schemeClr>
+            </a:lnRef>
+            <a:fillRef idx="1">
+              <a:schemeClr val="accent1"/>
+            </a:fillRef>
+            <a:effectRef idx="0">
+              <a:schemeClr val="accent1"/>
+            </a:effectRef>
+            <a:fontRef idx="minor">
+              <a:schemeClr val="lt1"/>
+            </a:fontRef>
+          </p:style>
+          <p:txBody>
+            <a:bodyPr rtlCol="0" anchor="ctr"/>
+            <a:lstStyle/>
+            <a:p>
+              <a:pPr algn="ctr"/>
+              <a:r>
+                <a:rPr lang="en-US" dirty="0">
+                  <a:solidFill>
+                    <a:schemeClr val="bg1"/>
+                  </a:solidFill>
+                </a:rPr>
+                <a:t>2</a:t>
+              </a:r>
+            </a:p>
+          </p:txBody>
+        </p:sp>
+        <p:sp>
+          <p:nvSpPr>
+            <p:cNvPr id="61" name="Oval 60">
+              <a:extLst>
+                <a:ext uri="{FF2B5EF4-FFF2-40B4-BE49-F238E27FC236}">
+                  <a16:creationId xmlns:a16="http://schemas.microsoft.com/office/drawing/2014/main" id="{4BDE4E6D-E27C-4BB9-4FAD-51CA70D70E33}"/>
+                </a:ext>
+              </a:extLst>
+            </p:cNvPr>
+            <p:cNvSpPr/>
+            <p:nvPr/>
+          </p:nvSpPr>
+          <p:spPr>
+            <a:xfrm>
+              <a:off x="3216853" y="1330740"/>
+              <a:ext cx="369947" cy="369948"/>
+            </a:xfrm>
+            <a:prstGeom prst="ellipse">
+              <a:avLst/>
+            </a:prstGeom>
+            <a:solidFill>
+              <a:schemeClr val="accent4"/>
+            </a:solidFill>
+            <a:ln>
+              <a:solidFill>
+                <a:schemeClr val="bg1"/>
+              </a:solidFill>
+            </a:ln>
+          </p:spPr>
+          <p:style>
+            <a:lnRef idx="2">
+              <a:schemeClr val="accent1">
+                <a:shade val="15000"/>
+              </a:schemeClr>
+            </a:lnRef>
+            <a:fillRef idx="1">
+              <a:schemeClr val="accent1"/>
+            </a:fillRef>
+            <a:effectRef idx="0">
+              <a:schemeClr val="accent1"/>
+            </a:effectRef>
+            <a:fontRef idx="minor">
+              <a:schemeClr val="lt1"/>
+            </a:fontRef>
+          </p:style>
+          <p:txBody>
+            <a:bodyPr rtlCol="0" anchor="ctr"/>
+            <a:lstStyle/>
+            <a:p>
+              <a:pPr algn="ctr"/>
+              <a:r>
+                <a:rPr lang="en-US" dirty="0">
+                  <a:solidFill>
+                    <a:schemeClr val="bg1"/>
+                  </a:solidFill>
+                </a:rPr>
+                <a:t>3</a:t>
+              </a:r>
+            </a:p>
+          </p:txBody>
+        </p:sp>
+        <p:sp>
+          <p:nvSpPr>
+            <p:cNvPr id="62" name="Oval 61">
+              <a:extLst>
+                <a:ext uri="{FF2B5EF4-FFF2-40B4-BE49-F238E27FC236}">
+                  <a16:creationId xmlns:a16="http://schemas.microsoft.com/office/drawing/2014/main" id="{31B2AAA6-F745-374E-D019-244B24DDA8E5}"/>
+                </a:ext>
+              </a:extLst>
+            </p:cNvPr>
+            <p:cNvSpPr/>
+            <p:nvPr/>
+          </p:nvSpPr>
+          <p:spPr>
+            <a:xfrm>
+              <a:off x="4035669" y="1330740"/>
+              <a:ext cx="369947" cy="369948"/>
+            </a:xfrm>
+            <a:prstGeom prst="ellipse">
+              <a:avLst/>
+            </a:prstGeom>
+            <a:solidFill>
+              <a:schemeClr val="accent4"/>
+            </a:solidFill>
+            <a:ln>
+              <a:solidFill>
+                <a:schemeClr val="bg1"/>
+              </a:solidFill>
+            </a:ln>
+          </p:spPr>
+          <p:style>
+            <a:lnRef idx="2">
+              <a:schemeClr val="accent1">
+                <a:shade val="15000"/>
+              </a:schemeClr>
+            </a:lnRef>
+            <a:fillRef idx="1">
+              <a:schemeClr val="accent1"/>
+            </a:fillRef>
+            <a:effectRef idx="0">
+              <a:schemeClr val="accent1"/>
+            </a:effectRef>
+            <a:fontRef idx="minor">
+              <a:schemeClr val="lt1"/>
+            </a:fontRef>
+          </p:style>
+          <p:txBody>
+            <a:bodyPr rtlCol="0" anchor="ctr"/>
+            <a:lstStyle/>
+            <a:p>
+              <a:pPr algn="ctr"/>
+              <a:r>
+                <a:rPr lang="en-US" dirty="0">
+                  <a:solidFill>
+                    <a:schemeClr val="bg1"/>
+                  </a:solidFill>
+                </a:rPr>
+                <a:t>4</a:t>
+              </a:r>
+            </a:p>
+          </p:txBody>
+        </p:sp>
+        <p:sp>
+          <p:nvSpPr>
+            <p:cNvPr id="63" name="Oval 62">
+              <a:extLst>
+                <a:ext uri="{FF2B5EF4-FFF2-40B4-BE49-F238E27FC236}">
+                  <a16:creationId xmlns:a16="http://schemas.microsoft.com/office/drawing/2014/main" id="{6508E5D3-3E8A-79A8-08B6-2EFCD01B8B37}"/>
+                </a:ext>
+              </a:extLst>
+            </p:cNvPr>
+            <p:cNvSpPr/>
+            <p:nvPr/>
+          </p:nvSpPr>
+          <p:spPr>
+            <a:xfrm>
+              <a:off x="1579221" y="2179152"/>
+              <a:ext cx="369947" cy="369948"/>
+            </a:xfrm>
+            <a:prstGeom prst="ellipse">
+              <a:avLst/>
+            </a:prstGeom>
+            <a:solidFill>
+              <a:schemeClr val="accent4"/>
+            </a:solidFill>
+            <a:ln>
+              <a:solidFill>
+                <a:schemeClr val="bg1"/>
+              </a:solidFill>
+            </a:ln>
+          </p:spPr>
+          <p:style>
+            <a:lnRef idx="2">
+              <a:schemeClr val="accent1">
+                <a:shade val="15000"/>
+              </a:schemeClr>
+            </a:lnRef>
+            <a:fillRef idx="1">
+              <a:schemeClr val="accent1"/>
+            </a:fillRef>
+            <a:effectRef idx="0">
+              <a:schemeClr val="accent1"/>
+            </a:effectRef>
+            <a:fontRef idx="minor">
+              <a:schemeClr val="lt1"/>
+            </a:fontRef>
+          </p:style>
+          <p:txBody>
+            <a:bodyPr rtlCol="0" anchor="ctr"/>
+            <a:lstStyle/>
+            <a:p>
+              <a:pPr algn="ctr"/>
+              <a:r>
+                <a:rPr lang="en-US" dirty="0">
+                  <a:solidFill>
+                    <a:schemeClr val="bg1"/>
+                  </a:solidFill>
+                </a:rPr>
+                <a:t>8</a:t>
+              </a:r>
+            </a:p>
+          </p:txBody>
+        </p:sp>
+        <p:sp>
+          <p:nvSpPr>
+            <p:cNvPr id="64" name="Oval 63">
+              <a:extLst>
+                <a:ext uri="{FF2B5EF4-FFF2-40B4-BE49-F238E27FC236}">
+                  <a16:creationId xmlns:a16="http://schemas.microsoft.com/office/drawing/2014/main" id="{C31DDCD2-5085-94BC-C43D-DDF11573CE5D}"/>
+                </a:ext>
+              </a:extLst>
+            </p:cNvPr>
+            <p:cNvSpPr/>
+            <p:nvPr/>
+          </p:nvSpPr>
+          <p:spPr>
+            <a:xfrm>
+              <a:off x="2398037" y="2179152"/>
+              <a:ext cx="369947" cy="369948"/>
+            </a:xfrm>
+            <a:prstGeom prst="ellipse">
+              <a:avLst/>
+            </a:prstGeom>
+            <a:solidFill>
+              <a:schemeClr val="accent4"/>
+            </a:solidFill>
+            <a:ln>
+              <a:solidFill>
+                <a:schemeClr val="bg1"/>
+              </a:solidFill>
+            </a:ln>
+          </p:spPr>
+          <p:style>
+            <a:lnRef idx="2">
+              <a:schemeClr val="accent1">
+                <a:shade val="15000"/>
+              </a:schemeClr>
+            </a:lnRef>
+            <a:fillRef idx="1">
+              <a:schemeClr val="accent1"/>
+            </a:fillRef>
+            <a:effectRef idx="0">
+              <a:schemeClr val="accent1"/>
+            </a:effectRef>
+            <a:fontRef idx="minor">
+              <a:schemeClr val="lt1"/>
+            </a:fontRef>
+          </p:style>
+          <p:txBody>
+            <a:bodyPr rtlCol="0" anchor="ctr"/>
+            <a:lstStyle/>
+            <a:p>
+              <a:pPr algn="ctr"/>
+              <a:r>
+                <a:rPr lang="en-US" dirty="0">
+                  <a:solidFill>
+                    <a:schemeClr val="bg1"/>
+                  </a:solidFill>
+                </a:rPr>
+                <a:t>7</a:t>
+              </a:r>
+            </a:p>
+          </p:txBody>
+        </p:sp>
+        <p:sp>
+          <p:nvSpPr>
+            <p:cNvPr id="65" name="Oval 64">
+              <a:extLst>
+                <a:ext uri="{FF2B5EF4-FFF2-40B4-BE49-F238E27FC236}">
+                  <a16:creationId xmlns:a16="http://schemas.microsoft.com/office/drawing/2014/main" id="{3080F373-3AF4-151F-F8A1-9DD677198F22}"/>
+                </a:ext>
+              </a:extLst>
+            </p:cNvPr>
+            <p:cNvSpPr/>
+            <p:nvPr/>
+          </p:nvSpPr>
+          <p:spPr>
+            <a:xfrm>
+              <a:off x="3216853" y="2179152"/>
+              <a:ext cx="369947" cy="369948"/>
+            </a:xfrm>
+            <a:prstGeom prst="ellipse">
+              <a:avLst/>
+            </a:prstGeom>
+            <a:solidFill>
+              <a:schemeClr val="accent4"/>
+            </a:solidFill>
+            <a:ln>
+              <a:solidFill>
+                <a:schemeClr val="bg1"/>
+              </a:solidFill>
+            </a:ln>
+          </p:spPr>
+          <p:style>
+            <a:lnRef idx="2">
+              <a:schemeClr val="accent1">
+                <a:shade val="15000"/>
+              </a:schemeClr>
+            </a:lnRef>
+            <a:fillRef idx="1">
+              <a:schemeClr val="accent1"/>
+            </a:fillRef>
+            <a:effectRef idx="0">
+              <a:schemeClr val="accent1"/>
+            </a:effectRef>
+            <a:fontRef idx="minor">
+              <a:schemeClr val="lt1"/>
+            </a:fontRef>
+          </p:style>
+          <p:txBody>
+            <a:bodyPr rtlCol="0" anchor="ctr"/>
+            <a:lstStyle/>
+            <a:p>
+              <a:pPr algn="ctr"/>
+              <a:r>
+                <a:rPr lang="en-US" dirty="0">
+                  <a:solidFill>
+                    <a:schemeClr val="bg1"/>
+                  </a:solidFill>
+                </a:rPr>
+                <a:t>6</a:t>
+              </a:r>
+            </a:p>
+          </p:txBody>
+        </p:sp>
+        <p:sp>
+          <p:nvSpPr>
+            <p:cNvPr id="66" name="Oval 65">
+              <a:extLst>
+                <a:ext uri="{FF2B5EF4-FFF2-40B4-BE49-F238E27FC236}">
+                  <a16:creationId xmlns:a16="http://schemas.microsoft.com/office/drawing/2014/main" id="{DC13DA7A-A74F-2A3C-65F7-9C64964A42D6}"/>
+                </a:ext>
+              </a:extLst>
+            </p:cNvPr>
+            <p:cNvSpPr/>
+            <p:nvPr/>
+          </p:nvSpPr>
+          <p:spPr>
+            <a:xfrm>
+              <a:off x="4035669" y="2179152"/>
+              <a:ext cx="369947" cy="369948"/>
+            </a:xfrm>
+            <a:prstGeom prst="ellipse">
+              <a:avLst/>
+            </a:prstGeom>
+            <a:solidFill>
+              <a:schemeClr val="accent4"/>
+            </a:solidFill>
+            <a:ln>
+              <a:solidFill>
+                <a:schemeClr val="bg1"/>
+              </a:solidFill>
+            </a:ln>
+          </p:spPr>
+          <p:style>
+            <a:lnRef idx="2">
+              <a:schemeClr val="accent1">
+                <a:shade val="15000"/>
+              </a:schemeClr>
+            </a:lnRef>
+            <a:fillRef idx="1">
+              <a:schemeClr val="accent1"/>
+            </a:fillRef>
+            <a:effectRef idx="0">
+              <a:schemeClr val="accent1"/>
+            </a:effectRef>
+            <a:fontRef idx="minor">
+              <a:schemeClr val="lt1"/>
+            </a:fontRef>
+          </p:style>
+          <p:txBody>
+            <a:bodyPr rtlCol="0" anchor="ctr"/>
+            <a:lstStyle/>
+            <a:p>
+              <a:pPr algn="ctr"/>
+              <a:r>
+                <a:rPr lang="en-US" dirty="0">
+                  <a:solidFill>
+                    <a:schemeClr val="bg1"/>
+                  </a:solidFill>
+                </a:rPr>
+                <a:t>5</a:t>
+              </a:r>
+            </a:p>
+          </p:txBody>
+        </p:sp>
+        <p:sp>
+          <p:nvSpPr>
+            <p:cNvPr id="67" name="Oval 66">
+              <a:extLst>
+                <a:ext uri="{FF2B5EF4-FFF2-40B4-BE49-F238E27FC236}">
+                  <a16:creationId xmlns:a16="http://schemas.microsoft.com/office/drawing/2014/main" id="{DFB97CED-F7C0-DC53-4509-2F1DB837ACDD}"/>
+                </a:ext>
+              </a:extLst>
+            </p:cNvPr>
+            <p:cNvSpPr/>
+            <p:nvPr/>
+          </p:nvSpPr>
+          <p:spPr>
+            <a:xfrm>
+              <a:off x="3247681" y="1361569"/>
+              <a:ext cx="309523" cy="309523"/>
+            </a:xfrm>
+            <a:prstGeom prst="ellipse">
+              <a:avLst/>
+            </a:prstGeom>
+            <a:solidFill>
+              <a:schemeClr val="accent4"/>
+            </a:solidFill>
+            <a:ln>
+              <a:solidFill>
+                <a:schemeClr val="bg1"/>
+              </a:solidFill>
+            </a:ln>
+          </p:spPr>
+          <p:style>
+            <a:lnRef idx="2">
+              <a:schemeClr val="accent1">
+                <a:shade val="15000"/>
+              </a:schemeClr>
+            </a:lnRef>
+            <a:fillRef idx="1">
+              <a:schemeClr val="accent1"/>
+            </a:fillRef>
+            <a:effectRef idx="0">
+              <a:schemeClr val="accent1"/>
+            </a:effectRef>
+            <a:fontRef idx="minor">
+              <a:schemeClr val="lt1"/>
+            </a:fontRef>
+          </p:style>
+          <p:txBody>
+            <a:bodyPr rtlCol="0" anchor="ctr"/>
+            <a:lstStyle/>
+            <a:p>
+              <a:pPr algn="ctr"/>
+              <a:r>
+                <a:rPr lang="en-US" dirty="0">
+                  <a:solidFill>
+                    <a:schemeClr val="bg1"/>
+                  </a:solidFill>
+                </a:rPr>
+                <a:t>3</a:t>
+              </a:r>
+            </a:p>
+          </p:txBody>
+        </p:sp>
+        <p:sp>
+          <p:nvSpPr>
+            <p:cNvPr id="68" name="Oval 67">
+              <a:extLst>
+                <a:ext uri="{FF2B5EF4-FFF2-40B4-BE49-F238E27FC236}">
+                  <a16:creationId xmlns:a16="http://schemas.microsoft.com/office/drawing/2014/main" id="{C4D2DF53-DA22-C120-A685-914E89D13CE6}"/>
+                </a:ext>
+              </a:extLst>
+            </p:cNvPr>
+            <p:cNvSpPr/>
+            <p:nvPr/>
+          </p:nvSpPr>
+          <p:spPr>
+            <a:xfrm>
+              <a:off x="3247681" y="2209365"/>
+              <a:ext cx="309523" cy="309523"/>
+            </a:xfrm>
+            <a:prstGeom prst="ellipse">
+              <a:avLst/>
+            </a:prstGeom>
+            <a:solidFill>
+              <a:schemeClr val="accent4"/>
+            </a:solidFill>
+            <a:ln>
+              <a:solidFill>
+                <a:schemeClr val="bg1"/>
+              </a:solidFill>
+            </a:ln>
+          </p:spPr>
+          <p:style>
+            <a:lnRef idx="2">
+              <a:schemeClr val="accent1">
+                <a:shade val="15000"/>
+              </a:schemeClr>
+            </a:lnRef>
+            <a:fillRef idx="1">
+              <a:schemeClr val="accent1"/>
+            </a:fillRef>
+            <a:effectRef idx="0">
+              <a:schemeClr val="accent1"/>
+            </a:effectRef>
+            <a:fontRef idx="minor">
+              <a:schemeClr val="lt1"/>
+            </a:fontRef>
+          </p:style>
+          <p:txBody>
+            <a:bodyPr rtlCol="0" anchor="ctr"/>
+            <a:lstStyle/>
+            <a:p>
+              <a:pPr algn="ctr"/>
+              <a:r>
+                <a:rPr lang="en-US" dirty="0">
+                  <a:solidFill>
+                    <a:schemeClr val="bg1"/>
+                  </a:solidFill>
+                </a:rPr>
+                <a:t>6</a:t>
+              </a:r>
+            </a:p>
+          </p:txBody>
+        </p:sp>
+        <p:sp>
+          <p:nvSpPr>
+            <p:cNvPr id="69" name="Oval 68">
+              <a:extLst>
+                <a:ext uri="{FF2B5EF4-FFF2-40B4-BE49-F238E27FC236}">
+                  <a16:creationId xmlns:a16="http://schemas.microsoft.com/office/drawing/2014/main" id="{A367C9F7-D2AD-BB01-BE23-0F3D7FD9EB8C}"/>
+                </a:ext>
+              </a:extLst>
+            </p:cNvPr>
+            <p:cNvSpPr/>
+            <p:nvPr/>
+          </p:nvSpPr>
+          <p:spPr>
+            <a:xfrm>
+              <a:off x="2428866" y="2209365"/>
+              <a:ext cx="309523" cy="309523"/>
+            </a:xfrm>
+            <a:prstGeom prst="ellipse">
+              <a:avLst/>
+            </a:prstGeom>
+            <a:solidFill>
+              <a:schemeClr val="accent4"/>
+            </a:solidFill>
+            <a:ln>
+              <a:solidFill>
+                <a:schemeClr val="bg1"/>
+              </a:solidFill>
+            </a:ln>
+          </p:spPr>
+          <p:style>
+            <a:lnRef idx="2">
+              <a:schemeClr val="accent1">
+                <a:shade val="15000"/>
+              </a:schemeClr>
+            </a:lnRef>
+            <a:fillRef idx="1">
+              <a:schemeClr val="accent1"/>
+            </a:fillRef>
+            <a:effectRef idx="0">
+              <a:schemeClr val="accent1"/>
+            </a:effectRef>
+            <a:fontRef idx="minor">
+              <a:schemeClr val="lt1"/>
+            </a:fontRef>
+          </p:style>
+          <p:txBody>
+            <a:bodyPr rtlCol="0" anchor="ctr"/>
+            <a:lstStyle/>
+            <a:p>
+              <a:pPr algn="ctr"/>
+              <a:r>
+                <a:rPr lang="en-US" dirty="0">
+                  <a:solidFill>
+                    <a:schemeClr val="bg1"/>
+                  </a:solidFill>
+                </a:rPr>
+                <a:t>5</a:t>
+              </a:r>
+            </a:p>
+          </p:txBody>
+        </p:sp>
+        <p:sp>
+          <p:nvSpPr>
+            <p:cNvPr id="70" name="Oval 69">
+              <a:extLst>
+                <a:ext uri="{FF2B5EF4-FFF2-40B4-BE49-F238E27FC236}">
+                  <a16:creationId xmlns:a16="http://schemas.microsoft.com/office/drawing/2014/main" id="{05993F49-43C4-A20A-0E87-97B5DA342219}"/>
+                </a:ext>
+              </a:extLst>
+            </p:cNvPr>
+            <p:cNvSpPr/>
+            <p:nvPr/>
+          </p:nvSpPr>
+          <p:spPr>
+            <a:xfrm>
+              <a:off x="1609433" y="2209365"/>
+              <a:ext cx="309523" cy="309523"/>
+            </a:xfrm>
+            <a:prstGeom prst="ellipse">
+              <a:avLst/>
+            </a:prstGeom>
+            <a:solidFill>
+              <a:schemeClr val="accent4"/>
+            </a:solidFill>
+            <a:ln>
+              <a:solidFill>
+                <a:schemeClr val="bg1"/>
+              </a:solidFill>
+            </a:ln>
+          </p:spPr>
+          <p:style>
+            <a:lnRef idx="2">
+              <a:schemeClr val="accent1">
+                <a:shade val="15000"/>
+              </a:schemeClr>
+            </a:lnRef>
+            <a:fillRef idx="1">
+              <a:schemeClr val="accent1"/>
+            </a:fillRef>
+            <a:effectRef idx="0">
+              <a:schemeClr val="accent1"/>
+            </a:effectRef>
+            <a:fontRef idx="minor">
+              <a:schemeClr val="lt1"/>
+            </a:fontRef>
+          </p:style>
+          <p:txBody>
+            <a:bodyPr rtlCol="0" anchor="ctr"/>
+            <a:lstStyle/>
+            <a:p>
+              <a:pPr algn="ctr"/>
+              <a:r>
+                <a:rPr lang="en-US" dirty="0">
+                  <a:solidFill>
+                    <a:schemeClr val="bg1"/>
+                  </a:solidFill>
+                </a:rPr>
+                <a:t>8</a:t>
+              </a:r>
+            </a:p>
+          </p:txBody>
+        </p:sp>
+        <p:cxnSp>
+          <p:nvCxnSpPr>
+            <p:cNvPr id="71" name="Straight Arrow Connector 70">
+              <a:extLst>
+                <a:ext uri="{FF2B5EF4-FFF2-40B4-BE49-F238E27FC236}">
+                  <a16:creationId xmlns:a16="http://schemas.microsoft.com/office/drawing/2014/main" id="{C30D55EC-FD5E-A1F6-B5FF-DE5E7ADA9C3B}"/>
+                </a:ext>
+              </a:extLst>
+            </p:cNvPr>
+            <p:cNvCxnSpPr>
+              <a:cxnSpLocks/>
+              <a:endCxn id="59" idx="2"/>
+            </p:cNvCxnSpPr>
+            <p:nvPr/>
+          </p:nvCxnSpPr>
+          <p:spPr>
+            <a:xfrm>
+              <a:off x="1212973" y="1515714"/>
+              <a:ext cx="366248" cy="0"/>
+            </a:xfrm>
+            <a:prstGeom prst="straightConnector1">
+              <a:avLst/>
+            </a:prstGeom>
+            <a:ln w="31750">
+              <a:solidFill>
+                <a:schemeClr val="accent4"/>
+              </a:solidFill>
+              <a:tailEnd type="triangle"/>
+            </a:ln>
+          </p:spPr>
+          <p:style>
+            <a:lnRef idx="1">
+              <a:schemeClr val="accent1"/>
+            </a:lnRef>
+            <a:fillRef idx="0">
+              <a:schemeClr val="accent1"/>
+            </a:fillRef>
+            <a:effectRef idx="0">
+              <a:schemeClr val="accent1"/>
+            </a:effectRef>
+            <a:fontRef idx="minor">
+              <a:schemeClr val="tx1"/>
+            </a:fontRef>
+          </p:style>
+        </p:cxnSp>
+        <p:cxnSp>
+          <p:nvCxnSpPr>
+            <p:cNvPr id="72" name="Straight Arrow Connector 71">
+              <a:extLst>
+                <a:ext uri="{FF2B5EF4-FFF2-40B4-BE49-F238E27FC236}">
+                  <a16:creationId xmlns:a16="http://schemas.microsoft.com/office/drawing/2014/main" id="{71517CDA-B146-2810-5BF1-E12668AC2230}"/>
+                </a:ext>
+              </a:extLst>
+            </p:cNvPr>
+            <p:cNvCxnSpPr>
+              <a:cxnSpLocks/>
+              <a:stCxn id="59" idx="6"/>
+              <a:endCxn id="60" idx="2"/>
+            </p:cNvCxnSpPr>
+            <p:nvPr/>
+          </p:nvCxnSpPr>
+          <p:spPr>
+            <a:xfrm>
+              <a:off x="1949168" y="1515714"/>
+              <a:ext cx="448869" cy="0"/>
+            </a:xfrm>
+            <a:prstGeom prst="straightConnector1">
+              <a:avLst/>
+            </a:prstGeom>
+            <a:ln w="31750">
+              <a:solidFill>
+                <a:schemeClr val="accent4"/>
+              </a:solidFill>
+              <a:tailEnd type="triangle"/>
+            </a:ln>
+          </p:spPr>
+          <p:style>
+            <a:lnRef idx="1">
+              <a:schemeClr val="accent1"/>
+            </a:lnRef>
+            <a:fillRef idx="0">
+              <a:schemeClr val="accent1"/>
+            </a:fillRef>
+            <a:effectRef idx="0">
+              <a:schemeClr val="accent1"/>
+            </a:effectRef>
+            <a:fontRef idx="minor">
+              <a:schemeClr val="tx1"/>
+            </a:fontRef>
+          </p:style>
+        </p:cxnSp>
+        <p:cxnSp>
+          <p:nvCxnSpPr>
+            <p:cNvPr id="73" name="Straight Arrow Connector 72">
+              <a:extLst>
+                <a:ext uri="{FF2B5EF4-FFF2-40B4-BE49-F238E27FC236}">
+                  <a16:creationId xmlns:a16="http://schemas.microsoft.com/office/drawing/2014/main" id="{A1282B21-5DB9-A1E9-56A1-5BF66795051F}"/>
+                </a:ext>
+              </a:extLst>
+            </p:cNvPr>
+            <p:cNvCxnSpPr>
+              <a:cxnSpLocks/>
+              <a:stCxn id="60" idx="6"/>
+              <a:endCxn id="61" idx="2"/>
+            </p:cNvCxnSpPr>
+            <p:nvPr/>
+          </p:nvCxnSpPr>
+          <p:spPr>
+            <a:xfrm>
+              <a:off x="2767984" y="1515714"/>
+              <a:ext cx="448869" cy="0"/>
+            </a:xfrm>
+            <a:prstGeom prst="straightConnector1">
+              <a:avLst/>
+            </a:prstGeom>
+            <a:ln w="31750">
+              <a:solidFill>
+                <a:schemeClr val="accent4"/>
+              </a:solidFill>
+              <a:tailEnd type="triangle"/>
+            </a:ln>
+          </p:spPr>
+          <p:style>
+            <a:lnRef idx="1">
+              <a:schemeClr val="accent1"/>
+            </a:lnRef>
+            <a:fillRef idx="0">
+              <a:schemeClr val="accent1"/>
+            </a:fillRef>
+            <a:effectRef idx="0">
+              <a:schemeClr val="accent1"/>
+            </a:effectRef>
+            <a:fontRef idx="minor">
+              <a:schemeClr val="tx1"/>
+            </a:fontRef>
+          </p:style>
+        </p:cxnSp>
+        <p:cxnSp>
+          <p:nvCxnSpPr>
+            <p:cNvPr id="74" name="Straight Arrow Connector 73">
+              <a:extLst>
+                <a:ext uri="{FF2B5EF4-FFF2-40B4-BE49-F238E27FC236}">
+                  <a16:creationId xmlns:a16="http://schemas.microsoft.com/office/drawing/2014/main" id="{3EA3245B-56AF-14FD-7893-87727F41FAD7}"/>
+                </a:ext>
+              </a:extLst>
+            </p:cNvPr>
+            <p:cNvCxnSpPr>
+              <a:cxnSpLocks/>
+              <a:stCxn id="61" idx="6"/>
+              <a:endCxn id="62" idx="2"/>
+            </p:cNvCxnSpPr>
+            <p:nvPr/>
+          </p:nvCxnSpPr>
+          <p:spPr>
+            <a:xfrm>
+              <a:off x="3586800" y="1515714"/>
+              <a:ext cx="448869" cy="0"/>
+            </a:xfrm>
+            <a:prstGeom prst="straightConnector1">
+              <a:avLst/>
+            </a:prstGeom>
+            <a:ln w="31750">
+              <a:solidFill>
+                <a:schemeClr val="accent4"/>
+              </a:solidFill>
+              <a:tailEnd type="triangle"/>
+            </a:ln>
+          </p:spPr>
+          <p:style>
+            <a:lnRef idx="1">
+              <a:schemeClr val="accent1"/>
+            </a:lnRef>
+            <a:fillRef idx="0">
+              <a:schemeClr val="accent1"/>
+            </a:fillRef>
+            <a:effectRef idx="0">
+              <a:schemeClr val="accent1"/>
+            </a:effectRef>
+            <a:fontRef idx="minor">
+              <a:schemeClr val="tx1"/>
+            </a:fontRef>
+          </p:style>
+        </p:cxnSp>
+        <p:cxnSp>
+          <p:nvCxnSpPr>
+            <p:cNvPr id="75" name="Straight Arrow Connector 74">
+              <a:extLst>
+                <a:ext uri="{FF2B5EF4-FFF2-40B4-BE49-F238E27FC236}">
+                  <a16:creationId xmlns:a16="http://schemas.microsoft.com/office/drawing/2014/main" id="{AAE60CB1-E578-1012-F135-2B63D21B0D63}"/>
+                </a:ext>
+              </a:extLst>
+            </p:cNvPr>
+            <p:cNvCxnSpPr>
+              <a:cxnSpLocks/>
+              <a:stCxn id="61" idx="5"/>
+              <a:endCxn id="66" idx="1"/>
+            </p:cNvCxnSpPr>
+            <p:nvPr/>
+          </p:nvCxnSpPr>
+          <p:spPr>
+            <a:xfrm>
+              <a:off x="3532623" y="1646510"/>
+              <a:ext cx="557224" cy="586820"/>
+            </a:xfrm>
+            <a:prstGeom prst="straightConnector1">
+              <a:avLst/>
+            </a:prstGeom>
+            <a:ln w="31750">
+              <a:solidFill>
+                <a:schemeClr val="accent4"/>
+              </a:solidFill>
+              <a:tailEnd type="triangle"/>
+            </a:ln>
+          </p:spPr>
+          <p:style>
+            <a:lnRef idx="1">
+              <a:schemeClr val="accent1"/>
+            </a:lnRef>
+            <a:fillRef idx="0">
+              <a:schemeClr val="accent1"/>
+            </a:fillRef>
+            <a:effectRef idx="0">
+              <a:schemeClr val="accent1"/>
+            </a:effectRef>
+            <a:fontRef idx="minor">
+              <a:schemeClr val="tx1"/>
+            </a:fontRef>
+          </p:style>
+        </p:cxnSp>
+        <p:cxnSp>
+          <p:nvCxnSpPr>
+            <p:cNvPr id="76" name="Straight Arrow Connector 75">
+              <a:extLst>
+                <a:ext uri="{FF2B5EF4-FFF2-40B4-BE49-F238E27FC236}">
+                  <a16:creationId xmlns:a16="http://schemas.microsoft.com/office/drawing/2014/main" id="{F8E4F06E-E69E-8EA3-06A3-CD96D318946E}"/>
+                </a:ext>
+              </a:extLst>
+            </p:cNvPr>
+            <p:cNvCxnSpPr>
+              <a:cxnSpLocks/>
+              <a:stCxn id="62" idx="4"/>
+              <a:endCxn id="66" idx="0"/>
+            </p:cNvCxnSpPr>
+            <p:nvPr/>
+          </p:nvCxnSpPr>
+          <p:spPr>
+            <a:xfrm>
+              <a:off x="4220642" y="1700688"/>
+              <a:ext cx="0" cy="478465"/>
+            </a:xfrm>
+            <a:prstGeom prst="straightConnector1">
+              <a:avLst/>
+            </a:prstGeom>
+            <a:ln w="31750">
+              <a:solidFill>
+                <a:schemeClr val="accent4"/>
+              </a:solidFill>
+              <a:tailEnd type="triangle"/>
+            </a:ln>
+          </p:spPr>
+          <p:style>
+            <a:lnRef idx="1">
+              <a:schemeClr val="accent1"/>
+            </a:lnRef>
+            <a:fillRef idx="0">
+              <a:schemeClr val="accent1"/>
+            </a:fillRef>
+            <a:effectRef idx="0">
+              <a:schemeClr val="accent1"/>
+            </a:effectRef>
+            <a:fontRef idx="minor">
+              <a:schemeClr val="tx1"/>
+            </a:fontRef>
+          </p:style>
+        </p:cxnSp>
+        <p:cxnSp>
+          <p:nvCxnSpPr>
+            <p:cNvPr id="77" name="Straight Arrow Connector 76">
+              <a:extLst>
+                <a:ext uri="{FF2B5EF4-FFF2-40B4-BE49-F238E27FC236}">
+                  <a16:creationId xmlns:a16="http://schemas.microsoft.com/office/drawing/2014/main" id="{4891D6C6-0AC8-1E70-2058-CD176F0EF348}"/>
+                </a:ext>
+              </a:extLst>
+            </p:cNvPr>
+            <p:cNvCxnSpPr>
+              <a:cxnSpLocks/>
+              <a:stCxn id="66" idx="2"/>
+              <a:endCxn id="65" idx="6"/>
+            </p:cNvCxnSpPr>
+            <p:nvPr/>
+          </p:nvCxnSpPr>
+          <p:spPr>
+            <a:xfrm flipH="1">
+              <a:off x="3586800" y="2364126"/>
+              <a:ext cx="448869" cy="0"/>
+            </a:xfrm>
+            <a:prstGeom prst="straightConnector1">
+              <a:avLst/>
+            </a:prstGeom>
+            <a:ln w="31750">
+              <a:solidFill>
+                <a:schemeClr val="accent4"/>
+              </a:solidFill>
+              <a:tailEnd type="triangle"/>
+            </a:ln>
+          </p:spPr>
+          <p:style>
+            <a:lnRef idx="1">
+              <a:schemeClr val="accent1"/>
+            </a:lnRef>
+            <a:fillRef idx="0">
+              <a:schemeClr val="accent1"/>
+            </a:fillRef>
+            <a:effectRef idx="0">
+              <a:schemeClr val="accent1"/>
+            </a:effectRef>
+            <a:fontRef idx="minor">
+              <a:schemeClr val="tx1"/>
+            </a:fontRef>
+          </p:style>
+        </p:cxnSp>
+        <p:cxnSp>
+          <p:nvCxnSpPr>
+            <p:cNvPr id="78" name="Straight Arrow Connector 77">
+              <a:extLst>
+                <a:ext uri="{FF2B5EF4-FFF2-40B4-BE49-F238E27FC236}">
+                  <a16:creationId xmlns:a16="http://schemas.microsoft.com/office/drawing/2014/main" id="{554A6042-6F5C-9EE3-1AA0-18DF26028CE4}"/>
+                </a:ext>
+              </a:extLst>
+            </p:cNvPr>
+            <p:cNvCxnSpPr>
+              <a:cxnSpLocks/>
+              <a:stCxn id="65" idx="2"/>
+              <a:endCxn id="64" idx="6"/>
+            </p:cNvCxnSpPr>
+            <p:nvPr/>
+          </p:nvCxnSpPr>
+          <p:spPr>
+            <a:xfrm flipH="1">
+              <a:off x="2767984" y="2364126"/>
+              <a:ext cx="448869" cy="0"/>
+            </a:xfrm>
+            <a:prstGeom prst="straightConnector1">
+              <a:avLst/>
+            </a:prstGeom>
+            <a:ln w="31750">
+              <a:solidFill>
+                <a:schemeClr val="accent4"/>
+              </a:solidFill>
+              <a:tailEnd type="triangle"/>
+            </a:ln>
+          </p:spPr>
+          <p:style>
+            <a:lnRef idx="1">
+              <a:schemeClr val="accent1"/>
+            </a:lnRef>
+            <a:fillRef idx="0">
+              <a:schemeClr val="accent1"/>
+            </a:fillRef>
+            <a:effectRef idx="0">
+              <a:schemeClr val="accent1"/>
+            </a:effectRef>
+            <a:fontRef idx="minor">
+              <a:schemeClr val="tx1"/>
+            </a:fontRef>
+          </p:style>
+        </p:cxnSp>
+        <p:cxnSp>
+          <p:nvCxnSpPr>
+            <p:cNvPr id="79" name="Straight Arrow Connector 78">
+              <a:extLst>
+                <a:ext uri="{FF2B5EF4-FFF2-40B4-BE49-F238E27FC236}">
+                  <a16:creationId xmlns:a16="http://schemas.microsoft.com/office/drawing/2014/main" id="{E9A2EB34-9D5D-AACD-C7F5-5FE8C54EAC4F}"/>
+                </a:ext>
+              </a:extLst>
+            </p:cNvPr>
+            <p:cNvCxnSpPr>
+              <a:cxnSpLocks/>
+              <a:stCxn id="64" idx="2"/>
+              <a:endCxn id="63" idx="6"/>
+            </p:cNvCxnSpPr>
+            <p:nvPr/>
+          </p:nvCxnSpPr>
+          <p:spPr>
+            <a:xfrm flipH="1">
+              <a:off x="1949168" y="2364126"/>
+              <a:ext cx="448869" cy="0"/>
+            </a:xfrm>
+            <a:prstGeom prst="straightConnector1">
+              <a:avLst/>
+            </a:prstGeom>
+            <a:ln w="31750">
+              <a:solidFill>
+                <a:schemeClr val="accent4"/>
+              </a:solidFill>
+              <a:tailEnd type="triangle"/>
+            </a:ln>
+          </p:spPr>
+          <p:style>
+            <a:lnRef idx="1">
+              <a:schemeClr val="accent1"/>
+            </a:lnRef>
+            <a:fillRef idx="0">
+              <a:schemeClr val="accent1"/>
+            </a:fillRef>
+            <a:effectRef idx="0">
+              <a:schemeClr val="accent1"/>
+            </a:effectRef>
+            <a:fontRef idx="minor">
+              <a:schemeClr val="tx1"/>
+            </a:fontRef>
+          </p:style>
+        </p:cxnSp>
+        <p:sp>
+          <p:nvSpPr>
+            <p:cNvPr id="82" name="Rectangle 81">
+              <a:extLst>
+                <a:ext uri="{FF2B5EF4-FFF2-40B4-BE49-F238E27FC236}">
+                  <a16:creationId xmlns:a16="http://schemas.microsoft.com/office/drawing/2014/main" id="{00676C9E-DACF-F3FD-0476-3A952DEFD347}"/>
+                </a:ext>
+              </a:extLst>
+            </p:cNvPr>
+            <p:cNvSpPr/>
+            <p:nvPr/>
+          </p:nvSpPr>
+          <p:spPr>
+            <a:xfrm>
+              <a:off x="4740879" y="1300528"/>
+              <a:ext cx="298580" cy="1218360"/>
+            </a:xfrm>
+            <a:prstGeom prst="rect">
+              <a:avLst/>
+            </a:prstGeom>
+            <a:solidFill>
+              <a:schemeClr val="accent4">
+                <a:lumMod val="60000"/>
+                <a:lumOff val="40000"/>
+              </a:schemeClr>
+            </a:solidFill>
+            <a:ln>
+              <a:solidFill>
+                <a:schemeClr val="bg1"/>
+              </a:solidFill>
+            </a:ln>
+          </p:spPr>
+          <p:style>
+            <a:lnRef idx="2">
+              <a:schemeClr val="accent1">
+                <a:shade val="15000"/>
+              </a:schemeClr>
+            </a:lnRef>
+            <a:fillRef idx="1">
+              <a:schemeClr val="accent1"/>
+            </a:fillRef>
+            <a:effectRef idx="0">
+              <a:schemeClr val="accent1"/>
+            </a:effectRef>
+            <a:fontRef idx="minor">
+              <a:schemeClr val="lt1"/>
+            </a:fontRef>
+          </p:style>
+          <p:txBody>
+            <a:bodyPr rtlCol="0" anchor="ctr"/>
+            <a:lstStyle/>
+            <a:p>
+              <a:pPr algn="ctr"/>
+              <a:endParaRPr lang="en-US"/>
+            </a:p>
+          </p:txBody>
+        </p:sp>
+        <p:sp>
+          <p:nvSpPr>
+            <p:cNvPr id="86" name="TextBox 85">
+              <a:extLst>
+                <a:ext uri="{FF2B5EF4-FFF2-40B4-BE49-F238E27FC236}">
+                  <a16:creationId xmlns:a16="http://schemas.microsoft.com/office/drawing/2014/main" id="{10048935-578E-4438-EE33-2C6596BCEB37}"/>
+                </a:ext>
+              </a:extLst>
+            </p:cNvPr>
+            <p:cNvSpPr txBox="1"/>
+            <p:nvPr/>
+          </p:nvSpPr>
+          <p:spPr>
+            <a:xfrm>
+              <a:off x="4567901" y="2453573"/>
+              <a:ext cx="644535" cy="369332"/>
+            </a:xfrm>
+            <a:prstGeom prst="rect">
+              <a:avLst/>
+            </a:prstGeom>
+            <a:noFill/>
+          </p:spPr>
+          <p:txBody>
+            <a:bodyPr wrap="none" rtlCol="0">
+              <a:spAutoFit/>
+            </a:bodyPr>
+            <a:lstStyle/>
+            <a:p>
+              <a:r>
+                <a:rPr lang="en-US" dirty="0"/>
+                <a:t>stack</a:t>
+              </a:r>
+            </a:p>
+          </p:txBody>
+        </p:sp>
+      </p:grpSp>
+      <p:sp>
+        <p:nvSpPr>
+          <p:cNvPr id="96" name="TextBox 95">
+            <a:extLst>
+              <a:ext uri="{FF2B5EF4-FFF2-40B4-BE49-F238E27FC236}">
+                <a16:creationId xmlns:a16="http://schemas.microsoft.com/office/drawing/2014/main" id="{0F9EEDA5-E410-285A-7B09-7F2696FFA003}"/>
+              </a:ext>
+            </a:extLst>
+          </p:cNvPr>
+          <p:cNvSpPr txBox="1"/>
+          <p:nvPr/>
+        </p:nvSpPr>
+        <p:spPr>
+          <a:xfrm>
+            <a:off x="5673301" y="4058584"/>
+            <a:ext cx="5771148" cy="369332"/>
+          </a:xfrm>
+          <a:prstGeom prst="rect">
+            <a:avLst/>
+          </a:prstGeom>
+          <a:solidFill>
+            <a:schemeClr val="tx1">
+              <a:lumMod val="95000"/>
+            </a:schemeClr>
+          </a:solidFill>
+          <a:ln>
+            <a:solidFill>
+              <a:schemeClr val="bg1"/>
+            </a:solidFill>
+          </a:ln>
+        </p:spPr>
+        <p:txBody>
+          <a:bodyPr wrap="square" rtlCol="0">
+            <a:spAutoFit/>
+          </a:bodyPr>
+          <a:lstStyle/>
+          <a:p>
+            <a:r>
+              <a:rPr lang="en-US" dirty="0">
+                <a:solidFill>
+                  <a:schemeClr val="accent2"/>
+                </a:solidFill>
+                <a:latin typeface="Arial" panose="020B0604020202020204" pitchFamily="34" charset="0"/>
+                <a:cs typeface="Arial" panose="020B0604020202020204" pitchFamily="34" charset="0"/>
+              </a:rPr>
+              <a:t>Turing Machine</a:t>
+            </a:r>
+            <a:r>
+              <a:rPr lang="en-US" dirty="0">
+                <a:solidFill>
+                  <a:schemeClr val="bg1"/>
+                </a:solidFill>
+                <a:latin typeface="Arial" panose="020B0604020202020204" pitchFamily="34" charset="0"/>
+                <a:cs typeface="Arial" panose="020B0604020202020204" pitchFamily="34" charset="0"/>
+              </a:rPr>
+              <a:t>. An NFA with a </a:t>
+            </a:r>
+            <a:r>
+              <a:rPr lang="en-US" dirty="0">
+                <a:solidFill>
+                  <a:schemeClr val="accent2"/>
+                </a:solidFill>
+                <a:latin typeface="Arial" panose="020B0604020202020204" pitchFamily="34" charset="0"/>
+                <a:cs typeface="Arial" panose="020B0604020202020204" pitchFamily="34" charset="0"/>
+              </a:rPr>
+              <a:t>tape (array)</a:t>
+            </a:r>
+          </a:p>
+        </p:txBody>
+      </p:sp>
+      <p:grpSp>
+        <p:nvGrpSpPr>
+          <p:cNvPr id="101" name="Group 100">
+            <a:extLst>
+              <a:ext uri="{FF2B5EF4-FFF2-40B4-BE49-F238E27FC236}">
+                <a16:creationId xmlns:a16="http://schemas.microsoft.com/office/drawing/2014/main" id="{2E654BED-3A79-C23B-84E6-B0C63B167A26}"/>
+              </a:ext>
+            </a:extLst>
+          </p:cNvPr>
+          <p:cNvGrpSpPr/>
+          <p:nvPr/>
+        </p:nvGrpSpPr>
+        <p:grpSpPr>
+          <a:xfrm>
+            <a:off x="1660842" y="3644726"/>
+            <a:ext cx="3192643" cy="2636392"/>
+            <a:chOff x="1212972" y="3961968"/>
+            <a:chExt cx="3192643" cy="2636392"/>
+          </a:xfrm>
+        </p:grpSpPr>
+        <p:sp>
+          <p:nvSpPr>
+            <p:cNvPr id="5" name="Oval 4">
+              <a:extLst>
+                <a:ext uri="{FF2B5EF4-FFF2-40B4-BE49-F238E27FC236}">
+                  <a16:creationId xmlns:a16="http://schemas.microsoft.com/office/drawing/2014/main" id="{148D81D8-01CD-E312-358C-70EF31F961C2}"/>
+                </a:ext>
+              </a:extLst>
+            </p:cNvPr>
+            <p:cNvSpPr/>
+            <p:nvPr/>
+          </p:nvSpPr>
+          <p:spPr>
+            <a:xfrm>
+              <a:off x="1579220" y="3961968"/>
+              <a:ext cx="369947" cy="369948"/>
+            </a:xfrm>
+            <a:prstGeom prst="ellipse">
+              <a:avLst/>
+            </a:prstGeom>
+            <a:solidFill>
+              <a:schemeClr val="accent2"/>
+            </a:solidFill>
+            <a:ln>
+              <a:solidFill>
+                <a:schemeClr val="bg1"/>
+              </a:solidFill>
+            </a:ln>
+          </p:spPr>
+          <p:style>
+            <a:lnRef idx="2">
+              <a:schemeClr val="accent1">
+                <a:shade val="15000"/>
+              </a:schemeClr>
+            </a:lnRef>
+            <a:fillRef idx="1">
+              <a:schemeClr val="accent1"/>
+            </a:fillRef>
+            <a:effectRef idx="0">
+              <a:schemeClr val="accent1"/>
+            </a:effectRef>
+            <a:fontRef idx="minor">
+              <a:schemeClr val="lt1"/>
+            </a:fontRef>
+          </p:style>
+          <p:txBody>
+            <a:bodyPr rtlCol="0" anchor="ctr"/>
+            <a:lstStyle/>
+            <a:p>
+              <a:pPr algn="ctr"/>
+              <a:r>
+                <a:rPr lang="en-US" dirty="0">
+                  <a:solidFill>
+                    <a:schemeClr val="bg1"/>
+                  </a:solidFill>
+                </a:rPr>
+                <a:t>1</a:t>
+              </a:r>
+            </a:p>
+          </p:txBody>
+        </p:sp>
+        <p:sp>
+          <p:nvSpPr>
+            <p:cNvPr id="46" name="Oval 45">
+              <a:extLst>
+                <a:ext uri="{FF2B5EF4-FFF2-40B4-BE49-F238E27FC236}">
+                  <a16:creationId xmlns:a16="http://schemas.microsoft.com/office/drawing/2014/main" id="{4C360322-404E-3CF2-2557-812A9D0F4200}"/>
+                </a:ext>
+              </a:extLst>
+            </p:cNvPr>
+            <p:cNvSpPr/>
+            <p:nvPr/>
+          </p:nvSpPr>
+          <p:spPr>
+            <a:xfrm>
+              <a:off x="2398036" y="3961968"/>
+              <a:ext cx="369947" cy="369948"/>
+            </a:xfrm>
+            <a:prstGeom prst="ellipse">
+              <a:avLst/>
+            </a:prstGeom>
+            <a:solidFill>
+              <a:schemeClr val="accent2"/>
+            </a:solidFill>
+            <a:ln>
+              <a:solidFill>
+                <a:schemeClr val="bg1"/>
+              </a:solidFill>
+            </a:ln>
+          </p:spPr>
+          <p:style>
+            <a:lnRef idx="2">
+              <a:schemeClr val="accent1">
+                <a:shade val="15000"/>
+              </a:schemeClr>
+            </a:lnRef>
+            <a:fillRef idx="1">
+              <a:schemeClr val="accent1"/>
+            </a:fillRef>
+            <a:effectRef idx="0">
+              <a:schemeClr val="accent1"/>
+            </a:effectRef>
+            <a:fontRef idx="minor">
+              <a:schemeClr val="lt1"/>
+            </a:fontRef>
+          </p:style>
+          <p:txBody>
+            <a:bodyPr rtlCol="0" anchor="ctr"/>
+            <a:lstStyle/>
+            <a:p>
+              <a:pPr algn="ctr"/>
+              <a:r>
+                <a:rPr lang="en-US" dirty="0">
+                  <a:solidFill>
+                    <a:schemeClr val="bg1"/>
+                  </a:solidFill>
+                </a:rPr>
+                <a:t>2</a:t>
+              </a:r>
+            </a:p>
+          </p:txBody>
+        </p:sp>
+        <p:sp>
+          <p:nvSpPr>
+            <p:cNvPr id="47" name="Oval 46">
+              <a:extLst>
+                <a:ext uri="{FF2B5EF4-FFF2-40B4-BE49-F238E27FC236}">
+                  <a16:creationId xmlns:a16="http://schemas.microsoft.com/office/drawing/2014/main" id="{469FA3F8-A3D6-48FB-3AB0-39ACF74929F3}"/>
+                </a:ext>
+              </a:extLst>
+            </p:cNvPr>
+            <p:cNvSpPr/>
+            <p:nvPr/>
+          </p:nvSpPr>
+          <p:spPr>
+            <a:xfrm>
+              <a:off x="3216852" y="3961968"/>
+              <a:ext cx="369947" cy="369948"/>
+            </a:xfrm>
+            <a:prstGeom prst="ellipse">
+              <a:avLst/>
+            </a:prstGeom>
+            <a:solidFill>
+              <a:schemeClr val="accent2"/>
+            </a:solidFill>
+            <a:ln>
+              <a:solidFill>
+                <a:schemeClr val="bg1"/>
+              </a:solidFill>
+            </a:ln>
+          </p:spPr>
+          <p:style>
+            <a:lnRef idx="2">
+              <a:schemeClr val="accent1">
+                <a:shade val="15000"/>
+              </a:schemeClr>
+            </a:lnRef>
+            <a:fillRef idx="1">
+              <a:schemeClr val="accent1"/>
+            </a:fillRef>
+            <a:effectRef idx="0">
+              <a:schemeClr val="accent1"/>
+            </a:effectRef>
+            <a:fontRef idx="minor">
+              <a:schemeClr val="lt1"/>
+            </a:fontRef>
+          </p:style>
+          <p:txBody>
+            <a:bodyPr rtlCol="0" anchor="ctr"/>
+            <a:lstStyle/>
+            <a:p>
+              <a:pPr algn="ctr"/>
+              <a:r>
+                <a:rPr lang="en-US" dirty="0">
+                  <a:solidFill>
+                    <a:schemeClr val="bg1"/>
+                  </a:solidFill>
+                </a:rPr>
+                <a:t>3</a:t>
+              </a:r>
+            </a:p>
+          </p:txBody>
+        </p:sp>
+        <p:sp>
+          <p:nvSpPr>
+            <p:cNvPr id="48" name="Oval 47">
+              <a:extLst>
+                <a:ext uri="{FF2B5EF4-FFF2-40B4-BE49-F238E27FC236}">
+                  <a16:creationId xmlns:a16="http://schemas.microsoft.com/office/drawing/2014/main" id="{3CAA44FC-1219-059A-29D5-4BDC29BAAB98}"/>
+                </a:ext>
+              </a:extLst>
+            </p:cNvPr>
+            <p:cNvSpPr/>
+            <p:nvPr/>
+          </p:nvSpPr>
+          <p:spPr>
+            <a:xfrm>
+              <a:off x="4035668" y="3961968"/>
+              <a:ext cx="369947" cy="369948"/>
+            </a:xfrm>
+            <a:prstGeom prst="ellipse">
+              <a:avLst/>
+            </a:prstGeom>
+            <a:solidFill>
+              <a:schemeClr val="accent2"/>
+            </a:solidFill>
+            <a:ln>
+              <a:solidFill>
+                <a:schemeClr val="bg1"/>
+              </a:solidFill>
+            </a:ln>
+          </p:spPr>
+          <p:style>
+            <a:lnRef idx="2">
+              <a:schemeClr val="accent1">
+                <a:shade val="15000"/>
+              </a:schemeClr>
+            </a:lnRef>
+            <a:fillRef idx="1">
+              <a:schemeClr val="accent1"/>
+            </a:fillRef>
+            <a:effectRef idx="0">
+              <a:schemeClr val="accent1"/>
+            </a:effectRef>
+            <a:fontRef idx="minor">
+              <a:schemeClr val="lt1"/>
+            </a:fontRef>
+          </p:style>
+          <p:txBody>
+            <a:bodyPr rtlCol="0" anchor="ctr"/>
+            <a:lstStyle/>
+            <a:p>
+              <a:pPr algn="ctr"/>
+              <a:r>
+                <a:rPr lang="en-US" dirty="0">
+                  <a:solidFill>
+                    <a:schemeClr val="bg1"/>
+                  </a:solidFill>
+                </a:rPr>
+                <a:t>4</a:t>
+              </a:r>
+            </a:p>
+          </p:txBody>
+        </p:sp>
+        <p:sp>
+          <p:nvSpPr>
+            <p:cNvPr id="49" name="Oval 48">
+              <a:extLst>
+                <a:ext uri="{FF2B5EF4-FFF2-40B4-BE49-F238E27FC236}">
+                  <a16:creationId xmlns:a16="http://schemas.microsoft.com/office/drawing/2014/main" id="{246B0DDE-0E95-20DF-1852-260A0F5E0290}"/>
+                </a:ext>
+              </a:extLst>
+            </p:cNvPr>
+            <p:cNvSpPr/>
+            <p:nvPr/>
+          </p:nvSpPr>
+          <p:spPr>
+            <a:xfrm>
+              <a:off x="1579220" y="4810380"/>
+              <a:ext cx="369947" cy="369948"/>
+            </a:xfrm>
+            <a:prstGeom prst="ellipse">
+              <a:avLst/>
+            </a:prstGeom>
+            <a:solidFill>
+              <a:schemeClr val="accent2"/>
+            </a:solidFill>
+            <a:ln>
+              <a:solidFill>
+                <a:schemeClr val="bg1"/>
+              </a:solidFill>
+            </a:ln>
+          </p:spPr>
+          <p:style>
+            <a:lnRef idx="2">
+              <a:schemeClr val="accent1">
+                <a:shade val="15000"/>
+              </a:schemeClr>
+            </a:lnRef>
+            <a:fillRef idx="1">
+              <a:schemeClr val="accent1"/>
+            </a:fillRef>
+            <a:effectRef idx="0">
+              <a:schemeClr val="accent1"/>
+            </a:effectRef>
+            <a:fontRef idx="minor">
+              <a:schemeClr val="lt1"/>
+            </a:fontRef>
+          </p:style>
+          <p:txBody>
+            <a:bodyPr rtlCol="0" anchor="ctr"/>
+            <a:lstStyle/>
+            <a:p>
+              <a:pPr algn="ctr"/>
+              <a:r>
+                <a:rPr lang="en-US" dirty="0">
+                  <a:solidFill>
+                    <a:schemeClr val="bg1"/>
+                  </a:solidFill>
+                </a:rPr>
+                <a:t>8</a:t>
+              </a:r>
+            </a:p>
+          </p:txBody>
+        </p:sp>
+        <p:sp>
+          <p:nvSpPr>
+            <p:cNvPr id="50" name="Oval 49">
+              <a:extLst>
+                <a:ext uri="{FF2B5EF4-FFF2-40B4-BE49-F238E27FC236}">
+                  <a16:creationId xmlns:a16="http://schemas.microsoft.com/office/drawing/2014/main" id="{EB73E790-FBD4-B03A-9FA4-7A6B4B020C89}"/>
+                </a:ext>
+              </a:extLst>
+            </p:cNvPr>
+            <p:cNvSpPr/>
+            <p:nvPr/>
+          </p:nvSpPr>
+          <p:spPr>
+            <a:xfrm>
+              <a:off x="2398036" y="4810380"/>
+              <a:ext cx="369947" cy="369948"/>
+            </a:xfrm>
+            <a:prstGeom prst="ellipse">
+              <a:avLst/>
+            </a:prstGeom>
+            <a:solidFill>
+              <a:schemeClr val="accent2"/>
+            </a:solidFill>
+            <a:ln>
+              <a:solidFill>
+                <a:schemeClr val="bg1"/>
+              </a:solidFill>
+            </a:ln>
+          </p:spPr>
+          <p:style>
+            <a:lnRef idx="2">
+              <a:schemeClr val="accent1">
+                <a:shade val="15000"/>
+              </a:schemeClr>
+            </a:lnRef>
+            <a:fillRef idx="1">
+              <a:schemeClr val="accent1"/>
+            </a:fillRef>
+            <a:effectRef idx="0">
+              <a:schemeClr val="accent1"/>
+            </a:effectRef>
+            <a:fontRef idx="minor">
+              <a:schemeClr val="lt1"/>
+            </a:fontRef>
+          </p:style>
+          <p:txBody>
+            <a:bodyPr rtlCol="0" anchor="ctr"/>
+            <a:lstStyle/>
+            <a:p>
+              <a:pPr algn="ctr"/>
+              <a:r>
+                <a:rPr lang="en-US" dirty="0">
+                  <a:solidFill>
+                    <a:schemeClr val="bg1"/>
+                  </a:solidFill>
+                </a:rPr>
+                <a:t>7</a:t>
+              </a:r>
+            </a:p>
+          </p:txBody>
+        </p:sp>
+        <p:sp>
+          <p:nvSpPr>
+            <p:cNvPr id="51" name="Oval 50">
+              <a:extLst>
+                <a:ext uri="{FF2B5EF4-FFF2-40B4-BE49-F238E27FC236}">
+                  <a16:creationId xmlns:a16="http://schemas.microsoft.com/office/drawing/2014/main" id="{55663364-079F-6731-D916-92BB4B7174F2}"/>
+                </a:ext>
+              </a:extLst>
+            </p:cNvPr>
+            <p:cNvSpPr/>
+            <p:nvPr/>
+          </p:nvSpPr>
+          <p:spPr>
+            <a:xfrm>
+              <a:off x="3216852" y="4810380"/>
+              <a:ext cx="369947" cy="369948"/>
+            </a:xfrm>
+            <a:prstGeom prst="ellipse">
+              <a:avLst/>
+            </a:prstGeom>
+            <a:solidFill>
+              <a:schemeClr val="accent2"/>
+            </a:solidFill>
+            <a:ln>
+              <a:solidFill>
+                <a:schemeClr val="bg1"/>
+              </a:solidFill>
+            </a:ln>
+          </p:spPr>
+          <p:style>
+            <a:lnRef idx="2">
+              <a:schemeClr val="accent1">
+                <a:shade val="15000"/>
+              </a:schemeClr>
+            </a:lnRef>
+            <a:fillRef idx="1">
+              <a:schemeClr val="accent1"/>
+            </a:fillRef>
+            <a:effectRef idx="0">
+              <a:schemeClr val="accent1"/>
+            </a:effectRef>
+            <a:fontRef idx="minor">
+              <a:schemeClr val="lt1"/>
+            </a:fontRef>
+          </p:style>
+          <p:txBody>
+            <a:bodyPr rtlCol="0" anchor="ctr"/>
+            <a:lstStyle/>
+            <a:p>
+              <a:pPr algn="ctr"/>
+              <a:r>
+                <a:rPr lang="en-US" dirty="0">
+                  <a:solidFill>
+                    <a:schemeClr val="bg1"/>
+                  </a:solidFill>
+                </a:rPr>
+                <a:t>6</a:t>
+              </a:r>
+            </a:p>
+          </p:txBody>
+        </p:sp>
+        <p:sp>
+          <p:nvSpPr>
+            <p:cNvPr id="52" name="Oval 51">
+              <a:extLst>
+                <a:ext uri="{FF2B5EF4-FFF2-40B4-BE49-F238E27FC236}">
+                  <a16:creationId xmlns:a16="http://schemas.microsoft.com/office/drawing/2014/main" id="{8B8FED0C-5A51-6036-E743-0DE1D89C72D1}"/>
+                </a:ext>
+              </a:extLst>
+            </p:cNvPr>
+            <p:cNvSpPr/>
+            <p:nvPr/>
+          </p:nvSpPr>
+          <p:spPr>
+            <a:xfrm>
+              <a:off x="4035668" y="4810380"/>
+              <a:ext cx="369947" cy="369948"/>
+            </a:xfrm>
+            <a:prstGeom prst="ellipse">
+              <a:avLst/>
+            </a:prstGeom>
+            <a:solidFill>
+              <a:schemeClr val="accent2"/>
+            </a:solidFill>
+            <a:ln>
+              <a:solidFill>
+                <a:schemeClr val="bg1"/>
+              </a:solidFill>
+            </a:ln>
+          </p:spPr>
+          <p:style>
+            <a:lnRef idx="2">
+              <a:schemeClr val="accent1">
+                <a:shade val="15000"/>
+              </a:schemeClr>
+            </a:lnRef>
+            <a:fillRef idx="1">
+              <a:schemeClr val="accent1"/>
+            </a:fillRef>
+            <a:effectRef idx="0">
+              <a:schemeClr val="accent1"/>
+            </a:effectRef>
+            <a:fontRef idx="minor">
+              <a:schemeClr val="lt1"/>
+            </a:fontRef>
+          </p:style>
+          <p:txBody>
+            <a:bodyPr rtlCol="0" anchor="ctr"/>
+            <a:lstStyle/>
+            <a:p>
+              <a:pPr algn="ctr"/>
+              <a:r>
+                <a:rPr lang="en-US" dirty="0">
+                  <a:solidFill>
+                    <a:schemeClr val="bg1"/>
+                  </a:solidFill>
+                </a:rPr>
+                <a:t>5</a:t>
+              </a:r>
+            </a:p>
+          </p:txBody>
+        </p:sp>
+        <p:sp>
+          <p:nvSpPr>
+            <p:cNvPr id="53" name="Oval 52">
+              <a:extLst>
+                <a:ext uri="{FF2B5EF4-FFF2-40B4-BE49-F238E27FC236}">
+                  <a16:creationId xmlns:a16="http://schemas.microsoft.com/office/drawing/2014/main" id="{EB1784C5-0B41-B27A-1384-25A37262191D}"/>
+                </a:ext>
+              </a:extLst>
+            </p:cNvPr>
+            <p:cNvSpPr/>
+            <p:nvPr/>
+          </p:nvSpPr>
+          <p:spPr>
+            <a:xfrm>
+              <a:off x="3247680" y="3992797"/>
+              <a:ext cx="309523" cy="309523"/>
+            </a:xfrm>
+            <a:prstGeom prst="ellipse">
+              <a:avLst/>
+            </a:prstGeom>
+            <a:solidFill>
+              <a:schemeClr val="accent2"/>
+            </a:solidFill>
+            <a:ln>
+              <a:solidFill>
+                <a:schemeClr val="bg1"/>
+              </a:solidFill>
+            </a:ln>
+          </p:spPr>
+          <p:style>
+            <a:lnRef idx="2">
+              <a:schemeClr val="accent1">
+                <a:shade val="15000"/>
+              </a:schemeClr>
+            </a:lnRef>
+            <a:fillRef idx="1">
+              <a:schemeClr val="accent1"/>
+            </a:fillRef>
+            <a:effectRef idx="0">
+              <a:schemeClr val="accent1"/>
+            </a:effectRef>
+            <a:fontRef idx="minor">
+              <a:schemeClr val="lt1"/>
+            </a:fontRef>
+          </p:style>
+          <p:txBody>
+            <a:bodyPr rtlCol="0" anchor="ctr"/>
+            <a:lstStyle/>
+            <a:p>
+              <a:pPr algn="ctr"/>
+              <a:r>
+                <a:rPr lang="en-US" dirty="0">
+                  <a:solidFill>
+                    <a:schemeClr val="bg1"/>
+                  </a:solidFill>
+                </a:rPr>
+                <a:t>3</a:t>
+              </a:r>
+            </a:p>
+          </p:txBody>
+        </p:sp>
+        <p:sp>
+          <p:nvSpPr>
+            <p:cNvPr id="54" name="Oval 53">
+              <a:extLst>
+                <a:ext uri="{FF2B5EF4-FFF2-40B4-BE49-F238E27FC236}">
+                  <a16:creationId xmlns:a16="http://schemas.microsoft.com/office/drawing/2014/main" id="{A61E67AD-2112-892D-E407-88A4AA46DC22}"/>
+                </a:ext>
+              </a:extLst>
+            </p:cNvPr>
+            <p:cNvSpPr/>
+            <p:nvPr/>
+          </p:nvSpPr>
+          <p:spPr>
+            <a:xfrm>
+              <a:off x="3247680" y="4840593"/>
+              <a:ext cx="309523" cy="309523"/>
+            </a:xfrm>
+            <a:prstGeom prst="ellipse">
+              <a:avLst/>
+            </a:prstGeom>
+            <a:solidFill>
+              <a:schemeClr val="accent2"/>
+            </a:solidFill>
+            <a:ln>
+              <a:solidFill>
+                <a:schemeClr val="bg1"/>
+              </a:solidFill>
+            </a:ln>
+          </p:spPr>
+          <p:style>
+            <a:lnRef idx="2">
+              <a:schemeClr val="accent1">
+                <a:shade val="15000"/>
+              </a:schemeClr>
+            </a:lnRef>
+            <a:fillRef idx="1">
+              <a:schemeClr val="accent1"/>
+            </a:fillRef>
+            <a:effectRef idx="0">
+              <a:schemeClr val="accent1"/>
+            </a:effectRef>
+            <a:fontRef idx="minor">
+              <a:schemeClr val="lt1"/>
+            </a:fontRef>
+          </p:style>
+          <p:txBody>
+            <a:bodyPr rtlCol="0" anchor="ctr"/>
+            <a:lstStyle/>
+            <a:p>
+              <a:pPr algn="ctr"/>
+              <a:r>
+                <a:rPr lang="en-US" dirty="0">
+                  <a:solidFill>
+                    <a:schemeClr val="bg1"/>
+                  </a:solidFill>
+                </a:rPr>
+                <a:t>6</a:t>
+              </a:r>
+            </a:p>
+          </p:txBody>
+        </p:sp>
+        <p:sp>
+          <p:nvSpPr>
+            <p:cNvPr id="56" name="Oval 55">
+              <a:extLst>
+                <a:ext uri="{FF2B5EF4-FFF2-40B4-BE49-F238E27FC236}">
+                  <a16:creationId xmlns:a16="http://schemas.microsoft.com/office/drawing/2014/main" id="{A1DB90E2-387D-672F-353A-B0E2790C4D7D}"/>
+                </a:ext>
+              </a:extLst>
+            </p:cNvPr>
+            <p:cNvSpPr/>
+            <p:nvPr/>
+          </p:nvSpPr>
+          <p:spPr>
+            <a:xfrm>
+              <a:off x="2428865" y="4840593"/>
+              <a:ext cx="309523" cy="309523"/>
+            </a:xfrm>
+            <a:prstGeom prst="ellipse">
+              <a:avLst/>
+            </a:prstGeom>
+            <a:solidFill>
+              <a:schemeClr val="accent2"/>
+            </a:solidFill>
+            <a:ln>
+              <a:solidFill>
+                <a:schemeClr val="bg1"/>
+              </a:solidFill>
+            </a:ln>
+          </p:spPr>
+          <p:style>
+            <a:lnRef idx="2">
+              <a:schemeClr val="accent1">
+                <a:shade val="15000"/>
+              </a:schemeClr>
+            </a:lnRef>
+            <a:fillRef idx="1">
+              <a:schemeClr val="accent1"/>
+            </a:fillRef>
+            <a:effectRef idx="0">
+              <a:schemeClr val="accent1"/>
+            </a:effectRef>
+            <a:fontRef idx="minor">
+              <a:schemeClr val="lt1"/>
+            </a:fontRef>
+          </p:style>
+          <p:txBody>
+            <a:bodyPr rtlCol="0" anchor="ctr"/>
+            <a:lstStyle/>
+            <a:p>
+              <a:pPr algn="ctr"/>
+              <a:r>
+                <a:rPr lang="en-US" dirty="0">
+                  <a:solidFill>
+                    <a:schemeClr val="bg1"/>
+                  </a:solidFill>
+                </a:rPr>
+                <a:t>5</a:t>
+              </a:r>
+            </a:p>
+          </p:txBody>
+        </p:sp>
+        <p:sp>
+          <p:nvSpPr>
+            <p:cNvPr id="83" name="Oval 82">
+              <a:extLst>
+                <a:ext uri="{FF2B5EF4-FFF2-40B4-BE49-F238E27FC236}">
+                  <a16:creationId xmlns:a16="http://schemas.microsoft.com/office/drawing/2014/main" id="{B130C47A-08B2-0460-CB57-F2456F99BB3B}"/>
+                </a:ext>
+              </a:extLst>
+            </p:cNvPr>
+            <p:cNvSpPr/>
+            <p:nvPr/>
+          </p:nvSpPr>
+          <p:spPr>
+            <a:xfrm>
+              <a:off x="1609432" y="4840593"/>
+              <a:ext cx="309523" cy="309523"/>
+            </a:xfrm>
+            <a:prstGeom prst="ellipse">
+              <a:avLst/>
+            </a:prstGeom>
+            <a:solidFill>
+              <a:schemeClr val="accent2"/>
+            </a:solidFill>
+            <a:ln>
+              <a:solidFill>
+                <a:schemeClr val="bg1"/>
+              </a:solidFill>
+            </a:ln>
+          </p:spPr>
+          <p:style>
+            <a:lnRef idx="2">
+              <a:schemeClr val="accent1">
+                <a:shade val="15000"/>
+              </a:schemeClr>
+            </a:lnRef>
+            <a:fillRef idx="1">
+              <a:schemeClr val="accent1"/>
+            </a:fillRef>
+            <a:effectRef idx="0">
+              <a:schemeClr val="accent1"/>
+            </a:effectRef>
+            <a:fontRef idx="minor">
+              <a:schemeClr val="lt1"/>
+            </a:fontRef>
+          </p:style>
+          <p:txBody>
+            <a:bodyPr rtlCol="0" anchor="ctr"/>
+            <a:lstStyle/>
+            <a:p>
+              <a:pPr algn="ctr"/>
+              <a:r>
+                <a:rPr lang="en-US" dirty="0">
+                  <a:solidFill>
+                    <a:schemeClr val="bg1"/>
+                  </a:solidFill>
+                </a:rPr>
+                <a:t>8</a:t>
+              </a:r>
+            </a:p>
+          </p:txBody>
+        </p:sp>
+        <p:cxnSp>
+          <p:nvCxnSpPr>
+            <p:cNvPr id="87" name="Straight Arrow Connector 86">
+              <a:extLst>
+                <a:ext uri="{FF2B5EF4-FFF2-40B4-BE49-F238E27FC236}">
+                  <a16:creationId xmlns:a16="http://schemas.microsoft.com/office/drawing/2014/main" id="{6268C106-91BC-913E-4393-0E2A37B77800}"/>
+                </a:ext>
+              </a:extLst>
+            </p:cNvPr>
+            <p:cNvCxnSpPr>
+              <a:cxnSpLocks/>
+              <a:endCxn id="5" idx="2"/>
+            </p:cNvCxnSpPr>
+            <p:nvPr/>
+          </p:nvCxnSpPr>
+          <p:spPr>
+            <a:xfrm>
+              <a:off x="1212972" y="4146942"/>
+              <a:ext cx="366248" cy="0"/>
+            </a:xfrm>
+            <a:prstGeom prst="straightConnector1">
+              <a:avLst/>
+            </a:prstGeom>
+            <a:ln w="31750">
+              <a:solidFill>
+                <a:schemeClr val="accent2"/>
+              </a:solidFill>
+              <a:tailEnd type="triangle"/>
+            </a:ln>
+          </p:spPr>
+          <p:style>
+            <a:lnRef idx="1">
+              <a:schemeClr val="accent1"/>
+            </a:lnRef>
+            <a:fillRef idx="0">
+              <a:schemeClr val="accent1"/>
+            </a:fillRef>
+            <a:effectRef idx="0">
+              <a:schemeClr val="accent1"/>
+            </a:effectRef>
+            <a:fontRef idx="minor">
+              <a:schemeClr val="tx1"/>
+            </a:fontRef>
+          </p:style>
+        </p:cxnSp>
+        <p:cxnSp>
+          <p:nvCxnSpPr>
+            <p:cNvPr id="88" name="Straight Arrow Connector 87">
+              <a:extLst>
+                <a:ext uri="{FF2B5EF4-FFF2-40B4-BE49-F238E27FC236}">
+                  <a16:creationId xmlns:a16="http://schemas.microsoft.com/office/drawing/2014/main" id="{FF65A843-5B76-6198-79F6-753832625245}"/>
+                </a:ext>
+              </a:extLst>
+            </p:cNvPr>
+            <p:cNvCxnSpPr>
+              <a:cxnSpLocks/>
+              <a:stCxn id="5" idx="6"/>
+              <a:endCxn id="46" idx="2"/>
+            </p:cNvCxnSpPr>
+            <p:nvPr/>
+          </p:nvCxnSpPr>
+          <p:spPr>
+            <a:xfrm>
+              <a:off x="1949167" y="4146942"/>
+              <a:ext cx="448869" cy="0"/>
+            </a:xfrm>
+            <a:prstGeom prst="straightConnector1">
+              <a:avLst/>
+            </a:prstGeom>
+            <a:ln w="31750">
+              <a:solidFill>
+                <a:schemeClr val="accent2"/>
+              </a:solidFill>
+              <a:tailEnd type="triangle"/>
+            </a:ln>
+          </p:spPr>
+          <p:style>
+            <a:lnRef idx="1">
+              <a:schemeClr val="accent1"/>
+            </a:lnRef>
+            <a:fillRef idx="0">
+              <a:schemeClr val="accent1"/>
+            </a:fillRef>
+            <a:effectRef idx="0">
+              <a:schemeClr val="accent1"/>
+            </a:effectRef>
+            <a:fontRef idx="minor">
+              <a:schemeClr val="tx1"/>
+            </a:fontRef>
+          </p:style>
+        </p:cxnSp>
+        <p:cxnSp>
+          <p:nvCxnSpPr>
+            <p:cNvPr id="89" name="Straight Arrow Connector 88">
+              <a:extLst>
+                <a:ext uri="{FF2B5EF4-FFF2-40B4-BE49-F238E27FC236}">
+                  <a16:creationId xmlns:a16="http://schemas.microsoft.com/office/drawing/2014/main" id="{02C26872-4A0D-6410-24E8-D96577E20CAE}"/>
+                </a:ext>
+              </a:extLst>
+            </p:cNvPr>
+            <p:cNvCxnSpPr>
+              <a:cxnSpLocks/>
+              <a:stCxn id="46" idx="6"/>
+              <a:endCxn id="47" idx="2"/>
+            </p:cNvCxnSpPr>
+            <p:nvPr/>
+          </p:nvCxnSpPr>
+          <p:spPr>
+            <a:xfrm>
+              <a:off x="2767983" y="4146942"/>
+              <a:ext cx="448869" cy="0"/>
+            </a:xfrm>
+            <a:prstGeom prst="straightConnector1">
+              <a:avLst/>
+            </a:prstGeom>
+            <a:ln w="31750">
+              <a:solidFill>
+                <a:schemeClr val="accent2"/>
+              </a:solidFill>
+              <a:tailEnd type="triangle"/>
+            </a:ln>
+          </p:spPr>
+          <p:style>
+            <a:lnRef idx="1">
+              <a:schemeClr val="accent1"/>
+            </a:lnRef>
+            <a:fillRef idx="0">
+              <a:schemeClr val="accent1"/>
+            </a:fillRef>
+            <a:effectRef idx="0">
+              <a:schemeClr val="accent1"/>
+            </a:effectRef>
+            <a:fontRef idx="minor">
+              <a:schemeClr val="tx1"/>
+            </a:fontRef>
+          </p:style>
+        </p:cxnSp>
+        <p:cxnSp>
+          <p:nvCxnSpPr>
+            <p:cNvPr id="90" name="Straight Arrow Connector 89">
+              <a:extLst>
+                <a:ext uri="{FF2B5EF4-FFF2-40B4-BE49-F238E27FC236}">
+                  <a16:creationId xmlns:a16="http://schemas.microsoft.com/office/drawing/2014/main" id="{88A3F12A-E478-66CB-CB32-9CE916DC778A}"/>
+                </a:ext>
+              </a:extLst>
+            </p:cNvPr>
+            <p:cNvCxnSpPr>
+              <a:cxnSpLocks/>
+              <a:stCxn id="47" idx="6"/>
+              <a:endCxn id="48" idx="2"/>
+            </p:cNvCxnSpPr>
+            <p:nvPr/>
+          </p:nvCxnSpPr>
+          <p:spPr>
+            <a:xfrm>
+              <a:off x="3586799" y="4146942"/>
+              <a:ext cx="448869" cy="0"/>
+            </a:xfrm>
+            <a:prstGeom prst="straightConnector1">
+              <a:avLst/>
+            </a:prstGeom>
+            <a:ln w="31750">
+              <a:solidFill>
+                <a:schemeClr val="accent2"/>
+              </a:solidFill>
+              <a:tailEnd type="triangle"/>
+            </a:ln>
+          </p:spPr>
+          <p:style>
+            <a:lnRef idx="1">
+              <a:schemeClr val="accent1"/>
+            </a:lnRef>
+            <a:fillRef idx="0">
+              <a:schemeClr val="accent1"/>
+            </a:fillRef>
+            <a:effectRef idx="0">
+              <a:schemeClr val="accent1"/>
+            </a:effectRef>
+            <a:fontRef idx="minor">
+              <a:schemeClr val="tx1"/>
+            </a:fontRef>
+          </p:style>
+        </p:cxnSp>
+        <p:cxnSp>
+          <p:nvCxnSpPr>
+            <p:cNvPr id="91" name="Straight Arrow Connector 90">
+              <a:extLst>
+                <a:ext uri="{FF2B5EF4-FFF2-40B4-BE49-F238E27FC236}">
+                  <a16:creationId xmlns:a16="http://schemas.microsoft.com/office/drawing/2014/main" id="{39774799-42CC-27CF-4AA3-501209ED8DBA}"/>
+                </a:ext>
+              </a:extLst>
+            </p:cNvPr>
+            <p:cNvCxnSpPr>
+              <a:cxnSpLocks/>
+              <a:stCxn id="47" idx="5"/>
+              <a:endCxn id="52" idx="1"/>
+            </p:cNvCxnSpPr>
+            <p:nvPr/>
+          </p:nvCxnSpPr>
+          <p:spPr>
+            <a:xfrm>
+              <a:off x="3532622" y="4277738"/>
+              <a:ext cx="557224" cy="586820"/>
+            </a:xfrm>
+            <a:prstGeom prst="straightConnector1">
+              <a:avLst/>
+            </a:prstGeom>
+            <a:ln w="31750">
+              <a:solidFill>
+                <a:schemeClr val="accent2"/>
+              </a:solidFill>
+              <a:tailEnd type="triangle"/>
+            </a:ln>
+          </p:spPr>
+          <p:style>
+            <a:lnRef idx="1">
+              <a:schemeClr val="accent1"/>
+            </a:lnRef>
+            <a:fillRef idx="0">
+              <a:schemeClr val="accent1"/>
+            </a:fillRef>
+            <a:effectRef idx="0">
+              <a:schemeClr val="accent1"/>
+            </a:effectRef>
+            <a:fontRef idx="minor">
+              <a:schemeClr val="tx1"/>
+            </a:fontRef>
+          </p:style>
+        </p:cxnSp>
+        <p:cxnSp>
+          <p:nvCxnSpPr>
+            <p:cNvPr id="92" name="Straight Arrow Connector 91">
+              <a:extLst>
+                <a:ext uri="{FF2B5EF4-FFF2-40B4-BE49-F238E27FC236}">
+                  <a16:creationId xmlns:a16="http://schemas.microsoft.com/office/drawing/2014/main" id="{D4E227D7-D416-BCFC-028D-83714D302ADF}"/>
+                </a:ext>
+              </a:extLst>
+            </p:cNvPr>
+            <p:cNvCxnSpPr>
+              <a:cxnSpLocks/>
+              <a:stCxn id="48" idx="4"/>
+              <a:endCxn id="52" idx="0"/>
+            </p:cNvCxnSpPr>
+            <p:nvPr/>
+          </p:nvCxnSpPr>
+          <p:spPr>
+            <a:xfrm>
+              <a:off x="4220641" y="4331916"/>
+              <a:ext cx="0" cy="478465"/>
+            </a:xfrm>
+            <a:prstGeom prst="straightConnector1">
+              <a:avLst/>
+            </a:prstGeom>
+            <a:ln w="31750">
+              <a:solidFill>
+                <a:schemeClr val="accent2"/>
+              </a:solidFill>
+              <a:tailEnd type="triangle"/>
+            </a:ln>
+          </p:spPr>
+          <p:style>
+            <a:lnRef idx="1">
+              <a:schemeClr val="accent1"/>
+            </a:lnRef>
+            <a:fillRef idx="0">
+              <a:schemeClr val="accent1"/>
+            </a:fillRef>
+            <a:effectRef idx="0">
+              <a:schemeClr val="accent1"/>
+            </a:effectRef>
+            <a:fontRef idx="minor">
+              <a:schemeClr val="tx1"/>
+            </a:fontRef>
+          </p:style>
+        </p:cxnSp>
+        <p:cxnSp>
+          <p:nvCxnSpPr>
+            <p:cNvPr id="93" name="Straight Arrow Connector 92">
+              <a:extLst>
+                <a:ext uri="{FF2B5EF4-FFF2-40B4-BE49-F238E27FC236}">
+                  <a16:creationId xmlns:a16="http://schemas.microsoft.com/office/drawing/2014/main" id="{D85F8D01-95E4-63EB-0191-718F10F15725}"/>
+                </a:ext>
+              </a:extLst>
+            </p:cNvPr>
+            <p:cNvCxnSpPr>
+              <a:cxnSpLocks/>
+              <a:stCxn id="52" idx="2"/>
+              <a:endCxn id="51" idx="6"/>
+            </p:cNvCxnSpPr>
+            <p:nvPr/>
+          </p:nvCxnSpPr>
+          <p:spPr>
+            <a:xfrm flipH="1">
+              <a:off x="3586799" y="4995354"/>
+              <a:ext cx="448869" cy="0"/>
+            </a:xfrm>
+            <a:prstGeom prst="straightConnector1">
+              <a:avLst/>
+            </a:prstGeom>
+            <a:ln w="31750">
+              <a:solidFill>
+                <a:schemeClr val="accent2"/>
+              </a:solidFill>
+              <a:tailEnd type="triangle"/>
+            </a:ln>
+          </p:spPr>
+          <p:style>
+            <a:lnRef idx="1">
+              <a:schemeClr val="accent1"/>
+            </a:lnRef>
+            <a:fillRef idx="0">
+              <a:schemeClr val="accent1"/>
+            </a:fillRef>
+            <a:effectRef idx="0">
+              <a:schemeClr val="accent1"/>
+            </a:effectRef>
+            <a:fontRef idx="minor">
+              <a:schemeClr val="tx1"/>
+            </a:fontRef>
+          </p:style>
+        </p:cxnSp>
+        <p:cxnSp>
+          <p:nvCxnSpPr>
+            <p:cNvPr id="94" name="Straight Arrow Connector 93">
+              <a:extLst>
+                <a:ext uri="{FF2B5EF4-FFF2-40B4-BE49-F238E27FC236}">
+                  <a16:creationId xmlns:a16="http://schemas.microsoft.com/office/drawing/2014/main" id="{25419317-283B-1782-D81B-78716EC5A839}"/>
+                </a:ext>
+              </a:extLst>
+            </p:cNvPr>
+            <p:cNvCxnSpPr>
+              <a:cxnSpLocks/>
+              <a:stCxn id="51" idx="2"/>
+              <a:endCxn id="50" idx="6"/>
+            </p:cNvCxnSpPr>
+            <p:nvPr/>
+          </p:nvCxnSpPr>
+          <p:spPr>
+            <a:xfrm flipH="1">
+              <a:off x="2767983" y="4995354"/>
+              <a:ext cx="448869" cy="0"/>
+            </a:xfrm>
+            <a:prstGeom prst="straightConnector1">
+              <a:avLst/>
+            </a:prstGeom>
+            <a:ln w="31750">
+              <a:solidFill>
+                <a:schemeClr val="accent2"/>
+              </a:solidFill>
+              <a:tailEnd type="triangle"/>
+            </a:ln>
+          </p:spPr>
+          <p:style>
+            <a:lnRef idx="1">
+              <a:schemeClr val="accent1"/>
+            </a:lnRef>
+            <a:fillRef idx="0">
+              <a:schemeClr val="accent1"/>
+            </a:fillRef>
+            <a:effectRef idx="0">
+              <a:schemeClr val="accent1"/>
+            </a:effectRef>
+            <a:fontRef idx="minor">
+              <a:schemeClr val="tx1"/>
+            </a:fontRef>
+          </p:style>
+        </p:cxnSp>
+        <p:cxnSp>
+          <p:nvCxnSpPr>
+            <p:cNvPr id="95" name="Straight Arrow Connector 94">
+              <a:extLst>
+                <a:ext uri="{FF2B5EF4-FFF2-40B4-BE49-F238E27FC236}">
+                  <a16:creationId xmlns:a16="http://schemas.microsoft.com/office/drawing/2014/main" id="{B59CD585-A43D-33D3-7FD4-0625E459827D}"/>
+                </a:ext>
+              </a:extLst>
+            </p:cNvPr>
+            <p:cNvCxnSpPr>
+              <a:cxnSpLocks/>
+              <a:stCxn id="50" idx="2"/>
+              <a:endCxn id="49" idx="6"/>
+            </p:cNvCxnSpPr>
+            <p:nvPr/>
+          </p:nvCxnSpPr>
+          <p:spPr>
+            <a:xfrm flipH="1">
+              <a:off x="1949167" y="4995354"/>
+              <a:ext cx="448869" cy="0"/>
+            </a:xfrm>
+            <a:prstGeom prst="straightConnector1">
+              <a:avLst/>
+            </a:prstGeom>
+            <a:ln w="31750">
+              <a:solidFill>
+                <a:schemeClr val="accent2"/>
+              </a:solidFill>
+              <a:tailEnd type="triangle"/>
+            </a:ln>
+          </p:spPr>
+          <p:style>
+            <a:lnRef idx="1">
+              <a:schemeClr val="accent1"/>
+            </a:lnRef>
+            <a:fillRef idx="0">
+              <a:schemeClr val="accent1"/>
+            </a:fillRef>
+            <a:effectRef idx="0">
+              <a:schemeClr val="accent1"/>
+            </a:effectRef>
+            <a:fontRef idx="minor">
+              <a:schemeClr val="tx1"/>
+            </a:fontRef>
+          </p:style>
+        </p:cxnSp>
+        <p:sp>
+          <p:nvSpPr>
+            <p:cNvPr id="97" name="Rectangle 96">
+              <a:extLst>
+                <a:ext uri="{FF2B5EF4-FFF2-40B4-BE49-F238E27FC236}">
+                  <a16:creationId xmlns:a16="http://schemas.microsoft.com/office/drawing/2014/main" id="{712DA111-5884-9BBF-82BD-77A7E5003275}"/>
+                </a:ext>
+              </a:extLst>
+            </p:cNvPr>
+            <p:cNvSpPr/>
+            <p:nvPr/>
+          </p:nvSpPr>
+          <p:spPr>
+            <a:xfrm rot="5400000">
+              <a:off x="2770491" y="4344492"/>
+              <a:ext cx="298580" cy="2800584"/>
+            </a:xfrm>
+            <a:prstGeom prst="rect">
+              <a:avLst/>
+            </a:prstGeom>
+            <a:solidFill>
+              <a:schemeClr val="accent2"/>
+            </a:solidFill>
+            <a:ln>
+              <a:solidFill>
+                <a:schemeClr val="bg1"/>
+              </a:solidFill>
+            </a:ln>
+          </p:spPr>
+          <p:style>
+            <a:lnRef idx="2">
+              <a:schemeClr val="accent1">
+                <a:shade val="15000"/>
+              </a:schemeClr>
+            </a:lnRef>
+            <a:fillRef idx="1">
+              <a:schemeClr val="accent1"/>
+            </a:fillRef>
+            <a:effectRef idx="0">
+              <a:schemeClr val="accent1"/>
+            </a:effectRef>
+            <a:fontRef idx="minor">
+              <a:schemeClr val="lt1"/>
+            </a:fontRef>
+          </p:style>
+          <p:txBody>
+            <a:bodyPr rtlCol="0" anchor="ctr"/>
+            <a:lstStyle/>
+            <a:p>
+              <a:pPr algn="ctr"/>
+              <a:endParaRPr lang="en-US"/>
+            </a:p>
+          </p:txBody>
+        </p:sp>
+        <p:sp>
+          <p:nvSpPr>
+            <p:cNvPr id="98" name="TextBox 97">
+              <a:extLst>
+                <a:ext uri="{FF2B5EF4-FFF2-40B4-BE49-F238E27FC236}">
+                  <a16:creationId xmlns:a16="http://schemas.microsoft.com/office/drawing/2014/main" id="{5617F416-6728-E458-CCAD-F06CD64FCE15}"/>
+                </a:ext>
+              </a:extLst>
+            </p:cNvPr>
+            <p:cNvSpPr txBox="1"/>
+            <p:nvPr/>
+          </p:nvSpPr>
+          <p:spPr>
+            <a:xfrm>
+              <a:off x="2428865" y="6229028"/>
+              <a:ext cx="635880" cy="369332"/>
+            </a:xfrm>
+            <a:prstGeom prst="rect">
+              <a:avLst/>
+            </a:prstGeom>
+            <a:noFill/>
+          </p:spPr>
+          <p:txBody>
+            <a:bodyPr wrap="none" rtlCol="0">
+              <a:spAutoFit/>
+            </a:bodyPr>
+            <a:lstStyle/>
+            <a:p>
+              <a:r>
+                <a:rPr lang="en-US" dirty="0"/>
+                <a:t>Tape</a:t>
+              </a:r>
+            </a:p>
+          </p:txBody>
+        </p:sp>
+        <p:sp>
+          <p:nvSpPr>
+            <p:cNvPr id="100" name="TextBox 99">
+              <a:extLst>
+                <a:ext uri="{FF2B5EF4-FFF2-40B4-BE49-F238E27FC236}">
+                  <a16:creationId xmlns:a16="http://schemas.microsoft.com/office/drawing/2014/main" id="{F3B212B4-D291-8804-882F-6A6D03EDB9F3}"/>
+                </a:ext>
+              </a:extLst>
+            </p:cNvPr>
+            <p:cNvSpPr txBox="1"/>
+            <p:nvPr/>
+          </p:nvSpPr>
+          <p:spPr>
+            <a:xfrm>
+              <a:off x="3263533" y="5929757"/>
+              <a:ext cx="293670" cy="369332"/>
+            </a:xfrm>
+            <a:prstGeom prst="rect">
+              <a:avLst/>
+            </a:prstGeom>
+            <a:noFill/>
+          </p:spPr>
+          <p:txBody>
+            <a:bodyPr wrap="none" rtlCol="0">
+              <a:spAutoFit/>
+            </a:bodyPr>
+            <a:lstStyle/>
+            <a:p>
+              <a:r>
+                <a:rPr lang="en-US" dirty="0"/>
+                <a:t>^</a:t>
+              </a:r>
+            </a:p>
+          </p:txBody>
+        </p:sp>
+      </p:grpSp>
+      <p:sp>
+        <p:nvSpPr>
+          <p:cNvPr id="102" name="TextBox 101">
+            <a:extLst>
+              <a:ext uri="{FF2B5EF4-FFF2-40B4-BE49-F238E27FC236}">
+                <a16:creationId xmlns:a16="http://schemas.microsoft.com/office/drawing/2014/main" id="{540D90B5-5452-205F-1100-61B9CE936CEB}"/>
+              </a:ext>
+            </a:extLst>
+          </p:cNvPr>
+          <p:cNvSpPr txBox="1"/>
+          <p:nvPr/>
+        </p:nvSpPr>
+        <p:spPr>
+          <a:xfrm>
+            <a:off x="6652726" y="5450121"/>
+            <a:ext cx="4478694" cy="923330"/>
+          </a:xfrm>
+          <a:prstGeom prst="rect">
+            <a:avLst/>
+          </a:prstGeom>
+          <a:noFill/>
+          <a:ln>
+            <a:solidFill>
+              <a:schemeClr val="tx1">
+                <a:lumMod val="95000"/>
+              </a:schemeClr>
+            </a:solidFill>
+          </a:ln>
+        </p:spPr>
+        <p:txBody>
+          <a:bodyPr wrap="square" rtlCol="0">
+            <a:spAutoFit/>
+          </a:bodyPr>
+          <a:lstStyle/>
+          <a:p>
+            <a:r>
+              <a:rPr lang="en-US" dirty="0"/>
+              <a:t>You’ll see these in a lot more detail in DMT2. They exist, but we are going to stick with the first two for now (to keep things simple)…</a:t>
+            </a:r>
+          </a:p>
+        </p:txBody>
+      </p:sp>
+    </p:spTree>
+    <p:extLst>
+      <p:ext uri="{BB962C8B-B14F-4D97-AF65-F5344CB8AC3E}">
+        <p14:creationId xmlns:p14="http://schemas.microsoft.com/office/powerpoint/2010/main" val="606849169"/>
+      </p:ext>
+    </p:extLst>
+  </p:cSld>
+  <p:clrMapOvr>
+    <a:masterClrMapping/>
+  </p:clrMapOvr>
+</p:sld>
+</file>
+
+<file path=ppt/slides/slide34.xml><?xml version="1.0" encoding="utf-8"?>
+<p:sld xmlns:a="http://schemas.openxmlformats.org/drawingml/2006/main" xmlns:r="http://schemas.openxmlformats.org/officeDocument/2006/relationships" xmlns:p="http://schemas.openxmlformats.org/presentationml/2006/main">
+  <p:cSld>
+    <p:spTree>
+      <p:nvGrpSpPr>
+        <p:cNvPr id="1" name="">
+          <a:extLst>
+            <a:ext uri="{FF2B5EF4-FFF2-40B4-BE49-F238E27FC236}">
+              <a16:creationId xmlns:a16="http://schemas.microsoft.com/office/drawing/2014/main" id="{88FEA92F-C4A8-4D91-623D-92B4E020E811}"/>
+            </a:ext>
+          </a:extLst>
+        </p:cNvPr>
+        <p:cNvGrpSpPr/>
+        <p:nvPr/>
+      </p:nvGrpSpPr>
+      <p:grpSpPr>
+        <a:xfrm>
+          <a:off x="0" y="0"/>
+          <a:ext cx="0" cy="0"/>
+          <a:chOff x="0" y="0"/>
+          <a:chExt cx="0" cy="0"/>
+        </a:xfrm>
+      </p:grpSpPr>
+      <p:sp>
+        <p:nvSpPr>
+          <p:cNvPr id="2" name="Title 1">
+            <a:extLst>
+              <a:ext uri="{FF2B5EF4-FFF2-40B4-BE49-F238E27FC236}">
+                <a16:creationId xmlns:a16="http://schemas.microsoft.com/office/drawing/2014/main" id="{7F499541-03E0-FD1C-D6E4-22F5AD3CA7D6}"/>
+              </a:ext>
+            </a:extLst>
+          </p:cNvPr>
+          <p:cNvSpPr>
+            <a:spLocks noGrp="1"/>
+          </p:cNvSpPr>
+          <p:nvPr>
+            <p:ph type="title"/>
+          </p:nvPr>
+        </p:nvSpPr>
+        <p:spPr>
+          <a:xfrm>
+            <a:off x="1143001" y="123995"/>
+            <a:ext cx="9905998" cy="448281"/>
+          </a:xfrm>
+        </p:spPr>
+        <p:txBody>
+          <a:bodyPr>
+            <a:normAutofit fontScale="90000"/>
+          </a:bodyPr>
+          <a:lstStyle/>
+          <a:p>
+            <a:pPr algn="ctr"/>
+            <a:r>
+              <a:rPr lang="en-US" dirty="0"/>
+              <a:t>Uva ID Detection with </a:t>
+            </a:r>
+            <a:r>
+              <a:rPr lang="en-US" dirty="0">
+                <a:solidFill>
+                  <a:schemeClr val="accent3">
+                    <a:lumMod val="60000"/>
+                    <a:lumOff val="40000"/>
+                  </a:schemeClr>
+                </a:solidFill>
+              </a:rPr>
+              <a:t>NFA</a:t>
+            </a:r>
+          </a:p>
+        </p:txBody>
+      </p:sp>
+      <p:sp>
+        <p:nvSpPr>
+          <p:cNvPr id="58" name="TextBox 57">
+            <a:extLst>
+              <a:ext uri="{FF2B5EF4-FFF2-40B4-BE49-F238E27FC236}">
+                <a16:creationId xmlns:a16="http://schemas.microsoft.com/office/drawing/2014/main" id="{D7B93368-BE6F-59C8-BF6D-04718B4815A7}"/>
+              </a:ext>
+            </a:extLst>
+          </p:cNvPr>
+          <p:cNvSpPr txBox="1"/>
+          <p:nvPr/>
+        </p:nvSpPr>
+        <p:spPr>
+          <a:xfrm>
+            <a:off x="8929293" y="1315728"/>
+            <a:ext cx="1315616" cy="1477328"/>
+          </a:xfrm>
+          <a:prstGeom prst="rect">
+            <a:avLst/>
+          </a:prstGeom>
+          <a:noFill/>
+          <a:ln>
+            <a:solidFill>
+              <a:schemeClr val="tx1">
+                <a:lumMod val="95000"/>
+              </a:schemeClr>
+            </a:solidFill>
+          </a:ln>
+        </p:spPr>
+        <p:txBody>
+          <a:bodyPr wrap="square" rtlCol="0">
+            <a:spAutoFit/>
+          </a:bodyPr>
+          <a:lstStyle/>
+          <a:p>
+            <a:r>
+              <a:rPr lang="en-US" dirty="0"/>
+              <a:t>Try it out:</a:t>
+            </a:r>
+          </a:p>
+          <a:p>
+            <a:endParaRPr lang="en-US" dirty="0"/>
+          </a:p>
+          <a:p>
+            <a:r>
+              <a:rPr lang="en-US" dirty="0"/>
+              <a:t>  mrf8t</a:t>
+            </a:r>
+          </a:p>
+          <a:p>
+            <a:r>
+              <a:rPr lang="en-US" dirty="0"/>
+              <a:t>  as8f</a:t>
+            </a:r>
+          </a:p>
+          <a:p>
+            <a:r>
+              <a:rPr lang="en-US" dirty="0"/>
+              <a:t>  afde9d</a:t>
+            </a:r>
+          </a:p>
+        </p:txBody>
+      </p:sp>
+      <p:grpSp>
+        <p:nvGrpSpPr>
+          <p:cNvPr id="134" name="Group 133">
+            <a:extLst>
+              <a:ext uri="{FF2B5EF4-FFF2-40B4-BE49-F238E27FC236}">
+                <a16:creationId xmlns:a16="http://schemas.microsoft.com/office/drawing/2014/main" id="{16A76799-896B-4F61-3697-F97F36F97679}"/>
+              </a:ext>
+            </a:extLst>
+          </p:cNvPr>
+          <p:cNvGrpSpPr/>
+          <p:nvPr/>
+        </p:nvGrpSpPr>
+        <p:grpSpPr>
+          <a:xfrm>
+            <a:off x="1343602" y="908179"/>
+            <a:ext cx="6156656" cy="5431207"/>
+            <a:chOff x="643807" y="1038807"/>
+            <a:chExt cx="6156656" cy="5431207"/>
+          </a:xfrm>
+        </p:grpSpPr>
+        <p:sp>
+          <p:nvSpPr>
+            <p:cNvPr id="3" name="Oval 2">
+              <a:extLst>
+                <a:ext uri="{FF2B5EF4-FFF2-40B4-BE49-F238E27FC236}">
+                  <a16:creationId xmlns:a16="http://schemas.microsoft.com/office/drawing/2014/main" id="{19506C8F-2B27-6612-0981-50EC97CB3D3E}"/>
+                </a:ext>
+              </a:extLst>
+            </p:cNvPr>
+            <p:cNvSpPr/>
+            <p:nvPr/>
+          </p:nvSpPr>
+          <p:spPr>
+            <a:xfrm>
+              <a:off x="2435288" y="1038807"/>
+              <a:ext cx="933062" cy="933062"/>
+            </a:xfrm>
+            <a:prstGeom prst="ellipse">
+              <a:avLst/>
+            </a:prstGeom>
+            <a:solidFill>
+              <a:schemeClr val="accent3">
+                <a:lumMod val="60000"/>
+                <a:lumOff val="40000"/>
+              </a:schemeClr>
+            </a:solidFill>
+            <a:ln>
+              <a:solidFill>
+                <a:schemeClr val="bg1"/>
+              </a:solidFill>
+            </a:ln>
+          </p:spPr>
+          <p:style>
+            <a:lnRef idx="2">
+              <a:schemeClr val="accent1">
+                <a:shade val="15000"/>
+              </a:schemeClr>
+            </a:lnRef>
+            <a:fillRef idx="1">
+              <a:schemeClr val="accent1"/>
+            </a:fillRef>
+            <a:effectRef idx="0">
+              <a:schemeClr val="accent1"/>
+            </a:effectRef>
+            <a:fontRef idx="minor">
+              <a:schemeClr val="lt1"/>
+            </a:fontRef>
+          </p:style>
+          <p:txBody>
+            <a:bodyPr rtlCol="0" anchor="ctr"/>
+            <a:lstStyle/>
+            <a:p>
+              <a:pPr algn="ctr"/>
+              <a:r>
+                <a:rPr lang="en-US" dirty="0">
+                  <a:solidFill>
+                    <a:schemeClr val="bg1"/>
+                  </a:solidFill>
+                </a:rPr>
+                <a:t>1</a:t>
+              </a:r>
+            </a:p>
+          </p:txBody>
+        </p:sp>
+        <p:sp>
+          <p:nvSpPr>
+            <p:cNvPr id="4" name="Oval 3">
+              <a:extLst>
+                <a:ext uri="{FF2B5EF4-FFF2-40B4-BE49-F238E27FC236}">
+                  <a16:creationId xmlns:a16="http://schemas.microsoft.com/office/drawing/2014/main" id="{B62F2518-B160-2FB9-6502-226BBE204B16}"/>
+                </a:ext>
+              </a:extLst>
+            </p:cNvPr>
+            <p:cNvSpPr/>
+            <p:nvPr/>
+          </p:nvSpPr>
+          <p:spPr>
+            <a:xfrm>
+              <a:off x="4264089" y="2185020"/>
+              <a:ext cx="933062" cy="933062"/>
+            </a:xfrm>
+            <a:prstGeom prst="ellipse">
+              <a:avLst/>
+            </a:prstGeom>
+            <a:solidFill>
+              <a:schemeClr val="accent3">
+                <a:lumMod val="60000"/>
+                <a:lumOff val="40000"/>
+              </a:schemeClr>
+            </a:solidFill>
+            <a:ln>
+              <a:solidFill>
+                <a:schemeClr val="bg1"/>
+              </a:solidFill>
+            </a:ln>
+          </p:spPr>
+          <p:style>
+            <a:lnRef idx="2">
+              <a:schemeClr val="accent1">
+                <a:shade val="15000"/>
+              </a:schemeClr>
+            </a:lnRef>
+            <a:fillRef idx="1">
+              <a:schemeClr val="accent1"/>
+            </a:fillRef>
+            <a:effectRef idx="0">
+              <a:schemeClr val="accent1"/>
+            </a:effectRef>
+            <a:fontRef idx="minor">
+              <a:schemeClr val="lt1"/>
+            </a:fontRef>
+          </p:style>
+          <p:txBody>
+            <a:bodyPr rtlCol="0" anchor="ctr"/>
+            <a:lstStyle/>
+            <a:p>
+              <a:pPr algn="ctr"/>
+              <a:r>
+                <a:rPr lang="en-US" dirty="0">
+                  <a:solidFill>
+                    <a:schemeClr val="bg1"/>
+                  </a:solidFill>
+                </a:rPr>
+                <a:t>2</a:t>
+              </a:r>
+            </a:p>
+          </p:txBody>
+        </p:sp>
+        <p:sp>
+          <p:nvSpPr>
+            <p:cNvPr id="6" name="Oval 5">
+              <a:extLst>
+                <a:ext uri="{FF2B5EF4-FFF2-40B4-BE49-F238E27FC236}">
+                  <a16:creationId xmlns:a16="http://schemas.microsoft.com/office/drawing/2014/main" id="{7D69B662-8028-A7DB-300D-CD29CDB053D0}"/>
+                </a:ext>
+              </a:extLst>
+            </p:cNvPr>
+            <p:cNvSpPr/>
+            <p:nvPr/>
+          </p:nvSpPr>
+          <p:spPr>
+            <a:xfrm>
+              <a:off x="5666791" y="3335881"/>
+              <a:ext cx="933062" cy="933062"/>
+            </a:xfrm>
+            <a:prstGeom prst="ellipse">
+              <a:avLst/>
+            </a:prstGeom>
+            <a:solidFill>
+              <a:schemeClr val="accent3">
+                <a:lumMod val="60000"/>
+                <a:lumOff val="40000"/>
+              </a:schemeClr>
+            </a:solidFill>
+            <a:ln>
+              <a:solidFill>
+                <a:schemeClr val="bg1"/>
+              </a:solidFill>
+            </a:ln>
+          </p:spPr>
+          <p:style>
+            <a:lnRef idx="2">
+              <a:schemeClr val="accent1">
+                <a:shade val="15000"/>
+              </a:schemeClr>
+            </a:lnRef>
+            <a:fillRef idx="1">
+              <a:schemeClr val="accent1"/>
+            </a:fillRef>
+            <a:effectRef idx="0">
+              <a:schemeClr val="accent1"/>
+            </a:effectRef>
+            <a:fontRef idx="minor">
+              <a:schemeClr val="lt1"/>
+            </a:fontRef>
+          </p:style>
+          <p:txBody>
+            <a:bodyPr rtlCol="0" anchor="ctr"/>
+            <a:lstStyle/>
+            <a:p>
+              <a:pPr algn="ctr"/>
+              <a:r>
+                <a:rPr lang="en-US" dirty="0">
+                  <a:solidFill>
+                    <a:schemeClr val="bg1"/>
+                  </a:solidFill>
+                </a:rPr>
+                <a:t>3</a:t>
+              </a:r>
+            </a:p>
+          </p:txBody>
+        </p:sp>
+        <p:sp>
+          <p:nvSpPr>
+            <p:cNvPr id="9" name="Oval 8">
+              <a:extLst>
+                <a:ext uri="{FF2B5EF4-FFF2-40B4-BE49-F238E27FC236}">
+                  <a16:creationId xmlns:a16="http://schemas.microsoft.com/office/drawing/2014/main" id="{5FD27654-E2BB-77B6-E7C5-9F9098C00F91}"/>
+                </a:ext>
+              </a:extLst>
+            </p:cNvPr>
+            <p:cNvSpPr/>
+            <p:nvPr/>
+          </p:nvSpPr>
+          <p:spPr>
+            <a:xfrm>
+              <a:off x="5725887" y="5070421"/>
+              <a:ext cx="933062" cy="933062"/>
+            </a:xfrm>
+            <a:prstGeom prst="ellipse">
+              <a:avLst/>
+            </a:prstGeom>
+            <a:solidFill>
+              <a:schemeClr val="accent3">
+                <a:lumMod val="60000"/>
+                <a:lumOff val="40000"/>
+              </a:schemeClr>
+            </a:solidFill>
+            <a:ln>
+              <a:solidFill>
+                <a:schemeClr val="bg1"/>
+              </a:solidFill>
+            </a:ln>
+          </p:spPr>
+          <p:style>
+            <a:lnRef idx="2">
+              <a:schemeClr val="accent1">
+                <a:shade val="15000"/>
+              </a:schemeClr>
+            </a:lnRef>
+            <a:fillRef idx="1">
+              <a:schemeClr val="accent1"/>
+            </a:fillRef>
+            <a:effectRef idx="0">
+              <a:schemeClr val="accent1"/>
+            </a:effectRef>
+            <a:fontRef idx="minor">
+              <a:schemeClr val="lt1"/>
+            </a:fontRef>
+          </p:style>
+          <p:txBody>
+            <a:bodyPr rtlCol="0" anchor="ctr"/>
+            <a:lstStyle/>
+            <a:p>
+              <a:pPr algn="ctr"/>
+              <a:r>
+                <a:rPr lang="en-US" dirty="0">
+                  <a:solidFill>
+                    <a:schemeClr val="bg1"/>
+                  </a:solidFill>
+                </a:rPr>
+                <a:t>4</a:t>
+              </a:r>
+            </a:p>
+          </p:txBody>
+        </p:sp>
+        <p:sp>
+          <p:nvSpPr>
+            <p:cNvPr id="11" name="Oval 10">
+              <a:extLst>
+                <a:ext uri="{FF2B5EF4-FFF2-40B4-BE49-F238E27FC236}">
+                  <a16:creationId xmlns:a16="http://schemas.microsoft.com/office/drawing/2014/main" id="{6B830914-81D9-FB30-29E8-86FE41D9C2F4}"/>
+                </a:ext>
+              </a:extLst>
+            </p:cNvPr>
+            <p:cNvSpPr/>
+            <p:nvPr/>
+          </p:nvSpPr>
+          <p:spPr>
+            <a:xfrm>
+              <a:off x="643807" y="4011380"/>
+              <a:ext cx="933062" cy="933062"/>
+            </a:xfrm>
+            <a:prstGeom prst="ellipse">
+              <a:avLst/>
+            </a:prstGeom>
+            <a:solidFill>
+              <a:schemeClr val="accent3">
+                <a:lumMod val="60000"/>
+                <a:lumOff val="40000"/>
+              </a:schemeClr>
+            </a:solidFill>
+            <a:ln>
+              <a:solidFill>
+                <a:schemeClr val="bg1"/>
+              </a:solidFill>
+            </a:ln>
+          </p:spPr>
+          <p:style>
+            <a:lnRef idx="2">
+              <a:schemeClr val="accent1">
+                <a:shade val="15000"/>
+              </a:schemeClr>
+            </a:lnRef>
+            <a:fillRef idx="1">
+              <a:schemeClr val="accent1"/>
+            </a:fillRef>
+            <a:effectRef idx="0">
+              <a:schemeClr val="accent1"/>
+            </a:effectRef>
+            <a:fontRef idx="minor">
+              <a:schemeClr val="lt1"/>
+            </a:fontRef>
+          </p:style>
+          <p:txBody>
+            <a:bodyPr rtlCol="0" anchor="ctr"/>
+            <a:lstStyle/>
+            <a:p>
+              <a:pPr algn="ctr"/>
+              <a:r>
+                <a:rPr lang="en-US" dirty="0">
+                  <a:solidFill>
+                    <a:schemeClr val="bg1"/>
+                  </a:solidFill>
+                </a:rPr>
+                <a:t>7</a:t>
+              </a:r>
+            </a:p>
+          </p:txBody>
+        </p:sp>
+        <p:sp>
+          <p:nvSpPr>
+            <p:cNvPr id="12" name="Oval 11">
+              <a:extLst>
+                <a:ext uri="{FF2B5EF4-FFF2-40B4-BE49-F238E27FC236}">
+                  <a16:creationId xmlns:a16="http://schemas.microsoft.com/office/drawing/2014/main" id="{79F1779E-1941-DC79-2373-9D27DB5964A5}"/>
+                </a:ext>
+              </a:extLst>
+            </p:cNvPr>
+            <p:cNvSpPr/>
+            <p:nvPr/>
+          </p:nvSpPr>
+          <p:spPr>
+            <a:xfrm>
+              <a:off x="1862995" y="5536952"/>
+              <a:ext cx="933062" cy="933062"/>
+            </a:xfrm>
+            <a:prstGeom prst="ellipse">
+              <a:avLst/>
+            </a:prstGeom>
+            <a:solidFill>
+              <a:schemeClr val="accent3">
+                <a:lumMod val="60000"/>
+                <a:lumOff val="40000"/>
+              </a:schemeClr>
+            </a:solidFill>
+            <a:ln>
+              <a:solidFill>
+                <a:schemeClr val="bg1"/>
+              </a:solidFill>
+            </a:ln>
+          </p:spPr>
+          <p:style>
+            <a:lnRef idx="2">
+              <a:schemeClr val="accent1">
+                <a:shade val="15000"/>
+              </a:schemeClr>
+            </a:lnRef>
+            <a:fillRef idx="1">
+              <a:schemeClr val="accent1"/>
+            </a:fillRef>
+            <a:effectRef idx="0">
+              <a:schemeClr val="accent1"/>
+            </a:effectRef>
+            <a:fontRef idx="minor">
+              <a:schemeClr val="lt1"/>
+            </a:fontRef>
+          </p:style>
+          <p:txBody>
+            <a:bodyPr rtlCol="0" anchor="ctr"/>
+            <a:lstStyle/>
+            <a:p>
+              <a:pPr algn="ctr"/>
+              <a:r>
+                <a:rPr lang="en-US" dirty="0">
+                  <a:solidFill>
+                    <a:schemeClr val="bg1"/>
+                  </a:solidFill>
+                </a:rPr>
+                <a:t>6</a:t>
+              </a:r>
+            </a:p>
+          </p:txBody>
+        </p:sp>
+        <p:sp>
+          <p:nvSpPr>
+            <p:cNvPr id="13" name="Oval 12">
+              <a:extLst>
+                <a:ext uri="{FF2B5EF4-FFF2-40B4-BE49-F238E27FC236}">
+                  <a16:creationId xmlns:a16="http://schemas.microsoft.com/office/drawing/2014/main" id="{C881E00A-51AD-97BD-1E23-39841FF44416}"/>
+                </a:ext>
+              </a:extLst>
+            </p:cNvPr>
+            <p:cNvSpPr/>
+            <p:nvPr/>
+          </p:nvSpPr>
+          <p:spPr>
+            <a:xfrm>
+              <a:off x="3778757" y="5493738"/>
+              <a:ext cx="933062" cy="933062"/>
+            </a:xfrm>
+            <a:prstGeom prst="ellipse">
+              <a:avLst/>
+            </a:prstGeom>
+            <a:solidFill>
+              <a:schemeClr val="accent3">
+                <a:lumMod val="60000"/>
+                <a:lumOff val="40000"/>
+              </a:schemeClr>
+            </a:solidFill>
+            <a:ln>
+              <a:solidFill>
+                <a:schemeClr val="bg1"/>
+              </a:solidFill>
+            </a:ln>
+          </p:spPr>
+          <p:style>
+            <a:lnRef idx="2">
+              <a:schemeClr val="accent1">
+                <a:shade val="15000"/>
+              </a:schemeClr>
+            </a:lnRef>
+            <a:fillRef idx="1">
+              <a:schemeClr val="accent1"/>
+            </a:fillRef>
+            <a:effectRef idx="0">
+              <a:schemeClr val="accent1"/>
+            </a:effectRef>
+            <a:fontRef idx="minor">
+              <a:schemeClr val="lt1"/>
+            </a:fontRef>
+          </p:style>
+          <p:txBody>
+            <a:bodyPr rtlCol="0" anchor="ctr"/>
+            <a:lstStyle/>
+            <a:p>
+              <a:pPr algn="ctr"/>
+              <a:r>
+                <a:rPr lang="en-US" dirty="0">
+                  <a:solidFill>
+                    <a:schemeClr val="bg1"/>
+                  </a:solidFill>
+                </a:rPr>
+                <a:t>5</a:t>
+              </a:r>
+            </a:p>
+          </p:txBody>
+        </p:sp>
+        <p:grpSp>
+          <p:nvGrpSpPr>
+            <p:cNvPr id="5" name="Group 4">
+              <a:extLst>
+                <a:ext uri="{FF2B5EF4-FFF2-40B4-BE49-F238E27FC236}">
+                  <a16:creationId xmlns:a16="http://schemas.microsoft.com/office/drawing/2014/main" id="{E4ADF184-27E8-2B1E-069E-EB66BA77D2A5}"/>
+                </a:ext>
+              </a:extLst>
+            </p:cNvPr>
+            <p:cNvGrpSpPr/>
+            <p:nvPr/>
+          </p:nvGrpSpPr>
+          <p:grpSpPr>
+            <a:xfrm>
+              <a:off x="1483667" y="2396944"/>
+              <a:ext cx="933062" cy="933062"/>
+              <a:chOff x="2161594" y="4032379"/>
+              <a:chExt cx="933062" cy="933062"/>
+            </a:xfrm>
+            <a:solidFill>
+              <a:schemeClr val="accent3">
+                <a:lumMod val="60000"/>
+                <a:lumOff val="40000"/>
+              </a:schemeClr>
+            </a:solidFill>
+          </p:grpSpPr>
+          <p:sp>
+            <p:nvSpPr>
+              <p:cNvPr id="10" name="Oval 9">
+                <a:extLst>
+                  <a:ext uri="{FF2B5EF4-FFF2-40B4-BE49-F238E27FC236}">
+                    <a16:creationId xmlns:a16="http://schemas.microsoft.com/office/drawing/2014/main" id="{A19EB0F2-982E-CE12-30B9-3DE82D150060}"/>
+                  </a:ext>
+                </a:extLst>
+              </p:cNvPr>
+              <p:cNvSpPr/>
+              <p:nvPr/>
+            </p:nvSpPr>
+            <p:spPr>
+              <a:xfrm>
+                <a:off x="2161594" y="4032379"/>
+                <a:ext cx="933062" cy="933062"/>
+              </a:xfrm>
+              <a:prstGeom prst="ellipse">
+                <a:avLst/>
+              </a:prstGeom>
+              <a:grpFill/>
+              <a:ln>
+                <a:solidFill>
+                  <a:schemeClr val="bg1"/>
+                </a:solidFill>
+              </a:ln>
+            </p:spPr>
+            <p:style>
+              <a:lnRef idx="2">
+                <a:schemeClr val="accent1">
+                  <a:shade val="15000"/>
+                </a:schemeClr>
+              </a:lnRef>
+              <a:fillRef idx="1">
+                <a:schemeClr val="accent1"/>
+              </a:fillRef>
+              <a:effectRef idx="0">
+                <a:schemeClr val="accent1"/>
+              </a:effectRef>
+              <a:fontRef idx="minor">
+                <a:schemeClr val="lt1"/>
+              </a:fontRef>
+            </p:style>
+            <p:txBody>
+              <a:bodyPr rtlCol="0" anchor="ctr"/>
+              <a:lstStyle/>
+              <a:p>
+                <a:pPr algn="ctr"/>
+                <a:r>
+                  <a:rPr lang="en-US" dirty="0">
+                    <a:solidFill>
+                      <a:schemeClr val="bg1"/>
+                    </a:solidFill>
+                  </a:rPr>
+                  <a:t>8</a:t>
+                </a:r>
+              </a:p>
+            </p:txBody>
+          </p:sp>
+          <p:sp>
+            <p:nvSpPr>
+              <p:cNvPr id="17" name="Oval 16">
+                <a:extLst>
+                  <a:ext uri="{FF2B5EF4-FFF2-40B4-BE49-F238E27FC236}">
+                    <a16:creationId xmlns:a16="http://schemas.microsoft.com/office/drawing/2014/main" id="{698DD64D-925B-4EC4-C1FA-B8ACC17C2C99}"/>
+                  </a:ext>
+                </a:extLst>
+              </p:cNvPr>
+              <p:cNvSpPr/>
+              <p:nvPr/>
+            </p:nvSpPr>
+            <p:spPr>
+              <a:xfrm>
+                <a:off x="2237794" y="4108579"/>
+                <a:ext cx="780662" cy="780662"/>
+              </a:xfrm>
+              <a:prstGeom prst="ellipse">
+                <a:avLst/>
+              </a:prstGeom>
+              <a:grpFill/>
+              <a:ln>
+                <a:solidFill>
+                  <a:schemeClr val="bg1"/>
+                </a:solidFill>
+              </a:ln>
+            </p:spPr>
+            <p:style>
+              <a:lnRef idx="2">
+                <a:schemeClr val="accent1">
+                  <a:shade val="15000"/>
+                </a:schemeClr>
+              </a:lnRef>
+              <a:fillRef idx="1">
+                <a:schemeClr val="accent1"/>
+              </a:fillRef>
+              <a:effectRef idx="0">
+                <a:schemeClr val="accent1"/>
+              </a:effectRef>
+              <a:fontRef idx="minor">
+                <a:schemeClr val="lt1"/>
+              </a:fontRef>
+            </p:style>
+            <p:txBody>
+              <a:bodyPr rtlCol="0" anchor="ctr"/>
+              <a:lstStyle/>
+              <a:p>
+                <a:pPr algn="ctr"/>
+                <a:r>
+                  <a:rPr lang="en-US" dirty="0">
+                    <a:solidFill>
+                      <a:schemeClr val="bg1"/>
+                    </a:solidFill>
+                  </a:rPr>
+                  <a:t>8</a:t>
+                </a:r>
+              </a:p>
+            </p:txBody>
+          </p:sp>
+        </p:grpSp>
+        <p:cxnSp>
+          <p:nvCxnSpPr>
+            <p:cNvPr id="19" name="Straight Arrow Connector 18">
+              <a:extLst>
+                <a:ext uri="{FF2B5EF4-FFF2-40B4-BE49-F238E27FC236}">
+                  <a16:creationId xmlns:a16="http://schemas.microsoft.com/office/drawing/2014/main" id="{DD4D15B4-A0E1-83EB-2048-019EBE234436}"/>
+                </a:ext>
+              </a:extLst>
+            </p:cNvPr>
+            <p:cNvCxnSpPr>
+              <a:cxnSpLocks/>
+              <a:endCxn id="3" idx="2"/>
+            </p:cNvCxnSpPr>
+            <p:nvPr/>
+          </p:nvCxnSpPr>
+          <p:spPr>
+            <a:xfrm>
+              <a:off x="1511556" y="1505338"/>
+              <a:ext cx="923732" cy="0"/>
+            </a:xfrm>
+            <a:prstGeom prst="straightConnector1">
+              <a:avLst/>
+            </a:prstGeom>
+            <a:ln w="31750">
+              <a:solidFill>
+                <a:schemeClr val="accent3">
+                  <a:lumMod val="60000"/>
+                  <a:lumOff val="40000"/>
+                </a:schemeClr>
+              </a:solidFill>
+              <a:tailEnd type="triangle"/>
+            </a:ln>
+          </p:spPr>
+          <p:style>
+            <a:lnRef idx="1">
+              <a:schemeClr val="accent1"/>
+            </a:lnRef>
+            <a:fillRef idx="0">
+              <a:schemeClr val="accent1"/>
+            </a:fillRef>
+            <a:effectRef idx="0">
+              <a:schemeClr val="accent1"/>
+            </a:effectRef>
+            <a:fontRef idx="minor">
+              <a:schemeClr val="tx1"/>
+            </a:fontRef>
+          </p:style>
+        </p:cxnSp>
+        <p:cxnSp>
+          <p:nvCxnSpPr>
+            <p:cNvPr id="21" name="Straight Arrow Connector 20">
+              <a:extLst>
+                <a:ext uri="{FF2B5EF4-FFF2-40B4-BE49-F238E27FC236}">
+                  <a16:creationId xmlns:a16="http://schemas.microsoft.com/office/drawing/2014/main" id="{B17266EA-7990-352A-CDA1-9F774B77E285}"/>
+                </a:ext>
+              </a:extLst>
+            </p:cNvPr>
+            <p:cNvCxnSpPr>
+              <a:cxnSpLocks/>
+              <a:stCxn id="3" idx="5"/>
+              <a:endCxn id="4" idx="1"/>
+            </p:cNvCxnSpPr>
+            <p:nvPr/>
+          </p:nvCxnSpPr>
+          <p:spPr>
+            <a:xfrm>
+              <a:off x="3231706" y="1835225"/>
+              <a:ext cx="1169027" cy="486439"/>
+            </a:xfrm>
+            <a:prstGeom prst="straightConnector1">
+              <a:avLst/>
+            </a:prstGeom>
+            <a:ln w="31750">
+              <a:solidFill>
+                <a:schemeClr val="accent3">
+                  <a:lumMod val="60000"/>
+                  <a:lumOff val="40000"/>
+                </a:schemeClr>
+              </a:solidFill>
+              <a:tailEnd type="triangle"/>
+            </a:ln>
+          </p:spPr>
+          <p:style>
+            <a:lnRef idx="1">
+              <a:schemeClr val="accent1"/>
+            </a:lnRef>
+            <a:fillRef idx="0">
+              <a:schemeClr val="accent1"/>
+            </a:fillRef>
+            <a:effectRef idx="0">
+              <a:schemeClr val="accent1"/>
+            </a:effectRef>
+            <a:fontRef idx="minor">
+              <a:schemeClr val="tx1"/>
+            </a:fontRef>
+          </p:style>
+        </p:cxnSp>
+        <p:cxnSp>
+          <p:nvCxnSpPr>
+            <p:cNvPr id="24" name="Straight Arrow Connector 23">
+              <a:extLst>
+                <a:ext uri="{FF2B5EF4-FFF2-40B4-BE49-F238E27FC236}">
+                  <a16:creationId xmlns:a16="http://schemas.microsoft.com/office/drawing/2014/main" id="{7689632E-1490-B956-FA9C-F2D0D3C64777}"/>
+                </a:ext>
+              </a:extLst>
+            </p:cNvPr>
+            <p:cNvCxnSpPr>
+              <a:cxnSpLocks/>
+              <a:stCxn id="4" idx="5"/>
+              <a:endCxn id="6" idx="1"/>
+            </p:cNvCxnSpPr>
+            <p:nvPr/>
+          </p:nvCxnSpPr>
+          <p:spPr>
+            <a:xfrm>
+              <a:off x="5060507" y="2981438"/>
+              <a:ext cx="742928" cy="491087"/>
+            </a:xfrm>
+            <a:prstGeom prst="straightConnector1">
+              <a:avLst/>
+            </a:prstGeom>
+            <a:ln w="31750">
+              <a:solidFill>
+                <a:schemeClr val="accent3">
+                  <a:lumMod val="60000"/>
+                  <a:lumOff val="40000"/>
+                </a:schemeClr>
+              </a:solidFill>
+              <a:tailEnd type="triangle"/>
+            </a:ln>
+          </p:spPr>
+          <p:style>
+            <a:lnRef idx="1">
+              <a:schemeClr val="accent1"/>
+            </a:lnRef>
+            <a:fillRef idx="0">
+              <a:schemeClr val="accent1"/>
+            </a:fillRef>
+            <a:effectRef idx="0">
+              <a:schemeClr val="accent1"/>
+            </a:effectRef>
+            <a:fontRef idx="minor">
+              <a:schemeClr val="tx1"/>
+            </a:fontRef>
+          </p:style>
+        </p:cxnSp>
+        <p:cxnSp>
+          <p:nvCxnSpPr>
+            <p:cNvPr id="27" name="Straight Arrow Connector 26">
+              <a:extLst>
+                <a:ext uri="{FF2B5EF4-FFF2-40B4-BE49-F238E27FC236}">
+                  <a16:creationId xmlns:a16="http://schemas.microsoft.com/office/drawing/2014/main" id="{2F63164F-90E6-364D-690E-A42BAA136969}"/>
+                </a:ext>
+              </a:extLst>
+            </p:cNvPr>
+            <p:cNvCxnSpPr>
+              <a:cxnSpLocks/>
+              <a:stCxn id="6" idx="4"/>
+              <a:endCxn id="9" idx="0"/>
+            </p:cNvCxnSpPr>
+            <p:nvPr/>
+          </p:nvCxnSpPr>
+          <p:spPr>
+            <a:xfrm>
+              <a:off x="6133322" y="4268943"/>
+              <a:ext cx="59096" cy="801478"/>
+            </a:xfrm>
+            <a:prstGeom prst="straightConnector1">
+              <a:avLst/>
+            </a:prstGeom>
+            <a:ln w="31750">
+              <a:solidFill>
+                <a:schemeClr val="accent3">
+                  <a:lumMod val="60000"/>
+                  <a:lumOff val="40000"/>
+                </a:schemeClr>
+              </a:solidFill>
+              <a:tailEnd type="triangle"/>
+            </a:ln>
+          </p:spPr>
+          <p:style>
+            <a:lnRef idx="1">
+              <a:schemeClr val="accent1"/>
+            </a:lnRef>
+            <a:fillRef idx="0">
+              <a:schemeClr val="accent1"/>
+            </a:fillRef>
+            <a:effectRef idx="0">
+              <a:schemeClr val="accent1"/>
+            </a:effectRef>
+            <a:fontRef idx="minor">
+              <a:schemeClr val="tx1"/>
+            </a:fontRef>
+          </p:style>
+        </p:cxnSp>
+        <p:cxnSp>
+          <p:nvCxnSpPr>
+            <p:cNvPr id="30" name="Straight Arrow Connector 29">
+              <a:extLst>
+                <a:ext uri="{FF2B5EF4-FFF2-40B4-BE49-F238E27FC236}">
+                  <a16:creationId xmlns:a16="http://schemas.microsoft.com/office/drawing/2014/main" id="{6C1842EA-B8C4-6065-F1A5-B01143D7EF6C}"/>
+                </a:ext>
+              </a:extLst>
+            </p:cNvPr>
+            <p:cNvCxnSpPr>
+              <a:cxnSpLocks/>
+              <a:stCxn id="4" idx="2"/>
+              <a:endCxn id="10" idx="6"/>
+            </p:cNvCxnSpPr>
+            <p:nvPr/>
+          </p:nvCxnSpPr>
+          <p:spPr>
+            <a:xfrm flipH="1">
+              <a:off x="2416729" y="2651551"/>
+              <a:ext cx="1847360" cy="211924"/>
+            </a:xfrm>
+            <a:prstGeom prst="straightConnector1">
+              <a:avLst/>
+            </a:prstGeom>
+            <a:ln w="31750">
+              <a:solidFill>
+                <a:schemeClr val="accent3">
+                  <a:lumMod val="60000"/>
+                  <a:lumOff val="40000"/>
+                </a:schemeClr>
+              </a:solidFill>
+              <a:tailEnd type="triangle"/>
+            </a:ln>
+          </p:spPr>
+          <p:style>
+            <a:lnRef idx="1">
+              <a:schemeClr val="accent1"/>
+            </a:lnRef>
+            <a:fillRef idx="0">
+              <a:schemeClr val="accent1"/>
+            </a:fillRef>
+            <a:effectRef idx="0">
+              <a:schemeClr val="accent1"/>
+            </a:effectRef>
+            <a:fontRef idx="minor">
+              <a:schemeClr val="tx1"/>
+            </a:fontRef>
+          </p:style>
+        </p:cxnSp>
+        <p:cxnSp>
+          <p:nvCxnSpPr>
+            <p:cNvPr id="34" name="Straight Arrow Connector 33">
+              <a:extLst>
+                <a:ext uri="{FF2B5EF4-FFF2-40B4-BE49-F238E27FC236}">
+                  <a16:creationId xmlns:a16="http://schemas.microsoft.com/office/drawing/2014/main" id="{7818C76E-594A-5849-5A4B-E826A10EFA21}"/>
+                </a:ext>
+              </a:extLst>
+            </p:cNvPr>
+            <p:cNvCxnSpPr>
+              <a:cxnSpLocks/>
+              <a:stCxn id="9" idx="2"/>
+              <a:endCxn id="13" idx="6"/>
+            </p:cNvCxnSpPr>
+            <p:nvPr/>
+          </p:nvCxnSpPr>
+          <p:spPr>
+            <a:xfrm flipH="1">
+              <a:off x="4711819" y="5536952"/>
+              <a:ext cx="1014068" cy="423317"/>
+            </a:xfrm>
+            <a:prstGeom prst="straightConnector1">
+              <a:avLst/>
+            </a:prstGeom>
+            <a:ln w="31750">
+              <a:solidFill>
+                <a:schemeClr val="accent3">
+                  <a:lumMod val="60000"/>
+                  <a:lumOff val="40000"/>
+                </a:schemeClr>
+              </a:solidFill>
+              <a:tailEnd type="triangle"/>
+            </a:ln>
+          </p:spPr>
+          <p:style>
+            <a:lnRef idx="1">
+              <a:schemeClr val="accent1"/>
+            </a:lnRef>
+            <a:fillRef idx="0">
+              <a:schemeClr val="accent1"/>
+            </a:fillRef>
+            <a:effectRef idx="0">
+              <a:schemeClr val="accent1"/>
+            </a:effectRef>
+            <a:fontRef idx="minor">
+              <a:schemeClr val="tx1"/>
+            </a:fontRef>
+          </p:style>
+        </p:cxnSp>
+        <p:cxnSp>
+          <p:nvCxnSpPr>
+            <p:cNvPr id="37" name="Straight Arrow Connector 36">
+              <a:extLst>
+                <a:ext uri="{FF2B5EF4-FFF2-40B4-BE49-F238E27FC236}">
+                  <a16:creationId xmlns:a16="http://schemas.microsoft.com/office/drawing/2014/main" id="{13FBF2F2-DE65-2C95-255D-B04F762757ED}"/>
+                </a:ext>
+              </a:extLst>
+            </p:cNvPr>
+            <p:cNvCxnSpPr>
+              <a:cxnSpLocks/>
+              <a:stCxn id="13" idx="2"/>
+              <a:endCxn id="12" idx="6"/>
+            </p:cNvCxnSpPr>
+            <p:nvPr/>
+          </p:nvCxnSpPr>
+          <p:spPr>
+            <a:xfrm flipH="1">
+              <a:off x="2796057" y="5960269"/>
+              <a:ext cx="982700" cy="43214"/>
+            </a:xfrm>
+            <a:prstGeom prst="straightConnector1">
+              <a:avLst/>
+            </a:prstGeom>
+            <a:ln w="31750">
+              <a:solidFill>
+                <a:schemeClr val="accent3">
+                  <a:lumMod val="60000"/>
+                  <a:lumOff val="40000"/>
+                </a:schemeClr>
+              </a:solidFill>
+              <a:tailEnd type="triangle"/>
+            </a:ln>
+          </p:spPr>
+          <p:style>
+            <a:lnRef idx="1">
+              <a:schemeClr val="accent1"/>
+            </a:lnRef>
+            <a:fillRef idx="0">
+              <a:schemeClr val="accent1"/>
+            </a:fillRef>
+            <a:effectRef idx="0">
+              <a:schemeClr val="accent1"/>
+            </a:effectRef>
+            <a:fontRef idx="minor">
+              <a:schemeClr val="tx1"/>
+            </a:fontRef>
+          </p:style>
+        </p:cxnSp>
+        <p:cxnSp>
+          <p:nvCxnSpPr>
+            <p:cNvPr id="40" name="Straight Arrow Connector 39">
+              <a:extLst>
+                <a:ext uri="{FF2B5EF4-FFF2-40B4-BE49-F238E27FC236}">
+                  <a16:creationId xmlns:a16="http://schemas.microsoft.com/office/drawing/2014/main" id="{79996FEC-F169-E154-C409-3B807035CDEF}"/>
+                </a:ext>
+              </a:extLst>
+            </p:cNvPr>
+            <p:cNvCxnSpPr>
+              <a:cxnSpLocks/>
+              <a:stCxn id="12" idx="1"/>
+              <a:endCxn id="11" idx="5"/>
+            </p:cNvCxnSpPr>
+            <p:nvPr/>
+          </p:nvCxnSpPr>
+          <p:spPr>
+            <a:xfrm flipH="1" flipV="1">
+              <a:off x="1440225" y="4807798"/>
+              <a:ext cx="559414" cy="865798"/>
+            </a:xfrm>
+            <a:prstGeom prst="straightConnector1">
+              <a:avLst/>
+            </a:prstGeom>
+            <a:ln w="31750">
+              <a:solidFill>
+                <a:schemeClr val="accent3">
+                  <a:lumMod val="60000"/>
+                  <a:lumOff val="40000"/>
+                </a:schemeClr>
+              </a:solidFill>
+              <a:tailEnd type="triangle"/>
+            </a:ln>
+          </p:spPr>
+          <p:style>
+            <a:lnRef idx="1">
+              <a:schemeClr val="accent1"/>
+            </a:lnRef>
+            <a:fillRef idx="0">
+              <a:schemeClr val="accent1"/>
+            </a:fillRef>
+            <a:effectRef idx="0">
+              <a:schemeClr val="accent1"/>
+            </a:effectRef>
+            <a:fontRef idx="minor">
+              <a:schemeClr val="tx1"/>
+            </a:fontRef>
+          </p:style>
+        </p:cxnSp>
+        <p:cxnSp>
+          <p:nvCxnSpPr>
+            <p:cNvPr id="43" name="Straight Arrow Connector 42">
+              <a:extLst>
+                <a:ext uri="{FF2B5EF4-FFF2-40B4-BE49-F238E27FC236}">
+                  <a16:creationId xmlns:a16="http://schemas.microsoft.com/office/drawing/2014/main" id="{0CD116A8-0997-9D99-3121-E0705554DDD4}"/>
+                </a:ext>
+              </a:extLst>
+            </p:cNvPr>
+            <p:cNvCxnSpPr>
+              <a:cxnSpLocks/>
+              <a:stCxn id="11" idx="0"/>
+              <a:endCxn id="10" idx="3"/>
+            </p:cNvCxnSpPr>
+            <p:nvPr/>
+          </p:nvCxnSpPr>
+          <p:spPr>
+            <a:xfrm flipV="1">
+              <a:off x="1110338" y="3193362"/>
+              <a:ext cx="509973" cy="818018"/>
+            </a:xfrm>
+            <a:prstGeom prst="straightConnector1">
+              <a:avLst/>
+            </a:prstGeom>
+            <a:ln w="31750">
+              <a:solidFill>
+                <a:schemeClr val="accent3">
+                  <a:lumMod val="60000"/>
+                  <a:lumOff val="40000"/>
+                </a:schemeClr>
+              </a:solidFill>
+              <a:tailEnd type="triangle"/>
+            </a:ln>
+          </p:spPr>
+          <p:style>
+            <a:lnRef idx="1">
+              <a:schemeClr val="accent1"/>
+            </a:lnRef>
+            <a:fillRef idx="0">
+              <a:schemeClr val="accent1"/>
+            </a:fillRef>
+            <a:effectRef idx="0">
+              <a:schemeClr val="accent1"/>
+            </a:effectRef>
+            <a:fontRef idx="minor">
+              <a:schemeClr val="tx1"/>
+            </a:fontRef>
+          </p:style>
+        </p:cxnSp>
+        <p:sp>
+          <p:nvSpPr>
+            <p:cNvPr id="46" name="TextBox 45">
+              <a:extLst>
+                <a:ext uri="{FF2B5EF4-FFF2-40B4-BE49-F238E27FC236}">
+                  <a16:creationId xmlns:a16="http://schemas.microsoft.com/office/drawing/2014/main" id="{3253BCCC-B4AA-78B6-A876-B82B3DA63077}"/>
+                </a:ext>
+              </a:extLst>
+            </p:cNvPr>
+            <p:cNvSpPr txBox="1"/>
+            <p:nvPr/>
+          </p:nvSpPr>
+          <p:spPr>
+            <a:xfrm>
+              <a:off x="3635833" y="1368694"/>
+              <a:ext cx="765110" cy="369332"/>
+            </a:xfrm>
+            <a:prstGeom prst="rect">
+              <a:avLst/>
+            </a:prstGeom>
+            <a:noFill/>
+          </p:spPr>
+          <p:txBody>
+            <a:bodyPr wrap="square" rtlCol="0">
+              <a:spAutoFit/>
+            </a:bodyPr>
+            <a:lstStyle/>
+            <a:p>
+              <a:pPr algn="ctr"/>
+              <a:r>
+                <a:rPr lang="en-US" dirty="0"/>
+                <a:t>A-Z</a:t>
+              </a:r>
+            </a:p>
+          </p:txBody>
+        </p:sp>
+        <p:sp>
+          <p:nvSpPr>
+            <p:cNvPr id="47" name="TextBox 46">
+              <a:extLst>
+                <a:ext uri="{FF2B5EF4-FFF2-40B4-BE49-F238E27FC236}">
+                  <a16:creationId xmlns:a16="http://schemas.microsoft.com/office/drawing/2014/main" id="{D6770791-8EEA-9D8C-A4DB-D18032A934A1}"/>
+                </a:ext>
+              </a:extLst>
+            </p:cNvPr>
+            <p:cNvSpPr txBox="1"/>
+            <p:nvPr/>
+          </p:nvSpPr>
+          <p:spPr>
+            <a:xfrm>
+              <a:off x="2743252" y="2424224"/>
+              <a:ext cx="765110" cy="369332"/>
+            </a:xfrm>
+            <a:prstGeom prst="rect">
+              <a:avLst/>
+            </a:prstGeom>
+            <a:noFill/>
+          </p:spPr>
+          <p:txBody>
+            <a:bodyPr wrap="square" rtlCol="0">
+              <a:spAutoFit/>
+            </a:bodyPr>
+            <a:lstStyle/>
+            <a:p>
+              <a:pPr algn="ctr"/>
+              <a:r>
+                <a:rPr lang="en-US" dirty="0"/>
+                <a:t>A-Z</a:t>
+              </a:r>
+            </a:p>
+          </p:txBody>
+        </p:sp>
+        <p:sp>
+          <p:nvSpPr>
+            <p:cNvPr id="48" name="TextBox 47">
+              <a:extLst>
+                <a:ext uri="{FF2B5EF4-FFF2-40B4-BE49-F238E27FC236}">
+                  <a16:creationId xmlns:a16="http://schemas.microsoft.com/office/drawing/2014/main" id="{26B1DEAF-5CC8-8DB1-7EB9-A8497B2C6B25}"/>
+                </a:ext>
+              </a:extLst>
+            </p:cNvPr>
+            <p:cNvSpPr txBox="1"/>
+            <p:nvPr/>
+          </p:nvSpPr>
+          <p:spPr>
+            <a:xfrm>
+              <a:off x="3441337" y="3106828"/>
+              <a:ext cx="765110" cy="369332"/>
+            </a:xfrm>
+            <a:prstGeom prst="rect">
+              <a:avLst/>
+            </a:prstGeom>
+            <a:noFill/>
+          </p:spPr>
+          <p:txBody>
+            <a:bodyPr wrap="square" rtlCol="0">
+              <a:spAutoFit/>
+            </a:bodyPr>
+            <a:lstStyle/>
+            <a:p>
+              <a:pPr algn="ctr"/>
+              <a:r>
+                <a:rPr lang="en-US" dirty="0"/>
+                <a:t>A-Z</a:t>
+              </a:r>
+            </a:p>
+          </p:txBody>
+        </p:sp>
+        <p:sp>
+          <p:nvSpPr>
+            <p:cNvPr id="49" name="TextBox 48">
+              <a:extLst>
+                <a:ext uri="{FF2B5EF4-FFF2-40B4-BE49-F238E27FC236}">
+                  <a16:creationId xmlns:a16="http://schemas.microsoft.com/office/drawing/2014/main" id="{EA96D105-B982-7CFC-D225-8250C5A69F65}"/>
+                </a:ext>
+              </a:extLst>
+            </p:cNvPr>
+            <p:cNvSpPr txBox="1"/>
+            <p:nvPr/>
+          </p:nvSpPr>
+          <p:spPr>
+            <a:xfrm>
+              <a:off x="5187768" y="2824030"/>
+              <a:ext cx="765110" cy="369332"/>
+            </a:xfrm>
+            <a:prstGeom prst="rect">
+              <a:avLst/>
+            </a:prstGeom>
+            <a:noFill/>
+          </p:spPr>
+          <p:txBody>
+            <a:bodyPr wrap="square" rtlCol="0">
+              <a:spAutoFit/>
+            </a:bodyPr>
+            <a:lstStyle/>
+            <a:p>
+              <a:pPr algn="ctr"/>
+              <a:r>
+                <a:rPr lang="en-US" dirty="0"/>
+                <a:t>A-Z</a:t>
+              </a:r>
+            </a:p>
+          </p:txBody>
+        </p:sp>
+        <p:sp>
+          <p:nvSpPr>
+            <p:cNvPr id="50" name="TextBox 49">
+              <a:extLst>
+                <a:ext uri="{FF2B5EF4-FFF2-40B4-BE49-F238E27FC236}">
+                  <a16:creationId xmlns:a16="http://schemas.microsoft.com/office/drawing/2014/main" id="{05D7D395-D2B8-C469-2F73-3699DE851D99}"/>
+                </a:ext>
+              </a:extLst>
+            </p:cNvPr>
+            <p:cNvSpPr txBox="1"/>
+            <p:nvPr/>
+          </p:nvSpPr>
+          <p:spPr>
+            <a:xfrm>
+              <a:off x="6035353" y="4450311"/>
+              <a:ext cx="765110" cy="369332"/>
+            </a:xfrm>
+            <a:prstGeom prst="rect">
+              <a:avLst/>
+            </a:prstGeom>
+            <a:noFill/>
+          </p:spPr>
+          <p:txBody>
+            <a:bodyPr wrap="square" rtlCol="0">
+              <a:spAutoFit/>
+            </a:bodyPr>
+            <a:lstStyle/>
+            <a:p>
+              <a:pPr algn="ctr"/>
+              <a:r>
+                <a:rPr lang="en-US" dirty="0"/>
+                <a:t>A-Z</a:t>
+              </a:r>
+            </a:p>
+          </p:txBody>
+        </p:sp>
+        <p:sp>
+          <p:nvSpPr>
+            <p:cNvPr id="51" name="TextBox 50">
+              <a:extLst>
+                <a:ext uri="{FF2B5EF4-FFF2-40B4-BE49-F238E27FC236}">
+                  <a16:creationId xmlns:a16="http://schemas.microsoft.com/office/drawing/2014/main" id="{FFC6A27B-8709-FC51-00EA-9D17AA7BA2B1}"/>
+                </a:ext>
+              </a:extLst>
+            </p:cNvPr>
+            <p:cNvSpPr txBox="1"/>
+            <p:nvPr/>
+          </p:nvSpPr>
+          <p:spPr>
+            <a:xfrm>
+              <a:off x="3071759" y="4284774"/>
+              <a:ext cx="765110" cy="369332"/>
+            </a:xfrm>
+            <a:prstGeom prst="rect">
+              <a:avLst/>
+            </a:prstGeom>
+            <a:noFill/>
+          </p:spPr>
+          <p:txBody>
+            <a:bodyPr wrap="square" rtlCol="0">
+              <a:spAutoFit/>
+            </a:bodyPr>
+            <a:lstStyle/>
+            <a:p>
+              <a:pPr algn="ctr"/>
+              <a:r>
+                <a:rPr lang="en-US" dirty="0"/>
+                <a:t>A-Z</a:t>
+              </a:r>
+            </a:p>
+          </p:txBody>
+        </p:sp>
+        <p:sp>
+          <p:nvSpPr>
+            <p:cNvPr id="52" name="TextBox 51">
+              <a:extLst>
+                <a:ext uri="{FF2B5EF4-FFF2-40B4-BE49-F238E27FC236}">
+                  <a16:creationId xmlns:a16="http://schemas.microsoft.com/office/drawing/2014/main" id="{E7671BFB-ADFC-991C-17F7-759E39DB3EF6}"/>
+                </a:ext>
+              </a:extLst>
+            </p:cNvPr>
+            <p:cNvSpPr txBox="1"/>
+            <p:nvPr/>
+          </p:nvSpPr>
+          <p:spPr>
+            <a:xfrm>
+              <a:off x="4575175" y="4546264"/>
+              <a:ext cx="765110" cy="369332"/>
+            </a:xfrm>
+            <a:prstGeom prst="rect">
+              <a:avLst/>
+            </a:prstGeom>
+            <a:noFill/>
+          </p:spPr>
+          <p:txBody>
+            <a:bodyPr wrap="square" rtlCol="0">
+              <a:spAutoFit/>
+            </a:bodyPr>
+            <a:lstStyle/>
+            <a:p>
+              <a:pPr algn="ctr"/>
+              <a:r>
+                <a:rPr lang="en-US" dirty="0"/>
+                <a:t>0-9</a:t>
+              </a:r>
+            </a:p>
+          </p:txBody>
+        </p:sp>
+        <p:sp>
+          <p:nvSpPr>
+            <p:cNvPr id="53" name="TextBox 52">
+              <a:extLst>
+                <a:ext uri="{FF2B5EF4-FFF2-40B4-BE49-F238E27FC236}">
+                  <a16:creationId xmlns:a16="http://schemas.microsoft.com/office/drawing/2014/main" id="{F37CDEDF-D87C-ED77-DDD5-E9140159A60B}"/>
+                </a:ext>
+              </a:extLst>
+            </p:cNvPr>
+            <p:cNvSpPr txBox="1"/>
+            <p:nvPr/>
+          </p:nvSpPr>
+          <p:spPr>
+            <a:xfrm>
+              <a:off x="4957730" y="5748610"/>
+              <a:ext cx="765110" cy="369332"/>
+            </a:xfrm>
+            <a:prstGeom prst="rect">
+              <a:avLst/>
+            </a:prstGeom>
+            <a:noFill/>
+          </p:spPr>
+          <p:txBody>
+            <a:bodyPr wrap="square" rtlCol="0">
+              <a:spAutoFit/>
+            </a:bodyPr>
+            <a:lstStyle/>
+            <a:p>
+              <a:pPr algn="ctr"/>
+              <a:r>
+                <a:rPr lang="en-US" dirty="0"/>
+                <a:t>0-9</a:t>
+              </a:r>
+            </a:p>
+          </p:txBody>
+        </p:sp>
+        <p:sp>
+          <p:nvSpPr>
+            <p:cNvPr id="54" name="TextBox 53">
+              <a:extLst>
+                <a:ext uri="{FF2B5EF4-FFF2-40B4-BE49-F238E27FC236}">
+                  <a16:creationId xmlns:a16="http://schemas.microsoft.com/office/drawing/2014/main" id="{795C6919-721B-8487-42EC-6C1C12FC59CE}"/>
+                </a:ext>
+              </a:extLst>
+            </p:cNvPr>
+            <p:cNvSpPr txBox="1"/>
+            <p:nvPr/>
+          </p:nvSpPr>
+          <p:spPr>
+            <a:xfrm>
+              <a:off x="1576869" y="1136006"/>
+              <a:ext cx="765110" cy="369332"/>
+            </a:xfrm>
+            <a:prstGeom prst="rect">
+              <a:avLst/>
+            </a:prstGeom>
+            <a:noFill/>
+          </p:spPr>
+          <p:txBody>
+            <a:bodyPr wrap="square" rtlCol="0">
+              <a:spAutoFit/>
+            </a:bodyPr>
+            <a:lstStyle/>
+            <a:p>
+              <a:pPr algn="ctr"/>
+              <a:r>
+                <a:rPr lang="en-US" dirty="0"/>
+                <a:t>Start</a:t>
+              </a:r>
+            </a:p>
+          </p:txBody>
+        </p:sp>
+        <p:cxnSp>
+          <p:nvCxnSpPr>
+            <p:cNvPr id="118" name="Straight Arrow Connector 117">
+              <a:extLst>
+                <a:ext uri="{FF2B5EF4-FFF2-40B4-BE49-F238E27FC236}">
+                  <a16:creationId xmlns:a16="http://schemas.microsoft.com/office/drawing/2014/main" id="{AEFAFC3C-B4D1-4212-2275-5C8103C1FB6A}"/>
+                </a:ext>
+              </a:extLst>
+            </p:cNvPr>
+            <p:cNvCxnSpPr>
+              <a:cxnSpLocks/>
+              <a:stCxn id="6" idx="2"/>
+              <a:endCxn id="10" idx="5"/>
+            </p:cNvCxnSpPr>
+            <p:nvPr/>
+          </p:nvCxnSpPr>
+          <p:spPr>
+            <a:xfrm flipH="1" flipV="1">
+              <a:off x="2280085" y="3193362"/>
+              <a:ext cx="3386706" cy="609050"/>
+            </a:xfrm>
+            <a:prstGeom prst="straightConnector1">
+              <a:avLst/>
+            </a:prstGeom>
+            <a:ln w="31750">
+              <a:solidFill>
+                <a:schemeClr val="accent3">
+                  <a:lumMod val="60000"/>
+                  <a:lumOff val="40000"/>
+                </a:schemeClr>
+              </a:solidFill>
+              <a:tailEnd type="triangle"/>
+            </a:ln>
+          </p:spPr>
+          <p:style>
+            <a:lnRef idx="1">
+              <a:schemeClr val="accent1"/>
+            </a:lnRef>
+            <a:fillRef idx="0">
+              <a:schemeClr val="accent1"/>
+            </a:fillRef>
+            <a:effectRef idx="0">
+              <a:schemeClr val="accent1"/>
+            </a:effectRef>
+            <a:fontRef idx="minor">
+              <a:schemeClr val="tx1"/>
+            </a:fontRef>
+          </p:style>
+        </p:cxnSp>
+        <p:cxnSp>
+          <p:nvCxnSpPr>
+            <p:cNvPr id="121" name="Straight Arrow Connector 120">
+              <a:extLst>
+                <a:ext uri="{FF2B5EF4-FFF2-40B4-BE49-F238E27FC236}">
+                  <a16:creationId xmlns:a16="http://schemas.microsoft.com/office/drawing/2014/main" id="{8EDE5EB5-AE61-6A75-7CAF-ABEB6552F33F}"/>
+                </a:ext>
+              </a:extLst>
+            </p:cNvPr>
+            <p:cNvCxnSpPr>
+              <a:cxnSpLocks/>
+              <a:stCxn id="6" idx="3"/>
+              <a:endCxn id="13" idx="7"/>
+            </p:cNvCxnSpPr>
+            <p:nvPr/>
+          </p:nvCxnSpPr>
+          <p:spPr>
+            <a:xfrm flipH="1">
+              <a:off x="4575175" y="4132299"/>
+              <a:ext cx="1228260" cy="1498083"/>
+            </a:xfrm>
+            <a:prstGeom prst="straightConnector1">
+              <a:avLst/>
+            </a:prstGeom>
+            <a:ln w="31750">
+              <a:solidFill>
+                <a:schemeClr val="accent3">
+                  <a:lumMod val="60000"/>
+                  <a:lumOff val="40000"/>
+                </a:schemeClr>
+              </a:solidFill>
+              <a:tailEnd type="triangle"/>
+            </a:ln>
+          </p:spPr>
+          <p:style>
+            <a:lnRef idx="1">
+              <a:schemeClr val="accent1"/>
+            </a:lnRef>
+            <a:fillRef idx="0">
+              <a:schemeClr val="accent1"/>
+            </a:fillRef>
+            <a:effectRef idx="0">
+              <a:schemeClr val="accent1"/>
+            </a:effectRef>
+            <a:fontRef idx="minor">
+              <a:schemeClr val="tx1"/>
+            </a:fontRef>
+          </p:style>
+        </p:cxnSp>
+        <p:cxnSp>
+          <p:nvCxnSpPr>
+            <p:cNvPr id="124" name="Straight Arrow Connector 123">
+              <a:extLst>
+                <a:ext uri="{FF2B5EF4-FFF2-40B4-BE49-F238E27FC236}">
+                  <a16:creationId xmlns:a16="http://schemas.microsoft.com/office/drawing/2014/main" id="{D742FB0C-F733-D8E1-6BE0-7200298BAE40}"/>
+                </a:ext>
+              </a:extLst>
+            </p:cNvPr>
+            <p:cNvCxnSpPr>
+              <a:cxnSpLocks/>
+              <a:stCxn id="13" idx="1"/>
+              <a:endCxn id="10" idx="5"/>
+            </p:cNvCxnSpPr>
+            <p:nvPr/>
+          </p:nvCxnSpPr>
+          <p:spPr>
+            <a:xfrm flipH="1" flipV="1">
+              <a:off x="2280085" y="3193362"/>
+              <a:ext cx="1635316" cy="2437020"/>
+            </a:xfrm>
+            <a:prstGeom prst="straightConnector1">
+              <a:avLst/>
+            </a:prstGeom>
+            <a:ln w="31750">
+              <a:solidFill>
+                <a:schemeClr val="accent3">
+                  <a:lumMod val="60000"/>
+                  <a:lumOff val="40000"/>
+                </a:schemeClr>
+              </a:solidFill>
+              <a:tailEnd type="triangle"/>
+            </a:ln>
+          </p:spPr>
+          <p:style>
+            <a:lnRef idx="1">
+              <a:schemeClr val="accent1"/>
+            </a:lnRef>
+            <a:fillRef idx="0">
+              <a:schemeClr val="accent1"/>
+            </a:fillRef>
+            <a:effectRef idx="0">
+              <a:schemeClr val="accent1"/>
+            </a:effectRef>
+            <a:fontRef idx="minor">
+              <a:schemeClr val="tx1"/>
+            </a:fontRef>
+          </p:style>
+        </p:cxnSp>
+        <p:cxnSp>
+          <p:nvCxnSpPr>
+            <p:cNvPr id="127" name="Straight Arrow Connector 126">
+              <a:extLst>
+                <a:ext uri="{FF2B5EF4-FFF2-40B4-BE49-F238E27FC236}">
+                  <a16:creationId xmlns:a16="http://schemas.microsoft.com/office/drawing/2014/main" id="{3690BA7D-18D6-7D07-FAFC-FA4128ED999D}"/>
+                </a:ext>
+              </a:extLst>
+            </p:cNvPr>
+            <p:cNvCxnSpPr>
+              <a:cxnSpLocks/>
+              <a:stCxn id="12" idx="0"/>
+              <a:endCxn id="10" idx="4"/>
+            </p:cNvCxnSpPr>
+            <p:nvPr/>
+          </p:nvCxnSpPr>
+          <p:spPr>
+            <a:xfrm flipH="1" flipV="1">
+              <a:off x="1950198" y="3330006"/>
+              <a:ext cx="379328" cy="2206946"/>
+            </a:xfrm>
+            <a:prstGeom prst="straightConnector1">
+              <a:avLst/>
+            </a:prstGeom>
+            <a:ln w="31750">
+              <a:solidFill>
+                <a:schemeClr val="accent3">
+                  <a:lumMod val="60000"/>
+                  <a:lumOff val="40000"/>
+                </a:schemeClr>
+              </a:solidFill>
+              <a:tailEnd type="triangle"/>
+            </a:ln>
+          </p:spPr>
+          <p:style>
+            <a:lnRef idx="1">
+              <a:schemeClr val="accent1"/>
+            </a:lnRef>
+            <a:fillRef idx="0">
+              <a:schemeClr val="accent1"/>
+            </a:fillRef>
+            <a:effectRef idx="0">
+              <a:schemeClr val="accent1"/>
+            </a:effectRef>
+            <a:fontRef idx="minor">
+              <a:schemeClr val="tx1"/>
+            </a:fontRef>
+          </p:style>
+        </p:cxnSp>
+        <p:sp>
+          <p:nvSpPr>
+            <p:cNvPr id="130" name="TextBox 129">
+              <a:extLst>
+                <a:ext uri="{FF2B5EF4-FFF2-40B4-BE49-F238E27FC236}">
+                  <a16:creationId xmlns:a16="http://schemas.microsoft.com/office/drawing/2014/main" id="{92879B5B-1BE2-B565-08A2-D8449721D493}"/>
+                </a:ext>
+              </a:extLst>
+            </p:cNvPr>
+            <p:cNvSpPr txBox="1"/>
+            <p:nvPr/>
+          </p:nvSpPr>
+          <p:spPr>
+            <a:xfrm>
+              <a:off x="2064813" y="4450329"/>
+              <a:ext cx="765110" cy="369332"/>
+            </a:xfrm>
+            <a:prstGeom prst="rect">
+              <a:avLst/>
+            </a:prstGeom>
+            <a:noFill/>
+          </p:spPr>
+          <p:txBody>
+            <a:bodyPr wrap="square" rtlCol="0">
+              <a:spAutoFit/>
+            </a:bodyPr>
+            <a:lstStyle/>
+            <a:p>
+              <a:pPr algn="ctr"/>
+              <a:r>
+                <a:rPr lang="en-US" dirty="0"/>
+                <a:t>A-Z</a:t>
+              </a:r>
+            </a:p>
+          </p:txBody>
+        </p:sp>
+        <p:sp>
+          <p:nvSpPr>
+            <p:cNvPr id="131" name="TextBox 130">
+              <a:extLst>
+                <a:ext uri="{FF2B5EF4-FFF2-40B4-BE49-F238E27FC236}">
+                  <a16:creationId xmlns:a16="http://schemas.microsoft.com/office/drawing/2014/main" id="{F125BE70-CC85-0333-C4AB-B448EC6FC9E3}"/>
+                </a:ext>
+              </a:extLst>
+            </p:cNvPr>
+            <p:cNvSpPr txBox="1"/>
+            <p:nvPr/>
+          </p:nvSpPr>
+          <p:spPr>
+            <a:xfrm>
+              <a:off x="2957854" y="6003483"/>
+              <a:ext cx="765110" cy="369332"/>
+            </a:xfrm>
+            <a:prstGeom prst="rect">
+              <a:avLst/>
+            </a:prstGeom>
+            <a:noFill/>
+          </p:spPr>
+          <p:txBody>
+            <a:bodyPr wrap="square" rtlCol="0">
+              <a:spAutoFit/>
+            </a:bodyPr>
+            <a:lstStyle/>
+            <a:p>
+              <a:pPr algn="ctr"/>
+              <a:r>
+                <a:rPr lang="en-US" dirty="0"/>
+                <a:t>A-Z</a:t>
+              </a:r>
+            </a:p>
+          </p:txBody>
+        </p:sp>
+        <p:sp>
+          <p:nvSpPr>
+            <p:cNvPr id="132" name="TextBox 131">
+              <a:extLst>
+                <a:ext uri="{FF2B5EF4-FFF2-40B4-BE49-F238E27FC236}">
+                  <a16:creationId xmlns:a16="http://schemas.microsoft.com/office/drawing/2014/main" id="{FA531CF5-F735-613B-EBAF-7AB78CAC8879}"/>
+                </a:ext>
+              </a:extLst>
+            </p:cNvPr>
+            <p:cNvSpPr txBox="1"/>
+            <p:nvPr/>
+          </p:nvSpPr>
+          <p:spPr>
+            <a:xfrm>
+              <a:off x="1077452" y="5125900"/>
+              <a:ext cx="765110" cy="369332"/>
+            </a:xfrm>
+            <a:prstGeom prst="rect">
+              <a:avLst/>
+            </a:prstGeom>
+            <a:noFill/>
+          </p:spPr>
+          <p:txBody>
+            <a:bodyPr wrap="square" rtlCol="0">
+              <a:spAutoFit/>
+            </a:bodyPr>
+            <a:lstStyle/>
+            <a:p>
+              <a:pPr algn="ctr"/>
+              <a:r>
+                <a:rPr lang="en-US" dirty="0"/>
+                <a:t>A-Z</a:t>
+              </a:r>
+            </a:p>
+          </p:txBody>
+        </p:sp>
+        <p:sp>
+          <p:nvSpPr>
+            <p:cNvPr id="133" name="TextBox 132">
+              <a:extLst>
+                <a:ext uri="{FF2B5EF4-FFF2-40B4-BE49-F238E27FC236}">
+                  <a16:creationId xmlns:a16="http://schemas.microsoft.com/office/drawing/2014/main" id="{9FD0FCFA-2B5A-5B16-028A-AF0AB7799DC1}"/>
+                </a:ext>
+              </a:extLst>
+            </p:cNvPr>
+            <p:cNvSpPr txBox="1"/>
+            <p:nvPr/>
+          </p:nvSpPr>
+          <p:spPr>
+            <a:xfrm>
+              <a:off x="713583" y="3336169"/>
+              <a:ext cx="765110" cy="369332"/>
+            </a:xfrm>
+            <a:prstGeom prst="rect">
+              <a:avLst/>
+            </a:prstGeom>
+            <a:noFill/>
+          </p:spPr>
+          <p:txBody>
+            <a:bodyPr wrap="square" rtlCol="0">
+              <a:spAutoFit/>
+            </a:bodyPr>
+            <a:lstStyle/>
+            <a:p>
+              <a:pPr algn="ctr"/>
+              <a:r>
+                <a:rPr lang="en-US" dirty="0"/>
+                <a:t>A-Z</a:t>
+              </a:r>
+            </a:p>
+          </p:txBody>
+        </p:sp>
+      </p:grpSp>
+      <p:sp>
+        <p:nvSpPr>
+          <p:cNvPr id="135" name="TextBox 134">
+            <a:extLst>
+              <a:ext uri="{FF2B5EF4-FFF2-40B4-BE49-F238E27FC236}">
+                <a16:creationId xmlns:a16="http://schemas.microsoft.com/office/drawing/2014/main" id="{9624B8EC-A770-CD54-8EF8-7F1C0513DCE5}"/>
+              </a:ext>
+            </a:extLst>
+          </p:cNvPr>
+          <p:cNvSpPr txBox="1"/>
+          <p:nvPr/>
+        </p:nvSpPr>
+        <p:spPr>
+          <a:xfrm>
+            <a:off x="8117976" y="3351983"/>
+            <a:ext cx="3259596" cy="1477328"/>
+          </a:xfrm>
+          <a:prstGeom prst="rect">
+            <a:avLst/>
+          </a:prstGeom>
+          <a:noFill/>
+          <a:ln>
+            <a:solidFill>
+              <a:schemeClr val="tx1">
+                <a:lumMod val="95000"/>
+              </a:schemeClr>
+            </a:solidFill>
+          </a:ln>
+        </p:spPr>
+        <p:txBody>
+          <a:bodyPr wrap="square" rtlCol="0">
+            <a:spAutoFit/>
+          </a:bodyPr>
+          <a:lstStyle/>
+          <a:p>
+            <a:r>
+              <a:rPr lang="en-US" b="1" i="1" u="sng" dirty="0"/>
+              <a:t>Remember</a:t>
+            </a:r>
+            <a:r>
+              <a:rPr lang="en-US" dirty="0"/>
+              <a:t>:</a:t>
+            </a:r>
+          </a:p>
+          <a:p>
+            <a:endParaRPr lang="en-US" dirty="0"/>
+          </a:p>
+          <a:p>
+            <a:r>
+              <a:rPr lang="en-US" dirty="0"/>
+              <a:t>String is a valid Uva user id if there is </a:t>
+            </a:r>
+            <a:r>
+              <a:rPr lang="en-US" dirty="0">
+                <a:solidFill>
+                  <a:schemeClr val="accent3">
+                    <a:lumMod val="60000"/>
+                    <a:lumOff val="40000"/>
+                  </a:schemeClr>
+                </a:solidFill>
+              </a:rPr>
+              <a:t>at least one path </a:t>
+            </a:r>
+            <a:r>
+              <a:rPr lang="en-US" dirty="0"/>
+              <a:t>from start to finish on that string.</a:t>
+            </a:r>
+          </a:p>
+        </p:txBody>
+      </p:sp>
+    </p:spTree>
+    <p:extLst>
+      <p:ext uri="{BB962C8B-B14F-4D97-AF65-F5344CB8AC3E}">
+        <p14:creationId xmlns:p14="http://schemas.microsoft.com/office/powerpoint/2010/main" val="2052690166"/>
+      </p:ext>
+    </p:extLst>
+  </p:cSld>
+  <p:clrMapOvr>
+    <a:masterClrMapping/>
+  </p:clrMapOvr>
+</p:sld>
+</file>
+
+<file path=ppt/slides/slide35.xml><?xml version="1.0" encoding="utf-8"?>
+<p:sld xmlns:a="http://schemas.openxmlformats.org/drawingml/2006/main" xmlns:r="http://schemas.openxmlformats.org/officeDocument/2006/relationships" xmlns:p="http://schemas.openxmlformats.org/presentationml/2006/main">
+  <p:cSld>
+    <p:spTree>
+      <p:nvGrpSpPr>
+        <p:cNvPr id="1" name="">
+          <a:extLst>
+            <a:ext uri="{FF2B5EF4-FFF2-40B4-BE49-F238E27FC236}">
+              <a16:creationId xmlns:a16="http://schemas.microsoft.com/office/drawing/2014/main" id="{B0DA22EE-8746-72C1-128A-7567D09FA9BA}"/>
+            </a:ext>
+          </a:extLst>
+        </p:cNvPr>
+        <p:cNvGrpSpPr/>
+        <p:nvPr/>
+      </p:nvGrpSpPr>
+      <p:grpSpPr>
+        <a:xfrm>
+          <a:off x="0" y="0"/>
+          <a:ext cx="0" cy="0"/>
+          <a:chOff x="0" y="0"/>
+          <a:chExt cx="0" cy="0"/>
+        </a:xfrm>
+      </p:grpSpPr>
+      <p:sp>
+        <p:nvSpPr>
+          <p:cNvPr id="2" name="Title 1">
+            <a:extLst>
+              <a:ext uri="{FF2B5EF4-FFF2-40B4-BE49-F238E27FC236}">
+                <a16:creationId xmlns:a16="http://schemas.microsoft.com/office/drawing/2014/main" id="{1ED8745C-0348-5776-9EAA-FE9968D70C37}"/>
+              </a:ext>
+            </a:extLst>
+          </p:cNvPr>
+          <p:cNvSpPr>
+            <a:spLocks noGrp="1"/>
+          </p:cNvSpPr>
+          <p:nvPr>
+            <p:ph type="title"/>
+          </p:nvPr>
+        </p:nvSpPr>
+        <p:spPr>
+          <a:xfrm>
+            <a:off x="1143001" y="2216918"/>
+            <a:ext cx="9905998" cy="1478570"/>
+          </a:xfrm>
+        </p:spPr>
+        <p:txBody>
+          <a:bodyPr/>
+          <a:lstStyle/>
+          <a:p>
+            <a:pPr algn="ctr"/>
+            <a:r>
+              <a:rPr lang="en-US" dirty="0"/>
+              <a:t>Reduction of NFA to Satisfiability</a:t>
+            </a:r>
+          </a:p>
+        </p:txBody>
+      </p:sp>
+    </p:spTree>
+    <p:extLst>
+      <p:ext uri="{BB962C8B-B14F-4D97-AF65-F5344CB8AC3E}">
+        <p14:creationId xmlns:p14="http://schemas.microsoft.com/office/powerpoint/2010/main" val="400802154"/>
+      </p:ext>
+    </p:extLst>
+  </p:cSld>
+  <p:clrMapOvr>
+    <a:masterClrMapping/>
+  </p:clrMapOvr>
+</p:sld>
+</file>
+
+<file path=ppt/slides/slide36.xml><?xml version="1.0" encoding="utf-8"?>
+<p:sld xmlns:a="http://schemas.openxmlformats.org/drawingml/2006/main" xmlns:r="http://schemas.openxmlformats.org/officeDocument/2006/relationships" xmlns:p="http://schemas.openxmlformats.org/presentationml/2006/main">
+  <p:cSld>
+    <p:spTree>
+      <p:nvGrpSpPr>
+        <p:cNvPr id="1" name=""/>
+        <p:cNvGrpSpPr/>
+        <p:nvPr/>
+      </p:nvGrpSpPr>
+      <p:grpSpPr>
+        <a:xfrm>
+          <a:off x="0" y="0"/>
+          <a:ext cx="0" cy="0"/>
+          <a:chOff x="0" y="0"/>
+          <a:chExt cx="0" cy="0"/>
+        </a:xfrm>
+      </p:grpSpPr>
+      <p:sp>
+        <p:nvSpPr>
+          <p:cNvPr id="2" name="Title 1">
+            <a:extLst>
+              <a:ext uri="{FF2B5EF4-FFF2-40B4-BE49-F238E27FC236}">
+                <a16:creationId xmlns:a16="http://schemas.microsoft.com/office/drawing/2014/main" id="{05AC2C83-ACD8-5D66-1E73-AD8496825949}"/>
+              </a:ext>
+            </a:extLst>
+          </p:cNvPr>
+          <p:cNvSpPr>
+            <a:spLocks noGrp="1"/>
+          </p:cNvSpPr>
+          <p:nvPr>
+            <p:ph type="title"/>
+          </p:nvPr>
+        </p:nvSpPr>
+        <p:spPr>
+          <a:xfrm>
+            <a:off x="1143001" y="245293"/>
+            <a:ext cx="9905998" cy="547809"/>
+          </a:xfrm>
+        </p:spPr>
+        <p:txBody>
+          <a:bodyPr>
+            <a:normAutofit fontScale="90000"/>
+          </a:bodyPr>
+          <a:lstStyle/>
+          <a:p>
+            <a:pPr algn="ctr"/>
+            <a:r>
+              <a:rPr lang="en-US" dirty="0"/>
+              <a:t>All NFA can be reduced to SAT</a:t>
+            </a:r>
+          </a:p>
+        </p:txBody>
+      </p:sp>
+    </p:spTree>
+    <p:extLst>
+      <p:ext uri="{BB962C8B-B14F-4D97-AF65-F5344CB8AC3E}">
+        <p14:creationId xmlns:p14="http://schemas.microsoft.com/office/powerpoint/2010/main" val="2540830043"/>
+      </p:ext>
+    </p:extLst>
+  </p:cSld>
+  <p:clrMapOvr>
+    <a:masterClrMapping/>
+  </p:clrMapOvr>
+</p:sld>
+</file>
+
+<file path=ppt/slides/slide37.xml><?xml version="1.0" encoding="utf-8"?>
 <p:sld xmlns:a="http://schemas.openxmlformats.org/drawingml/2006/main" xmlns:r="http://schemas.openxmlformats.org/officeDocument/2006/relationships" xmlns:p="http://schemas.openxmlformats.org/presentationml/2006/main">
   <p:cSld>
     <p:spTree>
@@ -35310,7 +44369,7 @@
 </p:sld>
 </file>
 
-<file path=ppt/slides/slide33.xml><?xml version="1.0" encoding="utf-8"?>
+<file path=ppt/slides/slide38.xml><?xml version="1.0" encoding="utf-8"?>
 <p:sld xmlns:a="http://schemas.openxmlformats.org/drawingml/2006/main" xmlns:r="http://schemas.openxmlformats.org/officeDocument/2006/relationships" xmlns:p="http://schemas.openxmlformats.org/presentationml/2006/main">
   <p:cSld>
     <p:spTree>
